--- a/output/wordlabs-ful-3day.pptx
+++ b/output/wordlabs-ful-3day.pptx
@@ -6071,7 +6071,7 @@
                 <a:ea typeface="Calibri" pitchFamily="34" charset="-122"/>
                 <a:cs typeface="Calibri" pitchFamily="34" charset="-120"/>
               </a:rPr>
-              <a:t> young swimmer was </a:t>
+              <a:t> runner was </a:t>
             </a:r>
             <a:pPr algn="l" indent="0" marL="0">
               <a:buNone/>
@@ -6088,7 +6088,7 @@
                 <a:ea typeface="Calibri" pitchFamily="34" charset="-122"/>
                 <a:cs typeface="Calibri" pitchFamily="34" charset="-120"/>
               </a:rPr>
-              <a:t>grateful</a:t>
+              <a:t>careful</a:t>
             </a:r>
             <a:pPr algn="l" indent="0" marL="0">
               <a:buNone/>
@@ -6102,7 +6102,7 @@
                 <a:ea typeface="Calibri" pitchFamily="34" charset="-122"/>
                 <a:cs typeface="Calibri" pitchFamily="34" charset="-120"/>
               </a:rPr>
-              <a:t> for her coach's support before the race.</a:t>
+              <a:t> not to trip on the wet track.</a:t>
             </a:r>
             <a:endParaRPr lang="en-US" sz="1800" dirty="0"/>
           </a:p>
@@ -6385,7 +6385,7 @@
                 <a:ea typeface="Trebuchet MS" pitchFamily="34" charset="-122"/>
                 <a:cs typeface="Trebuchet MS" pitchFamily="34" charset="-120"/>
               </a:rPr>
-              <a:t>grateful</a:t>
+              <a:t>careful</a:t>
             </a:r>
             <a:endParaRPr lang="en-US" sz="1400" dirty="0"/>
           </a:p>
@@ -6870,6 +6870,138 @@
         <p:spPr>
           <a:xfrm>
             <a:off x="365760" y="2240280"/>
+            <a:ext cx="1371600" cy="841248"/>
+          </a:xfrm>
+          <a:prstGeom prst="rect">
+            <a:avLst>
+              <a:gd name="adj" fmla="val 6522"/>
+            </a:avLst>
+          </a:prstGeom>
+          <a:solidFill>
+            <a:srgbClr val="E2E8F0"/>
+          </a:solidFill>
+          <a:ln w="12700">
+            <a:solidFill>
+              <a:srgbClr val="E2E8F0"/>
+            </a:solidFill>
+            <a:prstDash val="solid"/>
+          </a:ln>
+        </p:spPr>
+      </p:sp>
+      <p:sp>
+        <p:nvSpPr>
+          <p:cNvPr id="15" name="Text 13"/>
+          <p:cNvSpPr/>
+          <p:nvPr/>
+        </p:nvSpPr>
+        <p:spPr>
+          <a:xfrm>
+            <a:off x="365760" y="2240280"/>
+            <a:ext cx="1371600" cy="841248"/>
+          </a:xfrm>
+          <a:prstGeom prst="rect">
+            <a:avLst/>
+          </a:prstGeom>
+          <a:noFill/>
+          <a:ln/>
+        </p:spPr>
+        <p:txBody>
+          <a:bodyPr wrap="square" lIns="0" tIns="0" rIns="0" bIns="0" rtlCol="0" anchor="ctr"/>
+          <a:lstStyle/>
+          <a:p>
+            <a:pPr algn="ctr" indent="0" marL="0">
+              <a:buNone/>
+            </a:pPr>
+            <a:r>
+              <a:rPr lang="en-US" sz="1100" b="1" dirty="0">
+                <a:solidFill>
+                  <a:srgbClr val="475569"/>
+                </a:solidFill>
+                <a:latin typeface="Trebuchet MS" pitchFamily="34" charset="0"/>
+                <a:ea typeface="Trebuchet MS" pitchFamily="34" charset="-122"/>
+                <a:cs typeface="Trebuchet MS" pitchFamily="34" charset="-120"/>
+              </a:rPr>
+              <a:t>Morphemes</a:t>
+            </a:r>
+            <a:endParaRPr lang="en-US" sz="1100" dirty="0"/>
+          </a:p>
+        </p:txBody>
+      </p:sp>
+      <p:sp>
+        <p:nvSpPr>
+          <p:cNvPr id="16" name="Shape 14"/>
+          <p:cNvSpPr/>
+          <p:nvPr/>
+        </p:nvSpPr>
+        <p:spPr>
+          <a:xfrm>
+            <a:off x="1874520" y="2240280"/>
+            <a:ext cx="6903720" cy="841248"/>
+          </a:xfrm>
+          <a:prstGeom prst="rect">
+            <a:avLst>
+              <a:gd name="adj" fmla="val 6522"/>
+            </a:avLst>
+          </a:prstGeom>
+          <a:solidFill>
+            <a:srgbClr val="F8FAFC"/>
+          </a:solidFill>
+          <a:ln w="12700">
+            <a:solidFill>
+              <a:srgbClr val="E2E8F0"/>
+            </a:solidFill>
+            <a:prstDash val="dash"/>
+          </a:ln>
+        </p:spPr>
+      </p:sp>
+      <p:sp>
+        <p:nvSpPr>
+          <p:cNvPr id="17" name="Text 15"/>
+          <p:cNvSpPr/>
+          <p:nvPr/>
+        </p:nvSpPr>
+        <p:spPr>
+          <a:xfrm>
+            <a:off x="1874520" y="2240280"/>
+            <a:ext cx="6903720" cy="841248"/>
+          </a:xfrm>
+          <a:prstGeom prst="rect">
+            <a:avLst/>
+          </a:prstGeom>
+          <a:noFill/>
+          <a:ln/>
+        </p:spPr>
+        <p:txBody>
+          <a:bodyPr wrap="square" rtlCol="0" anchor="ctr"/>
+          <a:lstStyle/>
+          <a:p>
+            <a:pPr algn="ctr" indent="0" marL="0">
+              <a:buNone/>
+            </a:pPr>
+            <a:r>
+              <a:rPr lang="en-US" sz="1100" i="1" dirty="0">
+                <a:solidFill>
+                  <a:srgbClr val="CBD5E1"/>
+                </a:solidFill>
+                <a:latin typeface="Calibri" pitchFamily="34" charset="0"/>
+                <a:ea typeface="Calibri" pitchFamily="34" charset="-122"/>
+                <a:cs typeface="Calibri" pitchFamily="34" charset="-120"/>
+              </a:rPr>
+              <a:t>Write here...</a:t>
+            </a:r>
+            <a:endParaRPr lang="en-US" sz="1100" dirty="0"/>
+          </a:p>
+        </p:txBody>
+      </p:sp>
+      <p:sp>
+        <p:nvSpPr>
+          <p:cNvPr id="18" name="Shape 16"/>
+          <p:cNvSpPr/>
+          <p:nvPr/>
+        </p:nvSpPr>
+        <p:spPr>
+          <a:xfrm>
+            <a:off x="365760" y="3273552"/>
             <a:ext cx="1371600" cy="658368"/>
           </a:xfrm>
           <a:prstGeom prst="rect">
@@ -6890,13 +7022,13 @@
       </p:sp>
       <p:sp>
         <p:nvSpPr>
-          <p:cNvPr id="15" name="Text 13"/>
-          <p:cNvSpPr/>
-          <p:nvPr/>
-        </p:nvSpPr>
-        <p:spPr>
-          <a:xfrm>
-            <a:off x="365760" y="2240280"/>
+          <p:cNvPr id="19" name="Text 17"/>
+          <p:cNvSpPr/>
+          <p:nvPr/>
+        </p:nvSpPr>
+        <p:spPr>
+          <a:xfrm>
+            <a:off x="365760" y="3273552"/>
             <a:ext cx="1371600" cy="658368"/>
           </a:xfrm>
           <a:prstGeom prst="rect">
@@ -6921,7 +7053,7 @@
                 <a:ea typeface="Trebuchet MS" pitchFamily="34" charset="-122"/>
                 <a:cs typeface="Trebuchet MS" pitchFamily="34" charset="-120"/>
               </a:rPr>
-              <a:t>Morphemes</a:t>
+              <a:t>Syllables</a:t>
             </a:r>
             <a:endParaRPr lang="en-US" sz="1100" dirty="0"/>
           </a:p>
@@ -6929,13 +7061,13 @@
       </p:sp>
       <p:sp>
         <p:nvSpPr>
-          <p:cNvPr id="16" name="Shape 14"/>
-          <p:cNvSpPr/>
-          <p:nvPr/>
-        </p:nvSpPr>
-        <p:spPr>
-          <a:xfrm>
-            <a:off x="1874520" y="2240280"/>
+          <p:cNvPr id="20" name="Shape 18"/>
+          <p:cNvSpPr/>
+          <p:nvPr/>
+        </p:nvSpPr>
+        <p:spPr>
+          <a:xfrm>
+            <a:off x="1874520" y="3273552"/>
             <a:ext cx="6903720" cy="658368"/>
           </a:xfrm>
           <a:prstGeom prst="rect">
@@ -6956,13 +7088,13 @@
       </p:sp>
       <p:sp>
         <p:nvSpPr>
-          <p:cNvPr id="17" name="Text 15"/>
-          <p:cNvSpPr/>
-          <p:nvPr/>
-        </p:nvSpPr>
-        <p:spPr>
-          <a:xfrm>
-            <a:off x="1874520" y="2240280"/>
+          <p:cNvPr id="21" name="Text 19"/>
+          <p:cNvSpPr/>
+          <p:nvPr/>
+        </p:nvSpPr>
+        <p:spPr>
+          <a:xfrm>
+            <a:off x="1874520" y="3273552"/>
             <a:ext cx="6903720" cy="658368"/>
           </a:xfrm>
           <a:prstGeom prst="rect">
@@ -6995,13 +7127,13 @@
       </p:sp>
       <p:sp>
         <p:nvSpPr>
-          <p:cNvPr id="18" name="Shape 16"/>
-          <p:cNvSpPr/>
-          <p:nvPr/>
-        </p:nvSpPr>
-        <p:spPr>
-          <a:xfrm>
-            <a:off x="365760" y="3182112"/>
+          <p:cNvPr id="22" name="Shape 20"/>
+          <p:cNvSpPr/>
+          <p:nvPr/>
+        </p:nvSpPr>
+        <p:spPr>
+          <a:xfrm>
+            <a:off x="365760" y="4096512"/>
             <a:ext cx="1371600" cy="658368"/>
           </a:xfrm>
           <a:prstGeom prst="rect">
@@ -7022,13 +7154,13 @@
       </p:sp>
       <p:sp>
         <p:nvSpPr>
-          <p:cNvPr id="19" name="Text 17"/>
-          <p:cNvSpPr/>
-          <p:nvPr/>
-        </p:nvSpPr>
-        <p:spPr>
-          <a:xfrm>
-            <a:off x="365760" y="3182112"/>
+          <p:cNvPr id="23" name="Text 21"/>
+          <p:cNvSpPr/>
+          <p:nvPr/>
+        </p:nvSpPr>
+        <p:spPr>
+          <a:xfrm>
+            <a:off x="365760" y="4096512"/>
             <a:ext cx="1371600" cy="658368"/>
           </a:xfrm>
           <a:prstGeom prst="rect">
@@ -7053,7 +7185,7 @@
                 <a:ea typeface="Trebuchet MS" pitchFamily="34" charset="-122"/>
                 <a:cs typeface="Trebuchet MS" pitchFamily="34" charset="-120"/>
               </a:rPr>
-              <a:t>Syllables</a:t>
+              <a:t>Phonemes</a:t>
             </a:r>
             <a:endParaRPr lang="en-US" sz="1100" dirty="0"/>
           </a:p>
@@ -7061,13 +7193,13 @@
       </p:sp>
       <p:sp>
         <p:nvSpPr>
-          <p:cNvPr id="20" name="Shape 18"/>
-          <p:cNvSpPr/>
-          <p:nvPr/>
-        </p:nvSpPr>
-        <p:spPr>
-          <a:xfrm>
-            <a:off x="1874520" y="3182112"/>
+          <p:cNvPr id="24" name="Shape 22"/>
+          <p:cNvSpPr/>
+          <p:nvPr/>
+        </p:nvSpPr>
+        <p:spPr>
+          <a:xfrm>
+            <a:off x="1874520" y="4096512"/>
             <a:ext cx="6903720" cy="658368"/>
           </a:xfrm>
           <a:prstGeom prst="rect">
@@ -7088,145 +7220,13 @@
       </p:sp>
       <p:sp>
         <p:nvSpPr>
-          <p:cNvPr id="21" name="Text 19"/>
-          <p:cNvSpPr/>
-          <p:nvPr/>
-        </p:nvSpPr>
-        <p:spPr>
-          <a:xfrm>
-            <a:off x="1874520" y="3182112"/>
-            <a:ext cx="6903720" cy="658368"/>
-          </a:xfrm>
-          <a:prstGeom prst="rect">
-            <a:avLst/>
-          </a:prstGeom>
-          <a:noFill/>
-          <a:ln/>
-        </p:spPr>
-        <p:txBody>
-          <a:bodyPr wrap="square" rtlCol="0" anchor="ctr"/>
-          <a:lstStyle/>
-          <a:p>
-            <a:pPr algn="ctr" indent="0" marL="0">
-              <a:buNone/>
-            </a:pPr>
-            <a:r>
-              <a:rPr lang="en-US" sz="1100" i="1" dirty="0">
-                <a:solidFill>
-                  <a:srgbClr val="CBD5E1"/>
-                </a:solidFill>
-                <a:latin typeface="Calibri" pitchFamily="34" charset="0"/>
-                <a:ea typeface="Calibri" pitchFamily="34" charset="-122"/>
-                <a:cs typeface="Calibri" pitchFamily="34" charset="-120"/>
-              </a:rPr>
-              <a:t>Write here...</a:t>
-            </a:r>
-            <a:endParaRPr lang="en-US" sz="1100" dirty="0"/>
-          </a:p>
-        </p:txBody>
-      </p:sp>
-      <p:sp>
-        <p:nvSpPr>
-          <p:cNvPr id="22" name="Shape 20"/>
-          <p:cNvSpPr/>
-          <p:nvPr/>
-        </p:nvSpPr>
-        <p:spPr>
-          <a:xfrm>
-            <a:off x="365760" y="4005072"/>
-            <a:ext cx="1371600" cy="658368"/>
-          </a:xfrm>
-          <a:prstGeom prst="rect">
-            <a:avLst>
-              <a:gd name="adj" fmla="val 8333"/>
-            </a:avLst>
-          </a:prstGeom>
-          <a:solidFill>
-            <a:srgbClr val="E2E8F0"/>
-          </a:solidFill>
-          <a:ln w="12700">
-            <a:solidFill>
-              <a:srgbClr val="E2E8F0"/>
-            </a:solidFill>
-            <a:prstDash val="solid"/>
-          </a:ln>
-        </p:spPr>
-      </p:sp>
-      <p:sp>
-        <p:nvSpPr>
-          <p:cNvPr id="23" name="Text 21"/>
-          <p:cNvSpPr/>
-          <p:nvPr/>
-        </p:nvSpPr>
-        <p:spPr>
-          <a:xfrm>
-            <a:off x="365760" y="4005072"/>
-            <a:ext cx="1371600" cy="658368"/>
-          </a:xfrm>
-          <a:prstGeom prst="rect">
-            <a:avLst/>
-          </a:prstGeom>
-          <a:noFill/>
-          <a:ln/>
-        </p:spPr>
-        <p:txBody>
-          <a:bodyPr wrap="square" lIns="0" tIns="0" rIns="0" bIns="0" rtlCol="0" anchor="ctr"/>
-          <a:lstStyle/>
-          <a:p>
-            <a:pPr algn="ctr" indent="0" marL="0">
-              <a:buNone/>
-            </a:pPr>
-            <a:r>
-              <a:rPr lang="en-US" sz="1100" b="1" dirty="0">
-                <a:solidFill>
-                  <a:srgbClr val="475569"/>
-                </a:solidFill>
-                <a:latin typeface="Trebuchet MS" pitchFamily="34" charset="0"/>
-                <a:ea typeface="Trebuchet MS" pitchFamily="34" charset="-122"/>
-                <a:cs typeface="Trebuchet MS" pitchFamily="34" charset="-120"/>
-              </a:rPr>
-              <a:t>Phonemes</a:t>
-            </a:r>
-            <a:endParaRPr lang="en-US" sz="1100" dirty="0"/>
-          </a:p>
-        </p:txBody>
-      </p:sp>
-      <p:sp>
-        <p:nvSpPr>
-          <p:cNvPr id="24" name="Shape 22"/>
-          <p:cNvSpPr/>
-          <p:nvPr/>
-        </p:nvSpPr>
-        <p:spPr>
-          <a:xfrm>
-            <a:off x="1874520" y="4005072"/>
-            <a:ext cx="6903720" cy="658368"/>
-          </a:xfrm>
-          <a:prstGeom prst="rect">
-            <a:avLst>
-              <a:gd name="adj" fmla="val 8333"/>
-            </a:avLst>
-          </a:prstGeom>
-          <a:solidFill>
-            <a:srgbClr val="F8FAFC"/>
-          </a:solidFill>
-          <a:ln w="12700">
-            <a:solidFill>
-              <a:srgbClr val="E2E8F0"/>
-            </a:solidFill>
-            <a:prstDash val="dash"/>
-          </a:ln>
-        </p:spPr>
-      </p:sp>
-      <p:sp>
-        <p:nvSpPr>
           <p:cNvPr id="25" name="Text 23"/>
           <p:cNvSpPr/>
           <p:nvPr/>
         </p:nvSpPr>
         <p:spPr>
           <a:xfrm>
-            <a:off x="1874520" y="4005072"/>
+            <a:off x="1874520" y="4096512"/>
             <a:ext cx="6903720" cy="658368"/>
           </a:xfrm>
           <a:prstGeom prst="rect">
@@ -7697,11 +7697,11 @@
         <p:spPr>
           <a:xfrm>
             <a:off x="365760" y="2240280"/>
-            <a:ext cx="1371600" cy="658368"/>
+            <a:ext cx="1371600" cy="841248"/>
           </a:xfrm>
           <a:prstGeom prst="rect">
             <a:avLst>
-              <a:gd name="adj" fmla="val 8333"/>
+              <a:gd name="adj" fmla="val 6522"/>
             </a:avLst>
           </a:prstGeom>
           <a:solidFill>
@@ -7724,7 +7724,7 @@
         <p:spPr>
           <a:xfrm>
             <a:off x="365760" y="2240280"/>
-            <a:ext cx="1371600" cy="658368"/>
+            <a:ext cx="1371600" cy="841248"/>
           </a:xfrm>
           <a:prstGeom prst="rect">
             <a:avLst/>
@@ -7763,11 +7763,11 @@
         <p:spPr>
           <a:xfrm>
             <a:off x="2938272" y="2258568"/>
-            <a:ext cx="1828800" cy="347472"/>
+            <a:ext cx="1828800" cy="292608"/>
           </a:xfrm>
           <a:prstGeom prst="rect">
             <a:avLst>
-              <a:gd name="adj" fmla="val 21053"/>
+              <a:gd name="adj" fmla="val 25000"/>
             </a:avLst>
           </a:prstGeom>
           <a:solidFill>
@@ -7797,7 +7797,7 @@
         <p:spPr>
           <a:xfrm>
             <a:off x="2938272" y="2258568"/>
-            <a:ext cx="1828800" cy="347472"/>
+            <a:ext cx="1828800" cy="292608"/>
           </a:xfrm>
           <a:prstGeom prst="rect">
             <a:avLst/>
@@ -7835,8 +7835,8 @@
         </p:nvSpPr>
         <p:spPr>
           <a:xfrm>
-            <a:off x="2938272" y="2624328"/>
-            <a:ext cx="1828800" cy="256032"/>
+            <a:off x="2938272" y="2569464"/>
+            <a:ext cx="1828800" cy="201168"/>
           </a:xfrm>
           <a:prstGeom prst="rect">
             <a:avLst/>
@@ -7860,7 +7860,7 @@
                 <a:ea typeface="Calibri" pitchFamily="34" charset="-122"/>
                 <a:cs typeface="Calibri" pitchFamily="34" charset="-120"/>
               </a:rPr>
-              <a:t>to wish for something good</a:t>
+              <a:t>to wish for something</a:t>
             </a:r>
             <a:endParaRPr lang="en-US" sz="850" dirty="0"/>
           </a:p>
@@ -7875,11 +7875,11 @@
         <p:spPr>
           <a:xfrm>
             <a:off x="5803392" y="2258568"/>
-            <a:ext cx="1828800" cy="347472"/>
+            <a:ext cx="1828800" cy="292608"/>
           </a:xfrm>
           <a:prstGeom prst="rect">
             <a:avLst>
-              <a:gd name="adj" fmla="val 21053"/>
+              <a:gd name="adj" fmla="val 25000"/>
             </a:avLst>
           </a:prstGeom>
           <a:solidFill>
@@ -7909,7 +7909,7 @@
         <p:spPr>
           <a:xfrm>
             <a:off x="5803392" y="2258568"/>
-            <a:ext cx="1828800" cy="347472"/>
+            <a:ext cx="1828800" cy="292608"/>
           </a:xfrm>
           <a:prstGeom prst="rect">
             <a:avLst/>
@@ -7947,8 +7947,8 @@
         </p:nvSpPr>
         <p:spPr>
           <a:xfrm>
-            <a:off x="5803392" y="2624328"/>
-            <a:ext cx="1828800" cy="256032"/>
+            <a:off x="5803392" y="2569464"/>
+            <a:ext cx="1828800" cy="201168"/>
           </a:xfrm>
           <a:prstGeom prst="rect">
             <a:avLst/>
@@ -7972,7 +7972,7 @@
                 <a:ea typeface="Calibri" pitchFamily="34" charset="-122"/>
                 <a:cs typeface="Calibri" pitchFamily="34" charset="-120"/>
               </a:rPr>
-              <a:t>full of, having the quality of</a:t>
+              <a:t>full of, having quality</a:t>
             </a:r>
             <a:endParaRPr lang="en-US" sz="850" dirty="0"/>
           </a:p>
@@ -7986,7 +7986,7 @@
         </p:nvSpPr>
         <p:spPr>
           <a:xfrm>
-            <a:off x="365760" y="3182112"/>
+            <a:off x="365760" y="3273552"/>
             <a:ext cx="1371600" cy="658368"/>
           </a:xfrm>
           <a:prstGeom prst="rect">
@@ -8013,7 +8013,7 @@
         </p:nvSpPr>
         <p:spPr>
           <a:xfrm>
-            <a:off x="365760" y="3182112"/>
+            <a:off x="365760" y="3273552"/>
             <a:ext cx="1371600" cy="658368"/>
           </a:xfrm>
           <a:prstGeom prst="rect">
@@ -8052,7 +8052,7 @@
         </p:nvSpPr>
         <p:spPr>
           <a:xfrm>
-            <a:off x="1874520" y="3182112"/>
+            <a:off x="1874520" y="3273552"/>
             <a:ext cx="6903720" cy="658368"/>
           </a:xfrm>
           <a:prstGeom prst="rect">
@@ -8079,7 +8079,7 @@
         </p:nvSpPr>
         <p:spPr>
           <a:xfrm>
-            <a:off x="1874520" y="3182112"/>
+            <a:off x="1874520" y="3273552"/>
             <a:ext cx="6903720" cy="658368"/>
           </a:xfrm>
           <a:prstGeom prst="rect">
@@ -8118,7 +8118,7 @@
         </p:nvSpPr>
         <p:spPr>
           <a:xfrm>
-            <a:off x="365760" y="4005072"/>
+            <a:off x="365760" y="4096512"/>
             <a:ext cx="1371600" cy="658368"/>
           </a:xfrm>
           <a:prstGeom prst="rect">
@@ -8145,7 +8145,7 @@
         </p:nvSpPr>
         <p:spPr>
           <a:xfrm>
-            <a:off x="365760" y="4005072"/>
+            <a:off x="365760" y="4096512"/>
             <a:ext cx="1371600" cy="658368"/>
           </a:xfrm>
           <a:prstGeom prst="rect">
@@ -8184,7 +8184,7 @@
         </p:nvSpPr>
         <p:spPr>
           <a:xfrm>
-            <a:off x="1874520" y="4005072"/>
+            <a:off x="1874520" y="4096512"/>
             <a:ext cx="6903720" cy="658368"/>
           </a:xfrm>
           <a:prstGeom prst="rect">
@@ -8211,7 +8211,7 @@
         </p:nvSpPr>
         <p:spPr>
           <a:xfrm>
-            <a:off x="1874520" y="4005072"/>
+            <a:off x="1874520" y="4096512"/>
             <a:ext cx="6903720" cy="658368"/>
           </a:xfrm>
           <a:prstGeom prst="rect">
@@ -8682,11 +8682,11 @@
         <p:spPr>
           <a:xfrm>
             <a:off x="365760" y="2240280"/>
-            <a:ext cx="1371600" cy="658368"/>
+            <a:ext cx="1371600" cy="841248"/>
           </a:xfrm>
           <a:prstGeom prst="rect">
             <a:avLst>
-              <a:gd name="adj" fmla="val 8333"/>
+              <a:gd name="adj" fmla="val 6522"/>
             </a:avLst>
           </a:prstGeom>
           <a:solidFill>
@@ -8709,7 +8709,7 @@
         <p:spPr>
           <a:xfrm>
             <a:off x="365760" y="2240280"/>
-            <a:ext cx="1371600" cy="658368"/>
+            <a:ext cx="1371600" cy="841248"/>
           </a:xfrm>
           <a:prstGeom prst="rect">
             <a:avLst/>
@@ -8748,11 +8748,11 @@
         <p:spPr>
           <a:xfrm>
             <a:off x="2938272" y="2258568"/>
-            <a:ext cx="1828800" cy="347472"/>
+            <a:ext cx="1828800" cy="292608"/>
           </a:xfrm>
           <a:prstGeom prst="rect">
             <a:avLst>
-              <a:gd name="adj" fmla="val 21053"/>
+              <a:gd name="adj" fmla="val 25000"/>
             </a:avLst>
           </a:prstGeom>
           <a:solidFill>
@@ -8782,7 +8782,7 @@
         <p:spPr>
           <a:xfrm>
             <a:off x="2938272" y="2258568"/>
-            <a:ext cx="1828800" cy="347472"/>
+            <a:ext cx="1828800" cy="292608"/>
           </a:xfrm>
           <a:prstGeom prst="rect">
             <a:avLst/>
@@ -8820,8 +8820,8 @@
         </p:nvSpPr>
         <p:spPr>
           <a:xfrm>
-            <a:off x="2938272" y="2624328"/>
-            <a:ext cx="1828800" cy="256032"/>
+            <a:off x="2938272" y="2569464"/>
+            <a:ext cx="1828800" cy="201168"/>
           </a:xfrm>
           <a:prstGeom prst="rect">
             <a:avLst/>
@@ -8845,7 +8845,7 @@
                 <a:ea typeface="Calibri" pitchFamily="34" charset="-122"/>
                 <a:cs typeface="Calibri" pitchFamily="34" charset="-120"/>
               </a:rPr>
-              <a:t>to wish for something good</a:t>
+              <a:t>to wish for something</a:t>
             </a:r>
             <a:endParaRPr lang="en-US" sz="850" dirty="0"/>
           </a:p>
@@ -8860,11 +8860,11 @@
         <p:spPr>
           <a:xfrm>
             <a:off x="5803392" y="2258568"/>
-            <a:ext cx="1828800" cy="347472"/>
+            <a:ext cx="1828800" cy="292608"/>
           </a:xfrm>
           <a:prstGeom prst="rect">
             <a:avLst>
-              <a:gd name="adj" fmla="val 21053"/>
+              <a:gd name="adj" fmla="val 25000"/>
             </a:avLst>
           </a:prstGeom>
           <a:solidFill>
@@ -8894,7 +8894,7 @@
         <p:spPr>
           <a:xfrm>
             <a:off x="5803392" y="2258568"/>
-            <a:ext cx="1828800" cy="347472"/>
+            <a:ext cx="1828800" cy="292608"/>
           </a:xfrm>
           <a:prstGeom prst="rect">
             <a:avLst/>
@@ -8932,8 +8932,8 @@
         </p:nvSpPr>
         <p:spPr>
           <a:xfrm>
-            <a:off x="5803392" y="2624328"/>
-            <a:ext cx="1828800" cy="256032"/>
+            <a:off x="5803392" y="2569464"/>
+            <a:ext cx="1828800" cy="201168"/>
           </a:xfrm>
           <a:prstGeom prst="rect">
             <a:avLst/>
@@ -8957,7 +8957,7 @@
                 <a:ea typeface="Calibri" pitchFamily="34" charset="-122"/>
                 <a:cs typeface="Calibri" pitchFamily="34" charset="-120"/>
               </a:rPr>
-              <a:t>full of, having the quality of</a:t>
+              <a:t>full of, having quality</a:t>
             </a:r>
             <a:endParaRPr lang="en-US" sz="850" dirty="0"/>
           </a:p>
@@ -8971,7 +8971,7 @@
         </p:nvSpPr>
         <p:spPr>
           <a:xfrm>
-            <a:off x="365760" y="3182112"/>
+            <a:off x="365760" y="3273552"/>
             <a:ext cx="1371600" cy="658368"/>
           </a:xfrm>
           <a:prstGeom prst="rect">
@@ -8998,7 +8998,7 @@
         </p:nvSpPr>
         <p:spPr>
           <a:xfrm>
-            <a:off x="365760" y="3182112"/>
+            <a:off x="365760" y="3273552"/>
             <a:ext cx="1371600" cy="658368"/>
           </a:xfrm>
           <a:prstGeom prst="rect">
@@ -9037,7 +9037,7 @@
         </p:nvSpPr>
         <p:spPr>
           <a:xfrm>
-            <a:off x="1874520" y="3182112"/>
+            <a:off x="1874520" y="3273552"/>
             <a:ext cx="6903720" cy="658368"/>
           </a:xfrm>
           <a:prstGeom prst="rect">
@@ -9064,7 +9064,7 @@
         </p:nvSpPr>
         <p:spPr>
           <a:xfrm>
-            <a:off x="2999232" y="3273552"/>
+            <a:off x="2999232" y="3364992"/>
             <a:ext cx="1645920" cy="475488"/>
           </a:xfrm>
           <a:prstGeom prst="rect">
@@ -9091,7 +9091,7 @@
         </p:nvSpPr>
         <p:spPr>
           <a:xfrm>
-            <a:off x="2999232" y="3273552"/>
+            <a:off x="2999232" y="3364992"/>
             <a:ext cx="1645920" cy="475488"/>
           </a:xfrm>
           <a:prstGeom prst="rect">
@@ -9130,7 +9130,7 @@
         </p:nvSpPr>
         <p:spPr>
           <a:xfrm>
-            <a:off x="4645152" y="3273552"/>
+            <a:off x="4645152" y="3364992"/>
             <a:ext cx="1097280" cy="475488"/>
           </a:xfrm>
           <a:prstGeom prst="rect">
@@ -9169,7 +9169,7 @@
         </p:nvSpPr>
         <p:spPr>
           <a:xfrm>
-            <a:off x="5742432" y="3273552"/>
+            <a:off x="5742432" y="3364992"/>
             <a:ext cx="1645920" cy="475488"/>
           </a:xfrm>
           <a:prstGeom prst="rect">
@@ -9196,7 +9196,7 @@
         </p:nvSpPr>
         <p:spPr>
           <a:xfrm>
-            <a:off x="5742432" y="3273552"/>
+            <a:off x="5742432" y="3364992"/>
             <a:ext cx="1645920" cy="475488"/>
           </a:xfrm>
           <a:prstGeom prst="rect">
@@ -9235,7 +9235,7 @@
         </p:nvSpPr>
         <p:spPr>
           <a:xfrm>
-            <a:off x="365760" y="4005072"/>
+            <a:off x="365760" y="4096512"/>
             <a:ext cx="1371600" cy="658368"/>
           </a:xfrm>
           <a:prstGeom prst="rect">
@@ -9262,7 +9262,7 @@
         </p:nvSpPr>
         <p:spPr>
           <a:xfrm>
-            <a:off x="365760" y="4005072"/>
+            <a:off x="365760" y="4096512"/>
             <a:ext cx="1371600" cy="658368"/>
           </a:xfrm>
           <a:prstGeom prst="rect">
@@ -9301,7 +9301,7 @@
         </p:nvSpPr>
         <p:spPr>
           <a:xfrm>
-            <a:off x="1874520" y="4005072"/>
+            <a:off x="1874520" y="4096512"/>
             <a:ext cx="6903720" cy="658368"/>
           </a:xfrm>
           <a:prstGeom prst="rect">
@@ -9328,7 +9328,7 @@
         </p:nvSpPr>
         <p:spPr>
           <a:xfrm>
-            <a:off x="1874520" y="4005072"/>
+            <a:off x="1874520" y="4096512"/>
             <a:ext cx="6903720" cy="658368"/>
           </a:xfrm>
           <a:prstGeom prst="rect">
@@ -9799,11 +9799,11 @@
         <p:spPr>
           <a:xfrm>
             <a:off x="365760" y="2240280"/>
-            <a:ext cx="1371600" cy="658368"/>
+            <a:ext cx="1371600" cy="841248"/>
           </a:xfrm>
           <a:prstGeom prst="rect">
             <a:avLst>
-              <a:gd name="adj" fmla="val 8333"/>
+              <a:gd name="adj" fmla="val 6522"/>
             </a:avLst>
           </a:prstGeom>
           <a:solidFill>
@@ -9826,7 +9826,7 @@
         <p:spPr>
           <a:xfrm>
             <a:off x="365760" y="2240280"/>
-            <a:ext cx="1371600" cy="658368"/>
+            <a:ext cx="1371600" cy="841248"/>
           </a:xfrm>
           <a:prstGeom prst="rect">
             <a:avLst/>
@@ -9865,11 +9865,11 @@
         <p:spPr>
           <a:xfrm>
             <a:off x="2938272" y="2258568"/>
-            <a:ext cx="1828800" cy="347472"/>
+            <a:ext cx="1828800" cy="292608"/>
           </a:xfrm>
           <a:prstGeom prst="rect">
             <a:avLst>
-              <a:gd name="adj" fmla="val 21053"/>
+              <a:gd name="adj" fmla="val 25000"/>
             </a:avLst>
           </a:prstGeom>
           <a:solidFill>
@@ -9899,7 +9899,7 @@
         <p:spPr>
           <a:xfrm>
             <a:off x="2938272" y="2258568"/>
-            <a:ext cx="1828800" cy="347472"/>
+            <a:ext cx="1828800" cy="292608"/>
           </a:xfrm>
           <a:prstGeom prst="rect">
             <a:avLst/>
@@ -9937,8 +9937,8 @@
         </p:nvSpPr>
         <p:spPr>
           <a:xfrm>
-            <a:off x="2938272" y="2624328"/>
-            <a:ext cx="1828800" cy="256032"/>
+            <a:off x="2938272" y="2569464"/>
+            <a:ext cx="1828800" cy="201168"/>
           </a:xfrm>
           <a:prstGeom prst="rect">
             <a:avLst/>
@@ -9962,7 +9962,7 @@
                 <a:ea typeface="Calibri" pitchFamily="34" charset="-122"/>
                 <a:cs typeface="Calibri" pitchFamily="34" charset="-120"/>
               </a:rPr>
-              <a:t>to wish for something good</a:t>
+              <a:t>to wish for something</a:t>
             </a:r>
             <a:endParaRPr lang="en-US" sz="850" dirty="0"/>
           </a:p>
@@ -9977,11 +9977,11 @@
         <p:spPr>
           <a:xfrm>
             <a:off x="5803392" y="2258568"/>
-            <a:ext cx="1828800" cy="347472"/>
+            <a:ext cx="1828800" cy="292608"/>
           </a:xfrm>
           <a:prstGeom prst="rect">
             <a:avLst>
-              <a:gd name="adj" fmla="val 21053"/>
+              <a:gd name="adj" fmla="val 25000"/>
             </a:avLst>
           </a:prstGeom>
           <a:solidFill>
@@ -10011,7 +10011,7 @@
         <p:spPr>
           <a:xfrm>
             <a:off x="5803392" y="2258568"/>
-            <a:ext cx="1828800" cy="347472"/>
+            <a:ext cx="1828800" cy="292608"/>
           </a:xfrm>
           <a:prstGeom prst="rect">
             <a:avLst/>
@@ -10049,8 +10049,8 @@
         </p:nvSpPr>
         <p:spPr>
           <a:xfrm>
-            <a:off x="5803392" y="2624328"/>
-            <a:ext cx="1828800" cy="256032"/>
+            <a:off x="5803392" y="2569464"/>
+            <a:ext cx="1828800" cy="201168"/>
           </a:xfrm>
           <a:prstGeom prst="rect">
             <a:avLst/>
@@ -10074,7 +10074,7 @@
                 <a:ea typeface="Calibri" pitchFamily="34" charset="-122"/>
                 <a:cs typeface="Calibri" pitchFamily="34" charset="-120"/>
               </a:rPr>
-              <a:t>full of, having the quality of</a:t>
+              <a:t>full of, having quality</a:t>
             </a:r>
             <a:endParaRPr lang="en-US" sz="850" dirty="0"/>
           </a:p>
@@ -10088,7 +10088,7 @@
         </p:nvSpPr>
         <p:spPr>
           <a:xfrm>
-            <a:off x="365760" y="3182112"/>
+            <a:off x="365760" y="3273552"/>
             <a:ext cx="1371600" cy="658368"/>
           </a:xfrm>
           <a:prstGeom prst="rect">
@@ -10115,7 +10115,7 @@
         </p:nvSpPr>
         <p:spPr>
           <a:xfrm>
-            <a:off x="365760" y="3182112"/>
+            <a:off x="365760" y="3273552"/>
             <a:ext cx="1371600" cy="658368"/>
           </a:xfrm>
           <a:prstGeom prst="rect">
@@ -10154,7 +10154,7 @@
         </p:nvSpPr>
         <p:spPr>
           <a:xfrm>
-            <a:off x="1874520" y="3182112"/>
+            <a:off x="1874520" y="3273552"/>
             <a:ext cx="6903720" cy="658368"/>
           </a:xfrm>
           <a:prstGeom prst="rect">
@@ -10181,7 +10181,7 @@
         </p:nvSpPr>
         <p:spPr>
           <a:xfrm>
-            <a:off x="2999232" y="3273552"/>
+            <a:off x="2999232" y="3364992"/>
             <a:ext cx="1645920" cy="475488"/>
           </a:xfrm>
           <a:prstGeom prst="rect">
@@ -10208,7 +10208,7 @@
         </p:nvSpPr>
         <p:spPr>
           <a:xfrm>
-            <a:off x="2999232" y="3273552"/>
+            <a:off x="2999232" y="3364992"/>
             <a:ext cx="1645920" cy="475488"/>
           </a:xfrm>
           <a:prstGeom prst="rect">
@@ -10247,7 +10247,7 @@
         </p:nvSpPr>
         <p:spPr>
           <a:xfrm>
-            <a:off x="4645152" y="3273552"/>
+            <a:off x="4645152" y="3364992"/>
             <a:ext cx="1097280" cy="475488"/>
           </a:xfrm>
           <a:prstGeom prst="rect">
@@ -10286,7 +10286,7 @@
         </p:nvSpPr>
         <p:spPr>
           <a:xfrm>
-            <a:off x="5742432" y="3273552"/>
+            <a:off x="5742432" y="3364992"/>
             <a:ext cx="1645920" cy="475488"/>
           </a:xfrm>
           <a:prstGeom prst="rect">
@@ -10313,7 +10313,7 @@
         </p:nvSpPr>
         <p:spPr>
           <a:xfrm>
-            <a:off x="5742432" y="3273552"/>
+            <a:off x="5742432" y="3364992"/>
             <a:ext cx="1645920" cy="475488"/>
           </a:xfrm>
           <a:prstGeom prst="rect">
@@ -10352,7 +10352,7 @@
         </p:nvSpPr>
         <p:spPr>
           <a:xfrm>
-            <a:off x="365760" y="4005072"/>
+            <a:off x="365760" y="4096512"/>
             <a:ext cx="1371600" cy="658368"/>
           </a:xfrm>
           <a:prstGeom prst="rect">
@@ -10379,7 +10379,7 @@
         </p:nvSpPr>
         <p:spPr>
           <a:xfrm>
-            <a:off x="365760" y="4005072"/>
+            <a:off x="365760" y="4096512"/>
             <a:ext cx="1371600" cy="658368"/>
           </a:xfrm>
           <a:prstGeom prst="rect">
@@ -10418,7 +10418,7 @@
         </p:nvSpPr>
         <p:spPr>
           <a:xfrm>
-            <a:off x="1874520" y="4005072"/>
+            <a:off x="1874520" y="4096512"/>
             <a:ext cx="6903720" cy="658368"/>
           </a:xfrm>
           <a:prstGeom prst="rect">
@@ -10445,7 +10445,7 @@
         </p:nvSpPr>
         <p:spPr>
           <a:xfrm>
-            <a:off x="2124837" y="4096512"/>
+            <a:off x="2124837" y="4187952"/>
             <a:ext cx="685800" cy="475488"/>
           </a:xfrm>
           <a:prstGeom prst="rect">
@@ -10472,7 +10472,7 @@
         </p:nvSpPr>
         <p:spPr>
           <a:xfrm>
-            <a:off x="2124837" y="4096512"/>
+            <a:off x="2124837" y="4187952"/>
             <a:ext cx="685800" cy="475488"/>
           </a:xfrm>
           <a:prstGeom prst="rect">
@@ -10511,7 +10511,7 @@
         </p:nvSpPr>
         <p:spPr>
           <a:xfrm>
-            <a:off x="3033522" y="4096512"/>
+            <a:off x="3033522" y="4187952"/>
             <a:ext cx="685800" cy="475488"/>
           </a:xfrm>
           <a:prstGeom prst="rect">
@@ -10538,7 +10538,7 @@
         </p:nvSpPr>
         <p:spPr>
           <a:xfrm>
-            <a:off x="3033522" y="4096512"/>
+            <a:off x="3033522" y="4187952"/>
             <a:ext cx="685800" cy="475488"/>
           </a:xfrm>
           <a:prstGeom prst="rect">
@@ -10577,7 +10577,7 @@
         </p:nvSpPr>
         <p:spPr>
           <a:xfrm>
-            <a:off x="3942207" y="4096512"/>
+            <a:off x="3942207" y="4187952"/>
             <a:ext cx="685800" cy="475488"/>
           </a:xfrm>
           <a:prstGeom prst="rect">
@@ -10604,7 +10604,7 @@
         </p:nvSpPr>
         <p:spPr>
           <a:xfrm>
-            <a:off x="3942207" y="4096512"/>
+            <a:off x="3942207" y="4187952"/>
             <a:ext cx="685800" cy="475488"/>
           </a:xfrm>
           <a:prstGeom prst="rect">
@@ -10643,7 +10643,7 @@
         </p:nvSpPr>
         <p:spPr>
           <a:xfrm>
-            <a:off x="4850892" y="4096512"/>
+            <a:off x="4850892" y="4187952"/>
             <a:ext cx="685800" cy="475488"/>
           </a:xfrm>
           <a:prstGeom prst="rect">
@@ -10670,7 +10670,7 @@
         </p:nvSpPr>
         <p:spPr>
           <a:xfrm>
-            <a:off x="4850892" y="4096512"/>
+            <a:off x="4850892" y="4187952"/>
             <a:ext cx="685800" cy="475488"/>
           </a:xfrm>
           <a:prstGeom prst="rect">
@@ -10709,7 +10709,7 @@
         </p:nvSpPr>
         <p:spPr>
           <a:xfrm>
-            <a:off x="5759577" y="4096512"/>
+            <a:off x="5759577" y="4187952"/>
             <a:ext cx="685800" cy="475488"/>
           </a:xfrm>
           <a:prstGeom prst="rect">
@@ -10736,7 +10736,7 @@
         </p:nvSpPr>
         <p:spPr>
           <a:xfrm>
-            <a:off x="5759577" y="4096512"/>
+            <a:off x="5759577" y="4187952"/>
             <a:ext cx="685800" cy="475488"/>
           </a:xfrm>
           <a:prstGeom prst="rect">
@@ -10775,7 +10775,7 @@
         </p:nvSpPr>
         <p:spPr>
           <a:xfrm>
-            <a:off x="6668262" y="4096512"/>
+            <a:off x="6668262" y="4187952"/>
             <a:ext cx="685800" cy="475488"/>
           </a:xfrm>
           <a:prstGeom prst="rect">
@@ -10802,7 +10802,7 @@
         </p:nvSpPr>
         <p:spPr>
           <a:xfrm>
-            <a:off x="6668262" y="4096512"/>
+            <a:off x="6668262" y="4187952"/>
             <a:ext cx="685800" cy="475488"/>
           </a:xfrm>
           <a:prstGeom prst="rect">
@@ -10841,7 +10841,7 @@
         </p:nvSpPr>
         <p:spPr>
           <a:xfrm>
-            <a:off x="7576947" y="4096512"/>
+            <a:off x="7576947" y="4187952"/>
             <a:ext cx="685800" cy="475488"/>
           </a:xfrm>
           <a:prstGeom prst="rect">
@@ -10868,7 +10868,7 @@
         </p:nvSpPr>
         <p:spPr>
           <a:xfrm>
-            <a:off x="7576947" y="4096512"/>
+            <a:off x="7576947" y="4187952"/>
             <a:ext cx="685800" cy="475488"/>
           </a:xfrm>
           <a:prstGeom prst="rect">
@@ -11324,7 +11324,7 @@
                 <a:ea typeface="Trebuchet MS" pitchFamily="34" charset="-122"/>
                 <a:cs typeface="Trebuchet MS" pitchFamily="34" charset="-120"/>
               </a:rPr>
-              <a:t>grateful</a:t>
+              <a:t>careful</a:t>
             </a:r>
             <a:endParaRPr lang="en-US" sz="2800" dirty="0"/>
           </a:p>
@@ -11339,6 +11339,138 @@
         <p:spPr>
           <a:xfrm>
             <a:off x="365760" y="2240280"/>
+            <a:ext cx="1371600" cy="841248"/>
+          </a:xfrm>
+          <a:prstGeom prst="rect">
+            <a:avLst>
+              <a:gd name="adj" fmla="val 6522"/>
+            </a:avLst>
+          </a:prstGeom>
+          <a:solidFill>
+            <a:srgbClr val="E2E8F0"/>
+          </a:solidFill>
+          <a:ln w="12700">
+            <a:solidFill>
+              <a:srgbClr val="E2E8F0"/>
+            </a:solidFill>
+            <a:prstDash val="solid"/>
+          </a:ln>
+        </p:spPr>
+      </p:sp>
+      <p:sp>
+        <p:nvSpPr>
+          <p:cNvPr id="15" name="Text 13"/>
+          <p:cNvSpPr/>
+          <p:nvPr/>
+        </p:nvSpPr>
+        <p:spPr>
+          <a:xfrm>
+            <a:off x="365760" y="2240280"/>
+            <a:ext cx="1371600" cy="841248"/>
+          </a:xfrm>
+          <a:prstGeom prst="rect">
+            <a:avLst/>
+          </a:prstGeom>
+          <a:noFill/>
+          <a:ln/>
+        </p:spPr>
+        <p:txBody>
+          <a:bodyPr wrap="square" lIns="0" tIns="0" rIns="0" bIns="0" rtlCol="0" anchor="ctr"/>
+          <a:lstStyle/>
+          <a:p>
+            <a:pPr algn="ctr" indent="0" marL="0">
+              <a:buNone/>
+            </a:pPr>
+            <a:r>
+              <a:rPr lang="en-US" sz="1100" b="1" dirty="0">
+                <a:solidFill>
+                  <a:srgbClr val="475569"/>
+                </a:solidFill>
+                <a:latin typeface="Trebuchet MS" pitchFamily="34" charset="0"/>
+                <a:ea typeface="Trebuchet MS" pitchFamily="34" charset="-122"/>
+                <a:cs typeface="Trebuchet MS" pitchFamily="34" charset="-120"/>
+              </a:rPr>
+              <a:t>Morphemes</a:t>
+            </a:r>
+            <a:endParaRPr lang="en-US" sz="1100" dirty="0"/>
+          </a:p>
+        </p:txBody>
+      </p:sp>
+      <p:sp>
+        <p:nvSpPr>
+          <p:cNvPr id="16" name="Shape 14"/>
+          <p:cNvSpPr/>
+          <p:nvPr/>
+        </p:nvSpPr>
+        <p:spPr>
+          <a:xfrm>
+            <a:off x="1874520" y="2240280"/>
+            <a:ext cx="6903720" cy="841248"/>
+          </a:xfrm>
+          <a:prstGeom prst="rect">
+            <a:avLst>
+              <a:gd name="adj" fmla="val 6522"/>
+            </a:avLst>
+          </a:prstGeom>
+          <a:solidFill>
+            <a:srgbClr val="F8FAFC"/>
+          </a:solidFill>
+          <a:ln w="12700">
+            <a:solidFill>
+              <a:srgbClr val="E2E8F0"/>
+            </a:solidFill>
+            <a:prstDash val="dash"/>
+          </a:ln>
+        </p:spPr>
+      </p:sp>
+      <p:sp>
+        <p:nvSpPr>
+          <p:cNvPr id="17" name="Text 15"/>
+          <p:cNvSpPr/>
+          <p:nvPr/>
+        </p:nvSpPr>
+        <p:spPr>
+          <a:xfrm>
+            <a:off x="1874520" y="2240280"/>
+            <a:ext cx="6903720" cy="841248"/>
+          </a:xfrm>
+          <a:prstGeom prst="rect">
+            <a:avLst/>
+          </a:prstGeom>
+          <a:noFill/>
+          <a:ln/>
+        </p:spPr>
+        <p:txBody>
+          <a:bodyPr wrap="square" rtlCol="0" anchor="ctr"/>
+          <a:lstStyle/>
+          <a:p>
+            <a:pPr algn="ctr" indent="0" marL="0">
+              <a:buNone/>
+            </a:pPr>
+            <a:r>
+              <a:rPr lang="en-US" sz="1100" i="1" dirty="0">
+                <a:solidFill>
+                  <a:srgbClr val="CBD5E1"/>
+                </a:solidFill>
+                <a:latin typeface="Calibri" pitchFamily="34" charset="0"/>
+                <a:ea typeface="Calibri" pitchFamily="34" charset="-122"/>
+                <a:cs typeface="Calibri" pitchFamily="34" charset="-120"/>
+              </a:rPr>
+              <a:t>Write here...</a:t>
+            </a:r>
+            <a:endParaRPr lang="en-US" sz="1100" dirty="0"/>
+          </a:p>
+        </p:txBody>
+      </p:sp>
+      <p:sp>
+        <p:nvSpPr>
+          <p:cNvPr id="18" name="Shape 16"/>
+          <p:cNvSpPr/>
+          <p:nvPr/>
+        </p:nvSpPr>
+        <p:spPr>
+          <a:xfrm>
+            <a:off x="365760" y="3273552"/>
             <a:ext cx="1371600" cy="658368"/>
           </a:xfrm>
           <a:prstGeom prst="rect">
@@ -11359,13 +11491,13 @@
       </p:sp>
       <p:sp>
         <p:nvSpPr>
-          <p:cNvPr id="15" name="Text 13"/>
-          <p:cNvSpPr/>
-          <p:nvPr/>
-        </p:nvSpPr>
-        <p:spPr>
-          <a:xfrm>
-            <a:off x="365760" y="2240280"/>
+          <p:cNvPr id="19" name="Text 17"/>
+          <p:cNvSpPr/>
+          <p:nvPr/>
+        </p:nvSpPr>
+        <p:spPr>
+          <a:xfrm>
+            <a:off x="365760" y="3273552"/>
             <a:ext cx="1371600" cy="658368"/>
           </a:xfrm>
           <a:prstGeom prst="rect">
@@ -11390,7 +11522,7 @@
                 <a:ea typeface="Trebuchet MS" pitchFamily="34" charset="-122"/>
                 <a:cs typeface="Trebuchet MS" pitchFamily="34" charset="-120"/>
               </a:rPr>
-              <a:t>Morphemes</a:t>
+              <a:t>Syllables</a:t>
             </a:r>
             <a:endParaRPr lang="en-US" sz="1100" dirty="0"/>
           </a:p>
@@ -11398,13 +11530,13 @@
       </p:sp>
       <p:sp>
         <p:nvSpPr>
-          <p:cNvPr id="16" name="Shape 14"/>
-          <p:cNvSpPr/>
-          <p:nvPr/>
-        </p:nvSpPr>
-        <p:spPr>
-          <a:xfrm>
-            <a:off x="1874520" y="2240280"/>
+          <p:cNvPr id="20" name="Shape 18"/>
+          <p:cNvSpPr/>
+          <p:nvPr/>
+        </p:nvSpPr>
+        <p:spPr>
+          <a:xfrm>
+            <a:off x="1874520" y="3273552"/>
             <a:ext cx="6903720" cy="658368"/>
           </a:xfrm>
           <a:prstGeom prst="rect">
@@ -11425,13 +11557,13 @@
       </p:sp>
       <p:sp>
         <p:nvSpPr>
-          <p:cNvPr id="17" name="Text 15"/>
-          <p:cNvSpPr/>
-          <p:nvPr/>
-        </p:nvSpPr>
-        <p:spPr>
-          <a:xfrm>
-            <a:off x="1874520" y="2240280"/>
+          <p:cNvPr id="21" name="Text 19"/>
+          <p:cNvSpPr/>
+          <p:nvPr/>
+        </p:nvSpPr>
+        <p:spPr>
+          <a:xfrm>
+            <a:off x="1874520" y="3273552"/>
             <a:ext cx="6903720" cy="658368"/>
           </a:xfrm>
           <a:prstGeom prst="rect">
@@ -11464,13 +11596,13 @@
       </p:sp>
       <p:sp>
         <p:nvSpPr>
-          <p:cNvPr id="18" name="Shape 16"/>
-          <p:cNvSpPr/>
-          <p:nvPr/>
-        </p:nvSpPr>
-        <p:spPr>
-          <a:xfrm>
-            <a:off x="365760" y="3182112"/>
+          <p:cNvPr id="22" name="Shape 20"/>
+          <p:cNvSpPr/>
+          <p:nvPr/>
+        </p:nvSpPr>
+        <p:spPr>
+          <a:xfrm>
+            <a:off x="365760" y="4096512"/>
             <a:ext cx="1371600" cy="658368"/>
           </a:xfrm>
           <a:prstGeom prst="rect">
@@ -11491,13 +11623,13 @@
       </p:sp>
       <p:sp>
         <p:nvSpPr>
-          <p:cNvPr id="19" name="Text 17"/>
-          <p:cNvSpPr/>
-          <p:nvPr/>
-        </p:nvSpPr>
-        <p:spPr>
-          <a:xfrm>
-            <a:off x="365760" y="3182112"/>
+          <p:cNvPr id="23" name="Text 21"/>
+          <p:cNvSpPr/>
+          <p:nvPr/>
+        </p:nvSpPr>
+        <p:spPr>
+          <a:xfrm>
+            <a:off x="365760" y="4096512"/>
             <a:ext cx="1371600" cy="658368"/>
           </a:xfrm>
           <a:prstGeom prst="rect">
@@ -11522,7 +11654,7 @@
                 <a:ea typeface="Trebuchet MS" pitchFamily="34" charset="-122"/>
                 <a:cs typeface="Trebuchet MS" pitchFamily="34" charset="-120"/>
               </a:rPr>
-              <a:t>Syllables</a:t>
+              <a:t>Phonemes</a:t>
             </a:r>
             <a:endParaRPr lang="en-US" sz="1100" dirty="0"/>
           </a:p>
@@ -11530,13 +11662,13 @@
       </p:sp>
       <p:sp>
         <p:nvSpPr>
-          <p:cNvPr id="20" name="Shape 18"/>
-          <p:cNvSpPr/>
-          <p:nvPr/>
-        </p:nvSpPr>
-        <p:spPr>
-          <a:xfrm>
-            <a:off x="1874520" y="3182112"/>
+          <p:cNvPr id="24" name="Shape 22"/>
+          <p:cNvSpPr/>
+          <p:nvPr/>
+        </p:nvSpPr>
+        <p:spPr>
+          <a:xfrm>
+            <a:off x="1874520" y="4096512"/>
             <a:ext cx="6903720" cy="658368"/>
           </a:xfrm>
           <a:prstGeom prst="rect">
@@ -11557,145 +11689,13 @@
       </p:sp>
       <p:sp>
         <p:nvSpPr>
-          <p:cNvPr id="21" name="Text 19"/>
-          <p:cNvSpPr/>
-          <p:nvPr/>
-        </p:nvSpPr>
-        <p:spPr>
-          <a:xfrm>
-            <a:off x="1874520" y="3182112"/>
-            <a:ext cx="6903720" cy="658368"/>
-          </a:xfrm>
-          <a:prstGeom prst="rect">
-            <a:avLst/>
-          </a:prstGeom>
-          <a:noFill/>
-          <a:ln/>
-        </p:spPr>
-        <p:txBody>
-          <a:bodyPr wrap="square" rtlCol="0" anchor="ctr"/>
-          <a:lstStyle/>
-          <a:p>
-            <a:pPr algn="ctr" indent="0" marL="0">
-              <a:buNone/>
-            </a:pPr>
-            <a:r>
-              <a:rPr lang="en-US" sz="1100" i="1" dirty="0">
-                <a:solidFill>
-                  <a:srgbClr val="CBD5E1"/>
-                </a:solidFill>
-                <a:latin typeface="Calibri" pitchFamily="34" charset="0"/>
-                <a:ea typeface="Calibri" pitchFamily="34" charset="-122"/>
-                <a:cs typeface="Calibri" pitchFamily="34" charset="-120"/>
-              </a:rPr>
-              <a:t>Write here...</a:t>
-            </a:r>
-            <a:endParaRPr lang="en-US" sz="1100" dirty="0"/>
-          </a:p>
-        </p:txBody>
-      </p:sp>
-      <p:sp>
-        <p:nvSpPr>
-          <p:cNvPr id="22" name="Shape 20"/>
-          <p:cNvSpPr/>
-          <p:nvPr/>
-        </p:nvSpPr>
-        <p:spPr>
-          <a:xfrm>
-            <a:off x="365760" y="4005072"/>
-            <a:ext cx="1371600" cy="658368"/>
-          </a:xfrm>
-          <a:prstGeom prst="rect">
-            <a:avLst>
-              <a:gd name="adj" fmla="val 8333"/>
-            </a:avLst>
-          </a:prstGeom>
-          <a:solidFill>
-            <a:srgbClr val="E2E8F0"/>
-          </a:solidFill>
-          <a:ln w="12700">
-            <a:solidFill>
-              <a:srgbClr val="E2E8F0"/>
-            </a:solidFill>
-            <a:prstDash val="solid"/>
-          </a:ln>
-        </p:spPr>
-      </p:sp>
-      <p:sp>
-        <p:nvSpPr>
-          <p:cNvPr id="23" name="Text 21"/>
-          <p:cNvSpPr/>
-          <p:nvPr/>
-        </p:nvSpPr>
-        <p:spPr>
-          <a:xfrm>
-            <a:off x="365760" y="4005072"/>
-            <a:ext cx="1371600" cy="658368"/>
-          </a:xfrm>
-          <a:prstGeom prst="rect">
-            <a:avLst/>
-          </a:prstGeom>
-          <a:noFill/>
-          <a:ln/>
-        </p:spPr>
-        <p:txBody>
-          <a:bodyPr wrap="square" lIns="0" tIns="0" rIns="0" bIns="0" rtlCol="0" anchor="ctr"/>
-          <a:lstStyle/>
-          <a:p>
-            <a:pPr algn="ctr" indent="0" marL="0">
-              <a:buNone/>
-            </a:pPr>
-            <a:r>
-              <a:rPr lang="en-US" sz="1100" b="1" dirty="0">
-                <a:solidFill>
-                  <a:srgbClr val="475569"/>
-                </a:solidFill>
-                <a:latin typeface="Trebuchet MS" pitchFamily="34" charset="0"/>
-                <a:ea typeface="Trebuchet MS" pitchFamily="34" charset="-122"/>
-                <a:cs typeface="Trebuchet MS" pitchFamily="34" charset="-120"/>
-              </a:rPr>
-              <a:t>Phonemes</a:t>
-            </a:r>
-            <a:endParaRPr lang="en-US" sz="1100" dirty="0"/>
-          </a:p>
-        </p:txBody>
-      </p:sp>
-      <p:sp>
-        <p:nvSpPr>
-          <p:cNvPr id="24" name="Shape 22"/>
-          <p:cNvSpPr/>
-          <p:nvPr/>
-        </p:nvSpPr>
-        <p:spPr>
-          <a:xfrm>
-            <a:off x="1874520" y="4005072"/>
-            <a:ext cx="6903720" cy="658368"/>
-          </a:xfrm>
-          <a:prstGeom prst="rect">
-            <a:avLst>
-              <a:gd name="adj" fmla="val 8333"/>
-            </a:avLst>
-          </a:prstGeom>
-          <a:solidFill>
-            <a:srgbClr val="F8FAFC"/>
-          </a:solidFill>
-          <a:ln w="12700">
-            <a:solidFill>
-              <a:srgbClr val="E2E8F0"/>
-            </a:solidFill>
-            <a:prstDash val="dash"/>
-          </a:ln>
-        </p:spPr>
-      </p:sp>
-      <p:sp>
-        <p:nvSpPr>
           <p:cNvPr id="25" name="Text 23"/>
           <p:cNvSpPr/>
           <p:nvPr/>
         </p:nvSpPr>
         <p:spPr>
           <a:xfrm>
-            <a:off x="1874520" y="4005072"/>
+            <a:off x="1874520" y="4096512"/>
             <a:ext cx="6903720" cy="658368"/>
           </a:xfrm>
           <a:prstGeom prst="rect">
@@ -12151,7 +12151,7 @@
                 <a:ea typeface="Trebuchet MS" pitchFamily="34" charset="-122"/>
                 <a:cs typeface="Trebuchet MS" pitchFamily="34" charset="-120"/>
               </a:rPr>
-              <a:t>grateful</a:t>
+              <a:t>careful</a:t>
             </a:r>
             <a:endParaRPr lang="en-US" sz="2800" dirty="0"/>
           </a:p>
@@ -12166,11 +12166,11 @@
         <p:spPr>
           <a:xfrm>
             <a:off x="365760" y="2240280"/>
-            <a:ext cx="1371600" cy="658368"/>
+            <a:ext cx="1371600" cy="841248"/>
           </a:xfrm>
           <a:prstGeom prst="rect">
             <a:avLst>
-              <a:gd name="adj" fmla="val 8333"/>
+              <a:gd name="adj" fmla="val 6522"/>
             </a:avLst>
           </a:prstGeom>
           <a:solidFill>
@@ -12193,7 +12193,7 @@
         <p:spPr>
           <a:xfrm>
             <a:off x="365760" y="2240280"/>
-            <a:ext cx="1371600" cy="658368"/>
+            <a:ext cx="1371600" cy="841248"/>
           </a:xfrm>
           <a:prstGeom prst="rect">
             <a:avLst/>
@@ -12232,11 +12232,11 @@
         <p:spPr>
           <a:xfrm>
             <a:off x="2938272" y="2258568"/>
-            <a:ext cx="1828800" cy="347472"/>
+            <a:ext cx="1828800" cy="292608"/>
           </a:xfrm>
           <a:prstGeom prst="rect">
             <a:avLst>
-              <a:gd name="adj" fmla="val 21053"/>
+              <a:gd name="adj" fmla="val 25000"/>
             </a:avLst>
           </a:prstGeom>
           <a:solidFill>
@@ -12266,7 +12266,7 @@
         <p:spPr>
           <a:xfrm>
             <a:off x="2938272" y="2258568"/>
-            <a:ext cx="1828800" cy="347472"/>
+            <a:ext cx="1828800" cy="292608"/>
           </a:xfrm>
           <a:prstGeom prst="rect">
             <a:avLst/>
@@ -12290,7 +12290,7 @@
                 <a:ea typeface="Trebuchet MS" pitchFamily="34" charset="-122"/>
                 <a:cs typeface="Trebuchet MS" pitchFamily="34" charset="-120"/>
               </a:rPr>
-              <a:t>grate</a:t>
+              <a:t>care</a:t>
             </a:r>
             <a:endParaRPr lang="en-US" sz="1300" dirty="0"/>
           </a:p>
@@ -12304,8 +12304,8 @@
         </p:nvSpPr>
         <p:spPr>
           <a:xfrm>
-            <a:off x="2938272" y="2624328"/>
-            <a:ext cx="1828800" cy="256032"/>
+            <a:off x="2938272" y="2569464"/>
+            <a:ext cx="1828800" cy="201168"/>
           </a:xfrm>
           <a:prstGeom prst="rect">
             <a:avLst/>
@@ -12329,7 +12329,7 @@
                 <a:ea typeface="Calibri" pitchFamily="34" charset="-122"/>
                 <a:cs typeface="Calibri" pitchFamily="34" charset="-120"/>
               </a:rPr>
-              <a:t>pleasing, thankful (from Latin gratus)</a:t>
+              <a:t>attention, concern</a:t>
             </a:r>
             <a:endParaRPr lang="en-US" sz="850" dirty="0"/>
           </a:p>
@@ -12344,11 +12344,11 @@
         <p:spPr>
           <a:xfrm>
             <a:off x="5803392" y="2258568"/>
-            <a:ext cx="1828800" cy="347472"/>
+            <a:ext cx="1828800" cy="292608"/>
           </a:xfrm>
           <a:prstGeom prst="rect">
             <a:avLst>
-              <a:gd name="adj" fmla="val 21053"/>
+              <a:gd name="adj" fmla="val 25000"/>
             </a:avLst>
           </a:prstGeom>
           <a:solidFill>
@@ -12378,7 +12378,7 @@
         <p:spPr>
           <a:xfrm>
             <a:off x="5803392" y="2258568"/>
-            <a:ext cx="1828800" cy="347472"/>
+            <a:ext cx="1828800" cy="292608"/>
           </a:xfrm>
           <a:prstGeom prst="rect">
             <a:avLst/>
@@ -12416,8 +12416,8 @@
         </p:nvSpPr>
         <p:spPr>
           <a:xfrm>
-            <a:off x="5803392" y="2624328"/>
-            <a:ext cx="1828800" cy="256032"/>
+            <a:off x="5803392" y="2569464"/>
+            <a:ext cx="1828800" cy="201168"/>
           </a:xfrm>
           <a:prstGeom prst="rect">
             <a:avLst/>
@@ -12441,7 +12441,7 @@
                 <a:ea typeface="Calibri" pitchFamily="34" charset="-122"/>
                 <a:cs typeface="Calibri" pitchFamily="34" charset="-120"/>
               </a:rPr>
-              <a:t>full of, having the quality of</a:t>
+              <a:t>full of, having quality</a:t>
             </a:r>
             <a:endParaRPr lang="en-US" sz="850" dirty="0"/>
           </a:p>
@@ -12455,7 +12455,7 @@
         </p:nvSpPr>
         <p:spPr>
           <a:xfrm>
-            <a:off x="365760" y="3182112"/>
+            <a:off x="365760" y="3273552"/>
             <a:ext cx="1371600" cy="658368"/>
           </a:xfrm>
           <a:prstGeom prst="rect">
@@ -12482,7 +12482,7 @@
         </p:nvSpPr>
         <p:spPr>
           <a:xfrm>
-            <a:off x="365760" y="3182112"/>
+            <a:off x="365760" y="3273552"/>
             <a:ext cx="1371600" cy="658368"/>
           </a:xfrm>
           <a:prstGeom prst="rect">
@@ -12521,7 +12521,7 @@
         </p:nvSpPr>
         <p:spPr>
           <a:xfrm>
-            <a:off x="1874520" y="3182112"/>
+            <a:off x="1874520" y="3273552"/>
             <a:ext cx="6903720" cy="658368"/>
           </a:xfrm>
           <a:prstGeom prst="rect">
@@ -12548,7 +12548,7 @@
         </p:nvSpPr>
         <p:spPr>
           <a:xfrm>
-            <a:off x="1874520" y="3182112"/>
+            <a:off x="1874520" y="3273552"/>
             <a:ext cx="6903720" cy="658368"/>
           </a:xfrm>
           <a:prstGeom prst="rect">
@@ -12587,7 +12587,7 @@
         </p:nvSpPr>
         <p:spPr>
           <a:xfrm>
-            <a:off x="365760" y="4005072"/>
+            <a:off x="365760" y="4096512"/>
             <a:ext cx="1371600" cy="658368"/>
           </a:xfrm>
           <a:prstGeom prst="rect">
@@ -12614,7 +12614,7 @@
         </p:nvSpPr>
         <p:spPr>
           <a:xfrm>
-            <a:off x="365760" y="4005072"/>
+            <a:off x="365760" y="4096512"/>
             <a:ext cx="1371600" cy="658368"/>
           </a:xfrm>
           <a:prstGeom prst="rect">
@@ -12653,7 +12653,7 @@
         </p:nvSpPr>
         <p:spPr>
           <a:xfrm>
-            <a:off x="1874520" y="4005072"/>
+            <a:off x="1874520" y="4096512"/>
             <a:ext cx="6903720" cy="658368"/>
           </a:xfrm>
           <a:prstGeom prst="rect">
@@ -12680,7 +12680,7 @@
         </p:nvSpPr>
         <p:spPr>
           <a:xfrm>
-            <a:off x="1874520" y="4005072"/>
+            <a:off x="1874520" y="4096512"/>
             <a:ext cx="6903720" cy="658368"/>
           </a:xfrm>
           <a:prstGeom prst="rect">
@@ -13136,7 +13136,7 @@
                 <a:ea typeface="Trebuchet MS" pitchFamily="34" charset="-122"/>
                 <a:cs typeface="Trebuchet MS" pitchFamily="34" charset="-120"/>
               </a:rPr>
-              <a:t>grateful</a:t>
+              <a:t>careful</a:t>
             </a:r>
             <a:endParaRPr lang="en-US" sz="2800" dirty="0"/>
           </a:p>
@@ -13151,11 +13151,11 @@
         <p:spPr>
           <a:xfrm>
             <a:off x="365760" y="2240280"/>
-            <a:ext cx="1371600" cy="658368"/>
+            <a:ext cx="1371600" cy="841248"/>
           </a:xfrm>
           <a:prstGeom prst="rect">
             <a:avLst>
-              <a:gd name="adj" fmla="val 8333"/>
+              <a:gd name="adj" fmla="val 6522"/>
             </a:avLst>
           </a:prstGeom>
           <a:solidFill>
@@ -13178,7 +13178,7 @@
         <p:spPr>
           <a:xfrm>
             <a:off x="365760" y="2240280"/>
-            <a:ext cx="1371600" cy="658368"/>
+            <a:ext cx="1371600" cy="841248"/>
           </a:xfrm>
           <a:prstGeom prst="rect">
             <a:avLst/>
@@ -13217,11 +13217,11 @@
         <p:spPr>
           <a:xfrm>
             <a:off x="2938272" y="2258568"/>
-            <a:ext cx="1828800" cy="347472"/>
+            <a:ext cx="1828800" cy="292608"/>
           </a:xfrm>
           <a:prstGeom prst="rect">
             <a:avLst>
-              <a:gd name="adj" fmla="val 21053"/>
+              <a:gd name="adj" fmla="val 25000"/>
             </a:avLst>
           </a:prstGeom>
           <a:solidFill>
@@ -13251,7 +13251,7 @@
         <p:spPr>
           <a:xfrm>
             <a:off x="2938272" y="2258568"/>
-            <a:ext cx="1828800" cy="347472"/>
+            <a:ext cx="1828800" cy="292608"/>
           </a:xfrm>
           <a:prstGeom prst="rect">
             <a:avLst/>
@@ -13275,7 +13275,7 @@
                 <a:ea typeface="Trebuchet MS" pitchFamily="34" charset="-122"/>
                 <a:cs typeface="Trebuchet MS" pitchFamily="34" charset="-120"/>
               </a:rPr>
-              <a:t>grate</a:t>
+              <a:t>care</a:t>
             </a:r>
             <a:endParaRPr lang="en-US" sz="1300" dirty="0"/>
           </a:p>
@@ -13289,8 +13289,8 @@
         </p:nvSpPr>
         <p:spPr>
           <a:xfrm>
-            <a:off x="2938272" y="2624328"/>
-            <a:ext cx="1828800" cy="256032"/>
+            <a:off x="2938272" y="2569464"/>
+            <a:ext cx="1828800" cy="201168"/>
           </a:xfrm>
           <a:prstGeom prst="rect">
             <a:avLst/>
@@ -13314,7 +13314,7 @@
                 <a:ea typeface="Calibri" pitchFamily="34" charset="-122"/>
                 <a:cs typeface="Calibri" pitchFamily="34" charset="-120"/>
               </a:rPr>
-              <a:t>pleasing, thankful (from Latin gratus)</a:t>
+              <a:t>attention, concern</a:t>
             </a:r>
             <a:endParaRPr lang="en-US" sz="850" dirty="0"/>
           </a:p>
@@ -13329,11 +13329,11 @@
         <p:spPr>
           <a:xfrm>
             <a:off x="5803392" y="2258568"/>
-            <a:ext cx="1828800" cy="347472"/>
+            <a:ext cx="1828800" cy="292608"/>
           </a:xfrm>
           <a:prstGeom prst="rect">
             <a:avLst>
-              <a:gd name="adj" fmla="val 21053"/>
+              <a:gd name="adj" fmla="val 25000"/>
             </a:avLst>
           </a:prstGeom>
           <a:solidFill>
@@ -13363,7 +13363,7 @@
         <p:spPr>
           <a:xfrm>
             <a:off x="5803392" y="2258568"/>
-            <a:ext cx="1828800" cy="347472"/>
+            <a:ext cx="1828800" cy="292608"/>
           </a:xfrm>
           <a:prstGeom prst="rect">
             <a:avLst/>
@@ -13401,8 +13401,8 @@
         </p:nvSpPr>
         <p:spPr>
           <a:xfrm>
-            <a:off x="5803392" y="2624328"/>
-            <a:ext cx="1828800" cy="256032"/>
+            <a:off x="5803392" y="2569464"/>
+            <a:ext cx="1828800" cy="201168"/>
           </a:xfrm>
           <a:prstGeom prst="rect">
             <a:avLst/>
@@ -13426,7 +13426,7 @@
                 <a:ea typeface="Calibri" pitchFamily="34" charset="-122"/>
                 <a:cs typeface="Calibri" pitchFamily="34" charset="-120"/>
               </a:rPr>
-              <a:t>full of, having the quality of</a:t>
+              <a:t>full of, having quality</a:t>
             </a:r>
             <a:endParaRPr lang="en-US" sz="850" dirty="0"/>
           </a:p>
@@ -13440,7 +13440,7 @@
         </p:nvSpPr>
         <p:spPr>
           <a:xfrm>
-            <a:off x="365760" y="3182112"/>
+            <a:off x="365760" y="3273552"/>
             <a:ext cx="1371600" cy="658368"/>
           </a:xfrm>
           <a:prstGeom prst="rect">
@@ -13467,7 +13467,7 @@
         </p:nvSpPr>
         <p:spPr>
           <a:xfrm>
-            <a:off x="365760" y="3182112"/>
+            <a:off x="365760" y="3273552"/>
             <a:ext cx="1371600" cy="658368"/>
           </a:xfrm>
           <a:prstGeom prst="rect">
@@ -13506,7 +13506,7 @@
         </p:nvSpPr>
         <p:spPr>
           <a:xfrm>
-            <a:off x="1874520" y="3182112"/>
+            <a:off x="1874520" y="3273552"/>
             <a:ext cx="6903720" cy="658368"/>
           </a:xfrm>
           <a:prstGeom prst="rect">
@@ -13533,7 +13533,7 @@
         </p:nvSpPr>
         <p:spPr>
           <a:xfrm>
-            <a:off x="2999232" y="3273552"/>
+            <a:off x="2999232" y="3364992"/>
             <a:ext cx="1645920" cy="475488"/>
           </a:xfrm>
           <a:prstGeom prst="rect">
@@ -13560,7 +13560,7 @@
         </p:nvSpPr>
         <p:spPr>
           <a:xfrm>
-            <a:off x="2999232" y="3273552"/>
+            <a:off x="2999232" y="3364992"/>
             <a:ext cx="1645920" cy="475488"/>
           </a:xfrm>
           <a:prstGeom prst="rect">
@@ -13585,7 +13585,7 @@
                 <a:ea typeface="Trebuchet MS" pitchFamily="34" charset="-122"/>
                 <a:cs typeface="Trebuchet MS" pitchFamily="34" charset="-120"/>
               </a:rPr>
-              <a:t>grate</a:t>
+              <a:t>care</a:t>
             </a:r>
             <a:endParaRPr lang="en-US" sz="1400" dirty="0"/>
           </a:p>
@@ -13599,7 +13599,7 @@
         </p:nvSpPr>
         <p:spPr>
           <a:xfrm>
-            <a:off x="4645152" y="3273552"/>
+            <a:off x="4645152" y="3364992"/>
             <a:ext cx="1097280" cy="475488"/>
           </a:xfrm>
           <a:prstGeom prst="rect">
@@ -13638,7 +13638,7 @@
         </p:nvSpPr>
         <p:spPr>
           <a:xfrm>
-            <a:off x="5742432" y="3273552"/>
+            <a:off x="5742432" y="3364992"/>
             <a:ext cx="1645920" cy="475488"/>
           </a:xfrm>
           <a:prstGeom prst="rect">
@@ -13665,7 +13665,7 @@
         </p:nvSpPr>
         <p:spPr>
           <a:xfrm>
-            <a:off x="5742432" y="3273552"/>
+            <a:off x="5742432" y="3364992"/>
             <a:ext cx="1645920" cy="475488"/>
           </a:xfrm>
           <a:prstGeom prst="rect">
@@ -13704,7 +13704,7 @@
         </p:nvSpPr>
         <p:spPr>
           <a:xfrm>
-            <a:off x="365760" y="4005072"/>
+            <a:off x="365760" y="4096512"/>
             <a:ext cx="1371600" cy="658368"/>
           </a:xfrm>
           <a:prstGeom prst="rect">
@@ -13731,7 +13731,7 @@
         </p:nvSpPr>
         <p:spPr>
           <a:xfrm>
-            <a:off x="365760" y="4005072"/>
+            <a:off x="365760" y="4096512"/>
             <a:ext cx="1371600" cy="658368"/>
           </a:xfrm>
           <a:prstGeom prst="rect">
@@ -13770,7 +13770,7 @@
         </p:nvSpPr>
         <p:spPr>
           <a:xfrm>
-            <a:off x="1874520" y="4005072"/>
+            <a:off x="1874520" y="4096512"/>
             <a:ext cx="6903720" cy="658368"/>
           </a:xfrm>
           <a:prstGeom prst="rect">
@@ -13797,7 +13797,7 @@
         </p:nvSpPr>
         <p:spPr>
           <a:xfrm>
-            <a:off x="1874520" y="4005072"/>
+            <a:off x="1874520" y="4096512"/>
             <a:ext cx="6903720" cy="658368"/>
           </a:xfrm>
           <a:prstGeom prst="rect">
@@ -14518,7 +14518,7 @@
                 <a:ea typeface="Trebuchet MS" pitchFamily="34" charset="-122"/>
                 <a:cs typeface="Trebuchet MS" pitchFamily="34" charset="-120"/>
               </a:rPr>
-              <a:t>grateful</a:t>
+              <a:t>careful</a:t>
             </a:r>
             <a:endParaRPr lang="en-US" sz="2800" dirty="0"/>
           </a:p>
@@ -14533,11 +14533,11 @@
         <p:spPr>
           <a:xfrm>
             <a:off x="365760" y="2240280"/>
-            <a:ext cx="1371600" cy="658368"/>
+            <a:ext cx="1371600" cy="841248"/>
           </a:xfrm>
           <a:prstGeom prst="rect">
             <a:avLst>
-              <a:gd name="adj" fmla="val 8333"/>
+              <a:gd name="adj" fmla="val 6522"/>
             </a:avLst>
           </a:prstGeom>
           <a:solidFill>
@@ -14560,7 +14560,7 @@
         <p:spPr>
           <a:xfrm>
             <a:off x="365760" y="2240280"/>
-            <a:ext cx="1371600" cy="658368"/>
+            <a:ext cx="1371600" cy="841248"/>
           </a:xfrm>
           <a:prstGeom prst="rect">
             <a:avLst/>
@@ -14599,11 +14599,11 @@
         <p:spPr>
           <a:xfrm>
             <a:off x="2938272" y="2258568"/>
-            <a:ext cx="1828800" cy="347472"/>
+            <a:ext cx="1828800" cy="292608"/>
           </a:xfrm>
           <a:prstGeom prst="rect">
             <a:avLst>
-              <a:gd name="adj" fmla="val 21053"/>
+              <a:gd name="adj" fmla="val 25000"/>
             </a:avLst>
           </a:prstGeom>
           <a:solidFill>
@@ -14633,7 +14633,7 @@
         <p:spPr>
           <a:xfrm>
             <a:off x="2938272" y="2258568"/>
-            <a:ext cx="1828800" cy="347472"/>
+            <a:ext cx="1828800" cy="292608"/>
           </a:xfrm>
           <a:prstGeom prst="rect">
             <a:avLst/>
@@ -14657,7 +14657,7 @@
                 <a:ea typeface="Trebuchet MS" pitchFamily="34" charset="-122"/>
                 <a:cs typeface="Trebuchet MS" pitchFamily="34" charset="-120"/>
               </a:rPr>
-              <a:t>grate</a:t>
+              <a:t>care</a:t>
             </a:r>
             <a:endParaRPr lang="en-US" sz="1300" dirty="0"/>
           </a:p>
@@ -14671,8 +14671,8 @@
         </p:nvSpPr>
         <p:spPr>
           <a:xfrm>
-            <a:off x="2938272" y="2624328"/>
-            <a:ext cx="1828800" cy="256032"/>
+            <a:off x="2938272" y="2569464"/>
+            <a:ext cx="1828800" cy="201168"/>
           </a:xfrm>
           <a:prstGeom prst="rect">
             <a:avLst/>
@@ -14696,7 +14696,7 @@
                 <a:ea typeface="Calibri" pitchFamily="34" charset="-122"/>
                 <a:cs typeface="Calibri" pitchFamily="34" charset="-120"/>
               </a:rPr>
-              <a:t>pleasing, thankful (from Latin gratus)</a:t>
+              <a:t>attention, concern</a:t>
             </a:r>
             <a:endParaRPr lang="en-US" sz="850" dirty="0"/>
           </a:p>
@@ -14711,11 +14711,11 @@
         <p:spPr>
           <a:xfrm>
             <a:off x="5803392" y="2258568"/>
-            <a:ext cx="1828800" cy="347472"/>
+            <a:ext cx="1828800" cy="292608"/>
           </a:xfrm>
           <a:prstGeom prst="rect">
             <a:avLst>
-              <a:gd name="adj" fmla="val 21053"/>
+              <a:gd name="adj" fmla="val 25000"/>
             </a:avLst>
           </a:prstGeom>
           <a:solidFill>
@@ -14745,7 +14745,7 @@
         <p:spPr>
           <a:xfrm>
             <a:off x="5803392" y="2258568"/>
-            <a:ext cx="1828800" cy="347472"/>
+            <a:ext cx="1828800" cy="292608"/>
           </a:xfrm>
           <a:prstGeom prst="rect">
             <a:avLst/>
@@ -14783,8 +14783,8 @@
         </p:nvSpPr>
         <p:spPr>
           <a:xfrm>
-            <a:off x="5803392" y="2624328"/>
-            <a:ext cx="1828800" cy="256032"/>
+            <a:off x="5803392" y="2569464"/>
+            <a:ext cx="1828800" cy="201168"/>
           </a:xfrm>
           <a:prstGeom prst="rect">
             <a:avLst/>
@@ -14808,7 +14808,7 @@
                 <a:ea typeface="Calibri" pitchFamily="34" charset="-122"/>
                 <a:cs typeface="Calibri" pitchFamily="34" charset="-120"/>
               </a:rPr>
-              <a:t>full of, having the quality of</a:t>
+              <a:t>full of, having quality</a:t>
             </a:r>
             <a:endParaRPr lang="en-US" sz="850" dirty="0"/>
           </a:p>
@@ -14822,7 +14822,7 @@
         </p:nvSpPr>
         <p:spPr>
           <a:xfrm>
-            <a:off x="365760" y="3182112"/>
+            <a:off x="365760" y="3273552"/>
             <a:ext cx="1371600" cy="658368"/>
           </a:xfrm>
           <a:prstGeom prst="rect">
@@ -14849,7 +14849,7 @@
         </p:nvSpPr>
         <p:spPr>
           <a:xfrm>
-            <a:off x="365760" y="3182112"/>
+            <a:off x="365760" y="3273552"/>
             <a:ext cx="1371600" cy="658368"/>
           </a:xfrm>
           <a:prstGeom prst="rect">
@@ -14888,7 +14888,7 @@
         </p:nvSpPr>
         <p:spPr>
           <a:xfrm>
-            <a:off x="1874520" y="3182112"/>
+            <a:off x="1874520" y="3273552"/>
             <a:ext cx="6903720" cy="658368"/>
           </a:xfrm>
           <a:prstGeom prst="rect">
@@ -14915,7 +14915,7 @@
         </p:nvSpPr>
         <p:spPr>
           <a:xfrm>
-            <a:off x="2999232" y="3273552"/>
+            <a:off x="2999232" y="3364992"/>
             <a:ext cx="1645920" cy="475488"/>
           </a:xfrm>
           <a:prstGeom prst="rect">
@@ -14942,7 +14942,7 @@
         </p:nvSpPr>
         <p:spPr>
           <a:xfrm>
-            <a:off x="2999232" y="3273552"/>
+            <a:off x="2999232" y="3364992"/>
             <a:ext cx="1645920" cy="475488"/>
           </a:xfrm>
           <a:prstGeom prst="rect">
@@ -14967,7 +14967,7 @@
                 <a:ea typeface="Trebuchet MS" pitchFamily="34" charset="-122"/>
                 <a:cs typeface="Trebuchet MS" pitchFamily="34" charset="-120"/>
               </a:rPr>
-              <a:t>grate</a:t>
+              <a:t>care</a:t>
             </a:r>
             <a:endParaRPr lang="en-US" sz="1400" dirty="0"/>
           </a:p>
@@ -14981,7 +14981,7 @@
         </p:nvSpPr>
         <p:spPr>
           <a:xfrm>
-            <a:off x="4645152" y="3273552"/>
+            <a:off x="4645152" y="3364992"/>
             <a:ext cx="1097280" cy="475488"/>
           </a:xfrm>
           <a:prstGeom prst="rect">
@@ -15020,7 +15020,7 @@
         </p:nvSpPr>
         <p:spPr>
           <a:xfrm>
-            <a:off x="5742432" y="3273552"/>
+            <a:off x="5742432" y="3364992"/>
             <a:ext cx="1645920" cy="475488"/>
           </a:xfrm>
           <a:prstGeom prst="rect">
@@ -15047,7 +15047,7 @@
         </p:nvSpPr>
         <p:spPr>
           <a:xfrm>
-            <a:off x="5742432" y="3273552"/>
+            <a:off x="5742432" y="3364992"/>
             <a:ext cx="1645920" cy="475488"/>
           </a:xfrm>
           <a:prstGeom prst="rect">
@@ -15086,7 +15086,7 @@
         </p:nvSpPr>
         <p:spPr>
           <a:xfrm>
-            <a:off x="365760" y="4005072"/>
+            <a:off x="365760" y="4096512"/>
             <a:ext cx="1371600" cy="658368"/>
           </a:xfrm>
           <a:prstGeom prst="rect">
@@ -15113,7 +15113,7 @@
         </p:nvSpPr>
         <p:spPr>
           <a:xfrm>
-            <a:off x="365760" y="4005072"/>
+            <a:off x="365760" y="4096512"/>
             <a:ext cx="1371600" cy="658368"/>
           </a:xfrm>
           <a:prstGeom prst="rect">
@@ -15152,7 +15152,7 @@
         </p:nvSpPr>
         <p:spPr>
           <a:xfrm>
-            <a:off x="1874520" y="4005072"/>
+            <a:off x="1874520" y="4096512"/>
             <a:ext cx="6903720" cy="658368"/>
           </a:xfrm>
           <a:prstGeom prst="rect">
@@ -15179,7 +15179,7 @@
         </p:nvSpPr>
         <p:spPr>
           <a:xfrm>
-            <a:off x="2023872" y="4096512"/>
+            <a:off x="2427732" y="4187952"/>
             <a:ext cx="685800" cy="475488"/>
           </a:xfrm>
           <a:prstGeom prst="rect">
@@ -15206,7 +15206,7 @@
         </p:nvSpPr>
         <p:spPr>
           <a:xfrm>
-            <a:off x="2023872" y="4096512"/>
+            <a:off x="2427732" y="4187952"/>
             <a:ext cx="685800" cy="475488"/>
           </a:xfrm>
           <a:prstGeom prst="rect">
@@ -15231,7 +15231,7 @@
                 <a:ea typeface="Trebuchet MS" pitchFamily="34" charset="-122"/>
                 <a:cs typeface="Trebuchet MS" pitchFamily="34" charset="-120"/>
               </a:rPr>
-              <a:t>g</a:t>
+              <a:t>c</a:t>
             </a:r>
             <a:endParaRPr lang="en-US" sz="900" dirty="0"/>
           </a:p>
@@ -15245,7 +15245,7 @@
         </p:nvSpPr>
         <p:spPr>
           <a:xfrm>
-            <a:off x="2831592" y="4096512"/>
+            <a:off x="3639312" y="4187952"/>
             <a:ext cx="685800" cy="475488"/>
           </a:xfrm>
           <a:prstGeom prst="rect">
@@ -15272,7 +15272,7 @@
         </p:nvSpPr>
         <p:spPr>
           <a:xfrm>
-            <a:off x="2831592" y="4096512"/>
+            <a:off x="3639312" y="4187952"/>
             <a:ext cx="685800" cy="475488"/>
           </a:xfrm>
           <a:prstGeom prst="rect">
@@ -15297,7 +15297,7 @@
                 <a:ea typeface="Trebuchet MS" pitchFamily="34" charset="-122"/>
                 <a:cs typeface="Trebuchet MS" pitchFamily="34" charset="-120"/>
               </a:rPr>
-              <a:t>r</a:t>
+              <a:t>are</a:t>
             </a:r>
             <a:endParaRPr lang="en-US" sz="900" dirty="0"/>
           </a:p>
@@ -15311,7 +15311,7 @@
         </p:nvSpPr>
         <p:spPr>
           <a:xfrm>
-            <a:off x="3639312" y="4096512"/>
+            <a:off x="4850892" y="4187952"/>
             <a:ext cx="685800" cy="475488"/>
           </a:xfrm>
           <a:prstGeom prst="rect">
@@ -15338,7 +15338,7 @@
         </p:nvSpPr>
         <p:spPr>
           <a:xfrm>
-            <a:off x="3639312" y="4096512"/>
+            <a:off x="4850892" y="4187952"/>
             <a:ext cx="685800" cy="475488"/>
           </a:xfrm>
           <a:prstGeom prst="rect">
@@ -15363,7 +15363,7 @@
                 <a:ea typeface="Trebuchet MS" pitchFamily="34" charset="-122"/>
                 <a:cs typeface="Trebuchet MS" pitchFamily="34" charset="-120"/>
               </a:rPr>
-              <a:t>a</a:t>
+              <a:t>f</a:t>
             </a:r>
             <a:endParaRPr lang="en-US" sz="900" dirty="0"/>
           </a:p>
@@ -15377,7 +15377,7 @@
         </p:nvSpPr>
         <p:spPr>
           <a:xfrm>
-            <a:off x="4447032" y="4096512"/>
+            <a:off x="6062472" y="4187952"/>
             <a:ext cx="685800" cy="475488"/>
           </a:xfrm>
           <a:prstGeom prst="rect">
@@ -15404,7 +15404,7 @@
         </p:nvSpPr>
         <p:spPr>
           <a:xfrm>
-            <a:off x="4447032" y="4096512"/>
+            <a:off x="6062472" y="4187952"/>
             <a:ext cx="685800" cy="475488"/>
           </a:xfrm>
           <a:prstGeom prst="rect">
@@ -15429,7 +15429,7 @@
                 <a:ea typeface="Trebuchet MS" pitchFamily="34" charset="-122"/>
                 <a:cs typeface="Trebuchet MS" pitchFamily="34" charset="-120"/>
               </a:rPr>
-              <a:t>t</a:t>
+              <a:t>u</a:t>
             </a:r>
             <a:endParaRPr lang="en-US" sz="900" dirty="0"/>
           </a:p>
@@ -15443,7 +15443,7 @@
         </p:nvSpPr>
         <p:spPr>
           <a:xfrm>
-            <a:off x="5254752" y="4096512"/>
+            <a:off x="7274052" y="4187952"/>
             <a:ext cx="685800" cy="475488"/>
           </a:xfrm>
           <a:prstGeom prst="rect">
@@ -15470,205 +15470,7 @@
         </p:nvSpPr>
         <p:spPr>
           <a:xfrm>
-            <a:off x="5254752" y="4096512"/>
-            <a:ext cx="685800" cy="475488"/>
-          </a:xfrm>
-          <a:prstGeom prst="rect">
-            <a:avLst/>
-          </a:prstGeom>
-          <a:noFill/>
-          <a:ln/>
-        </p:spPr>
-        <p:txBody>
-          <a:bodyPr wrap="square" lIns="0" tIns="0" rIns="0" bIns="0" rtlCol="0" anchor="ctr"/>
-          <a:lstStyle/>
-          <a:p>
-            <a:pPr algn="ctr" indent="0" marL="0">
-              <a:buNone/>
-            </a:pPr>
-            <a:r>
-              <a:rPr lang="en-US" sz="900" b="1" dirty="0">
-                <a:solidFill>
-                  <a:srgbClr val="9D174D"/>
-                </a:solidFill>
-                <a:latin typeface="Trebuchet MS" pitchFamily="34" charset="0"/>
-                <a:ea typeface="Trebuchet MS" pitchFamily="34" charset="-122"/>
-                <a:cs typeface="Trebuchet MS" pitchFamily="34" charset="-120"/>
-              </a:rPr>
-              <a:t>e</a:t>
-            </a:r>
-            <a:endParaRPr lang="en-US" sz="900" dirty="0"/>
-          </a:p>
-        </p:txBody>
-      </p:sp>
-      <p:sp>
-        <p:nvSpPr>
-          <p:cNvPr id="43" name="Shape 41"/>
-          <p:cNvSpPr/>
-          <p:nvPr/>
-        </p:nvSpPr>
-        <p:spPr>
-          <a:xfrm>
-            <a:off x="6062472" y="4096512"/>
-            <a:ext cx="685800" cy="475488"/>
-          </a:xfrm>
-          <a:prstGeom prst="rect">
-            <a:avLst>
-              <a:gd name="adj" fmla="val 7692"/>
-            </a:avLst>
-          </a:prstGeom>
-          <a:solidFill>
-            <a:srgbClr val="FFFFFF"/>
-          </a:solidFill>
-          <a:ln w="12700">
-            <a:solidFill>
-              <a:srgbClr val="DB2777"/>
-            </a:solidFill>
-            <a:prstDash val="solid"/>
-          </a:ln>
-        </p:spPr>
-      </p:sp>
-      <p:sp>
-        <p:nvSpPr>
-          <p:cNvPr id="44" name="Text 42"/>
-          <p:cNvSpPr/>
-          <p:nvPr/>
-        </p:nvSpPr>
-        <p:spPr>
-          <a:xfrm>
-            <a:off x="6062472" y="4096512"/>
-            <a:ext cx="685800" cy="475488"/>
-          </a:xfrm>
-          <a:prstGeom prst="rect">
-            <a:avLst/>
-          </a:prstGeom>
-          <a:noFill/>
-          <a:ln/>
-        </p:spPr>
-        <p:txBody>
-          <a:bodyPr wrap="square" lIns="0" tIns="0" rIns="0" bIns="0" rtlCol="0" anchor="ctr"/>
-          <a:lstStyle/>
-          <a:p>
-            <a:pPr algn="ctr" indent="0" marL="0">
-              <a:buNone/>
-            </a:pPr>
-            <a:r>
-              <a:rPr lang="en-US" sz="900" b="1" dirty="0">
-                <a:solidFill>
-                  <a:srgbClr val="9D174D"/>
-                </a:solidFill>
-                <a:latin typeface="Trebuchet MS" pitchFamily="34" charset="0"/>
-                <a:ea typeface="Trebuchet MS" pitchFamily="34" charset="-122"/>
-                <a:cs typeface="Trebuchet MS" pitchFamily="34" charset="-120"/>
-              </a:rPr>
-              <a:t>f</a:t>
-            </a:r>
-            <a:endParaRPr lang="en-US" sz="900" dirty="0"/>
-          </a:p>
-        </p:txBody>
-      </p:sp>
-      <p:sp>
-        <p:nvSpPr>
-          <p:cNvPr id="45" name="Shape 43"/>
-          <p:cNvSpPr/>
-          <p:nvPr/>
-        </p:nvSpPr>
-        <p:spPr>
-          <a:xfrm>
-            <a:off x="6870192" y="4096512"/>
-            <a:ext cx="685800" cy="475488"/>
-          </a:xfrm>
-          <a:prstGeom prst="rect">
-            <a:avLst>
-              <a:gd name="adj" fmla="val 7692"/>
-            </a:avLst>
-          </a:prstGeom>
-          <a:solidFill>
-            <a:srgbClr val="FFFFFF"/>
-          </a:solidFill>
-          <a:ln w="12700">
-            <a:solidFill>
-              <a:srgbClr val="DB2777"/>
-            </a:solidFill>
-            <a:prstDash val="solid"/>
-          </a:ln>
-        </p:spPr>
-      </p:sp>
-      <p:sp>
-        <p:nvSpPr>
-          <p:cNvPr id="46" name="Text 44"/>
-          <p:cNvSpPr/>
-          <p:nvPr/>
-        </p:nvSpPr>
-        <p:spPr>
-          <a:xfrm>
-            <a:off x="6870192" y="4096512"/>
-            <a:ext cx="685800" cy="475488"/>
-          </a:xfrm>
-          <a:prstGeom prst="rect">
-            <a:avLst/>
-          </a:prstGeom>
-          <a:noFill/>
-          <a:ln/>
-        </p:spPr>
-        <p:txBody>
-          <a:bodyPr wrap="square" lIns="0" tIns="0" rIns="0" bIns="0" rtlCol="0" anchor="ctr"/>
-          <a:lstStyle/>
-          <a:p>
-            <a:pPr algn="ctr" indent="0" marL="0">
-              <a:buNone/>
-            </a:pPr>
-            <a:r>
-              <a:rPr lang="en-US" sz="900" b="1" dirty="0">
-                <a:solidFill>
-                  <a:srgbClr val="9D174D"/>
-                </a:solidFill>
-                <a:latin typeface="Trebuchet MS" pitchFamily="34" charset="0"/>
-                <a:ea typeface="Trebuchet MS" pitchFamily="34" charset="-122"/>
-                <a:cs typeface="Trebuchet MS" pitchFamily="34" charset="-120"/>
-              </a:rPr>
-              <a:t>u</a:t>
-            </a:r>
-            <a:endParaRPr lang="en-US" sz="900" dirty="0"/>
-          </a:p>
-        </p:txBody>
-      </p:sp>
-      <p:sp>
-        <p:nvSpPr>
-          <p:cNvPr id="47" name="Shape 45"/>
-          <p:cNvSpPr/>
-          <p:nvPr/>
-        </p:nvSpPr>
-        <p:spPr>
-          <a:xfrm>
-            <a:off x="7677912" y="4096512"/>
-            <a:ext cx="685800" cy="475488"/>
-          </a:xfrm>
-          <a:prstGeom prst="rect">
-            <a:avLst>
-              <a:gd name="adj" fmla="val 7692"/>
-            </a:avLst>
-          </a:prstGeom>
-          <a:solidFill>
-            <a:srgbClr val="FFFFFF"/>
-          </a:solidFill>
-          <a:ln w="12700">
-            <a:solidFill>
-              <a:srgbClr val="DB2777"/>
-            </a:solidFill>
-            <a:prstDash val="solid"/>
-          </a:ln>
-        </p:spPr>
-      </p:sp>
-      <p:sp>
-        <p:nvSpPr>
-          <p:cNvPr id="48" name="Text 46"/>
-          <p:cNvSpPr/>
-          <p:nvPr/>
-        </p:nvSpPr>
-        <p:spPr>
-          <a:xfrm>
-            <a:off x="7677912" y="4096512"/>
+            <a:off x="7274052" y="4187952"/>
             <a:ext cx="685800" cy="475488"/>
           </a:xfrm>
           <a:prstGeom prst="rect">
@@ -17036,7 +16838,7 @@
                 <a:ea typeface="Calibri" pitchFamily="34" charset="-122"/>
                 <a:cs typeface="Calibri" pitchFamily="34" charset="-120"/>
               </a:rPr>
-              <a:t>colourful</a:t>
+              <a:t>powerful</a:t>
             </a:r>
             <a:pPr algn="l" indent="0" marL="0">
               <a:buNone/>
@@ -17050,7 +16852,7 @@
                 <a:ea typeface="Calibri" pitchFamily="34" charset="-122"/>
                 <a:cs typeface="Calibri" pitchFamily="34" charset="-120"/>
               </a:rPr>
-              <a:t>, </a:t>
+              <a:t> storm was frightful, but the </a:t>
             </a:r>
             <a:pPr algn="l" indent="0" marL="0">
               <a:buNone/>
@@ -17067,7 +16869,7 @@
                 <a:ea typeface="Calibri" pitchFamily="34" charset="-122"/>
                 <a:cs typeface="Calibri" pitchFamily="34" charset="-120"/>
               </a:rPr>
-              <a:t>playful</a:t>
+              <a:t>cheerful</a:t>
             </a:r>
             <a:pPr algn="l" indent="0" marL="0">
               <a:buNone/>
@@ -17081,7 +16883,7 @@
                 <a:ea typeface="Calibri" pitchFamily="34" charset="-122"/>
                 <a:cs typeface="Calibri" pitchFamily="34" charset="-120"/>
               </a:rPr>
-              <a:t> puppy was so powerful that it knocked over the </a:t>
+              <a:t> teacher kept everyone calm and </a:t>
             </a:r>
             <a:pPr algn="l" indent="0" marL="0">
               <a:buNone/>
@@ -17098,7 +16900,7 @@
                 <a:ea typeface="Calibri" pitchFamily="34" charset="-122"/>
                 <a:cs typeface="Calibri" pitchFamily="34" charset="-120"/>
               </a:rPr>
-              <a:t>careful</a:t>
+              <a:t>playful</a:t>
             </a:r>
             <a:pPr algn="l" indent="0" marL="0">
               <a:buNone/>
@@ -17112,7 +16914,7 @@
                 <a:ea typeface="Calibri" pitchFamily="34" charset="-122"/>
                 <a:cs typeface="Calibri" pitchFamily="34" charset="-120"/>
               </a:rPr>
-              <a:t> arrangement of blocks.</a:t>
+              <a:t>.</a:t>
             </a:r>
             <a:endParaRPr lang="en-US" sz="1800" dirty="0"/>
           </a:p>
@@ -17267,7 +17069,7 @@
                 <a:ea typeface="Trebuchet MS" pitchFamily="34" charset="-122"/>
                 <a:cs typeface="Trebuchet MS" pitchFamily="34" charset="-120"/>
               </a:rPr>
-              <a:t>colourful</a:t>
+              <a:t>powerful</a:t>
             </a:r>
             <a:endParaRPr lang="en-US" sz="1400" dirty="0"/>
           </a:p>
@@ -17395,7 +17197,7 @@
                 <a:ea typeface="Trebuchet MS" pitchFamily="34" charset="-122"/>
                 <a:cs typeface="Trebuchet MS" pitchFamily="34" charset="-120"/>
               </a:rPr>
-              <a:t>playful</a:t>
+              <a:t>cheerful</a:t>
             </a:r>
             <a:endParaRPr lang="en-US" sz="1400" dirty="0"/>
           </a:p>
@@ -17523,7 +17325,7 @@
                 <a:ea typeface="Trebuchet MS" pitchFamily="34" charset="-122"/>
                 <a:cs typeface="Trebuchet MS" pitchFamily="34" charset="-120"/>
               </a:rPr>
-              <a:t>careful</a:t>
+              <a:t>playful</a:t>
             </a:r>
             <a:endParaRPr lang="en-US" sz="1400" dirty="0"/>
           </a:p>
@@ -17993,7 +17795,7 @@
                 <a:ea typeface="Trebuchet MS" pitchFamily="34" charset="-122"/>
                 <a:cs typeface="Trebuchet MS" pitchFamily="34" charset="-120"/>
               </a:rPr>
-              <a:t>colourful</a:t>
+              <a:t>powerful</a:t>
             </a:r>
             <a:endParaRPr lang="en-US" sz="2800" dirty="0"/>
           </a:p>
@@ -18008,6 +17810,138 @@
         <p:spPr>
           <a:xfrm>
             <a:off x="365760" y="2240280"/>
+            <a:ext cx="1371600" cy="841248"/>
+          </a:xfrm>
+          <a:prstGeom prst="rect">
+            <a:avLst>
+              <a:gd name="adj" fmla="val 6522"/>
+            </a:avLst>
+          </a:prstGeom>
+          <a:solidFill>
+            <a:srgbClr val="E2E8F0"/>
+          </a:solidFill>
+          <a:ln w="12700">
+            <a:solidFill>
+              <a:srgbClr val="E2E8F0"/>
+            </a:solidFill>
+            <a:prstDash val="solid"/>
+          </a:ln>
+        </p:spPr>
+      </p:sp>
+      <p:sp>
+        <p:nvSpPr>
+          <p:cNvPr id="15" name="Text 13"/>
+          <p:cNvSpPr/>
+          <p:nvPr/>
+        </p:nvSpPr>
+        <p:spPr>
+          <a:xfrm>
+            <a:off x="365760" y="2240280"/>
+            <a:ext cx="1371600" cy="841248"/>
+          </a:xfrm>
+          <a:prstGeom prst="rect">
+            <a:avLst/>
+          </a:prstGeom>
+          <a:noFill/>
+          <a:ln/>
+        </p:spPr>
+        <p:txBody>
+          <a:bodyPr wrap="square" lIns="0" tIns="0" rIns="0" bIns="0" rtlCol="0" anchor="ctr"/>
+          <a:lstStyle/>
+          <a:p>
+            <a:pPr algn="ctr" indent="0" marL="0">
+              <a:buNone/>
+            </a:pPr>
+            <a:r>
+              <a:rPr lang="en-US" sz="1100" b="1" dirty="0">
+                <a:solidFill>
+                  <a:srgbClr val="475569"/>
+                </a:solidFill>
+                <a:latin typeface="Trebuchet MS" pitchFamily="34" charset="0"/>
+                <a:ea typeface="Trebuchet MS" pitchFamily="34" charset="-122"/>
+                <a:cs typeface="Trebuchet MS" pitchFamily="34" charset="-120"/>
+              </a:rPr>
+              <a:t>Morphemes</a:t>
+            </a:r>
+            <a:endParaRPr lang="en-US" sz="1100" dirty="0"/>
+          </a:p>
+        </p:txBody>
+      </p:sp>
+      <p:sp>
+        <p:nvSpPr>
+          <p:cNvPr id="16" name="Shape 14"/>
+          <p:cNvSpPr/>
+          <p:nvPr/>
+        </p:nvSpPr>
+        <p:spPr>
+          <a:xfrm>
+            <a:off x="1874520" y="2240280"/>
+            <a:ext cx="6903720" cy="841248"/>
+          </a:xfrm>
+          <a:prstGeom prst="rect">
+            <a:avLst>
+              <a:gd name="adj" fmla="val 6522"/>
+            </a:avLst>
+          </a:prstGeom>
+          <a:solidFill>
+            <a:srgbClr val="F8FAFC"/>
+          </a:solidFill>
+          <a:ln w="12700">
+            <a:solidFill>
+              <a:srgbClr val="E2E8F0"/>
+            </a:solidFill>
+            <a:prstDash val="dash"/>
+          </a:ln>
+        </p:spPr>
+      </p:sp>
+      <p:sp>
+        <p:nvSpPr>
+          <p:cNvPr id="17" name="Text 15"/>
+          <p:cNvSpPr/>
+          <p:nvPr/>
+        </p:nvSpPr>
+        <p:spPr>
+          <a:xfrm>
+            <a:off x="1874520" y="2240280"/>
+            <a:ext cx="6903720" cy="841248"/>
+          </a:xfrm>
+          <a:prstGeom prst="rect">
+            <a:avLst/>
+          </a:prstGeom>
+          <a:noFill/>
+          <a:ln/>
+        </p:spPr>
+        <p:txBody>
+          <a:bodyPr wrap="square" rtlCol="0" anchor="ctr"/>
+          <a:lstStyle/>
+          <a:p>
+            <a:pPr algn="ctr" indent="0" marL="0">
+              <a:buNone/>
+            </a:pPr>
+            <a:r>
+              <a:rPr lang="en-US" sz="1100" i="1" dirty="0">
+                <a:solidFill>
+                  <a:srgbClr val="CBD5E1"/>
+                </a:solidFill>
+                <a:latin typeface="Calibri" pitchFamily="34" charset="0"/>
+                <a:ea typeface="Calibri" pitchFamily="34" charset="-122"/>
+                <a:cs typeface="Calibri" pitchFamily="34" charset="-120"/>
+              </a:rPr>
+              <a:t>Write here...</a:t>
+            </a:r>
+            <a:endParaRPr lang="en-US" sz="1100" dirty="0"/>
+          </a:p>
+        </p:txBody>
+      </p:sp>
+      <p:sp>
+        <p:nvSpPr>
+          <p:cNvPr id="18" name="Shape 16"/>
+          <p:cNvSpPr/>
+          <p:nvPr/>
+        </p:nvSpPr>
+        <p:spPr>
+          <a:xfrm>
+            <a:off x="365760" y="3273552"/>
             <a:ext cx="1371600" cy="658368"/>
           </a:xfrm>
           <a:prstGeom prst="rect">
@@ -18028,13 +17962,13 @@
       </p:sp>
       <p:sp>
         <p:nvSpPr>
-          <p:cNvPr id="15" name="Text 13"/>
-          <p:cNvSpPr/>
-          <p:nvPr/>
-        </p:nvSpPr>
-        <p:spPr>
-          <a:xfrm>
-            <a:off x="365760" y="2240280"/>
+          <p:cNvPr id="19" name="Text 17"/>
+          <p:cNvSpPr/>
+          <p:nvPr/>
+        </p:nvSpPr>
+        <p:spPr>
+          <a:xfrm>
+            <a:off x="365760" y="3273552"/>
             <a:ext cx="1371600" cy="658368"/>
           </a:xfrm>
           <a:prstGeom prst="rect">
@@ -18059,7 +17993,7 @@
                 <a:ea typeface="Trebuchet MS" pitchFamily="34" charset="-122"/>
                 <a:cs typeface="Trebuchet MS" pitchFamily="34" charset="-120"/>
               </a:rPr>
-              <a:t>Morphemes</a:t>
+              <a:t>Syllables</a:t>
             </a:r>
             <a:endParaRPr lang="en-US" sz="1100" dirty="0"/>
           </a:p>
@@ -18067,13 +18001,13 @@
       </p:sp>
       <p:sp>
         <p:nvSpPr>
-          <p:cNvPr id="16" name="Shape 14"/>
-          <p:cNvSpPr/>
-          <p:nvPr/>
-        </p:nvSpPr>
-        <p:spPr>
-          <a:xfrm>
-            <a:off x="1874520" y="2240280"/>
+          <p:cNvPr id="20" name="Shape 18"/>
+          <p:cNvSpPr/>
+          <p:nvPr/>
+        </p:nvSpPr>
+        <p:spPr>
+          <a:xfrm>
+            <a:off x="1874520" y="3273552"/>
             <a:ext cx="6903720" cy="658368"/>
           </a:xfrm>
           <a:prstGeom prst="rect">
@@ -18094,13 +18028,13 @@
       </p:sp>
       <p:sp>
         <p:nvSpPr>
-          <p:cNvPr id="17" name="Text 15"/>
-          <p:cNvSpPr/>
-          <p:nvPr/>
-        </p:nvSpPr>
-        <p:spPr>
-          <a:xfrm>
-            <a:off x="1874520" y="2240280"/>
+          <p:cNvPr id="21" name="Text 19"/>
+          <p:cNvSpPr/>
+          <p:nvPr/>
+        </p:nvSpPr>
+        <p:spPr>
+          <a:xfrm>
+            <a:off x="1874520" y="3273552"/>
             <a:ext cx="6903720" cy="658368"/>
           </a:xfrm>
           <a:prstGeom prst="rect">
@@ -18133,13 +18067,13 @@
       </p:sp>
       <p:sp>
         <p:nvSpPr>
-          <p:cNvPr id="18" name="Shape 16"/>
-          <p:cNvSpPr/>
-          <p:nvPr/>
-        </p:nvSpPr>
-        <p:spPr>
-          <a:xfrm>
-            <a:off x="365760" y="3182112"/>
+          <p:cNvPr id="22" name="Shape 20"/>
+          <p:cNvSpPr/>
+          <p:nvPr/>
+        </p:nvSpPr>
+        <p:spPr>
+          <a:xfrm>
+            <a:off x="365760" y="4096512"/>
             <a:ext cx="1371600" cy="658368"/>
           </a:xfrm>
           <a:prstGeom prst="rect">
@@ -18160,13 +18094,13 @@
       </p:sp>
       <p:sp>
         <p:nvSpPr>
-          <p:cNvPr id="19" name="Text 17"/>
-          <p:cNvSpPr/>
-          <p:nvPr/>
-        </p:nvSpPr>
-        <p:spPr>
-          <a:xfrm>
-            <a:off x="365760" y="3182112"/>
+          <p:cNvPr id="23" name="Text 21"/>
+          <p:cNvSpPr/>
+          <p:nvPr/>
+        </p:nvSpPr>
+        <p:spPr>
+          <a:xfrm>
+            <a:off x="365760" y="4096512"/>
             <a:ext cx="1371600" cy="658368"/>
           </a:xfrm>
           <a:prstGeom prst="rect">
@@ -18191,7 +18125,7 @@
                 <a:ea typeface="Trebuchet MS" pitchFamily="34" charset="-122"/>
                 <a:cs typeface="Trebuchet MS" pitchFamily="34" charset="-120"/>
               </a:rPr>
-              <a:t>Syllables</a:t>
+              <a:t>Phonemes</a:t>
             </a:r>
             <a:endParaRPr lang="en-US" sz="1100" dirty="0"/>
           </a:p>
@@ -18199,13 +18133,13 @@
       </p:sp>
       <p:sp>
         <p:nvSpPr>
-          <p:cNvPr id="20" name="Shape 18"/>
-          <p:cNvSpPr/>
-          <p:nvPr/>
-        </p:nvSpPr>
-        <p:spPr>
-          <a:xfrm>
-            <a:off x="1874520" y="3182112"/>
+          <p:cNvPr id="24" name="Shape 22"/>
+          <p:cNvSpPr/>
+          <p:nvPr/>
+        </p:nvSpPr>
+        <p:spPr>
+          <a:xfrm>
+            <a:off x="1874520" y="4096512"/>
             <a:ext cx="6903720" cy="658368"/>
           </a:xfrm>
           <a:prstGeom prst="rect">
@@ -18226,145 +18160,13 @@
       </p:sp>
       <p:sp>
         <p:nvSpPr>
-          <p:cNvPr id="21" name="Text 19"/>
-          <p:cNvSpPr/>
-          <p:nvPr/>
-        </p:nvSpPr>
-        <p:spPr>
-          <a:xfrm>
-            <a:off x="1874520" y="3182112"/>
-            <a:ext cx="6903720" cy="658368"/>
-          </a:xfrm>
-          <a:prstGeom prst="rect">
-            <a:avLst/>
-          </a:prstGeom>
-          <a:noFill/>
-          <a:ln/>
-        </p:spPr>
-        <p:txBody>
-          <a:bodyPr wrap="square" rtlCol="0" anchor="ctr"/>
-          <a:lstStyle/>
-          <a:p>
-            <a:pPr algn="ctr" indent="0" marL="0">
-              <a:buNone/>
-            </a:pPr>
-            <a:r>
-              <a:rPr lang="en-US" sz="1100" i="1" dirty="0">
-                <a:solidFill>
-                  <a:srgbClr val="CBD5E1"/>
-                </a:solidFill>
-                <a:latin typeface="Calibri" pitchFamily="34" charset="0"/>
-                <a:ea typeface="Calibri" pitchFamily="34" charset="-122"/>
-                <a:cs typeface="Calibri" pitchFamily="34" charset="-120"/>
-              </a:rPr>
-              <a:t>Write here...</a:t>
-            </a:r>
-            <a:endParaRPr lang="en-US" sz="1100" dirty="0"/>
-          </a:p>
-        </p:txBody>
-      </p:sp>
-      <p:sp>
-        <p:nvSpPr>
-          <p:cNvPr id="22" name="Shape 20"/>
-          <p:cNvSpPr/>
-          <p:nvPr/>
-        </p:nvSpPr>
-        <p:spPr>
-          <a:xfrm>
-            <a:off x="365760" y="4005072"/>
-            <a:ext cx="1371600" cy="658368"/>
-          </a:xfrm>
-          <a:prstGeom prst="rect">
-            <a:avLst>
-              <a:gd name="adj" fmla="val 8333"/>
-            </a:avLst>
-          </a:prstGeom>
-          <a:solidFill>
-            <a:srgbClr val="E2E8F0"/>
-          </a:solidFill>
-          <a:ln w="12700">
-            <a:solidFill>
-              <a:srgbClr val="E2E8F0"/>
-            </a:solidFill>
-            <a:prstDash val="solid"/>
-          </a:ln>
-        </p:spPr>
-      </p:sp>
-      <p:sp>
-        <p:nvSpPr>
-          <p:cNvPr id="23" name="Text 21"/>
-          <p:cNvSpPr/>
-          <p:nvPr/>
-        </p:nvSpPr>
-        <p:spPr>
-          <a:xfrm>
-            <a:off x="365760" y="4005072"/>
-            <a:ext cx="1371600" cy="658368"/>
-          </a:xfrm>
-          <a:prstGeom prst="rect">
-            <a:avLst/>
-          </a:prstGeom>
-          <a:noFill/>
-          <a:ln/>
-        </p:spPr>
-        <p:txBody>
-          <a:bodyPr wrap="square" lIns="0" tIns="0" rIns="0" bIns="0" rtlCol="0" anchor="ctr"/>
-          <a:lstStyle/>
-          <a:p>
-            <a:pPr algn="ctr" indent="0" marL="0">
-              <a:buNone/>
-            </a:pPr>
-            <a:r>
-              <a:rPr lang="en-US" sz="1100" b="1" dirty="0">
-                <a:solidFill>
-                  <a:srgbClr val="475569"/>
-                </a:solidFill>
-                <a:latin typeface="Trebuchet MS" pitchFamily="34" charset="0"/>
-                <a:ea typeface="Trebuchet MS" pitchFamily="34" charset="-122"/>
-                <a:cs typeface="Trebuchet MS" pitchFamily="34" charset="-120"/>
-              </a:rPr>
-              <a:t>Phonemes</a:t>
-            </a:r>
-            <a:endParaRPr lang="en-US" sz="1100" dirty="0"/>
-          </a:p>
-        </p:txBody>
-      </p:sp>
-      <p:sp>
-        <p:nvSpPr>
-          <p:cNvPr id="24" name="Shape 22"/>
-          <p:cNvSpPr/>
-          <p:nvPr/>
-        </p:nvSpPr>
-        <p:spPr>
-          <a:xfrm>
-            <a:off x="1874520" y="4005072"/>
-            <a:ext cx="6903720" cy="658368"/>
-          </a:xfrm>
-          <a:prstGeom prst="rect">
-            <a:avLst>
-              <a:gd name="adj" fmla="val 8333"/>
-            </a:avLst>
-          </a:prstGeom>
-          <a:solidFill>
-            <a:srgbClr val="F8FAFC"/>
-          </a:solidFill>
-          <a:ln w="12700">
-            <a:solidFill>
-              <a:srgbClr val="E2E8F0"/>
-            </a:solidFill>
-            <a:prstDash val="dash"/>
-          </a:ln>
-        </p:spPr>
-      </p:sp>
-      <p:sp>
-        <p:nvSpPr>
           <p:cNvPr id="25" name="Text 23"/>
           <p:cNvSpPr/>
           <p:nvPr/>
         </p:nvSpPr>
         <p:spPr>
           <a:xfrm>
-            <a:off x="1874520" y="4005072"/>
+            <a:off x="1874520" y="4096512"/>
             <a:ext cx="6903720" cy="658368"/>
           </a:xfrm>
           <a:prstGeom prst="rect">
@@ -18820,7 +18622,7 @@
                 <a:ea typeface="Trebuchet MS" pitchFamily="34" charset="-122"/>
                 <a:cs typeface="Trebuchet MS" pitchFamily="34" charset="-120"/>
               </a:rPr>
-              <a:t>colourful</a:t>
+              <a:t>powerful</a:t>
             </a:r>
             <a:endParaRPr lang="en-US" sz="2800" dirty="0"/>
           </a:p>
@@ -18835,11 +18637,11 @@
         <p:spPr>
           <a:xfrm>
             <a:off x="365760" y="2240280"/>
-            <a:ext cx="1371600" cy="658368"/>
+            <a:ext cx="1371600" cy="841248"/>
           </a:xfrm>
           <a:prstGeom prst="rect">
             <a:avLst>
-              <a:gd name="adj" fmla="val 8333"/>
+              <a:gd name="adj" fmla="val 6522"/>
             </a:avLst>
           </a:prstGeom>
           <a:solidFill>
@@ -18862,7 +18664,7 @@
         <p:spPr>
           <a:xfrm>
             <a:off x="365760" y="2240280"/>
-            <a:ext cx="1371600" cy="658368"/>
+            <a:ext cx="1371600" cy="841248"/>
           </a:xfrm>
           <a:prstGeom prst="rect">
             <a:avLst/>
@@ -18901,11 +18703,11 @@
         <p:spPr>
           <a:xfrm>
             <a:off x="2938272" y="2258568"/>
-            <a:ext cx="1828800" cy="347472"/>
+            <a:ext cx="1828800" cy="292608"/>
           </a:xfrm>
           <a:prstGeom prst="rect">
             <a:avLst>
-              <a:gd name="adj" fmla="val 21053"/>
+              <a:gd name="adj" fmla="val 25000"/>
             </a:avLst>
           </a:prstGeom>
           <a:solidFill>
@@ -18935,7 +18737,7 @@
         <p:spPr>
           <a:xfrm>
             <a:off x="2938272" y="2258568"/>
-            <a:ext cx="1828800" cy="347472"/>
+            <a:ext cx="1828800" cy="292608"/>
           </a:xfrm>
           <a:prstGeom prst="rect">
             <a:avLst/>
@@ -18959,7 +18761,7 @@
                 <a:ea typeface="Trebuchet MS" pitchFamily="34" charset="-122"/>
                 <a:cs typeface="Trebuchet MS" pitchFamily="34" charset="-120"/>
               </a:rPr>
-              <a:t>colour</a:t>
+              <a:t>power</a:t>
             </a:r>
             <a:endParaRPr lang="en-US" sz="1300" dirty="0"/>
           </a:p>
@@ -18973,8 +18775,8 @@
         </p:nvSpPr>
         <p:spPr>
           <a:xfrm>
-            <a:off x="2938272" y="2624328"/>
-            <a:ext cx="1828800" cy="256032"/>
+            <a:off x="2938272" y="2569464"/>
+            <a:ext cx="1828800" cy="201168"/>
           </a:xfrm>
           <a:prstGeom prst="rect">
             <a:avLst/>
@@ -18998,7 +18800,7 @@
                 <a:ea typeface="Calibri" pitchFamily="34" charset="-122"/>
                 <a:cs typeface="Calibri" pitchFamily="34" charset="-120"/>
               </a:rPr>
-              <a:t>a shade seen by the eyes, like red or blue</a:t>
+              <a:t>great strength or force</a:t>
             </a:r>
             <a:endParaRPr lang="en-US" sz="850" dirty="0"/>
           </a:p>
@@ -19013,11 +18815,11 @@
         <p:spPr>
           <a:xfrm>
             <a:off x="5803392" y="2258568"/>
-            <a:ext cx="1828800" cy="347472"/>
+            <a:ext cx="1828800" cy="292608"/>
           </a:xfrm>
           <a:prstGeom prst="rect">
             <a:avLst>
-              <a:gd name="adj" fmla="val 21053"/>
+              <a:gd name="adj" fmla="val 25000"/>
             </a:avLst>
           </a:prstGeom>
           <a:solidFill>
@@ -19047,7 +18849,7 @@
         <p:spPr>
           <a:xfrm>
             <a:off x="5803392" y="2258568"/>
-            <a:ext cx="1828800" cy="347472"/>
+            <a:ext cx="1828800" cy="292608"/>
           </a:xfrm>
           <a:prstGeom prst="rect">
             <a:avLst/>
@@ -19085,8 +18887,8 @@
         </p:nvSpPr>
         <p:spPr>
           <a:xfrm>
-            <a:off x="5803392" y="2624328"/>
-            <a:ext cx="1828800" cy="256032"/>
+            <a:off x="5803392" y="2569464"/>
+            <a:ext cx="1828800" cy="201168"/>
           </a:xfrm>
           <a:prstGeom prst="rect">
             <a:avLst/>
@@ -19110,7 +18912,7 @@
                 <a:ea typeface="Calibri" pitchFamily="34" charset="-122"/>
                 <a:cs typeface="Calibri" pitchFamily="34" charset="-120"/>
               </a:rPr>
-              <a:t>full of, having the quality of</a:t>
+              <a:t>full of, having quality</a:t>
             </a:r>
             <a:endParaRPr lang="en-US" sz="850" dirty="0"/>
           </a:p>
@@ -19124,7 +18926,7 @@
         </p:nvSpPr>
         <p:spPr>
           <a:xfrm>
-            <a:off x="365760" y="3182112"/>
+            <a:off x="365760" y="3273552"/>
             <a:ext cx="1371600" cy="658368"/>
           </a:xfrm>
           <a:prstGeom prst="rect">
@@ -19151,7 +18953,7 @@
         </p:nvSpPr>
         <p:spPr>
           <a:xfrm>
-            <a:off x="365760" y="3182112"/>
+            <a:off x="365760" y="3273552"/>
             <a:ext cx="1371600" cy="658368"/>
           </a:xfrm>
           <a:prstGeom prst="rect">
@@ -19190,7 +18992,7 @@
         </p:nvSpPr>
         <p:spPr>
           <a:xfrm>
-            <a:off x="1874520" y="3182112"/>
+            <a:off x="1874520" y="3273552"/>
             <a:ext cx="6903720" cy="658368"/>
           </a:xfrm>
           <a:prstGeom prst="rect">
@@ -19217,7 +19019,7 @@
         </p:nvSpPr>
         <p:spPr>
           <a:xfrm>
-            <a:off x="1874520" y="3182112"/>
+            <a:off x="1874520" y="3273552"/>
             <a:ext cx="6903720" cy="658368"/>
           </a:xfrm>
           <a:prstGeom prst="rect">
@@ -19256,7 +19058,7 @@
         </p:nvSpPr>
         <p:spPr>
           <a:xfrm>
-            <a:off x="365760" y="4005072"/>
+            <a:off x="365760" y="4096512"/>
             <a:ext cx="1371600" cy="658368"/>
           </a:xfrm>
           <a:prstGeom prst="rect">
@@ -19283,7 +19085,7 @@
         </p:nvSpPr>
         <p:spPr>
           <a:xfrm>
-            <a:off x="365760" y="4005072"/>
+            <a:off x="365760" y="4096512"/>
             <a:ext cx="1371600" cy="658368"/>
           </a:xfrm>
           <a:prstGeom prst="rect">
@@ -19322,7 +19124,7 @@
         </p:nvSpPr>
         <p:spPr>
           <a:xfrm>
-            <a:off x="1874520" y="4005072"/>
+            <a:off x="1874520" y="4096512"/>
             <a:ext cx="6903720" cy="658368"/>
           </a:xfrm>
           <a:prstGeom prst="rect">
@@ -19349,7 +19151,7 @@
         </p:nvSpPr>
         <p:spPr>
           <a:xfrm>
-            <a:off x="1874520" y="4005072"/>
+            <a:off x="1874520" y="4096512"/>
             <a:ext cx="6903720" cy="658368"/>
           </a:xfrm>
           <a:prstGeom prst="rect">
@@ -19805,7 +19607,7 @@
                 <a:ea typeface="Trebuchet MS" pitchFamily="34" charset="-122"/>
                 <a:cs typeface="Trebuchet MS" pitchFamily="34" charset="-120"/>
               </a:rPr>
-              <a:t>colourful</a:t>
+              <a:t>powerful</a:t>
             </a:r>
             <a:endParaRPr lang="en-US" sz="2800" dirty="0"/>
           </a:p>
@@ -19820,11 +19622,11 @@
         <p:spPr>
           <a:xfrm>
             <a:off x="365760" y="2240280"/>
-            <a:ext cx="1371600" cy="658368"/>
+            <a:ext cx="1371600" cy="841248"/>
           </a:xfrm>
           <a:prstGeom prst="rect">
             <a:avLst>
-              <a:gd name="adj" fmla="val 8333"/>
+              <a:gd name="adj" fmla="val 6522"/>
             </a:avLst>
           </a:prstGeom>
           <a:solidFill>
@@ -19847,7 +19649,7 @@
         <p:spPr>
           <a:xfrm>
             <a:off x="365760" y="2240280"/>
-            <a:ext cx="1371600" cy="658368"/>
+            <a:ext cx="1371600" cy="841248"/>
           </a:xfrm>
           <a:prstGeom prst="rect">
             <a:avLst/>
@@ -19886,11 +19688,11 @@
         <p:spPr>
           <a:xfrm>
             <a:off x="2938272" y="2258568"/>
-            <a:ext cx="1828800" cy="347472"/>
+            <a:ext cx="1828800" cy="292608"/>
           </a:xfrm>
           <a:prstGeom prst="rect">
             <a:avLst>
-              <a:gd name="adj" fmla="val 21053"/>
+              <a:gd name="adj" fmla="val 25000"/>
             </a:avLst>
           </a:prstGeom>
           <a:solidFill>
@@ -19920,7 +19722,7 @@
         <p:spPr>
           <a:xfrm>
             <a:off x="2938272" y="2258568"/>
-            <a:ext cx="1828800" cy="347472"/>
+            <a:ext cx="1828800" cy="292608"/>
           </a:xfrm>
           <a:prstGeom prst="rect">
             <a:avLst/>
@@ -19944,7 +19746,7 @@
                 <a:ea typeface="Trebuchet MS" pitchFamily="34" charset="-122"/>
                 <a:cs typeface="Trebuchet MS" pitchFamily="34" charset="-120"/>
               </a:rPr>
-              <a:t>colour</a:t>
+              <a:t>power</a:t>
             </a:r>
             <a:endParaRPr lang="en-US" sz="1300" dirty="0"/>
           </a:p>
@@ -19958,8 +19760,8 @@
         </p:nvSpPr>
         <p:spPr>
           <a:xfrm>
-            <a:off x="2938272" y="2624328"/>
-            <a:ext cx="1828800" cy="256032"/>
+            <a:off x="2938272" y="2569464"/>
+            <a:ext cx="1828800" cy="201168"/>
           </a:xfrm>
           <a:prstGeom prst="rect">
             <a:avLst/>
@@ -19983,7 +19785,7 @@
                 <a:ea typeface="Calibri" pitchFamily="34" charset="-122"/>
                 <a:cs typeface="Calibri" pitchFamily="34" charset="-120"/>
               </a:rPr>
-              <a:t>a shade seen by the eyes, like red or blue</a:t>
+              <a:t>great strength or force</a:t>
             </a:r>
             <a:endParaRPr lang="en-US" sz="850" dirty="0"/>
           </a:p>
@@ -19998,11 +19800,11 @@
         <p:spPr>
           <a:xfrm>
             <a:off x="5803392" y="2258568"/>
-            <a:ext cx="1828800" cy="347472"/>
+            <a:ext cx="1828800" cy="292608"/>
           </a:xfrm>
           <a:prstGeom prst="rect">
             <a:avLst>
-              <a:gd name="adj" fmla="val 21053"/>
+              <a:gd name="adj" fmla="val 25000"/>
             </a:avLst>
           </a:prstGeom>
           <a:solidFill>
@@ -20032,7 +19834,7 @@
         <p:spPr>
           <a:xfrm>
             <a:off x="5803392" y="2258568"/>
-            <a:ext cx="1828800" cy="347472"/>
+            <a:ext cx="1828800" cy="292608"/>
           </a:xfrm>
           <a:prstGeom prst="rect">
             <a:avLst/>
@@ -20070,8 +19872,8 @@
         </p:nvSpPr>
         <p:spPr>
           <a:xfrm>
-            <a:off x="5803392" y="2624328"/>
-            <a:ext cx="1828800" cy="256032"/>
+            <a:off x="5803392" y="2569464"/>
+            <a:ext cx="1828800" cy="201168"/>
           </a:xfrm>
           <a:prstGeom prst="rect">
             <a:avLst/>
@@ -20095,7 +19897,7 @@
                 <a:ea typeface="Calibri" pitchFamily="34" charset="-122"/>
                 <a:cs typeface="Calibri" pitchFamily="34" charset="-120"/>
               </a:rPr>
-              <a:t>full of, having the quality of</a:t>
+              <a:t>full of, having quality</a:t>
             </a:r>
             <a:endParaRPr lang="en-US" sz="850" dirty="0"/>
           </a:p>
@@ -20109,7 +19911,7 @@
         </p:nvSpPr>
         <p:spPr>
           <a:xfrm>
-            <a:off x="365760" y="3182112"/>
+            <a:off x="365760" y="3273552"/>
             <a:ext cx="1371600" cy="658368"/>
           </a:xfrm>
           <a:prstGeom prst="rect">
@@ -20136,7 +19938,7 @@
         </p:nvSpPr>
         <p:spPr>
           <a:xfrm>
-            <a:off x="365760" y="3182112"/>
+            <a:off x="365760" y="3273552"/>
             <a:ext cx="1371600" cy="658368"/>
           </a:xfrm>
           <a:prstGeom prst="rect">
@@ -20175,7 +19977,7 @@
         </p:nvSpPr>
         <p:spPr>
           <a:xfrm>
-            <a:off x="1874520" y="3182112"/>
+            <a:off x="1874520" y="3273552"/>
             <a:ext cx="6903720" cy="658368"/>
           </a:xfrm>
           <a:prstGeom prst="rect">
@@ -20202,7 +20004,7 @@
         </p:nvSpPr>
         <p:spPr>
           <a:xfrm>
-            <a:off x="2313432" y="3273552"/>
+            <a:off x="2313432" y="3364992"/>
             <a:ext cx="1645920" cy="475488"/>
           </a:xfrm>
           <a:prstGeom prst="rect">
@@ -20229,7 +20031,7 @@
         </p:nvSpPr>
         <p:spPr>
           <a:xfrm>
-            <a:off x="2313432" y="3273552"/>
+            <a:off x="2313432" y="3364992"/>
             <a:ext cx="1645920" cy="475488"/>
           </a:xfrm>
           <a:prstGeom prst="rect">
@@ -20254,7 +20056,7 @@
                 <a:ea typeface="Trebuchet MS" pitchFamily="34" charset="-122"/>
                 <a:cs typeface="Trebuchet MS" pitchFamily="34" charset="-120"/>
               </a:rPr>
-              <a:t>col</a:t>
+              <a:t>pow</a:t>
             </a:r>
             <a:endParaRPr lang="en-US" sz="1400" dirty="0"/>
           </a:p>
@@ -20268,7 +20070,7 @@
         </p:nvSpPr>
         <p:spPr>
           <a:xfrm>
-            <a:off x="3959352" y="3273552"/>
+            <a:off x="3959352" y="3364992"/>
             <a:ext cx="411480" cy="475488"/>
           </a:xfrm>
           <a:prstGeom prst="rect">
@@ -20307,7 +20109,7 @@
         </p:nvSpPr>
         <p:spPr>
           <a:xfrm>
-            <a:off x="4370832" y="3273552"/>
+            <a:off x="4370832" y="3364992"/>
             <a:ext cx="1645920" cy="475488"/>
           </a:xfrm>
           <a:prstGeom prst="rect">
@@ -20334,7 +20136,7 @@
         </p:nvSpPr>
         <p:spPr>
           <a:xfrm>
-            <a:off x="4370832" y="3273552"/>
+            <a:off x="4370832" y="3364992"/>
             <a:ext cx="1645920" cy="475488"/>
           </a:xfrm>
           <a:prstGeom prst="rect">
@@ -20359,7 +20161,7 @@
                 <a:ea typeface="Trebuchet MS" pitchFamily="34" charset="-122"/>
                 <a:cs typeface="Trebuchet MS" pitchFamily="34" charset="-120"/>
               </a:rPr>
-              <a:t>our</a:t>
+              <a:t>er</a:t>
             </a:r>
             <a:endParaRPr lang="en-US" sz="1400" dirty="0"/>
           </a:p>
@@ -20373,7 +20175,7 @@
         </p:nvSpPr>
         <p:spPr>
           <a:xfrm>
-            <a:off x="6016752" y="3273552"/>
+            <a:off x="6016752" y="3364992"/>
             <a:ext cx="411480" cy="475488"/>
           </a:xfrm>
           <a:prstGeom prst="rect">
@@ -20412,7 +20214,7 @@
         </p:nvSpPr>
         <p:spPr>
           <a:xfrm>
-            <a:off x="6428232" y="3273552"/>
+            <a:off x="6428232" y="3364992"/>
             <a:ext cx="1645920" cy="475488"/>
           </a:xfrm>
           <a:prstGeom prst="rect">
@@ -20439,7 +20241,7 @@
         </p:nvSpPr>
         <p:spPr>
           <a:xfrm>
-            <a:off x="6428232" y="3273552"/>
+            <a:off x="6428232" y="3364992"/>
             <a:ext cx="1645920" cy="475488"/>
           </a:xfrm>
           <a:prstGeom prst="rect">
@@ -20478,7 +20280,7 @@
         </p:nvSpPr>
         <p:spPr>
           <a:xfrm>
-            <a:off x="365760" y="4005072"/>
+            <a:off x="365760" y="4096512"/>
             <a:ext cx="1371600" cy="658368"/>
           </a:xfrm>
           <a:prstGeom prst="rect">
@@ -20505,7 +20307,7 @@
         </p:nvSpPr>
         <p:spPr>
           <a:xfrm>
-            <a:off x="365760" y="4005072"/>
+            <a:off x="365760" y="4096512"/>
             <a:ext cx="1371600" cy="658368"/>
           </a:xfrm>
           <a:prstGeom prst="rect">
@@ -20544,7 +20346,7 @@
         </p:nvSpPr>
         <p:spPr>
           <a:xfrm>
-            <a:off x="1874520" y="4005072"/>
+            <a:off x="1874520" y="4096512"/>
             <a:ext cx="6903720" cy="658368"/>
           </a:xfrm>
           <a:prstGeom prst="rect">
@@ -20571,7 +20373,7 @@
         </p:nvSpPr>
         <p:spPr>
           <a:xfrm>
-            <a:off x="1874520" y="4005072"/>
+            <a:off x="1874520" y="4096512"/>
             <a:ext cx="6903720" cy="658368"/>
           </a:xfrm>
           <a:prstGeom prst="rect">
@@ -21027,7 +20829,7 @@
                 <a:ea typeface="Trebuchet MS" pitchFamily="34" charset="-122"/>
                 <a:cs typeface="Trebuchet MS" pitchFamily="34" charset="-120"/>
               </a:rPr>
-              <a:t>colourful</a:t>
+              <a:t>powerful</a:t>
             </a:r>
             <a:endParaRPr lang="en-US" sz="2800" dirty="0"/>
           </a:p>
@@ -21042,11 +20844,11 @@
         <p:spPr>
           <a:xfrm>
             <a:off x="365760" y="2240280"/>
-            <a:ext cx="1371600" cy="658368"/>
+            <a:ext cx="1371600" cy="841248"/>
           </a:xfrm>
           <a:prstGeom prst="rect">
             <a:avLst>
-              <a:gd name="adj" fmla="val 8333"/>
+              <a:gd name="adj" fmla="val 6522"/>
             </a:avLst>
           </a:prstGeom>
           <a:solidFill>
@@ -21069,7 +20871,7 @@
         <p:spPr>
           <a:xfrm>
             <a:off x="365760" y="2240280"/>
-            <a:ext cx="1371600" cy="658368"/>
+            <a:ext cx="1371600" cy="841248"/>
           </a:xfrm>
           <a:prstGeom prst="rect">
             <a:avLst/>
@@ -21108,11 +20910,11 @@
         <p:spPr>
           <a:xfrm>
             <a:off x="2938272" y="2258568"/>
-            <a:ext cx="1828800" cy="347472"/>
+            <a:ext cx="1828800" cy="292608"/>
           </a:xfrm>
           <a:prstGeom prst="rect">
             <a:avLst>
-              <a:gd name="adj" fmla="val 21053"/>
+              <a:gd name="adj" fmla="val 25000"/>
             </a:avLst>
           </a:prstGeom>
           <a:solidFill>
@@ -21142,7 +20944,7 @@
         <p:spPr>
           <a:xfrm>
             <a:off x="2938272" y="2258568"/>
-            <a:ext cx="1828800" cy="347472"/>
+            <a:ext cx="1828800" cy="292608"/>
           </a:xfrm>
           <a:prstGeom prst="rect">
             <a:avLst/>
@@ -21166,7 +20968,7 @@
                 <a:ea typeface="Trebuchet MS" pitchFamily="34" charset="-122"/>
                 <a:cs typeface="Trebuchet MS" pitchFamily="34" charset="-120"/>
               </a:rPr>
-              <a:t>colour</a:t>
+              <a:t>power</a:t>
             </a:r>
             <a:endParaRPr lang="en-US" sz="1300" dirty="0"/>
           </a:p>
@@ -21180,8 +20982,8 @@
         </p:nvSpPr>
         <p:spPr>
           <a:xfrm>
-            <a:off x="2938272" y="2624328"/>
-            <a:ext cx="1828800" cy="256032"/>
+            <a:off x="2938272" y="2569464"/>
+            <a:ext cx="1828800" cy="201168"/>
           </a:xfrm>
           <a:prstGeom prst="rect">
             <a:avLst/>
@@ -21205,7 +21007,7 @@
                 <a:ea typeface="Calibri" pitchFamily="34" charset="-122"/>
                 <a:cs typeface="Calibri" pitchFamily="34" charset="-120"/>
               </a:rPr>
-              <a:t>a shade seen by the eyes, like red or blue</a:t>
+              <a:t>great strength or force</a:t>
             </a:r>
             <a:endParaRPr lang="en-US" sz="850" dirty="0"/>
           </a:p>
@@ -21220,11 +21022,11 @@
         <p:spPr>
           <a:xfrm>
             <a:off x="5803392" y="2258568"/>
-            <a:ext cx="1828800" cy="347472"/>
+            <a:ext cx="1828800" cy="292608"/>
           </a:xfrm>
           <a:prstGeom prst="rect">
             <a:avLst>
-              <a:gd name="adj" fmla="val 21053"/>
+              <a:gd name="adj" fmla="val 25000"/>
             </a:avLst>
           </a:prstGeom>
           <a:solidFill>
@@ -21254,7 +21056,7 @@
         <p:spPr>
           <a:xfrm>
             <a:off x="5803392" y="2258568"/>
-            <a:ext cx="1828800" cy="347472"/>
+            <a:ext cx="1828800" cy="292608"/>
           </a:xfrm>
           <a:prstGeom prst="rect">
             <a:avLst/>
@@ -21292,8 +21094,8 @@
         </p:nvSpPr>
         <p:spPr>
           <a:xfrm>
-            <a:off x="5803392" y="2624328"/>
-            <a:ext cx="1828800" cy="256032"/>
+            <a:off x="5803392" y="2569464"/>
+            <a:ext cx="1828800" cy="201168"/>
           </a:xfrm>
           <a:prstGeom prst="rect">
             <a:avLst/>
@@ -21317,7 +21119,7 @@
                 <a:ea typeface="Calibri" pitchFamily="34" charset="-122"/>
                 <a:cs typeface="Calibri" pitchFamily="34" charset="-120"/>
               </a:rPr>
-              <a:t>full of, having the quality of</a:t>
+              <a:t>full of, having quality</a:t>
             </a:r>
             <a:endParaRPr lang="en-US" sz="850" dirty="0"/>
           </a:p>
@@ -21331,7 +21133,7 @@
         </p:nvSpPr>
         <p:spPr>
           <a:xfrm>
-            <a:off x="365760" y="3182112"/>
+            <a:off x="365760" y="3273552"/>
             <a:ext cx="1371600" cy="658368"/>
           </a:xfrm>
           <a:prstGeom prst="rect">
@@ -21358,7 +21160,7 @@
         </p:nvSpPr>
         <p:spPr>
           <a:xfrm>
-            <a:off x="365760" y="3182112"/>
+            <a:off x="365760" y="3273552"/>
             <a:ext cx="1371600" cy="658368"/>
           </a:xfrm>
           <a:prstGeom prst="rect">
@@ -21397,7 +21199,7 @@
         </p:nvSpPr>
         <p:spPr>
           <a:xfrm>
-            <a:off x="1874520" y="3182112"/>
+            <a:off x="1874520" y="3273552"/>
             <a:ext cx="6903720" cy="658368"/>
           </a:xfrm>
           <a:prstGeom prst="rect">
@@ -21424,7 +21226,7 @@
         </p:nvSpPr>
         <p:spPr>
           <a:xfrm>
-            <a:off x="2313432" y="3273552"/>
+            <a:off x="2313432" y="3364992"/>
             <a:ext cx="1645920" cy="475488"/>
           </a:xfrm>
           <a:prstGeom prst="rect">
@@ -21451,7 +21253,7 @@
         </p:nvSpPr>
         <p:spPr>
           <a:xfrm>
-            <a:off x="2313432" y="3273552"/>
+            <a:off x="2313432" y="3364992"/>
             <a:ext cx="1645920" cy="475488"/>
           </a:xfrm>
           <a:prstGeom prst="rect">
@@ -21476,7 +21278,7 @@
                 <a:ea typeface="Trebuchet MS" pitchFamily="34" charset="-122"/>
                 <a:cs typeface="Trebuchet MS" pitchFamily="34" charset="-120"/>
               </a:rPr>
-              <a:t>col</a:t>
+              <a:t>pow</a:t>
             </a:r>
             <a:endParaRPr lang="en-US" sz="1400" dirty="0"/>
           </a:p>
@@ -21490,7 +21292,7 @@
         </p:nvSpPr>
         <p:spPr>
           <a:xfrm>
-            <a:off x="3959352" y="3273552"/>
+            <a:off x="3959352" y="3364992"/>
             <a:ext cx="411480" cy="475488"/>
           </a:xfrm>
           <a:prstGeom prst="rect">
@@ -21529,7 +21331,7 @@
         </p:nvSpPr>
         <p:spPr>
           <a:xfrm>
-            <a:off x="4370832" y="3273552"/>
+            <a:off x="4370832" y="3364992"/>
             <a:ext cx="1645920" cy="475488"/>
           </a:xfrm>
           <a:prstGeom prst="rect">
@@ -21556,7 +21358,7 @@
         </p:nvSpPr>
         <p:spPr>
           <a:xfrm>
-            <a:off x="4370832" y="3273552"/>
+            <a:off x="4370832" y="3364992"/>
             <a:ext cx="1645920" cy="475488"/>
           </a:xfrm>
           <a:prstGeom prst="rect">
@@ -21581,7 +21383,7 @@
                 <a:ea typeface="Trebuchet MS" pitchFamily="34" charset="-122"/>
                 <a:cs typeface="Trebuchet MS" pitchFamily="34" charset="-120"/>
               </a:rPr>
-              <a:t>our</a:t>
+              <a:t>er</a:t>
             </a:r>
             <a:endParaRPr lang="en-US" sz="1400" dirty="0"/>
           </a:p>
@@ -21595,7 +21397,7 @@
         </p:nvSpPr>
         <p:spPr>
           <a:xfrm>
-            <a:off x="6016752" y="3273552"/>
+            <a:off x="6016752" y="3364992"/>
             <a:ext cx="411480" cy="475488"/>
           </a:xfrm>
           <a:prstGeom prst="rect">
@@ -21634,7 +21436,7 @@
         </p:nvSpPr>
         <p:spPr>
           <a:xfrm>
-            <a:off x="6428232" y="3273552"/>
+            <a:off x="6428232" y="3364992"/>
             <a:ext cx="1645920" cy="475488"/>
           </a:xfrm>
           <a:prstGeom prst="rect">
@@ -21661,7 +21463,7 @@
         </p:nvSpPr>
         <p:spPr>
           <a:xfrm>
-            <a:off x="6428232" y="3273552"/>
+            <a:off x="6428232" y="3364992"/>
             <a:ext cx="1645920" cy="475488"/>
           </a:xfrm>
           <a:prstGeom prst="rect">
@@ -21700,7 +21502,7 @@
         </p:nvSpPr>
         <p:spPr>
           <a:xfrm>
-            <a:off x="365760" y="4005072"/>
+            <a:off x="365760" y="4096512"/>
             <a:ext cx="1371600" cy="658368"/>
           </a:xfrm>
           <a:prstGeom prst="rect">
@@ -21727,7 +21529,7 @@
         </p:nvSpPr>
         <p:spPr>
           <a:xfrm>
-            <a:off x="365760" y="4005072"/>
+            <a:off x="365760" y="4096512"/>
             <a:ext cx="1371600" cy="658368"/>
           </a:xfrm>
           <a:prstGeom prst="rect">
@@ -21766,7 +21568,7 @@
         </p:nvSpPr>
         <p:spPr>
           <a:xfrm>
-            <a:off x="1874520" y="4005072"/>
+            <a:off x="1874520" y="4096512"/>
             <a:ext cx="6903720" cy="658368"/>
           </a:xfrm>
           <a:prstGeom prst="rect">
@@ -21793,7 +21595,7 @@
         </p:nvSpPr>
         <p:spPr>
           <a:xfrm>
-            <a:off x="2124837" y="4096512"/>
+            <a:off x="2254649" y="4187952"/>
             <a:ext cx="685800" cy="475488"/>
           </a:xfrm>
           <a:prstGeom prst="rect">
@@ -21820,7 +21622,7 @@
         </p:nvSpPr>
         <p:spPr>
           <a:xfrm>
-            <a:off x="2124837" y="4096512"/>
+            <a:off x="2254649" y="4187952"/>
             <a:ext cx="685800" cy="475488"/>
           </a:xfrm>
           <a:prstGeom prst="rect">
@@ -21845,7 +21647,7 @@
                 <a:ea typeface="Trebuchet MS" pitchFamily="34" charset="-122"/>
                 <a:cs typeface="Trebuchet MS" pitchFamily="34" charset="-120"/>
               </a:rPr>
-              <a:t>c</a:t>
+              <a:t>p</a:t>
             </a:r>
             <a:endParaRPr lang="en-US" sz="900" dirty="0"/>
           </a:p>
@@ -21859,7 +21661,7 @@
         </p:nvSpPr>
         <p:spPr>
           <a:xfrm>
-            <a:off x="3033522" y="4096512"/>
+            <a:off x="3293146" y="4187952"/>
             <a:ext cx="685800" cy="475488"/>
           </a:xfrm>
           <a:prstGeom prst="rect">
@@ -21886,7 +21688,7 @@
         </p:nvSpPr>
         <p:spPr>
           <a:xfrm>
-            <a:off x="3033522" y="4096512"/>
+            <a:off x="3293146" y="4187952"/>
             <a:ext cx="685800" cy="475488"/>
           </a:xfrm>
           <a:prstGeom prst="rect">
@@ -21911,7 +21713,7 @@
                 <a:ea typeface="Trebuchet MS" pitchFamily="34" charset="-122"/>
                 <a:cs typeface="Trebuchet MS" pitchFamily="34" charset="-120"/>
               </a:rPr>
-              <a:t>o</a:t>
+              <a:t>ow</a:t>
             </a:r>
             <a:endParaRPr lang="en-US" sz="900" dirty="0"/>
           </a:p>
@@ -21925,7 +21727,7 @@
         </p:nvSpPr>
         <p:spPr>
           <a:xfrm>
-            <a:off x="3942207" y="4096512"/>
+            <a:off x="4331643" y="4187952"/>
             <a:ext cx="685800" cy="475488"/>
           </a:xfrm>
           <a:prstGeom prst="rect">
@@ -21952,7 +21754,7 @@
         </p:nvSpPr>
         <p:spPr>
           <a:xfrm>
-            <a:off x="3942207" y="4096512"/>
+            <a:off x="4331643" y="4187952"/>
             <a:ext cx="685800" cy="475488"/>
           </a:xfrm>
           <a:prstGeom prst="rect">
@@ -21977,7 +21779,7 @@
                 <a:ea typeface="Trebuchet MS" pitchFamily="34" charset="-122"/>
                 <a:cs typeface="Trebuchet MS" pitchFamily="34" charset="-120"/>
               </a:rPr>
-              <a:t>l</a:t>
+              <a:t>er</a:t>
             </a:r>
             <a:endParaRPr lang="en-US" sz="900" dirty="0"/>
           </a:p>
@@ -21991,7 +21793,7 @@
         </p:nvSpPr>
         <p:spPr>
           <a:xfrm>
-            <a:off x="4850892" y="4096512"/>
+            <a:off x="5370141" y="4187952"/>
             <a:ext cx="685800" cy="475488"/>
           </a:xfrm>
           <a:prstGeom prst="rect">
@@ -22018,7 +21820,7 @@
         </p:nvSpPr>
         <p:spPr>
           <a:xfrm>
-            <a:off x="4850892" y="4096512"/>
+            <a:off x="5370141" y="4187952"/>
             <a:ext cx="685800" cy="475488"/>
           </a:xfrm>
           <a:prstGeom prst="rect">
@@ -22043,7 +21845,7 @@
                 <a:ea typeface="Trebuchet MS" pitchFamily="34" charset="-122"/>
                 <a:cs typeface="Trebuchet MS" pitchFamily="34" charset="-120"/>
               </a:rPr>
-              <a:t>our</a:t>
+              <a:t>f</a:t>
             </a:r>
             <a:endParaRPr lang="en-US" sz="900" dirty="0"/>
           </a:p>
@@ -22057,7 +21859,7 @@
         </p:nvSpPr>
         <p:spPr>
           <a:xfrm>
-            <a:off x="5759577" y="4096512"/>
+            <a:off x="6408638" y="4187952"/>
             <a:ext cx="685800" cy="475488"/>
           </a:xfrm>
           <a:prstGeom prst="rect">
@@ -22084,7 +21886,7 @@
         </p:nvSpPr>
         <p:spPr>
           <a:xfrm>
-            <a:off x="5759577" y="4096512"/>
+            <a:off x="6408638" y="4187952"/>
             <a:ext cx="685800" cy="475488"/>
           </a:xfrm>
           <a:prstGeom prst="rect">
@@ -22109,7 +21911,7 @@
                 <a:ea typeface="Trebuchet MS" pitchFamily="34" charset="-122"/>
                 <a:cs typeface="Trebuchet MS" pitchFamily="34" charset="-120"/>
               </a:rPr>
-              <a:t>f</a:t>
+              <a:t>u</a:t>
             </a:r>
             <a:endParaRPr lang="en-US" sz="900" dirty="0"/>
           </a:p>
@@ -22123,7 +21925,7 @@
         </p:nvSpPr>
         <p:spPr>
           <a:xfrm>
-            <a:off x="6668262" y="4096512"/>
+            <a:off x="7447135" y="4187952"/>
             <a:ext cx="685800" cy="475488"/>
           </a:xfrm>
           <a:prstGeom prst="rect">
@@ -22150,73 +21952,7 @@
         </p:nvSpPr>
         <p:spPr>
           <a:xfrm>
-            <a:off x="6668262" y="4096512"/>
-            <a:ext cx="685800" cy="475488"/>
-          </a:xfrm>
-          <a:prstGeom prst="rect">
-            <a:avLst/>
-          </a:prstGeom>
-          <a:noFill/>
-          <a:ln/>
-        </p:spPr>
-        <p:txBody>
-          <a:bodyPr wrap="square" lIns="0" tIns="0" rIns="0" bIns="0" rtlCol="0" anchor="ctr"/>
-          <a:lstStyle/>
-          <a:p>
-            <a:pPr algn="ctr" indent="0" marL="0">
-              <a:buNone/>
-            </a:pPr>
-            <a:r>
-              <a:rPr lang="en-US" sz="900" b="1" dirty="0">
-                <a:solidFill>
-                  <a:srgbClr val="9D174D"/>
-                </a:solidFill>
-                <a:latin typeface="Trebuchet MS" pitchFamily="34" charset="0"/>
-                <a:ea typeface="Trebuchet MS" pitchFamily="34" charset="-122"/>
-                <a:cs typeface="Trebuchet MS" pitchFamily="34" charset="-120"/>
-              </a:rPr>
-              <a:t>u</a:t>
-            </a:r>
-            <a:endParaRPr lang="en-US" sz="900" dirty="0"/>
-          </a:p>
-        </p:txBody>
-      </p:sp>
-      <p:sp>
-        <p:nvSpPr>
-          <p:cNvPr id="48" name="Shape 46"/>
-          <p:cNvSpPr/>
-          <p:nvPr/>
-        </p:nvSpPr>
-        <p:spPr>
-          <a:xfrm>
-            <a:off x="7576947" y="4096512"/>
-            <a:ext cx="685800" cy="475488"/>
-          </a:xfrm>
-          <a:prstGeom prst="rect">
-            <a:avLst>
-              <a:gd name="adj" fmla="val 7692"/>
-            </a:avLst>
-          </a:prstGeom>
-          <a:solidFill>
-            <a:srgbClr val="FFFFFF"/>
-          </a:solidFill>
-          <a:ln w="12700">
-            <a:solidFill>
-              <a:srgbClr val="DB2777"/>
-            </a:solidFill>
-            <a:prstDash val="solid"/>
-          </a:ln>
-        </p:spPr>
-      </p:sp>
-      <p:sp>
-        <p:nvSpPr>
-          <p:cNvPr id="49" name="Text 47"/>
-          <p:cNvSpPr/>
-          <p:nvPr/>
-        </p:nvSpPr>
-        <p:spPr>
-          <a:xfrm>
-            <a:off x="7576947" y="4096512"/>
+            <a:off x="7447135" y="4187952"/>
             <a:ext cx="685800" cy="475488"/>
           </a:xfrm>
           <a:prstGeom prst="rect">
@@ -22672,7 +22408,7 @@
                 <a:ea typeface="Trebuchet MS" pitchFamily="34" charset="-122"/>
                 <a:cs typeface="Trebuchet MS" pitchFamily="34" charset="-120"/>
               </a:rPr>
-              <a:t>playful</a:t>
+              <a:t>cheerful</a:t>
             </a:r>
             <a:endParaRPr lang="en-US" sz="2800" dirty="0"/>
           </a:p>
@@ -22687,6 +22423,138 @@
         <p:spPr>
           <a:xfrm>
             <a:off x="365760" y="2240280"/>
+            <a:ext cx="1371600" cy="841248"/>
+          </a:xfrm>
+          <a:prstGeom prst="rect">
+            <a:avLst>
+              <a:gd name="adj" fmla="val 6522"/>
+            </a:avLst>
+          </a:prstGeom>
+          <a:solidFill>
+            <a:srgbClr val="E2E8F0"/>
+          </a:solidFill>
+          <a:ln w="12700">
+            <a:solidFill>
+              <a:srgbClr val="E2E8F0"/>
+            </a:solidFill>
+            <a:prstDash val="solid"/>
+          </a:ln>
+        </p:spPr>
+      </p:sp>
+      <p:sp>
+        <p:nvSpPr>
+          <p:cNvPr id="15" name="Text 13"/>
+          <p:cNvSpPr/>
+          <p:nvPr/>
+        </p:nvSpPr>
+        <p:spPr>
+          <a:xfrm>
+            <a:off x="365760" y="2240280"/>
+            <a:ext cx="1371600" cy="841248"/>
+          </a:xfrm>
+          <a:prstGeom prst="rect">
+            <a:avLst/>
+          </a:prstGeom>
+          <a:noFill/>
+          <a:ln/>
+        </p:spPr>
+        <p:txBody>
+          <a:bodyPr wrap="square" lIns="0" tIns="0" rIns="0" bIns="0" rtlCol="0" anchor="ctr"/>
+          <a:lstStyle/>
+          <a:p>
+            <a:pPr algn="ctr" indent="0" marL="0">
+              <a:buNone/>
+            </a:pPr>
+            <a:r>
+              <a:rPr lang="en-US" sz="1100" b="1" dirty="0">
+                <a:solidFill>
+                  <a:srgbClr val="475569"/>
+                </a:solidFill>
+                <a:latin typeface="Trebuchet MS" pitchFamily="34" charset="0"/>
+                <a:ea typeface="Trebuchet MS" pitchFamily="34" charset="-122"/>
+                <a:cs typeface="Trebuchet MS" pitchFamily="34" charset="-120"/>
+              </a:rPr>
+              <a:t>Morphemes</a:t>
+            </a:r>
+            <a:endParaRPr lang="en-US" sz="1100" dirty="0"/>
+          </a:p>
+        </p:txBody>
+      </p:sp>
+      <p:sp>
+        <p:nvSpPr>
+          <p:cNvPr id="16" name="Shape 14"/>
+          <p:cNvSpPr/>
+          <p:nvPr/>
+        </p:nvSpPr>
+        <p:spPr>
+          <a:xfrm>
+            <a:off x="1874520" y="2240280"/>
+            <a:ext cx="6903720" cy="841248"/>
+          </a:xfrm>
+          <a:prstGeom prst="rect">
+            <a:avLst>
+              <a:gd name="adj" fmla="val 6522"/>
+            </a:avLst>
+          </a:prstGeom>
+          <a:solidFill>
+            <a:srgbClr val="F8FAFC"/>
+          </a:solidFill>
+          <a:ln w="12700">
+            <a:solidFill>
+              <a:srgbClr val="E2E8F0"/>
+            </a:solidFill>
+            <a:prstDash val="dash"/>
+          </a:ln>
+        </p:spPr>
+      </p:sp>
+      <p:sp>
+        <p:nvSpPr>
+          <p:cNvPr id="17" name="Text 15"/>
+          <p:cNvSpPr/>
+          <p:nvPr/>
+        </p:nvSpPr>
+        <p:spPr>
+          <a:xfrm>
+            <a:off x="1874520" y="2240280"/>
+            <a:ext cx="6903720" cy="841248"/>
+          </a:xfrm>
+          <a:prstGeom prst="rect">
+            <a:avLst/>
+          </a:prstGeom>
+          <a:noFill/>
+          <a:ln/>
+        </p:spPr>
+        <p:txBody>
+          <a:bodyPr wrap="square" rtlCol="0" anchor="ctr"/>
+          <a:lstStyle/>
+          <a:p>
+            <a:pPr algn="ctr" indent="0" marL="0">
+              <a:buNone/>
+            </a:pPr>
+            <a:r>
+              <a:rPr lang="en-US" sz="1100" i="1" dirty="0">
+                <a:solidFill>
+                  <a:srgbClr val="CBD5E1"/>
+                </a:solidFill>
+                <a:latin typeface="Calibri" pitchFamily="34" charset="0"/>
+                <a:ea typeface="Calibri" pitchFamily="34" charset="-122"/>
+                <a:cs typeface="Calibri" pitchFamily="34" charset="-120"/>
+              </a:rPr>
+              <a:t>Write here...</a:t>
+            </a:r>
+            <a:endParaRPr lang="en-US" sz="1100" dirty="0"/>
+          </a:p>
+        </p:txBody>
+      </p:sp>
+      <p:sp>
+        <p:nvSpPr>
+          <p:cNvPr id="18" name="Shape 16"/>
+          <p:cNvSpPr/>
+          <p:nvPr/>
+        </p:nvSpPr>
+        <p:spPr>
+          <a:xfrm>
+            <a:off x="365760" y="3273552"/>
             <a:ext cx="1371600" cy="658368"/>
           </a:xfrm>
           <a:prstGeom prst="rect">
@@ -22707,13 +22575,13 @@
       </p:sp>
       <p:sp>
         <p:nvSpPr>
-          <p:cNvPr id="15" name="Text 13"/>
-          <p:cNvSpPr/>
-          <p:nvPr/>
-        </p:nvSpPr>
-        <p:spPr>
-          <a:xfrm>
-            <a:off x="365760" y="2240280"/>
+          <p:cNvPr id="19" name="Text 17"/>
+          <p:cNvSpPr/>
+          <p:nvPr/>
+        </p:nvSpPr>
+        <p:spPr>
+          <a:xfrm>
+            <a:off x="365760" y="3273552"/>
             <a:ext cx="1371600" cy="658368"/>
           </a:xfrm>
           <a:prstGeom prst="rect">
@@ -22738,7 +22606,7 @@
                 <a:ea typeface="Trebuchet MS" pitchFamily="34" charset="-122"/>
                 <a:cs typeface="Trebuchet MS" pitchFamily="34" charset="-120"/>
               </a:rPr>
-              <a:t>Morphemes</a:t>
+              <a:t>Syllables</a:t>
             </a:r>
             <a:endParaRPr lang="en-US" sz="1100" dirty="0"/>
           </a:p>
@@ -22746,13 +22614,13 @@
       </p:sp>
       <p:sp>
         <p:nvSpPr>
-          <p:cNvPr id="16" name="Shape 14"/>
-          <p:cNvSpPr/>
-          <p:nvPr/>
-        </p:nvSpPr>
-        <p:spPr>
-          <a:xfrm>
-            <a:off x="1874520" y="2240280"/>
+          <p:cNvPr id="20" name="Shape 18"/>
+          <p:cNvSpPr/>
+          <p:nvPr/>
+        </p:nvSpPr>
+        <p:spPr>
+          <a:xfrm>
+            <a:off x="1874520" y="3273552"/>
             <a:ext cx="6903720" cy="658368"/>
           </a:xfrm>
           <a:prstGeom prst="rect">
@@ -22773,13 +22641,13 @@
       </p:sp>
       <p:sp>
         <p:nvSpPr>
-          <p:cNvPr id="17" name="Text 15"/>
-          <p:cNvSpPr/>
-          <p:nvPr/>
-        </p:nvSpPr>
-        <p:spPr>
-          <a:xfrm>
-            <a:off x="1874520" y="2240280"/>
+          <p:cNvPr id="21" name="Text 19"/>
+          <p:cNvSpPr/>
+          <p:nvPr/>
+        </p:nvSpPr>
+        <p:spPr>
+          <a:xfrm>
+            <a:off x="1874520" y="3273552"/>
             <a:ext cx="6903720" cy="658368"/>
           </a:xfrm>
           <a:prstGeom prst="rect">
@@ -22812,13 +22680,13 @@
       </p:sp>
       <p:sp>
         <p:nvSpPr>
-          <p:cNvPr id="18" name="Shape 16"/>
-          <p:cNvSpPr/>
-          <p:nvPr/>
-        </p:nvSpPr>
-        <p:spPr>
-          <a:xfrm>
-            <a:off x="365760" y="3182112"/>
+          <p:cNvPr id="22" name="Shape 20"/>
+          <p:cNvSpPr/>
+          <p:nvPr/>
+        </p:nvSpPr>
+        <p:spPr>
+          <a:xfrm>
+            <a:off x="365760" y="4096512"/>
             <a:ext cx="1371600" cy="658368"/>
           </a:xfrm>
           <a:prstGeom prst="rect">
@@ -22839,13 +22707,13 @@
       </p:sp>
       <p:sp>
         <p:nvSpPr>
-          <p:cNvPr id="19" name="Text 17"/>
-          <p:cNvSpPr/>
-          <p:nvPr/>
-        </p:nvSpPr>
-        <p:spPr>
-          <a:xfrm>
-            <a:off x="365760" y="3182112"/>
+          <p:cNvPr id="23" name="Text 21"/>
+          <p:cNvSpPr/>
+          <p:nvPr/>
+        </p:nvSpPr>
+        <p:spPr>
+          <a:xfrm>
+            <a:off x="365760" y="4096512"/>
             <a:ext cx="1371600" cy="658368"/>
           </a:xfrm>
           <a:prstGeom prst="rect">
@@ -22870,7 +22738,7 @@
                 <a:ea typeface="Trebuchet MS" pitchFamily="34" charset="-122"/>
                 <a:cs typeface="Trebuchet MS" pitchFamily="34" charset="-120"/>
               </a:rPr>
-              <a:t>Syllables</a:t>
+              <a:t>Phonemes</a:t>
             </a:r>
             <a:endParaRPr lang="en-US" sz="1100" dirty="0"/>
           </a:p>
@@ -22878,13 +22746,13 @@
       </p:sp>
       <p:sp>
         <p:nvSpPr>
-          <p:cNvPr id="20" name="Shape 18"/>
-          <p:cNvSpPr/>
-          <p:nvPr/>
-        </p:nvSpPr>
-        <p:spPr>
-          <a:xfrm>
-            <a:off x="1874520" y="3182112"/>
+          <p:cNvPr id="24" name="Shape 22"/>
+          <p:cNvSpPr/>
+          <p:nvPr/>
+        </p:nvSpPr>
+        <p:spPr>
+          <a:xfrm>
+            <a:off x="1874520" y="4096512"/>
             <a:ext cx="6903720" cy="658368"/>
           </a:xfrm>
           <a:prstGeom prst="rect">
@@ -22905,145 +22773,13 @@
       </p:sp>
       <p:sp>
         <p:nvSpPr>
-          <p:cNvPr id="21" name="Text 19"/>
-          <p:cNvSpPr/>
-          <p:nvPr/>
-        </p:nvSpPr>
-        <p:spPr>
-          <a:xfrm>
-            <a:off x="1874520" y="3182112"/>
-            <a:ext cx="6903720" cy="658368"/>
-          </a:xfrm>
-          <a:prstGeom prst="rect">
-            <a:avLst/>
-          </a:prstGeom>
-          <a:noFill/>
-          <a:ln/>
-        </p:spPr>
-        <p:txBody>
-          <a:bodyPr wrap="square" rtlCol="0" anchor="ctr"/>
-          <a:lstStyle/>
-          <a:p>
-            <a:pPr algn="ctr" indent="0" marL="0">
-              <a:buNone/>
-            </a:pPr>
-            <a:r>
-              <a:rPr lang="en-US" sz="1100" i="1" dirty="0">
-                <a:solidFill>
-                  <a:srgbClr val="CBD5E1"/>
-                </a:solidFill>
-                <a:latin typeface="Calibri" pitchFamily="34" charset="0"/>
-                <a:ea typeface="Calibri" pitchFamily="34" charset="-122"/>
-                <a:cs typeface="Calibri" pitchFamily="34" charset="-120"/>
-              </a:rPr>
-              <a:t>Write here...</a:t>
-            </a:r>
-            <a:endParaRPr lang="en-US" sz="1100" dirty="0"/>
-          </a:p>
-        </p:txBody>
-      </p:sp>
-      <p:sp>
-        <p:nvSpPr>
-          <p:cNvPr id="22" name="Shape 20"/>
-          <p:cNvSpPr/>
-          <p:nvPr/>
-        </p:nvSpPr>
-        <p:spPr>
-          <a:xfrm>
-            <a:off x="365760" y="4005072"/>
-            <a:ext cx="1371600" cy="658368"/>
-          </a:xfrm>
-          <a:prstGeom prst="rect">
-            <a:avLst>
-              <a:gd name="adj" fmla="val 8333"/>
-            </a:avLst>
-          </a:prstGeom>
-          <a:solidFill>
-            <a:srgbClr val="E2E8F0"/>
-          </a:solidFill>
-          <a:ln w="12700">
-            <a:solidFill>
-              <a:srgbClr val="E2E8F0"/>
-            </a:solidFill>
-            <a:prstDash val="solid"/>
-          </a:ln>
-        </p:spPr>
-      </p:sp>
-      <p:sp>
-        <p:nvSpPr>
-          <p:cNvPr id="23" name="Text 21"/>
-          <p:cNvSpPr/>
-          <p:nvPr/>
-        </p:nvSpPr>
-        <p:spPr>
-          <a:xfrm>
-            <a:off x="365760" y="4005072"/>
-            <a:ext cx="1371600" cy="658368"/>
-          </a:xfrm>
-          <a:prstGeom prst="rect">
-            <a:avLst/>
-          </a:prstGeom>
-          <a:noFill/>
-          <a:ln/>
-        </p:spPr>
-        <p:txBody>
-          <a:bodyPr wrap="square" lIns="0" tIns="0" rIns="0" bIns="0" rtlCol="0" anchor="ctr"/>
-          <a:lstStyle/>
-          <a:p>
-            <a:pPr algn="ctr" indent="0" marL="0">
-              <a:buNone/>
-            </a:pPr>
-            <a:r>
-              <a:rPr lang="en-US" sz="1100" b="1" dirty="0">
-                <a:solidFill>
-                  <a:srgbClr val="475569"/>
-                </a:solidFill>
-                <a:latin typeface="Trebuchet MS" pitchFamily="34" charset="0"/>
-                <a:ea typeface="Trebuchet MS" pitchFamily="34" charset="-122"/>
-                <a:cs typeface="Trebuchet MS" pitchFamily="34" charset="-120"/>
-              </a:rPr>
-              <a:t>Phonemes</a:t>
-            </a:r>
-            <a:endParaRPr lang="en-US" sz="1100" dirty="0"/>
-          </a:p>
-        </p:txBody>
-      </p:sp>
-      <p:sp>
-        <p:nvSpPr>
-          <p:cNvPr id="24" name="Shape 22"/>
-          <p:cNvSpPr/>
-          <p:nvPr/>
-        </p:nvSpPr>
-        <p:spPr>
-          <a:xfrm>
-            <a:off x="1874520" y="4005072"/>
-            <a:ext cx="6903720" cy="658368"/>
-          </a:xfrm>
-          <a:prstGeom prst="rect">
-            <a:avLst>
-              <a:gd name="adj" fmla="val 8333"/>
-            </a:avLst>
-          </a:prstGeom>
-          <a:solidFill>
-            <a:srgbClr val="F8FAFC"/>
-          </a:solidFill>
-          <a:ln w="12700">
-            <a:solidFill>
-              <a:srgbClr val="E2E8F0"/>
-            </a:solidFill>
-            <a:prstDash val="dash"/>
-          </a:ln>
-        </p:spPr>
-      </p:sp>
-      <p:sp>
-        <p:nvSpPr>
           <p:cNvPr id="25" name="Text 23"/>
           <p:cNvSpPr/>
           <p:nvPr/>
         </p:nvSpPr>
         <p:spPr>
           <a:xfrm>
-            <a:off x="1874520" y="4005072"/>
+            <a:off x="1874520" y="4096512"/>
             <a:ext cx="6903720" cy="658368"/>
           </a:xfrm>
           <a:prstGeom prst="rect">
@@ -23499,7 +23235,7 @@
                 <a:ea typeface="Trebuchet MS" pitchFamily="34" charset="-122"/>
                 <a:cs typeface="Trebuchet MS" pitchFamily="34" charset="-120"/>
               </a:rPr>
-              <a:t>playful</a:t>
+              <a:t>cheerful</a:t>
             </a:r>
             <a:endParaRPr lang="en-US" sz="2800" dirty="0"/>
           </a:p>
@@ -23514,11 +23250,11 @@
         <p:spPr>
           <a:xfrm>
             <a:off x="365760" y="2240280"/>
-            <a:ext cx="1371600" cy="658368"/>
+            <a:ext cx="1371600" cy="841248"/>
           </a:xfrm>
           <a:prstGeom prst="rect">
             <a:avLst>
-              <a:gd name="adj" fmla="val 8333"/>
+              <a:gd name="adj" fmla="val 6522"/>
             </a:avLst>
           </a:prstGeom>
           <a:solidFill>
@@ -23541,7 +23277,7 @@
         <p:spPr>
           <a:xfrm>
             <a:off x="365760" y="2240280"/>
-            <a:ext cx="1371600" cy="658368"/>
+            <a:ext cx="1371600" cy="841248"/>
           </a:xfrm>
           <a:prstGeom prst="rect">
             <a:avLst/>
@@ -23580,11 +23316,11 @@
         <p:spPr>
           <a:xfrm>
             <a:off x="2938272" y="2258568"/>
-            <a:ext cx="1828800" cy="347472"/>
+            <a:ext cx="1828800" cy="292608"/>
           </a:xfrm>
           <a:prstGeom prst="rect">
             <a:avLst>
-              <a:gd name="adj" fmla="val 21053"/>
+              <a:gd name="adj" fmla="val 25000"/>
             </a:avLst>
           </a:prstGeom>
           <a:solidFill>
@@ -23614,7 +23350,7 @@
         <p:spPr>
           <a:xfrm>
             <a:off x="2938272" y="2258568"/>
-            <a:ext cx="1828800" cy="347472"/>
+            <a:ext cx="1828800" cy="292608"/>
           </a:xfrm>
           <a:prstGeom prst="rect">
             <a:avLst/>
@@ -23638,7 +23374,7 @@
                 <a:ea typeface="Trebuchet MS" pitchFamily="34" charset="-122"/>
                 <a:cs typeface="Trebuchet MS" pitchFamily="34" charset="-120"/>
               </a:rPr>
-              <a:t>play</a:t>
+              <a:t>cheer</a:t>
             </a:r>
             <a:endParaRPr lang="en-US" sz="1300" dirty="0"/>
           </a:p>
@@ -23652,8 +23388,8 @@
         </p:nvSpPr>
         <p:spPr>
           <a:xfrm>
-            <a:off x="2938272" y="2624328"/>
-            <a:ext cx="1828800" cy="256032"/>
+            <a:off x="2938272" y="2569464"/>
+            <a:ext cx="1828800" cy="201168"/>
           </a:xfrm>
           <a:prstGeom prst="rect">
             <a:avLst/>
@@ -23677,7 +23413,7 @@
                 <a:ea typeface="Calibri" pitchFamily="34" charset="-122"/>
                 <a:cs typeface="Calibri" pitchFamily="34" charset="-120"/>
               </a:rPr>
-              <a:t>to have fun or take part in a game</a:t>
+              <a:t>happiness, gladness</a:t>
             </a:r>
             <a:endParaRPr lang="en-US" sz="850" dirty="0"/>
           </a:p>
@@ -23692,11 +23428,11 @@
         <p:spPr>
           <a:xfrm>
             <a:off x="5803392" y="2258568"/>
-            <a:ext cx="1828800" cy="347472"/>
+            <a:ext cx="1828800" cy="292608"/>
           </a:xfrm>
           <a:prstGeom prst="rect">
             <a:avLst>
-              <a:gd name="adj" fmla="val 21053"/>
+              <a:gd name="adj" fmla="val 25000"/>
             </a:avLst>
           </a:prstGeom>
           <a:solidFill>
@@ -23726,7 +23462,7 @@
         <p:spPr>
           <a:xfrm>
             <a:off x="5803392" y="2258568"/>
-            <a:ext cx="1828800" cy="347472"/>
+            <a:ext cx="1828800" cy="292608"/>
           </a:xfrm>
           <a:prstGeom prst="rect">
             <a:avLst/>
@@ -23764,8 +23500,8 @@
         </p:nvSpPr>
         <p:spPr>
           <a:xfrm>
-            <a:off x="5803392" y="2624328"/>
-            <a:ext cx="1828800" cy="256032"/>
+            <a:off x="5803392" y="2569464"/>
+            <a:ext cx="1828800" cy="201168"/>
           </a:xfrm>
           <a:prstGeom prst="rect">
             <a:avLst/>
@@ -23789,7 +23525,7 @@
                 <a:ea typeface="Calibri" pitchFamily="34" charset="-122"/>
                 <a:cs typeface="Calibri" pitchFamily="34" charset="-120"/>
               </a:rPr>
-              <a:t>full of, having the quality of</a:t>
+              <a:t>full of, having quality</a:t>
             </a:r>
             <a:endParaRPr lang="en-US" sz="850" dirty="0"/>
           </a:p>
@@ -23803,7 +23539,7 @@
         </p:nvSpPr>
         <p:spPr>
           <a:xfrm>
-            <a:off x="365760" y="3182112"/>
+            <a:off x="365760" y="3273552"/>
             <a:ext cx="1371600" cy="658368"/>
           </a:xfrm>
           <a:prstGeom prst="rect">
@@ -23830,7 +23566,7 @@
         </p:nvSpPr>
         <p:spPr>
           <a:xfrm>
-            <a:off x="365760" y="3182112"/>
+            <a:off x="365760" y="3273552"/>
             <a:ext cx="1371600" cy="658368"/>
           </a:xfrm>
           <a:prstGeom prst="rect">
@@ -23869,7 +23605,7 @@
         </p:nvSpPr>
         <p:spPr>
           <a:xfrm>
-            <a:off x="1874520" y="3182112"/>
+            <a:off x="1874520" y="3273552"/>
             <a:ext cx="6903720" cy="658368"/>
           </a:xfrm>
           <a:prstGeom prst="rect">
@@ -23896,7 +23632,7 @@
         </p:nvSpPr>
         <p:spPr>
           <a:xfrm>
-            <a:off x="1874520" y="3182112"/>
+            <a:off x="1874520" y="3273552"/>
             <a:ext cx="6903720" cy="658368"/>
           </a:xfrm>
           <a:prstGeom prst="rect">
@@ -23935,7 +23671,7 @@
         </p:nvSpPr>
         <p:spPr>
           <a:xfrm>
-            <a:off x="365760" y="4005072"/>
+            <a:off x="365760" y="4096512"/>
             <a:ext cx="1371600" cy="658368"/>
           </a:xfrm>
           <a:prstGeom prst="rect">
@@ -23962,7 +23698,7 @@
         </p:nvSpPr>
         <p:spPr>
           <a:xfrm>
-            <a:off x="365760" y="4005072"/>
+            <a:off x="365760" y="4096512"/>
             <a:ext cx="1371600" cy="658368"/>
           </a:xfrm>
           <a:prstGeom prst="rect">
@@ -24001,7 +23737,7 @@
         </p:nvSpPr>
         <p:spPr>
           <a:xfrm>
-            <a:off x="1874520" y="4005072"/>
+            <a:off x="1874520" y="4096512"/>
             <a:ext cx="6903720" cy="658368"/>
           </a:xfrm>
           <a:prstGeom prst="rect">
@@ -24028,7 +23764,7 @@
         </p:nvSpPr>
         <p:spPr>
           <a:xfrm>
-            <a:off x="1874520" y="4005072"/>
+            <a:off x="1874520" y="4096512"/>
             <a:ext cx="6903720" cy="658368"/>
           </a:xfrm>
           <a:prstGeom prst="rect">
@@ -25203,7 +24939,7 @@
                 <a:ea typeface="Trebuchet MS" pitchFamily="34" charset="-122"/>
                 <a:cs typeface="Trebuchet MS" pitchFamily="34" charset="-120"/>
               </a:rPr>
-              <a:t>playful</a:t>
+              <a:t>cheerful</a:t>
             </a:r>
             <a:endParaRPr lang="en-US" sz="2800" dirty="0"/>
           </a:p>
@@ -25218,11 +24954,11 @@
         <p:spPr>
           <a:xfrm>
             <a:off x="365760" y="2240280"/>
-            <a:ext cx="1371600" cy="658368"/>
+            <a:ext cx="1371600" cy="841248"/>
           </a:xfrm>
           <a:prstGeom prst="rect">
             <a:avLst>
-              <a:gd name="adj" fmla="val 8333"/>
+              <a:gd name="adj" fmla="val 6522"/>
             </a:avLst>
           </a:prstGeom>
           <a:solidFill>
@@ -25245,7 +24981,7 @@
         <p:spPr>
           <a:xfrm>
             <a:off x="365760" y="2240280"/>
-            <a:ext cx="1371600" cy="658368"/>
+            <a:ext cx="1371600" cy="841248"/>
           </a:xfrm>
           <a:prstGeom prst="rect">
             <a:avLst/>
@@ -25284,11 +25020,11 @@
         <p:spPr>
           <a:xfrm>
             <a:off x="2938272" y="2258568"/>
-            <a:ext cx="1828800" cy="347472"/>
+            <a:ext cx="1828800" cy="292608"/>
           </a:xfrm>
           <a:prstGeom prst="rect">
             <a:avLst>
-              <a:gd name="adj" fmla="val 21053"/>
+              <a:gd name="adj" fmla="val 25000"/>
             </a:avLst>
           </a:prstGeom>
           <a:solidFill>
@@ -25318,7 +25054,7 @@
         <p:spPr>
           <a:xfrm>
             <a:off x="2938272" y="2258568"/>
-            <a:ext cx="1828800" cy="347472"/>
+            <a:ext cx="1828800" cy="292608"/>
           </a:xfrm>
           <a:prstGeom prst="rect">
             <a:avLst/>
@@ -25342,7 +25078,7 @@
                 <a:ea typeface="Trebuchet MS" pitchFamily="34" charset="-122"/>
                 <a:cs typeface="Trebuchet MS" pitchFamily="34" charset="-120"/>
               </a:rPr>
-              <a:t>play</a:t>
+              <a:t>cheer</a:t>
             </a:r>
             <a:endParaRPr lang="en-US" sz="1300" dirty="0"/>
           </a:p>
@@ -25356,8 +25092,8 @@
         </p:nvSpPr>
         <p:spPr>
           <a:xfrm>
-            <a:off x="2938272" y="2624328"/>
-            <a:ext cx="1828800" cy="256032"/>
+            <a:off x="2938272" y="2569464"/>
+            <a:ext cx="1828800" cy="201168"/>
           </a:xfrm>
           <a:prstGeom prst="rect">
             <a:avLst/>
@@ -25381,7 +25117,7 @@
                 <a:ea typeface="Calibri" pitchFamily="34" charset="-122"/>
                 <a:cs typeface="Calibri" pitchFamily="34" charset="-120"/>
               </a:rPr>
-              <a:t>to have fun or take part in a game</a:t>
+              <a:t>happiness, gladness</a:t>
             </a:r>
             <a:endParaRPr lang="en-US" sz="850" dirty="0"/>
           </a:p>
@@ -25396,11 +25132,11 @@
         <p:spPr>
           <a:xfrm>
             <a:off x="5803392" y="2258568"/>
-            <a:ext cx="1828800" cy="347472"/>
+            <a:ext cx="1828800" cy="292608"/>
           </a:xfrm>
           <a:prstGeom prst="rect">
             <a:avLst>
-              <a:gd name="adj" fmla="val 21053"/>
+              <a:gd name="adj" fmla="val 25000"/>
             </a:avLst>
           </a:prstGeom>
           <a:solidFill>
@@ -25430,7 +25166,7 @@
         <p:spPr>
           <a:xfrm>
             <a:off x="5803392" y="2258568"/>
-            <a:ext cx="1828800" cy="347472"/>
+            <a:ext cx="1828800" cy="292608"/>
           </a:xfrm>
           <a:prstGeom prst="rect">
             <a:avLst/>
@@ -25468,8 +25204,8 @@
         </p:nvSpPr>
         <p:spPr>
           <a:xfrm>
-            <a:off x="5803392" y="2624328"/>
-            <a:ext cx="1828800" cy="256032"/>
+            <a:off x="5803392" y="2569464"/>
+            <a:ext cx="1828800" cy="201168"/>
           </a:xfrm>
           <a:prstGeom prst="rect">
             <a:avLst/>
@@ -25493,7 +25229,7 @@
                 <a:ea typeface="Calibri" pitchFamily="34" charset="-122"/>
                 <a:cs typeface="Calibri" pitchFamily="34" charset="-120"/>
               </a:rPr>
-              <a:t>full of, having the quality of</a:t>
+              <a:t>full of, having quality</a:t>
             </a:r>
             <a:endParaRPr lang="en-US" sz="850" dirty="0"/>
           </a:p>
@@ -25507,7 +25243,7 @@
         </p:nvSpPr>
         <p:spPr>
           <a:xfrm>
-            <a:off x="365760" y="3182112"/>
+            <a:off x="365760" y="3273552"/>
             <a:ext cx="1371600" cy="658368"/>
           </a:xfrm>
           <a:prstGeom prst="rect">
@@ -25534,7 +25270,7 @@
         </p:nvSpPr>
         <p:spPr>
           <a:xfrm>
-            <a:off x="365760" y="3182112"/>
+            <a:off x="365760" y="3273552"/>
             <a:ext cx="1371600" cy="658368"/>
           </a:xfrm>
           <a:prstGeom prst="rect">
@@ -25573,7 +25309,7 @@
         </p:nvSpPr>
         <p:spPr>
           <a:xfrm>
-            <a:off x="1874520" y="3182112"/>
+            <a:off x="1874520" y="3273552"/>
             <a:ext cx="6903720" cy="658368"/>
           </a:xfrm>
           <a:prstGeom prst="rect">
@@ -25600,7 +25336,7 @@
         </p:nvSpPr>
         <p:spPr>
           <a:xfrm>
-            <a:off x="2999232" y="3273552"/>
+            <a:off x="2999232" y="3364992"/>
             <a:ext cx="1645920" cy="475488"/>
           </a:xfrm>
           <a:prstGeom prst="rect">
@@ -25627,7 +25363,7 @@
         </p:nvSpPr>
         <p:spPr>
           <a:xfrm>
-            <a:off x="2999232" y="3273552"/>
+            <a:off x="2999232" y="3364992"/>
             <a:ext cx="1645920" cy="475488"/>
           </a:xfrm>
           <a:prstGeom prst="rect">
@@ -25652,7 +25388,7 @@
                 <a:ea typeface="Trebuchet MS" pitchFamily="34" charset="-122"/>
                 <a:cs typeface="Trebuchet MS" pitchFamily="34" charset="-120"/>
               </a:rPr>
-              <a:t>play</a:t>
+              <a:t>cheer</a:t>
             </a:r>
             <a:endParaRPr lang="en-US" sz="1400" dirty="0"/>
           </a:p>
@@ -25666,7 +25402,7 @@
         </p:nvSpPr>
         <p:spPr>
           <a:xfrm>
-            <a:off x="4645152" y="3273552"/>
+            <a:off x="4645152" y="3364992"/>
             <a:ext cx="1097280" cy="475488"/>
           </a:xfrm>
           <a:prstGeom prst="rect">
@@ -25705,7 +25441,7 @@
         </p:nvSpPr>
         <p:spPr>
           <a:xfrm>
-            <a:off x="5742432" y="3273552"/>
+            <a:off x="5742432" y="3364992"/>
             <a:ext cx="1645920" cy="475488"/>
           </a:xfrm>
           <a:prstGeom prst="rect">
@@ -25732,7 +25468,7 @@
         </p:nvSpPr>
         <p:spPr>
           <a:xfrm>
-            <a:off x="5742432" y="3273552"/>
+            <a:off x="5742432" y="3364992"/>
             <a:ext cx="1645920" cy="475488"/>
           </a:xfrm>
           <a:prstGeom prst="rect">
@@ -25771,7 +25507,7 @@
         </p:nvSpPr>
         <p:spPr>
           <a:xfrm>
-            <a:off x="365760" y="4005072"/>
+            <a:off x="365760" y="4096512"/>
             <a:ext cx="1371600" cy="658368"/>
           </a:xfrm>
           <a:prstGeom prst="rect">
@@ -25798,7 +25534,7 @@
         </p:nvSpPr>
         <p:spPr>
           <a:xfrm>
-            <a:off x="365760" y="4005072"/>
+            <a:off x="365760" y="4096512"/>
             <a:ext cx="1371600" cy="658368"/>
           </a:xfrm>
           <a:prstGeom prst="rect">
@@ -25837,7 +25573,7 @@
         </p:nvSpPr>
         <p:spPr>
           <a:xfrm>
-            <a:off x="1874520" y="4005072"/>
+            <a:off x="1874520" y="4096512"/>
             <a:ext cx="6903720" cy="658368"/>
           </a:xfrm>
           <a:prstGeom prst="rect">
@@ -25864,7 +25600,7 @@
         </p:nvSpPr>
         <p:spPr>
           <a:xfrm>
-            <a:off x="1874520" y="4005072"/>
+            <a:off x="1874520" y="4096512"/>
             <a:ext cx="6903720" cy="658368"/>
           </a:xfrm>
           <a:prstGeom prst="rect">
@@ -26320,7 +26056,7 @@
                 <a:ea typeface="Trebuchet MS" pitchFamily="34" charset="-122"/>
                 <a:cs typeface="Trebuchet MS" pitchFamily="34" charset="-120"/>
               </a:rPr>
-              <a:t>playful</a:t>
+              <a:t>cheerful</a:t>
             </a:r>
             <a:endParaRPr lang="en-US" sz="2800" dirty="0"/>
           </a:p>
@@ -26335,11 +26071,11 @@
         <p:spPr>
           <a:xfrm>
             <a:off x="365760" y="2240280"/>
-            <a:ext cx="1371600" cy="658368"/>
+            <a:ext cx="1371600" cy="841248"/>
           </a:xfrm>
           <a:prstGeom prst="rect">
             <a:avLst>
-              <a:gd name="adj" fmla="val 8333"/>
+              <a:gd name="adj" fmla="val 6522"/>
             </a:avLst>
           </a:prstGeom>
           <a:solidFill>
@@ -26362,7 +26098,7 @@
         <p:spPr>
           <a:xfrm>
             <a:off x="365760" y="2240280"/>
-            <a:ext cx="1371600" cy="658368"/>
+            <a:ext cx="1371600" cy="841248"/>
           </a:xfrm>
           <a:prstGeom prst="rect">
             <a:avLst/>
@@ -26401,11 +26137,11 @@
         <p:spPr>
           <a:xfrm>
             <a:off x="2938272" y="2258568"/>
-            <a:ext cx="1828800" cy="347472"/>
+            <a:ext cx="1828800" cy="292608"/>
           </a:xfrm>
           <a:prstGeom prst="rect">
             <a:avLst>
-              <a:gd name="adj" fmla="val 21053"/>
+              <a:gd name="adj" fmla="val 25000"/>
             </a:avLst>
           </a:prstGeom>
           <a:solidFill>
@@ -26435,7 +26171,7 @@
         <p:spPr>
           <a:xfrm>
             <a:off x="2938272" y="2258568"/>
-            <a:ext cx="1828800" cy="347472"/>
+            <a:ext cx="1828800" cy="292608"/>
           </a:xfrm>
           <a:prstGeom prst="rect">
             <a:avLst/>
@@ -26459,7 +26195,7 @@
                 <a:ea typeface="Trebuchet MS" pitchFamily="34" charset="-122"/>
                 <a:cs typeface="Trebuchet MS" pitchFamily="34" charset="-120"/>
               </a:rPr>
-              <a:t>play</a:t>
+              <a:t>cheer</a:t>
             </a:r>
             <a:endParaRPr lang="en-US" sz="1300" dirty="0"/>
           </a:p>
@@ -26473,8 +26209,8 @@
         </p:nvSpPr>
         <p:spPr>
           <a:xfrm>
-            <a:off x="2938272" y="2624328"/>
-            <a:ext cx="1828800" cy="256032"/>
+            <a:off x="2938272" y="2569464"/>
+            <a:ext cx="1828800" cy="201168"/>
           </a:xfrm>
           <a:prstGeom prst="rect">
             <a:avLst/>
@@ -26498,7 +26234,7 @@
                 <a:ea typeface="Calibri" pitchFamily="34" charset="-122"/>
                 <a:cs typeface="Calibri" pitchFamily="34" charset="-120"/>
               </a:rPr>
-              <a:t>to have fun or take part in a game</a:t>
+              <a:t>happiness, gladness</a:t>
             </a:r>
             <a:endParaRPr lang="en-US" sz="850" dirty="0"/>
           </a:p>
@@ -26513,11 +26249,11 @@
         <p:spPr>
           <a:xfrm>
             <a:off x="5803392" y="2258568"/>
-            <a:ext cx="1828800" cy="347472"/>
+            <a:ext cx="1828800" cy="292608"/>
           </a:xfrm>
           <a:prstGeom prst="rect">
             <a:avLst>
-              <a:gd name="adj" fmla="val 21053"/>
+              <a:gd name="adj" fmla="val 25000"/>
             </a:avLst>
           </a:prstGeom>
           <a:solidFill>
@@ -26547,7 +26283,7 @@
         <p:spPr>
           <a:xfrm>
             <a:off x="5803392" y="2258568"/>
-            <a:ext cx="1828800" cy="347472"/>
+            <a:ext cx="1828800" cy="292608"/>
           </a:xfrm>
           <a:prstGeom prst="rect">
             <a:avLst/>
@@ -26585,8 +26321,8 @@
         </p:nvSpPr>
         <p:spPr>
           <a:xfrm>
-            <a:off x="5803392" y="2624328"/>
-            <a:ext cx="1828800" cy="256032"/>
+            <a:off x="5803392" y="2569464"/>
+            <a:ext cx="1828800" cy="201168"/>
           </a:xfrm>
           <a:prstGeom prst="rect">
             <a:avLst/>
@@ -26610,7 +26346,7 @@
                 <a:ea typeface="Calibri" pitchFamily="34" charset="-122"/>
                 <a:cs typeface="Calibri" pitchFamily="34" charset="-120"/>
               </a:rPr>
-              <a:t>full of, having the quality of</a:t>
+              <a:t>full of, having quality</a:t>
             </a:r>
             <a:endParaRPr lang="en-US" sz="850" dirty="0"/>
           </a:p>
@@ -26624,7 +26360,7 @@
         </p:nvSpPr>
         <p:spPr>
           <a:xfrm>
-            <a:off x="365760" y="3182112"/>
+            <a:off x="365760" y="3273552"/>
             <a:ext cx="1371600" cy="658368"/>
           </a:xfrm>
           <a:prstGeom prst="rect">
@@ -26651,7 +26387,7 @@
         </p:nvSpPr>
         <p:spPr>
           <a:xfrm>
-            <a:off x="365760" y="3182112"/>
+            <a:off x="365760" y="3273552"/>
             <a:ext cx="1371600" cy="658368"/>
           </a:xfrm>
           <a:prstGeom prst="rect">
@@ -26690,7 +26426,7 @@
         </p:nvSpPr>
         <p:spPr>
           <a:xfrm>
-            <a:off x="1874520" y="3182112"/>
+            <a:off x="1874520" y="3273552"/>
             <a:ext cx="6903720" cy="658368"/>
           </a:xfrm>
           <a:prstGeom prst="rect">
@@ -26717,7 +26453,7 @@
         </p:nvSpPr>
         <p:spPr>
           <a:xfrm>
-            <a:off x="2999232" y="3273552"/>
+            <a:off x="2999232" y="3364992"/>
             <a:ext cx="1645920" cy="475488"/>
           </a:xfrm>
           <a:prstGeom prst="rect">
@@ -26744,7 +26480,7 @@
         </p:nvSpPr>
         <p:spPr>
           <a:xfrm>
-            <a:off x="2999232" y="3273552"/>
+            <a:off x="2999232" y="3364992"/>
             <a:ext cx="1645920" cy="475488"/>
           </a:xfrm>
           <a:prstGeom prst="rect">
@@ -26769,7 +26505,7 @@
                 <a:ea typeface="Trebuchet MS" pitchFamily="34" charset="-122"/>
                 <a:cs typeface="Trebuchet MS" pitchFamily="34" charset="-120"/>
               </a:rPr>
-              <a:t>play</a:t>
+              <a:t>cheer</a:t>
             </a:r>
             <a:endParaRPr lang="en-US" sz="1400" dirty="0"/>
           </a:p>
@@ -26783,7 +26519,7 @@
         </p:nvSpPr>
         <p:spPr>
           <a:xfrm>
-            <a:off x="4645152" y="3273552"/>
+            <a:off x="4645152" y="3364992"/>
             <a:ext cx="1097280" cy="475488"/>
           </a:xfrm>
           <a:prstGeom prst="rect">
@@ -26822,7 +26558,7 @@
         </p:nvSpPr>
         <p:spPr>
           <a:xfrm>
-            <a:off x="5742432" y="3273552"/>
+            <a:off x="5742432" y="3364992"/>
             <a:ext cx="1645920" cy="475488"/>
           </a:xfrm>
           <a:prstGeom prst="rect">
@@ -26849,7 +26585,7 @@
         </p:nvSpPr>
         <p:spPr>
           <a:xfrm>
-            <a:off x="5742432" y="3273552"/>
+            <a:off x="5742432" y="3364992"/>
             <a:ext cx="1645920" cy="475488"/>
           </a:xfrm>
           <a:prstGeom prst="rect">
@@ -26888,7 +26624,7 @@
         </p:nvSpPr>
         <p:spPr>
           <a:xfrm>
-            <a:off x="365760" y="4005072"/>
+            <a:off x="365760" y="4096512"/>
             <a:ext cx="1371600" cy="658368"/>
           </a:xfrm>
           <a:prstGeom prst="rect">
@@ -26915,7 +26651,7 @@
         </p:nvSpPr>
         <p:spPr>
           <a:xfrm>
-            <a:off x="365760" y="4005072"/>
+            <a:off x="365760" y="4096512"/>
             <a:ext cx="1371600" cy="658368"/>
           </a:xfrm>
           <a:prstGeom prst="rect">
@@ -26954,7 +26690,7 @@
         </p:nvSpPr>
         <p:spPr>
           <a:xfrm>
-            <a:off x="1874520" y="4005072"/>
+            <a:off x="1874520" y="4096512"/>
             <a:ext cx="6903720" cy="658368"/>
           </a:xfrm>
           <a:prstGeom prst="rect">
@@ -26981,7 +26717,7 @@
         </p:nvSpPr>
         <p:spPr>
           <a:xfrm>
-            <a:off x="2254649" y="4096512"/>
+            <a:off x="2427732" y="4187952"/>
             <a:ext cx="685800" cy="475488"/>
           </a:xfrm>
           <a:prstGeom prst="rect">
@@ -27008,7 +26744,7 @@
         </p:nvSpPr>
         <p:spPr>
           <a:xfrm>
-            <a:off x="2254649" y="4096512"/>
+            <a:off x="2427732" y="4187952"/>
             <a:ext cx="685800" cy="475488"/>
           </a:xfrm>
           <a:prstGeom prst="rect">
@@ -27033,7 +26769,7 @@
                 <a:ea typeface="Trebuchet MS" pitchFamily="34" charset="-122"/>
                 <a:cs typeface="Trebuchet MS" pitchFamily="34" charset="-120"/>
               </a:rPr>
-              <a:t>p</a:t>
+              <a:t>ch</a:t>
             </a:r>
             <a:endParaRPr lang="en-US" sz="900" dirty="0"/>
           </a:p>
@@ -27047,7 +26783,7 @@
         </p:nvSpPr>
         <p:spPr>
           <a:xfrm>
-            <a:off x="3293146" y="4096512"/>
+            <a:off x="3639312" y="4187952"/>
             <a:ext cx="685800" cy="475488"/>
           </a:xfrm>
           <a:prstGeom prst="rect">
@@ -27074,7 +26810,7 @@
         </p:nvSpPr>
         <p:spPr>
           <a:xfrm>
-            <a:off x="3293146" y="4096512"/>
+            <a:off x="3639312" y="4187952"/>
             <a:ext cx="685800" cy="475488"/>
           </a:xfrm>
           <a:prstGeom prst="rect">
@@ -27099,7 +26835,7 @@
                 <a:ea typeface="Trebuchet MS" pitchFamily="34" charset="-122"/>
                 <a:cs typeface="Trebuchet MS" pitchFamily="34" charset="-120"/>
               </a:rPr>
-              <a:t>l</a:t>
+              <a:t>eer</a:t>
             </a:r>
             <a:endParaRPr lang="en-US" sz="900" dirty="0"/>
           </a:p>
@@ -27113,7 +26849,7 @@
         </p:nvSpPr>
         <p:spPr>
           <a:xfrm>
-            <a:off x="4331643" y="4096512"/>
+            <a:off x="4850892" y="4187952"/>
             <a:ext cx="685800" cy="475488"/>
           </a:xfrm>
           <a:prstGeom prst="rect">
@@ -27140,7 +26876,7 @@
         </p:nvSpPr>
         <p:spPr>
           <a:xfrm>
-            <a:off x="4331643" y="4096512"/>
+            <a:off x="4850892" y="4187952"/>
             <a:ext cx="685800" cy="475488"/>
           </a:xfrm>
           <a:prstGeom prst="rect">
@@ -27165,7 +26901,7 @@
                 <a:ea typeface="Trebuchet MS" pitchFamily="34" charset="-122"/>
                 <a:cs typeface="Trebuchet MS" pitchFamily="34" charset="-120"/>
               </a:rPr>
-              <a:t>ay</a:t>
+              <a:t>f</a:t>
             </a:r>
             <a:endParaRPr lang="en-US" sz="900" dirty="0"/>
           </a:p>
@@ -27179,7 +26915,7 @@
         </p:nvSpPr>
         <p:spPr>
           <a:xfrm>
-            <a:off x="5370141" y="4096512"/>
+            <a:off x="6062472" y="4187952"/>
             <a:ext cx="685800" cy="475488"/>
           </a:xfrm>
           <a:prstGeom prst="rect">
@@ -27206,7 +26942,7 @@
         </p:nvSpPr>
         <p:spPr>
           <a:xfrm>
-            <a:off x="5370141" y="4096512"/>
+            <a:off x="6062472" y="4187952"/>
             <a:ext cx="685800" cy="475488"/>
           </a:xfrm>
           <a:prstGeom prst="rect">
@@ -27231,7 +26967,7 @@
                 <a:ea typeface="Trebuchet MS" pitchFamily="34" charset="-122"/>
                 <a:cs typeface="Trebuchet MS" pitchFamily="34" charset="-120"/>
               </a:rPr>
-              <a:t>f</a:t>
+              <a:t>u</a:t>
             </a:r>
             <a:endParaRPr lang="en-US" sz="900" dirty="0"/>
           </a:p>
@@ -27245,7 +26981,7 @@
         </p:nvSpPr>
         <p:spPr>
           <a:xfrm>
-            <a:off x="6408638" y="4096512"/>
+            <a:off x="7274052" y="4187952"/>
             <a:ext cx="685800" cy="475488"/>
           </a:xfrm>
           <a:prstGeom prst="rect">
@@ -27272,73 +27008,7 @@
         </p:nvSpPr>
         <p:spPr>
           <a:xfrm>
-            <a:off x="6408638" y="4096512"/>
-            <a:ext cx="685800" cy="475488"/>
-          </a:xfrm>
-          <a:prstGeom prst="rect">
-            <a:avLst/>
-          </a:prstGeom>
-          <a:noFill/>
-          <a:ln/>
-        </p:spPr>
-        <p:txBody>
-          <a:bodyPr wrap="square" lIns="0" tIns="0" rIns="0" bIns="0" rtlCol="0" anchor="ctr"/>
-          <a:lstStyle/>
-          <a:p>
-            <a:pPr algn="ctr" indent="0" marL="0">
-              <a:buNone/>
-            </a:pPr>
-            <a:r>
-              <a:rPr lang="en-US" sz="900" b="1" dirty="0">
-                <a:solidFill>
-                  <a:srgbClr val="9D174D"/>
-                </a:solidFill>
-                <a:latin typeface="Trebuchet MS" pitchFamily="34" charset="0"/>
-                <a:ea typeface="Trebuchet MS" pitchFamily="34" charset="-122"/>
-                <a:cs typeface="Trebuchet MS" pitchFamily="34" charset="-120"/>
-              </a:rPr>
-              <a:t>u</a:t>
-            </a:r>
-            <a:endParaRPr lang="en-US" sz="900" dirty="0"/>
-          </a:p>
-        </p:txBody>
-      </p:sp>
-      <p:sp>
-        <p:nvSpPr>
-          <p:cNvPr id="43" name="Shape 41"/>
-          <p:cNvSpPr/>
-          <p:nvPr/>
-        </p:nvSpPr>
-        <p:spPr>
-          <a:xfrm>
-            <a:off x="7447135" y="4096512"/>
-            <a:ext cx="685800" cy="475488"/>
-          </a:xfrm>
-          <a:prstGeom prst="rect">
-            <a:avLst>
-              <a:gd name="adj" fmla="val 7692"/>
-            </a:avLst>
-          </a:prstGeom>
-          <a:solidFill>
-            <a:srgbClr val="FFFFFF"/>
-          </a:solidFill>
-          <a:ln w="12700">
-            <a:solidFill>
-              <a:srgbClr val="DB2777"/>
-            </a:solidFill>
-            <a:prstDash val="solid"/>
-          </a:ln>
-        </p:spPr>
-      </p:sp>
-      <p:sp>
-        <p:nvSpPr>
-          <p:cNvPr id="44" name="Text 42"/>
-          <p:cNvSpPr/>
-          <p:nvPr/>
-        </p:nvSpPr>
-        <p:spPr>
-          <a:xfrm>
-            <a:off x="7447135" y="4096512"/>
+            <a:off x="7274052" y="4187952"/>
             <a:ext cx="685800" cy="475488"/>
           </a:xfrm>
           <a:prstGeom prst="rect">
@@ -27794,7 +27464,7 @@
                 <a:ea typeface="Trebuchet MS" pitchFamily="34" charset="-122"/>
                 <a:cs typeface="Trebuchet MS" pitchFamily="34" charset="-120"/>
               </a:rPr>
-              <a:t>careful</a:t>
+              <a:t>playful</a:t>
             </a:r>
             <a:endParaRPr lang="en-US" sz="2800" dirty="0"/>
           </a:p>
@@ -27809,6 +27479,138 @@
         <p:spPr>
           <a:xfrm>
             <a:off x="365760" y="2240280"/>
+            <a:ext cx="1371600" cy="841248"/>
+          </a:xfrm>
+          <a:prstGeom prst="rect">
+            <a:avLst>
+              <a:gd name="adj" fmla="val 6522"/>
+            </a:avLst>
+          </a:prstGeom>
+          <a:solidFill>
+            <a:srgbClr val="E2E8F0"/>
+          </a:solidFill>
+          <a:ln w="12700">
+            <a:solidFill>
+              <a:srgbClr val="E2E8F0"/>
+            </a:solidFill>
+            <a:prstDash val="solid"/>
+          </a:ln>
+        </p:spPr>
+      </p:sp>
+      <p:sp>
+        <p:nvSpPr>
+          <p:cNvPr id="15" name="Text 13"/>
+          <p:cNvSpPr/>
+          <p:nvPr/>
+        </p:nvSpPr>
+        <p:spPr>
+          <a:xfrm>
+            <a:off x="365760" y="2240280"/>
+            <a:ext cx="1371600" cy="841248"/>
+          </a:xfrm>
+          <a:prstGeom prst="rect">
+            <a:avLst/>
+          </a:prstGeom>
+          <a:noFill/>
+          <a:ln/>
+        </p:spPr>
+        <p:txBody>
+          <a:bodyPr wrap="square" lIns="0" tIns="0" rIns="0" bIns="0" rtlCol="0" anchor="ctr"/>
+          <a:lstStyle/>
+          <a:p>
+            <a:pPr algn="ctr" indent="0" marL="0">
+              <a:buNone/>
+            </a:pPr>
+            <a:r>
+              <a:rPr lang="en-US" sz="1100" b="1" dirty="0">
+                <a:solidFill>
+                  <a:srgbClr val="475569"/>
+                </a:solidFill>
+                <a:latin typeface="Trebuchet MS" pitchFamily="34" charset="0"/>
+                <a:ea typeface="Trebuchet MS" pitchFamily="34" charset="-122"/>
+                <a:cs typeface="Trebuchet MS" pitchFamily="34" charset="-120"/>
+              </a:rPr>
+              <a:t>Morphemes</a:t>
+            </a:r>
+            <a:endParaRPr lang="en-US" sz="1100" dirty="0"/>
+          </a:p>
+        </p:txBody>
+      </p:sp>
+      <p:sp>
+        <p:nvSpPr>
+          <p:cNvPr id="16" name="Shape 14"/>
+          <p:cNvSpPr/>
+          <p:nvPr/>
+        </p:nvSpPr>
+        <p:spPr>
+          <a:xfrm>
+            <a:off x="1874520" y="2240280"/>
+            <a:ext cx="6903720" cy="841248"/>
+          </a:xfrm>
+          <a:prstGeom prst="rect">
+            <a:avLst>
+              <a:gd name="adj" fmla="val 6522"/>
+            </a:avLst>
+          </a:prstGeom>
+          <a:solidFill>
+            <a:srgbClr val="F8FAFC"/>
+          </a:solidFill>
+          <a:ln w="12700">
+            <a:solidFill>
+              <a:srgbClr val="E2E8F0"/>
+            </a:solidFill>
+            <a:prstDash val="dash"/>
+          </a:ln>
+        </p:spPr>
+      </p:sp>
+      <p:sp>
+        <p:nvSpPr>
+          <p:cNvPr id="17" name="Text 15"/>
+          <p:cNvSpPr/>
+          <p:nvPr/>
+        </p:nvSpPr>
+        <p:spPr>
+          <a:xfrm>
+            <a:off x="1874520" y="2240280"/>
+            <a:ext cx="6903720" cy="841248"/>
+          </a:xfrm>
+          <a:prstGeom prst="rect">
+            <a:avLst/>
+          </a:prstGeom>
+          <a:noFill/>
+          <a:ln/>
+        </p:spPr>
+        <p:txBody>
+          <a:bodyPr wrap="square" rtlCol="0" anchor="ctr"/>
+          <a:lstStyle/>
+          <a:p>
+            <a:pPr algn="ctr" indent="0" marL="0">
+              <a:buNone/>
+            </a:pPr>
+            <a:r>
+              <a:rPr lang="en-US" sz="1100" i="1" dirty="0">
+                <a:solidFill>
+                  <a:srgbClr val="CBD5E1"/>
+                </a:solidFill>
+                <a:latin typeface="Calibri" pitchFamily="34" charset="0"/>
+                <a:ea typeface="Calibri" pitchFamily="34" charset="-122"/>
+                <a:cs typeface="Calibri" pitchFamily="34" charset="-120"/>
+              </a:rPr>
+              <a:t>Write here...</a:t>
+            </a:r>
+            <a:endParaRPr lang="en-US" sz="1100" dirty="0"/>
+          </a:p>
+        </p:txBody>
+      </p:sp>
+      <p:sp>
+        <p:nvSpPr>
+          <p:cNvPr id="18" name="Shape 16"/>
+          <p:cNvSpPr/>
+          <p:nvPr/>
+        </p:nvSpPr>
+        <p:spPr>
+          <a:xfrm>
+            <a:off x="365760" y="3273552"/>
             <a:ext cx="1371600" cy="658368"/>
           </a:xfrm>
           <a:prstGeom prst="rect">
@@ -27829,13 +27631,13 @@
       </p:sp>
       <p:sp>
         <p:nvSpPr>
-          <p:cNvPr id="15" name="Text 13"/>
-          <p:cNvSpPr/>
-          <p:nvPr/>
-        </p:nvSpPr>
-        <p:spPr>
-          <a:xfrm>
-            <a:off x="365760" y="2240280"/>
+          <p:cNvPr id="19" name="Text 17"/>
+          <p:cNvSpPr/>
+          <p:nvPr/>
+        </p:nvSpPr>
+        <p:spPr>
+          <a:xfrm>
+            <a:off x="365760" y="3273552"/>
             <a:ext cx="1371600" cy="658368"/>
           </a:xfrm>
           <a:prstGeom prst="rect">
@@ -27860,7 +27662,7 @@
                 <a:ea typeface="Trebuchet MS" pitchFamily="34" charset="-122"/>
                 <a:cs typeface="Trebuchet MS" pitchFamily="34" charset="-120"/>
               </a:rPr>
-              <a:t>Morphemes</a:t>
+              <a:t>Syllables</a:t>
             </a:r>
             <a:endParaRPr lang="en-US" sz="1100" dirty="0"/>
           </a:p>
@@ -27868,13 +27670,13 @@
       </p:sp>
       <p:sp>
         <p:nvSpPr>
-          <p:cNvPr id="16" name="Shape 14"/>
-          <p:cNvSpPr/>
-          <p:nvPr/>
-        </p:nvSpPr>
-        <p:spPr>
-          <a:xfrm>
-            <a:off x="1874520" y="2240280"/>
+          <p:cNvPr id="20" name="Shape 18"/>
+          <p:cNvSpPr/>
+          <p:nvPr/>
+        </p:nvSpPr>
+        <p:spPr>
+          <a:xfrm>
+            <a:off x="1874520" y="3273552"/>
             <a:ext cx="6903720" cy="658368"/>
           </a:xfrm>
           <a:prstGeom prst="rect">
@@ -27895,13 +27697,13 @@
       </p:sp>
       <p:sp>
         <p:nvSpPr>
-          <p:cNvPr id="17" name="Text 15"/>
-          <p:cNvSpPr/>
-          <p:nvPr/>
-        </p:nvSpPr>
-        <p:spPr>
-          <a:xfrm>
-            <a:off x="1874520" y="2240280"/>
+          <p:cNvPr id="21" name="Text 19"/>
+          <p:cNvSpPr/>
+          <p:nvPr/>
+        </p:nvSpPr>
+        <p:spPr>
+          <a:xfrm>
+            <a:off x="1874520" y="3273552"/>
             <a:ext cx="6903720" cy="658368"/>
           </a:xfrm>
           <a:prstGeom prst="rect">
@@ -27934,13 +27736,13 @@
       </p:sp>
       <p:sp>
         <p:nvSpPr>
-          <p:cNvPr id="18" name="Shape 16"/>
-          <p:cNvSpPr/>
-          <p:nvPr/>
-        </p:nvSpPr>
-        <p:spPr>
-          <a:xfrm>
-            <a:off x="365760" y="3182112"/>
+          <p:cNvPr id="22" name="Shape 20"/>
+          <p:cNvSpPr/>
+          <p:nvPr/>
+        </p:nvSpPr>
+        <p:spPr>
+          <a:xfrm>
+            <a:off x="365760" y="4096512"/>
             <a:ext cx="1371600" cy="658368"/>
           </a:xfrm>
           <a:prstGeom prst="rect">
@@ -27961,13 +27763,13 @@
       </p:sp>
       <p:sp>
         <p:nvSpPr>
-          <p:cNvPr id="19" name="Text 17"/>
-          <p:cNvSpPr/>
-          <p:nvPr/>
-        </p:nvSpPr>
-        <p:spPr>
-          <a:xfrm>
-            <a:off x="365760" y="3182112"/>
+          <p:cNvPr id="23" name="Text 21"/>
+          <p:cNvSpPr/>
+          <p:nvPr/>
+        </p:nvSpPr>
+        <p:spPr>
+          <a:xfrm>
+            <a:off x="365760" y="4096512"/>
             <a:ext cx="1371600" cy="658368"/>
           </a:xfrm>
           <a:prstGeom prst="rect">
@@ -27992,7 +27794,7 @@
                 <a:ea typeface="Trebuchet MS" pitchFamily="34" charset="-122"/>
                 <a:cs typeface="Trebuchet MS" pitchFamily="34" charset="-120"/>
               </a:rPr>
-              <a:t>Syllables</a:t>
+              <a:t>Phonemes</a:t>
             </a:r>
             <a:endParaRPr lang="en-US" sz="1100" dirty="0"/>
           </a:p>
@@ -28000,13 +27802,13 @@
       </p:sp>
       <p:sp>
         <p:nvSpPr>
-          <p:cNvPr id="20" name="Shape 18"/>
-          <p:cNvSpPr/>
-          <p:nvPr/>
-        </p:nvSpPr>
-        <p:spPr>
-          <a:xfrm>
-            <a:off x="1874520" y="3182112"/>
+          <p:cNvPr id="24" name="Shape 22"/>
+          <p:cNvSpPr/>
+          <p:nvPr/>
+        </p:nvSpPr>
+        <p:spPr>
+          <a:xfrm>
+            <a:off x="1874520" y="4096512"/>
             <a:ext cx="6903720" cy="658368"/>
           </a:xfrm>
           <a:prstGeom prst="rect">
@@ -28027,145 +27829,13 @@
       </p:sp>
       <p:sp>
         <p:nvSpPr>
-          <p:cNvPr id="21" name="Text 19"/>
-          <p:cNvSpPr/>
-          <p:nvPr/>
-        </p:nvSpPr>
-        <p:spPr>
-          <a:xfrm>
-            <a:off x="1874520" y="3182112"/>
-            <a:ext cx="6903720" cy="658368"/>
-          </a:xfrm>
-          <a:prstGeom prst="rect">
-            <a:avLst/>
-          </a:prstGeom>
-          <a:noFill/>
-          <a:ln/>
-        </p:spPr>
-        <p:txBody>
-          <a:bodyPr wrap="square" rtlCol="0" anchor="ctr"/>
-          <a:lstStyle/>
-          <a:p>
-            <a:pPr algn="ctr" indent="0" marL="0">
-              <a:buNone/>
-            </a:pPr>
-            <a:r>
-              <a:rPr lang="en-US" sz="1100" i="1" dirty="0">
-                <a:solidFill>
-                  <a:srgbClr val="CBD5E1"/>
-                </a:solidFill>
-                <a:latin typeface="Calibri" pitchFamily="34" charset="0"/>
-                <a:ea typeface="Calibri" pitchFamily="34" charset="-122"/>
-                <a:cs typeface="Calibri" pitchFamily="34" charset="-120"/>
-              </a:rPr>
-              <a:t>Write here...</a:t>
-            </a:r>
-            <a:endParaRPr lang="en-US" sz="1100" dirty="0"/>
-          </a:p>
-        </p:txBody>
-      </p:sp>
-      <p:sp>
-        <p:nvSpPr>
-          <p:cNvPr id="22" name="Shape 20"/>
-          <p:cNvSpPr/>
-          <p:nvPr/>
-        </p:nvSpPr>
-        <p:spPr>
-          <a:xfrm>
-            <a:off x="365760" y="4005072"/>
-            <a:ext cx="1371600" cy="658368"/>
-          </a:xfrm>
-          <a:prstGeom prst="rect">
-            <a:avLst>
-              <a:gd name="adj" fmla="val 8333"/>
-            </a:avLst>
-          </a:prstGeom>
-          <a:solidFill>
-            <a:srgbClr val="E2E8F0"/>
-          </a:solidFill>
-          <a:ln w="12700">
-            <a:solidFill>
-              <a:srgbClr val="E2E8F0"/>
-            </a:solidFill>
-            <a:prstDash val="solid"/>
-          </a:ln>
-        </p:spPr>
-      </p:sp>
-      <p:sp>
-        <p:nvSpPr>
-          <p:cNvPr id="23" name="Text 21"/>
-          <p:cNvSpPr/>
-          <p:nvPr/>
-        </p:nvSpPr>
-        <p:spPr>
-          <a:xfrm>
-            <a:off x="365760" y="4005072"/>
-            <a:ext cx="1371600" cy="658368"/>
-          </a:xfrm>
-          <a:prstGeom prst="rect">
-            <a:avLst/>
-          </a:prstGeom>
-          <a:noFill/>
-          <a:ln/>
-        </p:spPr>
-        <p:txBody>
-          <a:bodyPr wrap="square" lIns="0" tIns="0" rIns="0" bIns="0" rtlCol="0" anchor="ctr"/>
-          <a:lstStyle/>
-          <a:p>
-            <a:pPr algn="ctr" indent="0" marL="0">
-              <a:buNone/>
-            </a:pPr>
-            <a:r>
-              <a:rPr lang="en-US" sz="1100" b="1" dirty="0">
-                <a:solidFill>
-                  <a:srgbClr val="475569"/>
-                </a:solidFill>
-                <a:latin typeface="Trebuchet MS" pitchFamily="34" charset="0"/>
-                <a:ea typeface="Trebuchet MS" pitchFamily="34" charset="-122"/>
-                <a:cs typeface="Trebuchet MS" pitchFamily="34" charset="-120"/>
-              </a:rPr>
-              <a:t>Phonemes</a:t>
-            </a:r>
-            <a:endParaRPr lang="en-US" sz="1100" dirty="0"/>
-          </a:p>
-        </p:txBody>
-      </p:sp>
-      <p:sp>
-        <p:nvSpPr>
-          <p:cNvPr id="24" name="Shape 22"/>
-          <p:cNvSpPr/>
-          <p:nvPr/>
-        </p:nvSpPr>
-        <p:spPr>
-          <a:xfrm>
-            <a:off x="1874520" y="4005072"/>
-            <a:ext cx="6903720" cy="658368"/>
-          </a:xfrm>
-          <a:prstGeom prst="rect">
-            <a:avLst>
-              <a:gd name="adj" fmla="val 8333"/>
-            </a:avLst>
-          </a:prstGeom>
-          <a:solidFill>
-            <a:srgbClr val="F8FAFC"/>
-          </a:solidFill>
-          <a:ln w="12700">
-            <a:solidFill>
-              <a:srgbClr val="E2E8F0"/>
-            </a:solidFill>
-            <a:prstDash val="dash"/>
-          </a:ln>
-        </p:spPr>
-      </p:sp>
-      <p:sp>
-        <p:nvSpPr>
           <p:cNvPr id="25" name="Text 23"/>
           <p:cNvSpPr/>
           <p:nvPr/>
         </p:nvSpPr>
         <p:spPr>
           <a:xfrm>
-            <a:off x="1874520" y="4005072"/>
+            <a:off x="1874520" y="4096512"/>
             <a:ext cx="6903720" cy="658368"/>
           </a:xfrm>
           <a:prstGeom prst="rect">
@@ -28621,7 +28291,7 @@
                 <a:ea typeface="Trebuchet MS" pitchFamily="34" charset="-122"/>
                 <a:cs typeface="Trebuchet MS" pitchFamily="34" charset="-120"/>
               </a:rPr>
-              <a:t>careful</a:t>
+              <a:t>playful</a:t>
             </a:r>
             <a:endParaRPr lang="en-US" sz="2800" dirty="0"/>
           </a:p>
@@ -28636,11 +28306,11 @@
         <p:spPr>
           <a:xfrm>
             <a:off x="365760" y="2240280"/>
-            <a:ext cx="1371600" cy="658368"/>
+            <a:ext cx="1371600" cy="841248"/>
           </a:xfrm>
           <a:prstGeom prst="rect">
             <a:avLst>
-              <a:gd name="adj" fmla="val 8333"/>
+              <a:gd name="adj" fmla="val 6522"/>
             </a:avLst>
           </a:prstGeom>
           <a:solidFill>
@@ -28663,7 +28333,7 @@
         <p:spPr>
           <a:xfrm>
             <a:off x="365760" y="2240280"/>
-            <a:ext cx="1371600" cy="658368"/>
+            <a:ext cx="1371600" cy="841248"/>
           </a:xfrm>
           <a:prstGeom prst="rect">
             <a:avLst/>
@@ -28702,11 +28372,11 @@
         <p:spPr>
           <a:xfrm>
             <a:off x="2938272" y="2258568"/>
-            <a:ext cx="1828800" cy="347472"/>
+            <a:ext cx="1828800" cy="292608"/>
           </a:xfrm>
           <a:prstGeom prst="rect">
             <a:avLst>
-              <a:gd name="adj" fmla="val 21053"/>
+              <a:gd name="adj" fmla="val 25000"/>
             </a:avLst>
           </a:prstGeom>
           <a:solidFill>
@@ -28736,7 +28406,7 @@
         <p:spPr>
           <a:xfrm>
             <a:off x="2938272" y="2258568"/>
-            <a:ext cx="1828800" cy="347472"/>
+            <a:ext cx="1828800" cy="292608"/>
           </a:xfrm>
           <a:prstGeom prst="rect">
             <a:avLst/>
@@ -28760,7 +28430,7 @@
                 <a:ea typeface="Trebuchet MS" pitchFamily="34" charset="-122"/>
                 <a:cs typeface="Trebuchet MS" pitchFamily="34" charset="-120"/>
               </a:rPr>
-              <a:t>care</a:t>
+              <a:t>play</a:t>
             </a:r>
             <a:endParaRPr lang="en-US" sz="1300" dirty="0"/>
           </a:p>
@@ -28774,8 +28444,8 @@
         </p:nvSpPr>
         <p:spPr>
           <a:xfrm>
-            <a:off x="2938272" y="2624328"/>
-            <a:ext cx="1828800" cy="256032"/>
+            <a:off x="2938272" y="2569464"/>
+            <a:ext cx="1828800" cy="201168"/>
           </a:xfrm>
           <a:prstGeom prst="rect">
             <a:avLst/>
@@ -28799,7 +28469,7 @@
                 <a:ea typeface="Calibri" pitchFamily="34" charset="-122"/>
                 <a:cs typeface="Calibri" pitchFamily="34" charset="-120"/>
               </a:rPr>
-              <a:t>to pay attention and avoid mistakes</a:t>
+              <a:t>fun, games, activity</a:t>
             </a:r>
             <a:endParaRPr lang="en-US" sz="850" dirty="0"/>
           </a:p>
@@ -28814,11 +28484,11 @@
         <p:spPr>
           <a:xfrm>
             <a:off x="5803392" y="2258568"/>
-            <a:ext cx="1828800" cy="347472"/>
+            <a:ext cx="1828800" cy="292608"/>
           </a:xfrm>
           <a:prstGeom prst="rect">
             <a:avLst>
-              <a:gd name="adj" fmla="val 21053"/>
+              <a:gd name="adj" fmla="val 25000"/>
             </a:avLst>
           </a:prstGeom>
           <a:solidFill>
@@ -28848,7 +28518,7 @@
         <p:spPr>
           <a:xfrm>
             <a:off x="5803392" y="2258568"/>
-            <a:ext cx="1828800" cy="347472"/>
+            <a:ext cx="1828800" cy="292608"/>
           </a:xfrm>
           <a:prstGeom prst="rect">
             <a:avLst/>
@@ -28886,8 +28556,8 @@
         </p:nvSpPr>
         <p:spPr>
           <a:xfrm>
-            <a:off x="5803392" y="2624328"/>
-            <a:ext cx="1828800" cy="256032"/>
+            <a:off x="5803392" y="2569464"/>
+            <a:ext cx="1828800" cy="201168"/>
           </a:xfrm>
           <a:prstGeom prst="rect">
             <a:avLst/>
@@ -28911,7 +28581,7 @@
                 <a:ea typeface="Calibri" pitchFamily="34" charset="-122"/>
                 <a:cs typeface="Calibri" pitchFamily="34" charset="-120"/>
               </a:rPr>
-              <a:t>full of, having the quality of</a:t>
+              <a:t>full of, having quality</a:t>
             </a:r>
             <a:endParaRPr lang="en-US" sz="850" dirty="0"/>
           </a:p>
@@ -28925,7 +28595,7 @@
         </p:nvSpPr>
         <p:spPr>
           <a:xfrm>
-            <a:off x="365760" y="3182112"/>
+            <a:off x="365760" y="3273552"/>
             <a:ext cx="1371600" cy="658368"/>
           </a:xfrm>
           <a:prstGeom prst="rect">
@@ -28952,7 +28622,7 @@
         </p:nvSpPr>
         <p:spPr>
           <a:xfrm>
-            <a:off x="365760" y="3182112"/>
+            <a:off x="365760" y="3273552"/>
             <a:ext cx="1371600" cy="658368"/>
           </a:xfrm>
           <a:prstGeom prst="rect">
@@ -28991,7 +28661,7 @@
         </p:nvSpPr>
         <p:spPr>
           <a:xfrm>
-            <a:off x="1874520" y="3182112"/>
+            <a:off x="1874520" y="3273552"/>
             <a:ext cx="6903720" cy="658368"/>
           </a:xfrm>
           <a:prstGeom prst="rect">
@@ -29018,7 +28688,7 @@
         </p:nvSpPr>
         <p:spPr>
           <a:xfrm>
-            <a:off x="1874520" y="3182112"/>
+            <a:off x="1874520" y="3273552"/>
             <a:ext cx="6903720" cy="658368"/>
           </a:xfrm>
           <a:prstGeom prst="rect">
@@ -29057,7 +28727,7 @@
         </p:nvSpPr>
         <p:spPr>
           <a:xfrm>
-            <a:off x="365760" y="4005072"/>
+            <a:off x="365760" y="4096512"/>
             <a:ext cx="1371600" cy="658368"/>
           </a:xfrm>
           <a:prstGeom prst="rect">
@@ -29084,7 +28754,7 @@
         </p:nvSpPr>
         <p:spPr>
           <a:xfrm>
-            <a:off x="365760" y="4005072"/>
+            <a:off x="365760" y="4096512"/>
             <a:ext cx="1371600" cy="658368"/>
           </a:xfrm>
           <a:prstGeom prst="rect">
@@ -29123,7 +28793,7 @@
         </p:nvSpPr>
         <p:spPr>
           <a:xfrm>
-            <a:off x="1874520" y="4005072"/>
+            <a:off x="1874520" y="4096512"/>
             <a:ext cx="6903720" cy="658368"/>
           </a:xfrm>
           <a:prstGeom prst="rect">
@@ -29150,7 +28820,7 @@
         </p:nvSpPr>
         <p:spPr>
           <a:xfrm>
-            <a:off x="1874520" y="4005072"/>
+            <a:off x="1874520" y="4096512"/>
             <a:ext cx="6903720" cy="658368"/>
           </a:xfrm>
           <a:prstGeom prst="rect">
@@ -29606,7 +29276,7 @@
                 <a:ea typeface="Trebuchet MS" pitchFamily="34" charset="-122"/>
                 <a:cs typeface="Trebuchet MS" pitchFamily="34" charset="-120"/>
               </a:rPr>
-              <a:t>careful</a:t>
+              <a:t>playful</a:t>
             </a:r>
             <a:endParaRPr lang="en-US" sz="2800" dirty="0"/>
           </a:p>
@@ -29621,11 +29291,11 @@
         <p:spPr>
           <a:xfrm>
             <a:off x="365760" y="2240280"/>
-            <a:ext cx="1371600" cy="658368"/>
+            <a:ext cx="1371600" cy="841248"/>
           </a:xfrm>
           <a:prstGeom prst="rect">
             <a:avLst>
-              <a:gd name="adj" fmla="val 8333"/>
+              <a:gd name="adj" fmla="val 6522"/>
             </a:avLst>
           </a:prstGeom>
           <a:solidFill>
@@ -29648,7 +29318,7 @@
         <p:spPr>
           <a:xfrm>
             <a:off x="365760" y="2240280"/>
-            <a:ext cx="1371600" cy="658368"/>
+            <a:ext cx="1371600" cy="841248"/>
           </a:xfrm>
           <a:prstGeom prst="rect">
             <a:avLst/>
@@ -29687,11 +29357,11 @@
         <p:spPr>
           <a:xfrm>
             <a:off x="2938272" y="2258568"/>
-            <a:ext cx="1828800" cy="347472"/>
+            <a:ext cx="1828800" cy="292608"/>
           </a:xfrm>
           <a:prstGeom prst="rect">
             <a:avLst>
-              <a:gd name="adj" fmla="val 21053"/>
+              <a:gd name="adj" fmla="val 25000"/>
             </a:avLst>
           </a:prstGeom>
           <a:solidFill>
@@ -29721,7 +29391,7 @@
         <p:spPr>
           <a:xfrm>
             <a:off x="2938272" y="2258568"/>
-            <a:ext cx="1828800" cy="347472"/>
+            <a:ext cx="1828800" cy="292608"/>
           </a:xfrm>
           <a:prstGeom prst="rect">
             <a:avLst/>
@@ -29745,7 +29415,7 @@
                 <a:ea typeface="Trebuchet MS" pitchFamily="34" charset="-122"/>
                 <a:cs typeface="Trebuchet MS" pitchFamily="34" charset="-120"/>
               </a:rPr>
-              <a:t>care</a:t>
+              <a:t>play</a:t>
             </a:r>
             <a:endParaRPr lang="en-US" sz="1300" dirty="0"/>
           </a:p>
@@ -29759,8 +29429,8 @@
         </p:nvSpPr>
         <p:spPr>
           <a:xfrm>
-            <a:off x="2938272" y="2624328"/>
-            <a:ext cx="1828800" cy="256032"/>
+            <a:off x="2938272" y="2569464"/>
+            <a:ext cx="1828800" cy="201168"/>
           </a:xfrm>
           <a:prstGeom prst="rect">
             <a:avLst/>
@@ -29784,7 +29454,7 @@
                 <a:ea typeface="Calibri" pitchFamily="34" charset="-122"/>
                 <a:cs typeface="Calibri" pitchFamily="34" charset="-120"/>
               </a:rPr>
-              <a:t>to pay attention and avoid mistakes</a:t>
+              <a:t>fun, games, activity</a:t>
             </a:r>
             <a:endParaRPr lang="en-US" sz="850" dirty="0"/>
           </a:p>
@@ -29799,11 +29469,11 @@
         <p:spPr>
           <a:xfrm>
             <a:off x="5803392" y="2258568"/>
-            <a:ext cx="1828800" cy="347472"/>
+            <a:ext cx="1828800" cy="292608"/>
           </a:xfrm>
           <a:prstGeom prst="rect">
             <a:avLst>
-              <a:gd name="adj" fmla="val 21053"/>
+              <a:gd name="adj" fmla="val 25000"/>
             </a:avLst>
           </a:prstGeom>
           <a:solidFill>
@@ -29833,7 +29503,7 @@
         <p:spPr>
           <a:xfrm>
             <a:off x="5803392" y="2258568"/>
-            <a:ext cx="1828800" cy="347472"/>
+            <a:ext cx="1828800" cy="292608"/>
           </a:xfrm>
           <a:prstGeom prst="rect">
             <a:avLst/>
@@ -29871,8 +29541,8 @@
         </p:nvSpPr>
         <p:spPr>
           <a:xfrm>
-            <a:off x="5803392" y="2624328"/>
-            <a:ext cx="1828800" cy="256032"/>
+            <a:off x="5803392" y="2569464"/>
+            <a:ext cx="1828800" cy="201168"/>
           </a:xfrm>
           <a:prstGeom prst="rect">
             <a:avLst/>
@@ -29896,7 +29566,7 @@
                 <a:ea typeface="Calibri" pitchFamily="34" charset="-122"/>
                 <a:cs typeface="Calibri" pitchFamily="34" charset="-120"/>
               </a:rPr>
-              <a:t>full of, having the quality of</a:t>
+              <a:t>full of, having quality</a:t>
             </a:r>
             <a:endParaRPr lang="en-US" sz="850" dirty="0"/>
           </a:p>
@@ -29910,7 +29580,7 @@
         </p:nvSpPr>
         <p:spPr>
           <a:xfrm>
-            <a:off x="365760" y="3182112"/>
+            <a:off x="365760" y="3273552"/>
             <a:ext cx="1371600" cy="658368"/>
           </a:xfrm>
           <a:prstGeom prst="rect">
@@ -29937,7 +29607,7 @@
         </p:nvSpPr>
         <p:spPr>
           <a:xfrm>
-            <a:off x="365760" y="3182112"/>
+            <a:off x="365760" y="3273552"/>
             <a:ext cx="1371600" cy="658368"/>
           </a:xfrm>
           <a:prstGeom prst="rect">
@@ -29976,7 +29646,7 @@
         </p:nvSpPr>
         <p:spPr>
           <a:xfrm>
-            <a:off x="1874520" y="3182112"/>
+            <a:off x="1874520" y="3273552"/>
             <a:ext cx="6903720" cy="658368"/>
           </a:xfrm>
           <a:prstGeom prst="rect">
@@ -30003,7 +29673,7 @@
         </p:nvSpPr>
         <p:spPr>
           <a:xfrm>
-            <a:off x="2999232" y="3273552"/>
+            <a:off x="2999232" y="3364992"/>
             <a:ext cx="1645920" cy="475488"/>
           </a:xfrm>
           <a:prstGeom prst="rect">
@@ -30030,7 +29700,7 @@
         </p:nvSpPr>
         <p:spPr>
           <a:xfrm>
-            <a:off x="2999232" y="3273552"/>
+            <a:off x="2999232" y="3364992"/>
             <a:ext cx="1645920" cy="475488"/>
           </a:xfrm>
           <a:prstGeom prst="rect">
@@ -30055,7 +29725,7 @@
                 <a:ea typeface="Trebuchet MS" pitchFamily="34" charset="-122"/>
                 <a:cs typeface="Trebuchet MS" pitchFamily="34" charset="-120"/>
               </a:rPr>
-              <a:t>care</a:t>
+              <a:t>play</a:t>
             </a:r>
             <a:endParaRPr lang="en-US" sz="1400" dirty="0"/>
           </a:p>
@@ -30069,7 +29739,7 @@
         </p:nvSpPr>
         <p:spPr>
           <a:xfrm>
-            <a:off x="4645152" y="3273552"/>
+            <a:off x="4645152" y="3364992"/>
             <a:ext cx="1097280" cy="475488"/>
           </a:xfrm>
           <a:prstGeom prst="rect">
@@ -30108,7 +29778,7 @@
         </p:nvSpPr>
         <p:spPr>
           <a:xfrm>
-            <a:off x="5742432" y="3273552"/>
+            <a:off x="5742432" y="3364992"/>
             <a:ext cx="1645920" cy="475488"/>
           </a:xfrm>
           <a:prstGeom prst="rect">
@@ -30135,7 +29805,7 @@
         </p:nvSpPr>
         <p:spPr>
           <a:xfrm>
-            <a:off x="5742432" y="3273552"/>
+            <a:off x="5742432" y="3364992"/>
             <a:ext cx="1645920" cy="475488"/>
           </a:xfrm>
           <a:prstGeom prst="rect">
@@ -30174,7 +29844,7 @@
         </p:nvSpPr>
         <p:spPr>
           <a:xfrm>
-            <a:off x="365760" y="4005072"/>
+            <a:off x="365760" y="4096512"/>
             <a:ext cx="1371600" cy="658368"/>
           </a:xfrm>
           <a:prstGeom prst="rect">
@@ -30201,7 +29871,7 @@
         </p:nvSpPr>
         <p:spPr>
           <a:xfrm>
-            <a:off x="365760" y="4005072"/>
+            <a:off x="365760" y="4096512"/>
             <a:ext cx="1371600" cy="658368"/>
           </a:xfrm>
           <a:prstGeom prst="rect">
@@ -30240,7 +29910,7 @@
         </p:nvSpPr>
         <p:spPr>
           <a:xfrm>
-            <a:off x="1874520" y="4005072"/>
+            <a:off x="1874520" y="4096512"/>
             <a:ext cx="6903720" cy="658368"/>
           </a:xfrm>
           <a:prstGeom prst="rect">
@@ -30267,7 +29937,7 @@
         </p:nvSpPr>
         <p:spPr>
           <a:xfrm>
-            <a:off x="1874520" y="4005072"/>
+            <a:off x="1874520" y="4096512"/>
             <a:ext cx="6903720" cy="658368"/>
           </a:xfrm>
           <a:prstGeom prst="rect">
@@ -30723,7 +30393,7 @@
                 <a:ea typeface="Trebuchet MS" pitchFamily="34" charset="-122"/>
                 <a:cs typeface="Trebuchet MS" pitchFamily="34" charset="-120"/>
               </a:rPr>
-              <a:t>careful</a:t>
+              <a:t>playful</a:t>
             </a:r>
             <a:endParaRPr lang="en-US" sz="2800" dirty="0"/>
           </a:p>
@@ -30738,11 +30408,11 @@
         <p:spPr>
           <a:xfrm>
             <a:off x="365760" y="2240280"/>
-            <a:ext cx="1371600" cy="658368"/>
+            <a:ext cx="1371600" cy="841248"/>
           </a:xfrm>
           <a:prstGeom prst="rect">
             <a:avLst>
-              <a:gd name="adj" fmla="val 8333"/>
+              <a:gd name="adj" fmla="val 6522"/>
             </a:avLst>
           </a:prstGeom>
           <a:solidFill>
@@ -30765,7 +30435,7 @@
         <p:spPr>
           <a:xfrm>
             <a:off x="365760" y="2240280"/>
-            <a:ext cx="1371600" cy="658368"/>
+            <a:ext cx="1371600" cy="841248"/>
           </a:xfrm>
           <a:prstGeom prst="rect">
             <a:avLst/>
@@ -30804,11 +30474,11 @@
         <p:spPr>
           <a:xfrm>
             <a:off x="2938272" y="2258568"/>
-            <a:ext cx="1828800" cy="347472"/>
+            <a:ext cx="1828800" cy="292608"/>
           </a:xfrm>
           <a:prstGeom prst="rect">
             <a:avLst>
-              <a:gd name="adj" fmla="val 21053"/>
+              <a:gd name="adj" fmla="val 25000"/>
             </a:avLst>
           </a:prstGeom>
           <a:solidFill>
@@ -30838,7 +30508,7 @@
         <p:spPr>
           <a:xfrm>
             <a:off x="2938272" y="2258568"/>
-            <a:ext cx="1828800" cy="347472"/>
+            <a:ext cx="1828800" cy="292608"/>
           </a:xfrm>
           <a:prstGeom prst="rect">
             <a:avLst/>
@@ -30862,7 +30532,7 @@
                 <a:ea typeface="Trebuchet MS" pitchFamily="34" charset="-122"/>
                 <a:cs typeface="Trebuchet MS" pitchFamily="34" charset="-120"/>
               </a:rPr>
-              <a:t>care</a:t>
+              <a:t>play</a:t>
             </a:r>
             <a:endParaRPr lang="en-US" sz="1300" dirty="0"/>
           </a:p>
@@ -30876,8 +30546,8 @@
         </p:nvSpPr>
         <p:spPr>
           <a:xfrm>
-            <a:off x="2938272" y="2624328"/>
-            <a:ext cx="1828800" cy="256032"/>
+            <a:off x="2938272" y="2569464"/>
+            <a:ext cx="1828800" cy="201168"/>
           </a:xfrm>
           <a:prstGeom prst="rect">
             <a:avLst/>
@@ -30901,7 +30571,7 @@
                 <a:ea typeface="Calibri" pitchFamily="34" charset="-122"/>
                 <a:cs typeface="Calibri" pitchFamily="34" charset="-120"/>
               </a:rPr>
-              <a:t>to pay attention and avoid mistakes</a:t>
+              <a:t>fun, games, activity</a:t>
             </a:r>
             <a:endParaRPr lang="en-US" sz="850" dirty="0"/>
           </a:p>
@@ -30916,11 +30586,11 @@
         <p:spPr>
           <a:xfrm>
             <a:off x="5803392" y="2258568"/>
-            <a:ext cx="1828800" cy="347472"/>
+            <a:ext cx="1828800" cy="292608"/>
           </a:xfrm>
           <a:prstGeom prst="rect">
             <a:avLst>
-              <a:gd name="adj" fmla="val 21053"/>
+              <a:gd name="adj" fmla="val 25000"/>
             </a:avLst>
           </a:prstGeom>
           <a:solidFill>
@@ -30950,7 +30620,7 @@
         <p:spPr>
           <a:xfrm>
             <a:off x="5803392" y="2258568"/>
-            <a:ext cx="1828800" cy="347472"/>
+            <a:ext cx="1828800" cy="292608"/>
           </a:xfrm>
           <a:prstGeom prst="rect">
             <a:avLst/>
@@ -30988,8 +30658,8 @@
         </p:nvSpPr>
         <p:spPr>
           <a:xfrm>
-            <a:off x="5803392" y="2624328"/>
-            <a:ext cx="1828800" cy="256032"/>
+            <a:off x="5803392" y="2569464"/>
+            <a:ext cx="1828800" cy="201168"/>
           </a:xfrm>
           <a:prstGeom prst="rect">
             <a:avLst/>
@@ -31013,7 +30683,7 @@
                 <a:ea typeface="Calibri" pitchFamily="34" charset="-122"/>
                 <a:cs typeface="Calibri" pitchFamily="34" charset="-120"/>
               </a:rPr>
-              <a:t>full of, having the quality of</a:t>
+              <a:t>full of, having quality</a:t>
             </a:r>
             <a:endParaRPr lang="en-US" sz="850" dirty="0"/>
           </a:p>
@@ -31027,7 +30697,7 @@
         </p:nvSpPr>
         <p:spPr>
           <a:xfrm>
-            <a:off x="365760" y="3182112"/>
+            <a:off x="365760" y="3273552"/>
             <a:ext cx="1371600" cy="658368"/>
           </a:xfrm>
           <a:prstGeom prst="rect">
@@ -31054,7 +30724,7 @@
         </p:nvSpPr>
         <p:spPr>
           <a:xfrm>
-            <a:off x="365760" y="3182112"/>
+            <a:off x="365760" y="3273552"/>
             <a:ext cx="1371600" cy="658368"/>
           </a:xfrm>
           <a:prstGeom prst="rect">
@@ -31093,7 +30763,7 @@
         </p:nvSpPr>
         <p:spPr>
           <a:xfrm>
-            <a:off x="1874520" y="3182112"/>
+            <a:off x="1874520" y="3273552"/>
             <a:ext cx="6903720" cy="658368"/>
           </a:xfrm>
           <a:prstGeom prst="rect">
@@ -31120,7 +30790,7 @@
         </p:nvSpPr>
         <p:spPr>
           <a:xfrm>
-            <a:off x="2999232" y="3273552"/>
+            <a:off x="2999232" y="3364992"/>
             <a:ext cx="1645920" cy="475488"/>
           </a:xfrm>
           <a:prstGeom prst="rect">
@@ -31147,7 +30817,7 @@
         </p:nvSpPr>
         <p:spPr>
           <a:xfrm>
-            <a:off x="2999232" y="3273552"/>
+            <a:off x="2999232" y="3364992"/>
             <a:ext cx="1645920" cy="475488"/>
           </a:xfrm>
           <a:prstGeom prst="rect">
@@ -31172,7 +30842,7 @@
                 <a:ea typeface="Trebuchet MS" pitchFamily="34" charset="-122"/>
                 <a:cs typeface="Trebuchet MS" pitchFamily="34" charset="-120"/>
               </a:rPr>
-              <a:t>care</a:t>
+              <a:t>play</a:t>
             </a:r>
             <a:endParaRPr lang="en-US" sz="1400" dirty="0"/>
           </a:p>
@@ -31186,7 +30856,7 @@
         </p:nvSpPr>
         <p:spPr>
           <a:xfrm>
-            <a:off x="4645152" y="3273552"/>
+            <a:off x="4645152" y="3364992"/>
             <a:ext cx="1097280" cy="475488"/>
           </a:xfrm>
           <a:prstGeom prst="rect">
@@ -31225,7 +30895,7 @@
         </p:nvSpPr>
         <p:spPr>
           <a:xfrm>
-            <a:off x="5742432" y="3273552"/>
+            <a:off x="5742432" y="3364992"/>
             <a:ext cx="1645920" cy="475488"/>
           </a:xfrm>
           <a:prstGeom prst="rect">
@@ -31252,7 +30922,7 @@
         </p:nvSpPr>
         <p:spPr>
           <a:xfrm>
-            <a:off x="5742432" y="3273552"/>
+            <a:off x="5742432" y="3364992"/>
             <a:ext cx="1645920" cy="475488"/>
           </a:xfrm>
           <a:prstGeom prst="rect">
@@ -31291,7 +30961,7 @@
         </p:nvSpPr>
         <p:spPr>
           <a:xfrm>
-            <a:off x="365760" y="4005072"/>
+            <a:off x="365760" y="4096512"/>
             <a:ext cx="1371600" cy="658368"/>
           </a:xfrm>
           <a:prstGeom prst="rect">
@@ -31318,7 +30988,7 @@
         </p:nvSpPr>
         <p:spPr>
           <a:xfrm>
-            <a:off x="365760" y="4005072"/>
+            <a:off x="365760" y="4096512"/>
             <a:ext cx="1371600" cy="658368"/>
           </a:xfrm>
           <a:prstGeom prst="rect">
@@ -31357,7 +31027,7 @@
         </p:nvSpPr>
         <p:spPr>
           <a:xfrm>
-            <a:off x="1874520" y="4005072"/>
+            <a:off x="1874520" y="4096512"/>
             <a:ext cx="6903720" cy="658368"/>
           </a:xfrm>
           <a:prstGeom prst="rect">
@@ -31384,7 +31054,7 @@
         </p:nvSpPr>
         <p:spPr>
           <a:xfrm>
-            <a:off x="2254649" y="4096512"/>
+            <a:off x="2254649" y="4187952"/>
             <a:ext cx="685800" cy="475488"/>
           </a:xfrm>
           <a:prstGeom prst="rect">
@@ -31411,7 +31081,7 @@
         </p:nvSpPr>
         <p:spPr>
           <a:xfrm>
-            <a:off x="2254649" y="4096512"/>
+            <a:off x="2254649" y="4187952"/>
             <a:ext cx="685800" cy="475488"/>
           </a:xfrm>
           <a:prstGeom prst="rect">
@@ -31436,7 +31106,7 @@
                 <a:ea typeface="Trebuchet MS" pitchFamily="34" charset="-122"/>
                 <a:cs typeface="Trebuchet MS" pitchFamily="34" charset="-120"/>
               </a:rPr>
-              <a:t>c</a:t>
+              <a:t>p</a:t>
             </a:r>
             <a:endParaRPr lang="en-US" sz="900" dirty="0"/>
           </a:p>
@@ -31450,7 +31120,7 @@
         </p:nvSpPr>
         <p:spPr>
           <a:xfrm>
-            <a:off x="3293146" y="4096512"/>
+            <a:off x="3293146" y="4187952"/>
             <a:ext cx="685800" cy="475488"/>
           </a:xfrm>
           <a:prstGeom prst="rect">
@@ -31477,7 +31147,7 @@
         </p:nvSpPr>
         <p:spPr>
           <a:xfrm>
-            <a:off x="3293146" y="4096512"/>
+            <a:off x="3293146" y="4187952"/>
             <a:ext cx="685800" cy="475488"/>
           </a:xfrm>
           <a:prstGeom prst="rect">
@@ -31502,7 +31172,7 @@
                 <a:ea typeface="Trebuchet MS" pitchFamily="34" charset="-122"/>
                 <a:cs typeface="Trebuchet MS" pitchFamily="34" charset="-120"/>
               </a:rPr>
-              <a:t>air</a:t>
+              <a:t>l</a:t>
             </a:r>
             <a:endParaRPr lang="en-US" sz="900" dirty="0"/>
           </a:p>
@@ -31516,7 +31186,7 @@
         </p:nvSpPr>
         <p:spPr>
           <a:xfrm>
-            <a:off x="4331643" y="4096512"/>
+            <a:off x="4331643" y="4187952"/>
             <a:ext cx="685800" cy="475488"/>
           </a:xfrm>
           <a:prstGeom prst="rect">
@@ -31543,7 +31213,7 @@
         </p:nvSpPr>
         <p:spPr>
           <a:xfrm>
-            <a:off x="4331643" y="4096512"/>
+            <a:off x="4331643" y="4187952"/>
             <a:ext cx="685800" cy="475488"/>
           </a:xfrm>
           <a:prstGeom prst="rect">
@@ -31568,7 +31238,7 @@
                 <a:ea typeface="Trebuchet MS" pitchFamily="34" charset="-122"/>
                 <a:cs typeface="Trebuchet MS" pitchFamily="34" charset="-120"/>
               </a:rPr>
-              <a:t>e</a:t>
+              <a:t>ay</a:t>
             </a:r>
             <a:endParaRPr lang="en-US" sz="900" dirty="0"/>
           </a:p>
@@ -31582,7 +31252,7 @@
         </p:nvSpPr>
         <p:spPr>
           <a:xfrm>
-            <a:off x="5370141" y="4096512"/>
+            <a:off x="5370141" y="4187952"/>
             <a:ext cx="685800" cy="475488"/>
           </a:xfrm>
           <a:prstGeom prst="rect">
@@ -31609,7 +31279,7 @@
         </p:nvSpPr>
         <p:spPr>
           <a:xfrm>
-            <a:off x="5370141" y="4096512"/>
+            <a:off x="5370141" y="4187952"/>
             <a:ext cx="685800" cy="475488"/>
           </a:xfrm>
           <a:prstGeom prst="rect">
@@ -31648,7 +31318,7 @@
         </p:nvSpPr>
         <p:spPr>
           <a:xfrm>
-            <a:off x="6408638" y="4096512"/>
+            <a:off x="6408638" y="4187952"/>
             <a:ext cx="685800" cy="475488"/>
           </a:xfrm>
           <a:prstGeom prst="rect">
@@ -31675,7 +31345,7 @@
         </p:nvSpPr>
         <p:spPr>
           <a:xfrm>
-            <a:off x="6408638" y="4096512"/>
+            <a:off x="6408638" y="4187952"/>
             <a:ext cx="685800" cy="475488"/>
           </a:xfrm>
           <a:prstGeom prst="rect">
@@ -31714,7 +31384,7 @@
         </p:nvSpPr>
         <p:spPr>
           <a:xfrm>
-            <a:off x="7447135" y="4096512"/>
+            <a:off x="7447135" y="4187952"/>
             <a:ext cx="685800" cy="475488"/>
           </a:xfrm>
           <a:prstGeom prst="rect">
@@ -31741,7 +31411,7 @@
         </p:nvSpPr>
         <p:spPr>
           <a:xfrm>
-            <a:off x="7447135" y="4096512"/>
+            <a:off x="7447135" y="4187952"/>
             <a:ext cx="685800" cy="475488"/>
           </a:xfrm>
           <a:prstGeom prst="rect">
@@ -34026,7 +33696,7 @@
                 <a:ea typeface="Trebuchet MS" pitchFamily="34" charset="-122"/>
                 <a:cs typeface="Trebuchet MS" pitchFamily="34" charset="-120"/>
               </a:rPr>
-              <a:t>wonder-</a:t>
+              <a:t>de-</a:t>
             </a:r>
             <a:endParaRPr lang="en-US" sz="1300" dirty="0"/>
           </a:p>
@@ -34179,7 +33849,7 @@
                 <a:ea typeface="Trebuchet MS" pitchFamily="34" charset="-122"/>
                 <a:cs typeface="Trebuchet MS" pitchFamily="34" charset="-120"/>
               </a:rPr>
-              <a:t>grace-</a:t>
+              <a:t>mis-</a:t>
             </a:r>
             <a:endParaRPr lang="en-US" sz="1300" dirty="0"/>
           </a:p>
@@ -34769,7 +34439,7 @@
                 <a:ea typeface="Trebuchet MS" pitchFamily="34" charset="-122"/>
                 <a:cs typeface="Trebuchet MS" pitchFamily="34" charset="-120"/>
               </a:rPr>
-              <a:t>colourful</a:t>
+              <a:t>wonderful</a:t>
             </a:r>
             <a:endParaRPr lang="en-US" sz="1200" dirty="0"/>
           </a:p>
@@ -34835,7 +34505,7 @@
                 <a:ea typeface="Trebuchet MS" pitchFamily="34" charset="-122"/>
                 <a:cs typeface="Trebuchet MS" pitchFamily="34" charset="-120"/>
               </a:rPr>
-              <a:t>wonderful</a:t>
+              <a:t>colourful</a:t>
             </a:r>
             <a:endParaRPr lang="en-US" sz="1200" dirty="0"/>
           </a:p>
@@ -36023,7 +35693,7 @@
                 <a:ea typeface="Calibri" pitchFamily="34" charset="-122"/>
                 <a:cs typeface="Calibri" pitchFamily="34" charset="-120"/>
               </a:rPr>
-              <a:t>1.  The suffix '-ful' can turn a noun or verb into an adjective meaning 'full of'.</a:t>
+              <a:t>1.  The suffix '-ful' can turn a noun or verb into an adjective.</a:t>
             </a:r>
             <a:endParaRPr lang="en-US" sz="1300" dirty="0"/>
           </a:p>
@@ -36162,7 +35832,7 @@
                 <a:ea typeface="Calibri" pitchFamily="34" charset="-122"/>
                 <a:cs typeface="Calibri" pitchFamily="34" charset="-120"/>
               </a:rPr>
-              <a:t>2.  The suffix '-ful' always adds two syllables to a base word.</a:t>
+              <a:t>2.  The suffix '-ful' means 'without' or 'lacking'.</a:t>
             </a:r>
             <a:endParaRPr lang="en-US" sz="1300" dirty="0"/>
           </a:p>
@@ -36301,7 +35971,7 @@
                 <a:ea typeface="Calibri" pitchFamily="34" charset="-122"/>
                 <a:cs typeface="Calibri" pitchFamily="34" charset="-120"/>
               </a:rPr>
-              <a:t>3.  The word 'hopeful' contains the base word 'hope' and the suffix '-ful'.</a:t>
+              <a:t>3.  The word 'careful' contains the suffix '-ful'.</a:t>
             </a:r>
             <a:endParaRPr lang="en-US" sz="1300" dirty="0"/>
           </a:p>
@@ -36440,7 +36110,7 @@
                 <a:ea typeface="Calibri" pitchFamily="34" charset="-122"/>
                 <a:cs typeface="Calibri" pitchFamily="34" charset="-120"/>
               </a:rPr>
-              <a:t>4.  Adding '-ful' to a word changes its meaning to suggest having a quality or being full of something.</a:t>
+              <a:t>4.  Adding '-ful' to a word usually means it has the quality of that word.</a:t>
             </a:r>
             <a:endParaRPr lang="en-US" sz="1300" dirty="0"/>
           </a:p>
@@ -36579,7 +36249,7 @@
                 <a:ea typeface="Calibri" pitchFamily="34" charset="-122"/>
                 <a:cs typeface="Calibri" pitchFamily="34" charset="-120"/>
               </a:rPr>
-              <a:t>5.  The suffix '-ful' comes from a Latin word meaning 'without'.</a:t>
+              <a:t>5.  The suffix '-ful' always makes a word mean exactly one full cup of something.</a:t>
             </a:r>
             <a:endParaRPr lang="en-US" sz="1300" dirty="0"/>
           </a:p>
@@ -37614,7 +37284,7 @@
                 <a:ea typeface="Trebuchet MS" pitchFamily="34" charset="-122"/>
                 <a:cs typeface="Trebuchet MS" pitchFamily="34" charset="-120"/>
               </a:rPr>
-              <a:t>colourful</a:t>
+              <a:t>wonderful</a:t>
             </a:r>
             <a:endParaRPr lang="en-US" sz="1300" dirty="0"/>
           </a:p>
@@ -38705,7 +38375,7 @@
                 <a:ea typeface="Trebuchet MS" pitchFamily="34" charset="-122"/>
                 <a:cs typeface="Trebuchet MS" pitchFamily="34" charset="-120"/>
               </a:rPr>
-              <a:t>wonder-</a:t>
+              <a:t>de-</a:t>
             </a:r>
             <a:endParaRPr lang="en-US" sz="1300" dirty="0"/>
           </a:p>
@@ -38858,7 +38528,7 @@
                 <a:ea typeface="Trebuchet MS" pitchFamily="34" charset="-122"/>
                 <a:cs typeface="Trebuchet MS" pitchFamily="34" charset="-120"/>
               </a:rPr>
-              <a:t>grace-</a:t>
+              <a:t>mis-</a:t>
             </a:r>
             <a:endParaRPr lang="en-US" sz="1300" dirty="0"/>
           </a:p>
@@ -39858,7 +39528,7 @@
                 <a:ea typeface="Calibri" pitchFamily="34" charset="-122"/>
                 <a:cs typeface="Calibri" pitchFamily="34" charset="-120"/>
               </a:rPr>
-              <a:t>Willing to help others or make things easier.</a:t>
+              <a:t>Ready and willing to give assistance to others.</a:t>
             </a:r>
             <a:endParaRPr lang="en-US" sz="1200" dirty="0"/>
           </a:p>
@@ -39997,7 +39667,7 @@
                 <a:ea typeface="Calibri" pitchFamily="34" charset="-122"/>
                 <a:cs typeface="Calibri" pitchFamily="34" charset="-120"/>
               </a:rPr>
-              <a:t>Giving attention to avoid mistakes or danger.</a:t>
+              <a:t>Paying close attention to avoid mistakes or danger.</a:t>
             </a:r>
             <a:endParaRPr lang="en-US" sz="1200" dirty="0"/>
           </a:p>
@@ -40136,7 +39806,7 @@
                 <a:ea typeface="Calibri" pitchFamily="34" charset="-122"/>
                 <a:cs typeface="Calibri" pitchFamily="34" charset="-120"/>
               </a:rPr>
-              <a:t>Feeling like something good might happen.</a:t>
+              <a:t>Feeling that something good is likely to happen.</a:t>
             </a:r>
             <a:endParaRPr lang="en-US" sz="1200" dirty="0"/>
           </a:p>
@@ -40275,7 +39945,7 @@
                 <a:ea typeface="Calibri" pitchFamily="34" charset="-122"/>
                 <a:cs typeface="Calibri" pitchFamily="34" charset="-120"/>
               </a:rPr>
-              <a:t>Full of fun and wanting to play.</a:t>
+              <a:t>Fond of fun and games; lively and cheerful.</a:t>
             </a:r>
             <a:endParaRPr lang="en-US" sz="1200" dirty="0"/>
           </a:p>
@@ -40414,7 +40084,7 @@
                 <a:ea typeface="Calibri" pitchFamily="34" charset="-122"/>
                 <a:cs typeface="Calibri" pitchFamily="34" charset="-120"/>
               </a:rPr>
-              <a:t>Full of bright and interesting colours.</a:t>
+              <a:t>Extremely good or impressive; causing delight.</a:t>
             </a:r>
             <a:endParaRPr lang="en-US" sz="1200" dirty="0"/>
           </a:p>
@@ -40626,7 +40296,7 @@
                 <a:ea typeface="Trebuchet MS" pitchFamily="34" charset="-122"/>
                 <a:cs typeface="Trebuchet MS" pitchFamily="34" charset="-120"/>
               </a:rPr>
-              <a:t>colourful</a:t>
+              <a:t>wonderful</a:t>
             </a:r>
             <a:endParaRPr lang="en-US" sz="1200" dirty="0"/>
           </a:p>
@@ -40692,7 +40362,7 @@
                 <a:ea typeface="Calibri" pitchFamily="34" charset="-122"/>
                 <a:cs typeface="Calibri" pitchFamily="34" charset="-120"/>
               </a:rPr>
-              <a:t>Having a lot of strength or force.</a:t>
+              <a:t>Having great strength or force.</a:t>
             </a:r>
             <a:endParaRPr lang="en-US" sz="1200" dirty="0"/>
           </a:p>
@@ -41187,7 +40857,7 @@
                 <a:ea typeface="Calibri" pitchFamily="34" charset="-122"/>
                 <a:cs typeface="Calibri" pitchFamily="34" charset="-120"/>
               </a:rPr>
-              <a:t>Mia was grateful for the colourful birthday cake her mum baked.</a:t>
+              <a:t>The helpful student showed the new child around the school.</a:t>
             </a:r>
             <a:endParaRPr lang="en-US" sz="1500" dirty="0"/>
           </a:p>
@@ -41351,7 +41021,7 @@
                 <a:ea typeface="Calibri" pitchFamily="34" charset="-122"/>
                 <a:cs typeface="Calibri" pitchFamily="34" charset="-120"/>
               </a:rPr>
-              <a:t>The powerful storm made the children careful when walking to school.</a:t>
+              <a:t>She was grateful for the kind note her teacher left on her desk.</a:t>
             </a:r>
             <a:endParaRPr lang="en-US" sz="1500" dirty="0"/>
           </a:p>
@@ -41515,7 +41185,7 @@
                 <a:ea typeface="Calibri" pitchFamily="34" charset="-122"/>
                 <a:cs typeface="Calibri" pitchFamily="34" charset="-120"/>
               </a:rPr>
-              <a:t>Our teacher gave us a helpful tip for solving the tricky maths problem.</a:t>
+              <a:t>The colourful butterfly landed gently on the flower in the garden.</a:t>
             </a:r>
             <a:endParaRPr lang="en-US" sz="1500" dirty="0"/>
           </a:p>

--- a/output/wordlabs-ful-3day.pptx
+++ b/output/wordlabs-ful-3day.pptx
@@ -6057,7 +6057,7 @@
                 <a:ea typeface="Calibri" pitchFamily="34" charset="-122"/>
                 <a:cs typeface="Calibri" pitchFamily="34" charset="-120"/>
               </a:rPr>
-              <a:t>hopeful</a:t>
+              <a:t>playful</a:t>
             </a:r>
             <a:pPr algn="l" indent="0" marL="0">
               <a:buNone/>
@@ -6071,7 +6071,7 @@
                 <a:ea typeface="Calibri" pitchFamily="34" charset="-122"/>
                 <a:cs typeface="Calibri" pitchFamily="34" charset="-120"/>
               </a:rPr>
-              <a:t> runner was </a:t>
+              <a:t> puppy was so </a:t>
             </a:r>
             <a:pPr algn="l" indent="0" marL="0">
               <a:buNone/>
@@ -6088,7 +6088,7 @@
                 <a:ea typeface="Calibri" pitchFamily="34" charset="-122"/>
                 <a:cs typeface="Calibri" pitchFamily="34" charset="-120"/>
               </a:rPr>
-              <a:t>careful</a:t>
+              <a:t>cheerful</a:t>
             </a:r>
             <a:pPr algn="l" indent="0" marL="0">
               <a:buNone/>
@@ -6102,7 +6102,7 @@
                 <a:ea typeface="Calibri" pitchFamily="34" charset="-122"/>
                 <a:cs typeface="Calibri" pitchFamily="34" charset="-120"/>
               </a:rPr>
-              <a:t> not to trip on the wet track.</a:t>
+              <a:t> that it made everyone smile.</a:t>
             </a:r>
             <a:endParaRPr lang="en-US" sz="1800" dirty="0"/>
           </a:p>
@@ -6257,7 +6257,7 @@
                 <a:ea typeface="Trebuchet MS" pitchFamily="34" charset="-122"/>
                 <a:cs typeface="Trebuchet MS" pitchFamily="34" charset="-120"/>
               </a:rPr>
-              <a:t>hopeful</a:t>
+              <a:t>playful</a:t>
             </a:r>
             <a:endParaRPr lang="en-US" sz="1400" dirty="0"/>
           </a:p>
@@ -6385,7 +6385,7 @@
                 <a:ea typeface="Trebuchet MS" pitchFamily="34" charset="-122"/>
                 <a:cs typeface="Trebuchet MS" pitchFamily="34" charset="-120"/>
               </a:rPr>
-              <a:t>careful</a:t>
+              <a:t>cheerful</a:t>
             </a:r>
             <a:endParaRPr lang="en-US" sz="1400" dirty="0"/>
           </a:p>
@@ -6855,7 +6855,7 @@
                 <a:ea typeface="Trebuchet MS" pitchFamily="34" charset="-122"/>
                 <a:cs typeface="Trebuchet MS" pitchFamily="34" charset="-120"/>
               </a:rPr>
-              <a:t>hopeful</a:t>
+              <a:t>playful</a:t>
             </a:r>
             <a:endParaRPr lang="en-US" sz="2800" dirty="0"/>
           </a:p>
@@ -7134,11 +7134,11 @@
         <p:spPr>
           <a:xfrm>
             <a:off x="365760" y="4096512"/>
-            <a:ext cx="1371600" cy="658368"/>
+            <a:ext cx="1371600" cy="804672"/>
           </a:xfrm>
           <a:prstGeom prst="rect">
             <a:avLst>
-              <a:gd name="adj" fmla="val 8333"/>
+              <a:gd name="adj" fmla="val 6818"/>
             </a:avLst>
           </a:prstGeom>
           <a:solidFill>
@@ -7161,7 +7161,7 @@
         <p:spPr>
           <a:xfrm>
             <a:off x="365760" y="4096512"/>
-            <a:ext cx="1371600" cy="658368"/>
+            <a:ext cx="1371600" cy="804672"/>
           </a:xfrm>
           <a:prstGeom prst="rect">
             <a:avLst/>
@@ -7200,11 +7200,11 @@
         <p:spPr>
           <a:xfrm>
             <a:off x="1874520" y="4096512"/>
-            <a:ext cx="6903720" cy="658368"/>
+            <a:ext cx="6903720" cy="804672"/>
           </a:xfrm>
           <a:prstGeom prst="rect">
             <a:avLst>
-              <a:gd name="adj" fmla="val 8333"/>
+              <a:gd name="adj" fmla="val 6818"/>
             </a:avLst>
           </a:prstGeom>
           <a:solidFill>
@@ -7227,7 +7227,7 @@
         <p:spPr>
           <a:xfrm>
             <a:off x="1874520" y="4096512"/>
-            <a:ext cx="6903720" cy="658368"/>
+            <a:ext cx="6903720" cy="804672"/>
           </a:xfrm>
           <a:prstGeom prst="rect">
             <a:avLst/>
@@ -7682,7 +7682,7 @@
                 <a:ea typeface="Trebuchet MS" pitchFamily="34" charset="-122"/>
                 <a:cs typeface="Trebuchet MS" pitchFamily="34" charset="-120"/>
               </a:rPr>
-              <a:t>hopeful</a:t>
+              <a:t>playful</a:t>
             </a:r>
             <a:endParaRPr lang="en-US" sz="2800" dirty="0"/>
           </a:p>
@@ -7821,7 +7821,7 @@
                 <a:ea typeface="Trebuchet MS" pitchFamily="34" charset="-122"/>
                 <a:cs typeface="Trebuchet MS" pitchFamily="34" charset="-120"/>
               </a:rPr>
-              <a:t>hope</a:t>
+              <a:t>play</a:t>
             </a:r>
             <a:endParaRPr lang="en-US" sz="1300" dirty="0"/>
           </a:p>
@@ -7860,7 +7860,7 @@
                 <a:ea typeface="Calibri" pitchFamily="34" charset="-122"/>
                 <a:cs typeface="Calibri" pitchFamily="34" charset="-120"/>
               </a:rPr>
-              <a:t>to wish for something</a:t>
+              <a:t>to play, have fun</a:t>
             </a:r>
             <a:endParaRPr lang="en-US" sz="850" dirty="0"/>
           </a:p>
@@ -8119,11 +8119,11 @@
         <p:spPr>
           <a:xfrm>
             <a:off x="365760" y="4096512"/>
-            <a:ext cx="1371600" cy="658368"/>
+            <a:ext cx="1371600" cy="804672"/>
           </a:xfrm>
           <a:prstGeom prst="rect">
             <a:avLst>
-              <a:gd name="adj" fmla="val 8333"/>
+              <a:gd name="adj" fmla="val 6818"/>
             </a:avLst>
           </a:prstGeom>
           <a:solidFill>
@@ -8146,7 +8146,7 @@
         <p:spPr>
           <a:xfrm>
             <a:off x="365760" y="4096512"/>
-            <a:ext cx="1371600" cy="658368"/>
+            <a:ext cx="1371600" cy="804672"/>
           </a:xfrm>
           <a:prstGeom prst="rect">
             <a:avLst/>
@@ -8185,11 +8185,11 @@
         <p:spPr>
           <a:xfrm>
             <a:off x="1874520" y="4096512"/>
-            <a:ext cx="6903720" cy="658368"/>
+            <a:ext cx="6903720" cy="804672"/>
           </a:xfrm>
           <a:prstGeom prst="rect">
             <a:avLst>
-              <a:gd name="adj" fmla="val 8333"/>
+              <a:gd name="adj" fmla="val 6818"/>
             </a:avLst>
           </a:prstGeom>
           <a:solidFill>
@@ -8212,7 +8212,7 @@
         <p:spPr>
           <a:xfrm>
             <a:off x="1874520" y="4096512"/>
-            <a:ext cx="6903720" cy="658368"/>
+            <a:ext cx="6903720" cy="804672"/>
           </a:xfrm>
           <a:prstGeom prst="rect">
             <a:avLst/>
@@ -8667,7 +8667,7 @@
                 <a:ea typeface="Trebuchet MS" pitchFamily="34" charset="-122"/>
                 <a:cs typeface="Trebuchet MS" pitchFamily="34" charset="-120"/>
               </a:rPr>
-              <a:t>hopeful</a:t>
+              <a:t>playful</a:t>
             </a:r>
             <a:endParaRPr lang="en-US" sz="2800" dirty="0"/>
           </a:p>
@@ -8806,7 +8806,7 @@
                 <a:ea typeface="Trebuchet MS" pitchFamily="34" charset="-122"/>
                 <a:cs typeface="Trebuchet MS" pitchFamily="34" charset="-120"/>
               </a:rPr>
-              <a:t>hope</a:t>
+              <a:t>play</a:t>
             </a:r>
             <a:endParaRPr lang="en-US" sz="1300" dirty="0"/>
           </a:p>
@@ -8845,7 +8845,7 @@
                 <a:ea typeface="Calibri" pitchFamily="34" charset="-122"/>
                 <a:cs typeface="Calibri" pitchFamily="34" charset="-120"/>
               </a:rPr>
-              <a:t>to wish for something</a:t>
+              <a:t>to play, have fun</a:t>
             </a:r>
             <a:endParaRPr lang="en-US" sz="850" dirty="0"/>
           </a:p>
@@ -9116,7 +9116,7 @@
                 <a:ea typeface="Trebuchet MS" pitchFamily="34" charset="-122"/>
                 <a:cs typeface="Trebuchet MS" pitchFamily="34" charset="-120"/>
               </a:rPr>
-              <a:t>hope</a:t>
+              <a:t>play</a:t>
             </a:r>
             <a:endParaRPr lang="en-US" sz="1400" dirty="0"/>
           </a:p>
@@ -9236,11 +9236,11 @@
         <p:spPr>
           <a:xfrm>
             <a:off x="365760" y="4096512"/>
-            <a:ext cx="1371600" cy="658368"/>
+            <a:ext cx="1371600" cy="804672"/>
           </a:xfrm>
           <a:prstGeom prst="rect">
             <a:avLst>
-              <a:gd name="adj" fmla="val 8333"/>
+              <a:gd name="adj" fmla="val 6818"/>
             </a:avLst>
           </a:prstGeom>
           <a:solidFill>
@@ -9263,7 +9263,7 @@
         <p:spPr>
           <a:xfrm>
             <a:off x="365760" y="4096512"/>
-            <a:ext cx="1371600" cy="658368"/>
+            <a:ext cx="1371600" cy="804672"/>
           </a:xfrm>
           <a:prstGeom prst="rect">
             <a:avLst/>
@@ -9302,11 +9302,11 @@
         <p:spPr>
           <a:xfrm>
             <a:off x="1874520" y="4096512"/>
-            <a:ext cx="6903720" cy="658368"/>
+            <a:ext cx="6903720" cy="804672"/>
           </a:xfrm>
           <a:prstGeom prst="rect">
             <a:avLst>
-              <a:gd name="adj" fmla="val 8333"/>
+              <a:gd name="adj" fmla="val 6818"/>
             </a:avLst>
           </a:prstGeom>
           <a:solidFill>
@@ -9329,7 +9329,7 @@
         <p:spPr>
           <a:xfrm>
             <a:off x="1874520" y="4096512"/>
-            <a:ext cx="6903720" cy="658368"/>
+            <a:ext cx="6903720" cy="804672"/>
           </a:xfrm>
           <a:prstGeom prst="rect">
             <a:avLst/>
@@ -9784,7 +9784,7 @@
                 <a:ea typeface="Trebuchet MS" pitchFamily="34" charset="-122"/>
                 <a:cs typeface="Trebuchet MS" pitchFamily="34" charset="-120"/>
               </a:rPr>
-              <a:t>hopeful</a:t>
+              <a:t>playful</a:t>
             </a:r>
             <a:endParaRPr lang="en-US" sz="2800" dirty="0"/>
           </a:p>
@@ -9923,7 +9923,7 @@
                 <a:ea typeface="Trebuchet MS" pitchFamily="34" charset="-122"/>
                 <a:cs typeface="Trebuchet MS" pitchFamily="34" charset="-120"/>
               </a:rPr>
-              <a:t>hope</a:t>
+              <a:t>play</a:t>
             </a:r>
             <a:endParaRPr lang="en-US" sz="1300" dirty="0"/>
           </a:p>
@@ -9962,7 +9962,7 @@
                 <a:ea typeface="Calibri" pitchFamily="34" charset="-122"/>
                 <a:cs typeface="Calibri" pitchFamily="34" charset="-120"/>
               </a:rPr>
-              <a:t>to wish for something</a:t>
+              <a:t>to play, have fun</a:t>
             </a:r>
             <a:endParaRPr lang="en-US" sz="850" dirty="0"/>
           </a:p>
@@ -10233,7 +10233,7 @@
                 <a:ea typeface="Trebuchet MS" pitchFamily="34" charset="-122"/>
                 <a:cs typeface="Trebuchet MS" pitchFamily="34" charset="-120"/>
               </a:rPr>
-              <a:t>hope</a:t>
+              <a:t>play</a:t>
             </a:r>
             <a:endParaRPr lang="en-US" sz="1400" dirty="0"/>
           </a:p>
@@ -10353,7 +10353,73 @@
         <p:spPr>
           <a:xfrm>
             <a:off x="365760" y="4096512"/>
-            <a:ext cx="1371600" cy="658368"/>
+            <a:ext cx="1371600" cy="804672"/>
+          </a:xfrm>
+          <a:prstGeom prst="rect">
+            <a:avLst>
+              <a:gd name="adj" fmla="val 6818"/>
+            </a:avLst>
+          </a:prstGeom>
+          <a:solidFill>
+            <a:srgbClr val="E2E8F0"/>
+          </a:solidFill>
+          <a:ln w="12700">
+            <a:solidFill>
+              <a:srgbClr val="E2E8F0"/>
+            </a:solidFill>
+            <a:prstDash val="solid"/>
+          </a:ln>
+        </p:spPr>
+      </p:sp>
+      <p:sp>
+        <p:nvSpPr>
+          <p:cNvPr id="31" name="Text 29"/>
+          <p:cNvSpPr/>
+          <p:nvPr/>
+        </p:nvSpPr>
+        <p:spPr>
+          <a:xfrm>
+            <a:off x="365760" y="4096512"/>
+            <a:ext cx="1371600" cy="804672"/>
+          </a:xfrm>
+          <a:prstGeom prst="rect">
+            <a:avLst/>
+          </a:prstGeom>
+          <a:noFill/>
+          <a:ln/>
+        </p:spPr>
+        <p:txBody>
+          <a:bodyPr wrap="square" lIns="0" tIns="0" rIns="0" bIns="0" rtlCol="0" anchor="ctr"/>
+          <a:lstStyle/>
+          <a:p>
+            <a:pPr algn="ctr" indent="0" marL="0">
+              <a:buNone/>
+            </a:pPr>
+            <a:r>
+              <a:rPr lang="en-US" sz="1100" b="1" dirty="0">
+                <a:solidFill>
+                  <a:srgbClr val="475569"/>
+                </a:solidFill>
+                <a:latin typeface="Trebuchet MS" pitchFamily="34" charset="0"/>
+                <a:ea typeface="Trebuchet MS" pitchFamily="34" charset="-122"/>
+                <a:cs typeface="Trebuchet MS" pitchFamily="34" charset="-120"/>
+              </a:rPr>
+              <a:t>Phonemes</a:t>
+            </a:r>
+            <a:endParaRPr lang="en-US" sz="1100" dirty="0"/>
+          </a:p>
+        </p:txBody>
+      </p:sp>
+      <p:sp>
+        <p:nvSpPr>
+          <p:cNvPr id="32" name="Shape 30"/>
+          <p:cNvSpPr/>
+          <p:nvPr/>
+        </p:nvSpPr>
+        <p:spPr>
+          <a:xfrm>
+            <a:off x="1874520" y="4096512"/>
+            <a:ext cx="6903720" cy="658368"/>
           </a:xfrm>
           <a:prstGeom prst="rect">
             <a:avLst>
@@ -10361,26 +10427,53 @@
             </a:avLst>
           </a:prstGeom>
           <a:solidFill>
-            <a:srgbClr val="E2E8F0"/>
-          </a:solidFill>
-          <a:ln w="12700">
-            <a:solidFill>
-              <a:srgbClr val="E2E8F0"/>
-            </a:solidFill>
-            <a:prstDash val="solid"/>
-          </a:ln>
-        </p:spPr>
-      </p:sp>
-      <p:sp>
-        <p:nvSpPr>
-          <p:cNvPr id="31" name="Text 29"/>
-          <p:cNvSpPr/>
-          <p:nvPr/>
-        </p:nvSpPr>
-        <p:spPr>
-          <a:xfrm>
-            <a:off x="365760" y="4096512"/>
-            <a:ext cx="1371600" cy="658368"/>
+            <a:srgbClr val="FCE7F3"/>
+          </a:solidFill>
+          <a:ln w="12700">
+            <a:solidFill>
+              <a:srgbClr val="DB2777"/>
+            </a:solidFill>
+            <a:prstDash val="solid"/>
+          </a:ln>
+        </p:spPr>
+      </p:sp>
+      <p:sp>
+        <p:nvSpPr>
+          <p:cNvPr id="33" name="Shape 31"/>
+          <p:cNvSpPr/>
+          <p:nvPr/>
+        </p:nvSpPr>
+        <p:spPr>
+          <a:xfrm>
+            <a:off x="2427732" y="4169664"/>
+            <a:ext cx="685800" cy="475488"/>
+          </a:xfrm>
+          <a:prstGeom prst="rect">
+            <a:avLst>
+              <a:gd name="adj" fmla="val 7692"/>
+            </a:avLst>
+          </a:prstGeom>
+          <a:solidFill>
+            <a:srgbClr val="FFFFFF"/>
+          </a:solidFill>
+          <a:ln w="12700">
+            <a:solidFill>
+              <a:srgbClr val="DB2777"/>
+            </a:solidFill>
+            <a:prstDash val="solid"/>
+          </a:ln>
+        </p:spPr>
+      </p:sp>
+      <p:sp>
+        <p:nvSpPr>
+          <p:cNvPr id="34" name="Text 32"/>
+          <p:cNvSpPr/>
+          <p:nvPr/>
+        </p:nvSpPr>
+        <p:spPr>
+          <a:xfrm>
+            <a:off x="2427732" y="4169664"/>
+            <a:ext cx="685800" cy="475488"/>
           </a:xfrm>
           <a:prstGeom prst="rect">
             <a:avLst/>
@@ -10396,56 +10489,29 @@
               <a:buNone/>
             </a:pPr>
             <a:r>
-              <a:rPr lang="en-US" sz="1100" b="1" dirty="0">
-                <a:solidFill>
-                  <a:srgbClr val="475569"/>
+              <a:rPr lang="en-US" sz="900" b="1" dirty="0">
+                <a:solidFill>
+                  <a:srgbClr val="9D174D"/>
                 </a:solidFill>
                 <a:latin typeface="Trebuchet MS" pitchFamily="34" charset="0"/>
                 <a:ea typeface="Trebuchet MS" pitchFamily="34" charset="-122"/>
                 <a:cs typeface="Trebuchet MS" pitchFamily="34" charset="-120"/>
               </a:rPr>
-              <a:t>Phonemes</a:t>
-            </a:r>
-            <a:endParaRPr lang="en-US" sz="1100" dirty="0"/>
-          </a:p>
-        </p:txBody>
-      </p:sp>
-      <p:sp>
-        <p:nvSpPr>
-          <p:cNvPr id="32" name="Shape 30"/>
-          <p:cNvSpPr/>
-          <p:nvPr/>
-        </p:nvSpPr>
-        <p:spPr>
-          <a:xfrm>
-            <a:off x="1874520" y="4096512"/>
-            <a:ext cx="6903720" cy="658368"/>
-          </a:xfrm>
-          <a:prstGeom prst="rect">
-            <a:avLst>
-              <a:gd name="adj" fmla="val 8333"/>
-            </a:avLst>
-          </a:prstGeom>
-          <a:solidFill>
-            <a:srgbClr val="FCE7F3"/>
-          </a:solidFill>
-          <a:ln w="12700">
-            <a:solidFill>
-              <a:srgbClr val="DB2777"/>
-            </a:solidFill>
-            <a:prstDash val="solid"/>
-          </a:ln>
-        </p:spPr>
-      </p:sp>
-      <p:sp>
-        <p:nvSpPr>
-          <p:cNvPr id="33" name="Shape 31"/>
-          <p:cNvSpPr/>
-          <p:nvPr/>
-        </p:nvSpPr>
-        <p:spPr>
-          <a:xfrm>
-            <a:off x="2124837" y="4187952"/>
+              <a:t>pl</a:t>
+            </a:r>
+            <a:endParaRPr lang="en-US" sz="900" dirty="0"/>
+          </a:p>
+        </p:txBody>
+      </p:sp>
+      <p:sp>
+        <p:nvSpPr>
+          <p:cNvPr id="35" name="Shape 33"/>
+          <p:cNvSpPr/>
+          <p:nvPr/>
+        </p:nvSpPr>
+        <p:spPr>
+          <a:xfrm>
+            <a:off x="3639312" y="4169664"/>
             <a:ext cx="685800" cy="475488"/>
           </a:xfrm>
           <a:prstGeom prst="rect">
@@ -10466,13 +10532,13 @@
       </p:sp>
       <p:sp>
         <p:nvSpPr>
-          <p:cNvPr id="34" name="Text 32"/>
-          <p:cNvSpPr/>
-          <p:nvPr/>
-        </p:nvSpPr>
-        <p:spPr>
-          <a:xfrm>
-            <a:off x="2124837" y="4187952"/>
+          <p:cNvPr id="36" name="Text 34"/>
+          <p:cNvSpPr/>
+          <p:nvPr/>
+        </p:nvSpPr>
+        <p:spPr>
+          <a:xfrm>
+            <a:off x="3639312" y="4169664"/>
             <a:ext cx="685800" cy="475488"/>
           </a:xfrm>
           <a:prstGeom prst="rect">
@@ -10497,7 +10563,7 @@
                 <a:ea typeface="Trebuchet MS" pitchFamily="34" charset="-122"/>
                 <a:cs typeface="Trebuchet MS" pitchFamily="34" charset="-120"/>
               </a:rPr>
-              <a:t>h</a:t>
+              <a:t>ay</a:t>
             </a:r>
             <a:endParaRPr lang="en-US" sz="900" dirty="0"/>
           </a:p>
@@ -10505,13 +10571,13 @@
       </p:sp>
       <p:sp>
         <p:nvSpPr>
-          <p:cNvPr id="35" name="Shape 33"/>
-          <p:cNvSpPr/>
-          <p:nvPr/>
-        </p:nvSpPr>
-        <p:spPr>
-          <a:xfrm>
-            <a:off x="3033522" y="4187952"/>
+          <p:cNvPr id="37" name="Shape 35"/>
+          <p:cNvSpPr/>
+          <p:nvPr/>
+        </p:nvSpPr>
+        <p:spPr>
+          <a:xfrm>
+            <a:off x="4850892" y="4169664"/>
             <a:ext cx="685800" cy="475488"/>
           </a:xfrm>
           <a:prstGeom prst="rect">
@@ -10532,13 +10598,13 @@
       </p:sp>
       <p:sp>
         <p:nvSpPr>
-          <p:cNvPr id="36" name="Text 34"/>
-          <p:cNvSpPr/>
-          <p:nvPr/>
-        </p:nvSpPr>
-        <p:spPr>
-          <a:xfrm>
-            <a:off x="3033522" y="4187952"/>
+          <p:cNvPr id="38" name="Text 36"/>
+          <p:cNvSpPr/>
+          <p:nvPr/>
+        </p:nvSpPr>
+        <p:spPr>
+          <a:xfrm>
+            <a:off x="4850892" y="4169664"/>
             <a:ext cx="685800" cy="475488"/>
           </a:xfrm>
           <a:prstGeom prst="rect">
@@ -10563,7 +10629,7 @@
                 <a:ea typeface="Trebuchet MS" pitchFamily="34" charset="-122"/>
                 <a:cs typeface="Trebuchet MS" pitchFamily="34" charset="-120"/>
               </a:rPr>
-              <a:t>o</a:t>
+              <a:t>f</a:t>
             </a:r>
             <a:endParaRPr lang="en-US" sz="900" dirty="0"/>
           </a:p>
@@ -10571,13 +10637,13 @@
       </p:sp>
       <p:sp>
         <p:nvSpPr>
-          <p:cNvPr id="37" name="Shape 35"/>
-          <p:cNvSpPr/>
-          <p:nvPr/>
-        </p:nvSpPr>
-        <p:spPr>
-          <a:xfrm>
-            <a:off x="3942207" y="4187952"/>
+          <p:cNvPr id="39" name="Shape 37"/>
+          <p:cNvSpPr/>
+          <p:nvPr/>
+        </p:nvSpPr>
+        <p:spPr>
+          <a:xfrm>
+            <a:off x="6062472" y="4169664"/>
             <a:ext cx="685800" cy="475488"/>
           </a:xfrm>
           <a:prstGeom prst="rect">
@@ -10598,13 +10664,13 @@
       </p:sp>
       <p:sp>
         <p:nvSpPr>
-          <p:cNvPr id="38" name="Text 36"/>
-          <p:cNvSpPr/>
-          <p:nvPr/>
-        </p:nvSpPr>
-        <p:spPr>
-          <a:xfrm>
-            <a:off x="3942207" y="4187952"/>
+          <p:cNvPr id="40" name="Text 38"/>
+          <p:cNvSpPr/>
+          <p:nvPr/>
+        </p:nvSpPr>
+        <p:spPr>
+          <a:xfrm>
+            <a:off x="6062472" y="4169664"/>
             <a:ext cx="685800" cy="475488"/>
           </a:xfrm>
           <a:prstGeom prst="rect">
@@ -10629,7 +10695,7 @@
                 <a:ea typeface="Trebuchet MS" pitchFamily="34" charset="-122"/>
                 <a:cs typeface="Trebuchet MS" pitchFamily="34" charset="-120"/>
               </a:rPr>
-              <a:t>p</a:t>
+              <a:t>u</a:t>
             </a:r>
             <a:endParaRPr lang="en-US" sz="900" dirty="0"/>
           </a:p>
@@ -10637,13 +10703,13 @@
       </p:sp>
       <p:sp>
         <p:nvSpPr>
-          <p:cNvPr id="39" name="Shape 37"/>
-          <p:cNvSpPr/>
-          <p:nvPr/>
-        </p:nvSpPr>
-        <p:spPr>
-          <a:xfrm>
-            <a:off x="4850892" y="4187952"/>
+          <p:cNvPr id="41" name="Shape 39"/>
+          <p:cNvSpPr/>
+          <p:nvPr/>
+        </p:nvSpPr>
+        <p:spPr>
+          <a:xfrm>
+            <a:off x="7274052" y="4169664"/>
             <a:ext cx="685800" cy="475488"/>
           </a:xfrm>
           <a:prstGeom prst="rect">
@@ -10664,211 +10730,13 @@
       </p:sp>
       <p:sp>
         <p:nvSpPr>
-          <p:cNvPr id="40" name="Text 38"/>
-          <p:cNvSpPr/>
-          <p:nvPr/>
-        </p:nvSpPr>
-        <p:spPr>
-          <a:xfrm>
-            <a:off x="4850892" y="4187952"/>
-            <a:ext cx="685800" cy="475488"/>
-          </a:xfrm>
-          <a:prstGeom prst="rect">
-            <a:avLst/>
-          </a:prstGeom>
-          <a:noFill/>
-          <a:ln/>
-        </p:spPr>
-        <p:txBody>
-          <a:bodyPr wrap="square" lIns="0" tIns="0" rIns="0" bIns="0" rtlCol="0" anchor="ctr"/>
-          <a:lstStyle/>
-          <a:p>
-            <a:pPr algn="ctr" indent="0" marL="0">
-              <a:buNone/>
-            </a:pPr>
-            <a:r>
-              <a:rPr lang="en-US" sz="900" b="1" dirty="0">
-                <a:solidFill>
-                  <a:srgbClr val="9D174D"/>
-                </a:solidFill>
-                <a:latin typeface="Trebuchet MS" pitchFamily="34" charset="0"/>
-                <a:ea typeface="Trebuchet MS" pitchFamily="34" charset="-122"/>
-                <a:cs typeface="Trebuchet MS" pitchFamily="34" charset="-120"/>
-              </a:rPr>
-              <a:t>e</a:t>
-            </a:r>
-            <a:endParaRPr lang="en-US" sz="900" dirty="0"/>
-          </a:p>
-        </p:txBody>
-      </p:sp>
-      <p:sp>
-        <p:nvSpPr>
-          <p:cNvPr id="41" name="Shape 39"/>
-          <p:cNvSpPr/>
-          <p:nvPr/>
-        </p:nvSpPr>
-        <p:spPr>
-          <a:xfrm>
-            <a:off x="5759577" y="4187952"/>
-            <a:ext cx="685800" cy="475488"/>
-          </a:xfrm>
-          <a:prstGeom prst="rect">
-            <a:avLst>
-              <a:gd name="adj" fmla="val 7692"/>
-            </a:avLst>
-          </a:prstGeom>
-          <a:solidFill>
-            <a:srgbClr val="FFFFFF"/>
-          </a:solidFill>
-          <a:ln w="12700">
-            <a:solidFill>
-              <a:srgbClr val="DB2777"/>
-            </a:solidFill>
-            <a:prstDash val="solid"/>
-          </a:ln>
-        </p:spPr>
-      </p:sp>
-      <p:sp>
-        <p:nvSpPr>
           <p:cNvPr id="42" name="Text 40"/>
           <p:cNvSpPr/>
           <p:nvPr/>
         </p:nvSpPr>
         <p:spPr>
           <a:xfrm>
-            <a:off x="5759577" y="4187952"/>
-            <a:ext cx="685800" cy="475488"/>
-          </a:xfrm>
-          <a:prstGeom prst="rect">
-            <a:avLst/>
-          </a:prstGeom>
-          <a:noFill/>
-          <a:ln/>
-        </p:spPr>
-        <p:txBody>
-          <a:bodyPr wrap="square" lIns="0" tIns="0" rIns="0" bIns="0" rtlCol="0" anchor="ctr"/>
-          <a:lstStyle/>
-          <a:p>
-            <a:pPr algn="ctr" indent="0" marL="0">
-              <a:buNone/>
-            </a:pPr>
-            <a:r>
-              <a:rPr lang="en-US" sz="900" b="1" dirty="0">
-                <a:solidFill>
-                  <a:srgbClr val="9D174D"/>
-                </a:solidFill>
-                <a:latin typeface="Trebuchet MS" pitchFamily="34" charset="0"/>
-                <a:ea typeface="Trebuchet MS" pitchFamily="34" charset="-122"/>
-                <a:cs typeface="Trebuchet MS" pitchFamily="34" charset="-120"/>
-              </a:rPr>
-              <a:t>f</a:t>
-            </a:r>
-            <a:endParaRPr lang="en-US" sz="900" dirty="0"/>
-          </a:p>
-        </p:txBody>
-      </p:sp>
-      <p:sp>
-        <p:nvSpPr>
-          <p:cNvPr id="43" name="Shape 41"/>
-          <p:cNvSpPr/>
-          <p:nvPr/>
-        </p:nvSpPr>
-        <p:spPr>
-          <a:xfrm>
-            <a:off x="6668262" y="4187952"/>
-            <a:ext cx="685800" cy="475488"/>
-          </a:xfrm>
-          <a:prstGeom prst="rect">
-            <a:avLst>
-              <a:gd name="adj" fmla="val 7692"/>
-            </a:avLst>
-          </a:prstGeom>
-          <a:solidFill>
-            <a:srgbClr val="FFFFFF"/>
-          </a:solidFill>
-          <a:ln w="12700">
-            <a:solidFill>
-              <a:srgbClr val="DB2777"/>
-            </a:solidFill>
-            <a:prstDash val="solid"/>
-          </a:ln>
-        </p:spPr>
-      </p:sp>
-      <p:sp>
-        <p:nvSpPr>
-          <p:cNvPr id="44" name="Text 42"/>
-          <p:cNvSpPr/>
-          <p:nvPr/>
-        </p:nvSpPr>
-        <p:spPr>
-          <a:xfrm>
-            <a:off x="6668262" y="4187952"/>
-            <a:ext cx="685800" cy="475488"/>
-          </a:xfrm>
-          <a:prstGeom prst="rect">
-            <a:avLst/>
-          </a:prstGeom>
-          <a:noFill/>
-          <a:ln/>
-        </p:spPr>
-        <p:txBody>
-          <a:bodyPr wrap="square" lIns="0" tIns="0" rIns="0" bIns="0" rtlCol="0" anchor="ctr"/>
-          <a:lstStyle/>
-          <a:p>
-            <a:pPr algn="ctr" indent="0" marL="0">
-              <a:buNone/>
-            </a:pPr>
-            <a:r>
-              <a:rPr lang="en-US" sz="900" b="1" dirty="0">
-                <a:solidFill>
-                  <a:srgbClr val="9D174D"/>
-                </a:solidFill>
-                <a:latin typeface="Trebuchet MS" pitchFamily="34" charset="0"/>
-                <a:ea typeface="Trebuchet MS" pitchFamily="34" charset="-122"/>
-                <a:cs typeface="Trebuchet MS" pitchFamily="34" charset="-120"/>
-              </a:rPr>
-              <a:t>u</a:t>
-            </a:r>
-            <a:endParaRPr lang="en-US" sz="900" dirty="0"/>
-          </a:p>
-        </p:txBody>
-      </p:sp>
-      <p:sp>
-        <p:nvSpPr>
-          <p:cNvPr id="45" name="Shape 43"/>
-          <p:cNvSpPr/>
-          <p:nvPr/>
-        </p:nvSpPr>
-        <p:spPr>
-          <a:xfrm>
-            <a:off x="7576947" y="4187952"/>
-            <a:ext cx="685800" cy="475488"/>
-          </a:xfrm>
-          <a:prstGeom prst="rect">
-            <a:avLst>
-              <a:gd name="adj" fmla="val 7692"/>
-            </a:avLst>
-          </a:prstGeom>
-          <a:solidFill>
-            <a:srgbClr val="FFFFFF"/>
-          </a:solidFill>
-          <a:ln w="12700">
-            <a:solidFill>
-              <a:srgbClr val="DB2777"/>
-            </a:solidFill>
-            <a:prstDash val="solid"/>
-          </a:ln>
-        </p:spPr>
-      </p:sp>
-      <p:sp>
-        <p:nvSpPr>
-          <p:cNvPr id="46" name="Text 44"/>
-          <p:cNvSpPr/>
-          <p:nvPr/>
-        </p:nvSpPr>
-        <p:spPr>
-          <a:xfrm>
-            <a:off x="7576947" y="4187952"/>
+            <a:off x="7274052" y="4169664"/>
             <a:ext cx="685800" cy="475488"/>
           </a:xfrm>
           <a:prstGeom prst="rect">
@@ -11324,7 +11192,7 @@
                 <a:ea typeface="Trebuchet MS" pitchFamily="34" charset="-122"/>
                 <a:cs typeface="Trebuchet MS" pitchFamily="34" charset="-120"/>
               </a:rPr>
-              <a:t>careful</a:t>
+              <a:t>cheerful</a:t>
             </a:r>
             <a:endParaRPr lang="en-US" sz="2800" dirty="0"/>
           </a:p>
@@ -11603,11 +11471,11 @@
         <p:spPr>
           <a:xfrm>
             <a:off x="365760" y="4096512"/>
-            <a:ext cx="1371600" cy="658368"/>
+            <a:ext cx="1371600" cy="804672"/>
           </a:xfrm>
           <a:prstGeom prst="rect">
             <a:avLst>
-              <a:gd name="adj" fmla="val 8333"/>
+              <a:gd name="adj" fmla="val 6818"/>
             </a:avLst>
           </a:prstGeom>
           <a:solidFill>
@@ -11630,7 +11498,7 @@
         <p:spPr>
           <a:xfrm>
             <a:off x="365760" y="4096512"/>
-            <a:ext cx="1371600" cy="658368"/>
+            <a:ext cx="1371600" cy="804672"/>
           </a:xfrm>
           <a:prstGeom prst="rect">
             <a:avLst/>
@@ -11669,11 +11537,11 @@
         <p:spPr>
           <a:xfrm>
             <a:off x="1874520" y="4096512"/>
-            <a:ext cx="6903720" cy="658368"/>
+            <a:ext cx="6903720" cy="804672"/>
           </a:xfrm>
           <a:prstGeom prst="rect">
             <a:avLst>
-              <a:gd name="adj" fmla="val 8333"/>
+              <a:gd name="adj" fmla="val 6818"/>
             </a:avLst>
           </a:prstGeom>
           <a:solidFill>
@@ -11696,7 +11564,7 @@
         <p:spPr>
           <a:xfrm>
             <a:off x="1874520" y="4096512"/>
-            <a:ext cx="6903720" cy="658368"/>
+            <a:ext cx="6903720" cy="804672"/>
           </a:xfrm>
           <a:prstGeom prst="rect">
             <a:avLst/>
@@ -12151,7 +12019,7 @@
                 <a:ea typeface="Trebuchet MS" pitchFamily="34" charset="-122"/>
                 <a:cs typeface="Trebuchet MS" pitchFamily="34" charset="-120"/>
               </a:rPr>
-              <a:t>careful</a:t>
+              <a:t>cheerful</a:t>
             </a:r>
             <a:endParaRPr lang="en-US" sz="2800" dirty="0"/>
           </a:p>
@@ -12290,7 +12158,7 @@
                 <a:ea typeface="Trebuchet MS" pitchFamily="34" charset="-122"/>
                 <a:cs typeface="Trebuchet MS" pitchFamily="34" charset="-120"/>
               </a:rPr>
-              <a:t>care</a:t>
+              <a:t>cheer</a:t>
             </a:r>
             <a:endParaRPr lang="en-US" sz="1300" dirty="0"/>
           </a:p>
@@ -12329,7 +12197,7 @@
                 <a:ea typeface="Calibri" pitchFamily="34" charset="-122"/>
                 <a:cs typeface="Calibri" pitchFamily="34" charset="-120"/>
               </a:rPr>
-              <a:t>attention, concern</a:t>
+              <a:t>happiness, joy</a:t>
             </a:r>
             <a:endParaRPr lang="en-US" sz="850" dirty="0"/>
           </a:p>
@@ -12588,11 +12456,11 @@
         <p:spPr>
           <a:xfrm>
             <a:off x="365760" y="4096512"/>
-            <a:ext cx="1371600" cy="658368"/>
+            <a:ext cx="1371600" cy="804672"/>
           </a:xfrm>
           <a:prstGeom prst="rect">
             <a:avLst>
-              <a:gd name="adj" fmla="val 8333"/>
+              <a:gd name="adj" fmla="val 6818"/>
             </a:avLst>
           </a:prstGeom>
           <a:solidFill>
@@ -12615,7 +12483,7 @@
         <p:spPr>
           <a:xfrm>
             <a:off x="365760" y="4096512"/>
-            <a:ext cx="1371600" cy="658368"/>
+            <a:ext cx="1371600" cy="804672"/>
           </a:xfrm>
           <a:prstGeom prst="rect">
             <a:avLst/>
@@ -12654,11 +12522,11 @@
         <p:spPr>
           <a:xfrm>
             <a:off x="1874520" y="4096512"/>
-            <a:ext cx="6903720" cy="658368"/>
+            <a:ext cx="6903720" cy="804672"/>
           </a:xfrm>
           <a:prstGeom prst="rect">
             <a:avLst>
-              <a:gd name="adj" fmla="val 8333"/>
+              <a:gd name="adj" fmla="val 6818"/>
             </a:avLst>
           </a:prstGeom>
           <a:solidFill>
@@ -12681,7 +12549,7 @@
         <p:spPr>
           <a:xfrm>
             <a:off x="1874520" y="4096512"/>
-            <a:ext cx="6903720" cy="658368"/>
+            <a:ext cx="6903720" cy="804672"/>
           </a:xfrm>
           <a:prstGeom prst="rect">
             <a:avLst/>
@@ -13136,7 +13004,7 @@
                 <a:ea typeface="Trebuchet MS" pitchFamily="34" charset="-122"/>
                 <a:cs typeface="Trebuchet MS" pitchFamily="34" charset="-120"/>
               </a:rPr>
-              <a:t>careful</a:t>
+              <a:t>cheerful</a:t>
             </a:r>
             <a:endParaRPr lang="en-US" sz="2800" dirty="0"/>
           </a:p>
@@ -13275,7 +13143,7 @@
                 <a:ea typeface="Trebuchet MS" pitchFamily="34" charset="-122"/>
                 <a:cs typeface="Trebuchet MS" pitchFamily="34" charset="-120"/>
               </a:rPr>
-              <a:t>care</a:t>
+              <a:t>cheer</a:t>
             </a:r>
             <a:endParaRPr lang="en-US" sz="1300" dirty="0"/>
           </a:p>
@@ -13314,7 +13182,7 @@
                 <a:ea typeface="Calibri" pitchFamily="34" charset="-122"/>
                 <a:cs typeface="Calibri" pitchFamily="34" charset="-120"/>
               </a:rPr>
-              <a:t>attention, concern</a:t>
+              <a:t>happiness, joy</a:t>
             </a:r>
             <a:endParaRPr lang="en-US" sz="850" dirty="0"/>
           </a:p>
@@ -13585,7 +13453,7 @@
                 <a:ea typeface="Trebuchet MS" pitchFamily="34" charset="-122"/>
                 <a:cs typeface="Trebuchet MS" pitchFamily="34" charset="-120"/>
               </a:rPr>
-              <a:t>care</a:t>
+              <a:t>cheer</a:t>
             </a:r>
             <a:endParaRPr lang="en-US" sz="1400" dirty="0"/>
           </a:p>
@@ -13705,11 +13573,11 @@
         <p:spPr>
           <a:xfrm>
             <a:off x="365760" y="4096512"/>
-            <a:ext cx="1371600" cy="658368"/>
+            <a:ext cx="1371600" cy="804672"/>
           </a:xfrm>
           <a:prstGeom prst="rect">
             <a:avLst>
-              <a:gd name="adj" fmla="val 8333"/>
+              <a:gd name="adj" fmla="val 6818"/>
             </a:avLst>
           </a:prstGeom>
           <a:solidFill>
@@ -13732,7 +13600,7 @@
         <p:spPr>
           <a:xfrm>
             <a:off x="365760" y="4096512"/>
-            <a:ext cx="1371600" cy="658368"/>
+            <a:ext cx="1371600" cy="804672"/>
           </a:xfrm>
           <a:prstGeom prst="rect">
             <a:avLst/>
@@ -13771,11 +13639,11 @@
         <p:spPr>
           <a:xfrm>
             <a:off x="1874520" y="4096512"/>
-            <a:ext cx="6903720" cy="658368"/>
+            <a:ext cx="6903720" cy="804672"/>
           </a:xfrm>
           <a:prstGeom prst="rect">
             <a:avLst>
-              <a:gd name="adj" fmla="val 8333"/>
+              <a:gd name="adj" fmla="val 6818"/>
             </a:avLst>
           </a:prstGeom>
           <a:solidFill>
@@ -13798,7 +13666,7 @@
         <p:spPr>
           <a:xfrm>
             <a:off x="1874520" y="4096512"/>
-            <a:ext cx="6903720" cy="658368"/>
+            <a:ext cx="6903720" cy="804672"/>
           </a:xfrm>
           <a:prstGeom prst="rect">
             <a:avLst/>
@@ -14518,7 +14386,7 @@
                 <a:ea typeface="Trebuchet MS" pitchFamily="34" charset="-122"/>
                 <a:cs typeface="Trebuchet MS" pitchFamily="34" charset="-120"/>
               </a:rPr>
-              <a:t>careful</a:t>
+              <a:t>cheerful</a:t>
             </a:r>
             <a:endParaRPr lang="en-US" sz="2800" dirty="0"/>
           </a:p>
@@ -14657,7 +14525,7 @@
                 <a:ea typeface="Trebuchet MS" pitchFamily="34" charset="-122"/>
                 <a:cs typeface="Trebuchet MS" pitchFamily="34" charset="-120"/>
               </a:rPr>
-              <a:t>care</a:t>
+              <a:t>cheer</a:t>
             </a:r>
             <a:endParaRPr lang="en-US" sz="1300" dirty="0"/>
           </a:p>
@@ -14696,7 +14564,7 @@
                 <a:ea typeface="Calibri" pitchFamily="34" charset="-122"/>
                 <a:cs typeface="Calibri" pitchFamily="34" charset="-120"/>
               </a:rPr>
-              <a:t>attention, concern</a:t>
+              <a:t>happiness, joy</a:t>
             </a:r>
             <a:endParaRPr lang="en-US" sz="850" dirty="0"/>
           </a:p>
@@ -14967,7 +14835,7 @@
                 <a:ea typeface="Trebuchet MS" pitchFamily="34" charset="-122"/>
                 <a:cs typeface="Trebuchet MS" pitchFamily="34" charset="-120"/>
               </a:rPr>
-              <a:t>care</a:t>
+              <a:t>cheer</a:t>
             </a:r>
             <a:endParaRPr lang="en-US" sz="1400" dirty="0"/>
           </a:p>
@@ -15087,7 +14955,73 @@
         <p:spPr>
           <a:xfrm>
             <a:off x="365760" y="4096512"/>
-            <a:ext cx="1371600" cy="658368"/>
+            <a:ext cx="1371600" cy="804672"/>
+          </a:xfrm>
+          <a:prstGeom prst="rect">
+            <a:avLst>
+              <a:gd name="adj" fmla="val 6818"/>
+            </a:avLst>
+          </a:prstGeom>
+          <a:solidFill>
+            <a:srgbClr val="E2E8F0"/>
+          </a:solidFill>
+          <a:ln w="12700">
+            <a:solidFill>
+              <a:srgbClr val="E2E8F0"/>
+            </a:solidFill>
+            <a:prstDash val="solid"/>
+          </a:ln>
+        </p:spPr>
+      </p:sp>
+      <p:sp>
+        <p:nvSpPr>
+          <p:cNvPr id="31" name="Text 29"/>
+          <p:cNvSpPr/>
+          <p:nvPr/>
+        </p:nvSpPr>
+        <p:spPr>
+          <a:xfrm>
+            <a:off x="365760" y="4096512"/>
+            <a:ext cx="1371600" cy="804672"/>
+          </a:xfrm>
+          <a:prstGeom prst="rect">
+            <a:avLst/>
+          </a:prstGeom>
+          <a:noFill/>
+          <a:ln/>
+        </p:spPr>
+        <p:txBody>
+          <a:bodyPr wrap="square" lIns="0" tIns="0" rIns="0" bIns="0" rtlCol="0" anchor="ctr"/>
+          <a:lstStyle/>
+          <a:p>
+            <a:pPr algn="ctr" indent="0" marL="0">
+              <a:buNone/>
+            </a:pPr>
+            <a:r>
+              <a:rPr lang="en-US" sz="1100" b="1" dirty="0">
+                <a:solidFill>
+                  <a:srgbClr val="475569"/>
+                </a:solidFill>
+                <a:latin typeface="Trebuchet MS" pitchFamily="34" charset="0"/>
+                <a:ea typeface="Trebuchet MS" pitchFamily="34" charset="-122"/>
+                <a:cs typeface="Trebuchet MS" pitchFamily="34" charset="-120"/>
+              </a:rPr>
+              <a:t>Phonemes</a:t>
+            </a:r>
+            <a:endParaRPr lang="en-US" sz="1100" dirty="0"/>
+          </a:p>
+        </p:txBody>
+      </p:sp>
+      <p:sp>
+        <p:nvSpPr>
+          <p:cNvPr id="32" name="Shape 30"/>
+          <p:cNvSpPr/>
+          <p:nvPr/>
+        </p:nvSpPr>
+        <p:spPr>
+          <a:xfrm>
+            <a:off x="1874520" y="4096512"/>
+            <a:ext cx="6903720" cy="658368"/>
           </a:xfrm>
           <a:prstGeom prst="rect">
             <a:avLst>
@@ -15095,26 +15029,53 @@
             </a:avLst>
           </a:prstGeom>
           <a:solidFill>
-            <a:srgbClr val="E2E8F0"/>
-          </a:solidFill>
-          <a:ln w="12700">
-            <a:solidFill>
-              <a:srgbClr val="E2E8F0"/>
-            </a:solidFill>
-            <a:prstDash val="solid"/>
-          </a:ln>
-        </p:spPr>
-      </p:sp>
-      <p:sp>
-        <p:nvSpPr>
-          <p:cNvPr id="31" name="Text 29"/>
-          <p:cNvSpPr/>
-          <p:nvPr/>
-        </p:nvSpPr>
-        <p:spPr>
-          <a:xfrm>
-            <a:off x="365760" y="4096512"/>
-            <a:ext cx="1371600" cy="658368"/>
+            <a:srgbClr val="FCE7F3"/>
+          </a:solidFill>
+          <a:ln w="12700">
+            <a:solidFill>
+              <a:srgbClr val="DB2777"/>
+            </a:solidFill>
+            <a:prstDash val="solid"/>
+          </a:ln>
+        </p:spPr>
+      </p:sp>
+      <p:sp>
+        <p:nvSpPr>
+          <p:cNvPr id="33" name="Shape 31"/>
+          <p:cNvSpPr/>
+          <p:nvPr/>
+        </p:nvSpPr>
+        <p:spPr>
+          <a:xfrm>
+            <a:off x="2427732" y="4169664"/>
+            <a:ext cx="685800" cy="475488"/>
+          </a:xfrm>
+          <a:prstGeom prst="rect">
+            <a:avLst>
+              <a:gd name="adj" fmla="val 7692"/>
+            </a:avLst>
+          </a:prstGeom>
+          <a:solidFill>
+            <a:srgbClr val="FFFFFF"/>
+          </a:solidFill>
+          <a:ln w="12700">
+            <a:solidFill>
+              <a:srgbClr val="DB2777"/>
+            </a:solidFill>
+            <a:prstDash val="solid"/>
+          </a:ln>
+        </p:spPr>
+      </p:sp>
+      <p:sp>
+        <p:nvSpPr>
+          <p:cNvPr id="34" name="Text 32"/>
+          <p:cNvSpPr/>
+          <p:nvPr/>
+        </p:nvSpPr>
+        <p:spPr>
+          <a:xfrm>
+            <a:off x="2427732" y="4169664"/>
+            <a:ext cx="685800" cy="475488"/>
           </a:xfrm>
           <a:prstGeom prst="rect">
             <a:avLst/>
@@ -15130,56 +15091,29 @@
               <a:buNone/>
             </a:pPr>
             <a:r>
-              <a:rPr lang="en-US" sz="1100" b="1" dirty="0">
-                <a:solidFill>
-                  <a:srgbClr val="475569"/>
+              <a:rPr lang="en-US" sz="900" b="1" dirty="0">
+                <a:solidFill>
+                  <a:srgbClr val="9D174D"/>
                 </a:solidFill>
                 <a:latin typeface="Trebuchet MS" pitchFamily="34" charset="0"/>
                 <a:ea typeface="Trebuchet MS" pitchFamily="34" charset="-122"/>
                 <a:cs typeface="Trebuchet MS" pitchFamily="34" charset="-120"/>
               </a:rPr>
-              <a:t>Phonemes</a:t>
-            </a:r>
-            <a:endParaRPr lang="en-US" sz="1100" dirty="0"/>
-          </a:p>
-        </p:txBody>
-      </p:sp>
-      <p:sp>
-        <p:nvSpPr>
-          <p:cNvPr id="32" name="Shape 30"/>
-          <p:cNvSpPr/>
-          <p:nvPr/>
-        </p:nvSpPr>
-        <p:spPr>
-          <a:xfrm>
-            <a:off x="1874520" y="4096512"/>
-            <a:ext cx="6903720" cy="658368"/>
-          </a:xfrm>
-          <a:prstGeom prst="rect">
-            <a:avLst>
-              <a:gd name="adj" fmla="val 8333"/>
-            </a:avLst>
-          </a:prstGeom>
-          <a:solidFill>
-            <a:srgbClr val="FCE7F3"/>
-          </a:solidFill>
-          <a:ln w="12700">
-            <a:solidFill>
-              <a:srgbClr val="DB2777"/>
-            </a:solidFill>
-            <a:prstDash val="solid"/>
-          </a:ln>
-        </p:spPr>
-      </p:sp>
-      <p:sp>
-        <p:nvSpPr>
-          <p:cNvPr id="33" name="Shape 31"/>
-          <p:cNvSpPr/>
-          <p:nvPr/>
-        </p:nvSpPr>
-        <p:spPr>
-          <a:xfrm>
-            <a:off x="2427732" y="4187952"/>
+              <a:t>ch</a:t>
+            </a:r>
+            <a:endParaRPr lang="en-US" sz="900" dirty="0"/>
+          </a:p>
+        </p:txBody>
+      </p:sp>
+      <p:sp>
+        <p:nvSpPr>
+          <p:cNvPr id="35" name="Shape 33"/>
+          <p:cNvSpPr/>
+          <p:nvPr/>
+        </p:nvSpPr>
+        <p:spPr>
+          <a:xfrm>
+            <a:off x="3639312" y="4169664"/>
             <a:ext cx="685800" cy="475488"/>
           </a:xfrm>
           <a:prstGeom prst="rect">
@@ -15200,13 +15134,13 @@
       </p:sp>
       <p:sp>
         <p:nvSpPr>
-          <p:cNvPr id="34" name="Text 32"/>
-          <p:cNvSpPr/>
-          <p:nvPr/>
-        </p:nvSpPr>
-        <p:spPr>
-          <a:xfrm>
-            <a:off x="2427732" y="4187952"/>
+          <p:cNvPr id="36" name="Text 34"/>
+          <p:cNvSpPr/>
+          <p:nvPr/>
+        </p:nvSpPr>
+        <p:spPr>
+          <a:xfrm>
+            <a:off x="3639312" y="4169664"/>
             <a:ext cx="685800" cy="475488"/>
           </a:xfrm>
           <a:prstGeom prst="rect">
@@ -15231,7 +15165,7 @@
                 <a:ea typeface="Trebuchet MS" pitchFamily="34" charset="-122"/>
                 <a:cs typeface="Trebuchet MS" pitchFamily="34" charset="-120"/>
               </a:rPr>
-              <a:t>c</a:t>
+              <a:t>eer</a:t>
             </a:r>
             <a:endParaRPr lang="en-US" sz="900" dirty="0"/>
           </a:p>
@@ -15239,13 +15173,13 @@
       </p:sp>
       <p:sp>
         <p:nvSpPr>
-          <p:cNvPr id="35" name="Shape 33"/>
-          <p:cNvSpPr/>
-          <p:nvPr/>
-        </p:nvSpPr>
-        <p:spPr>
-          <a:xfrm>
-            <a:off x="3639312" y="4187952"/>
+          <p:cNvPr id="37" name="Shape 35"/>
+          <p:cNvSpPr/>
+          <p:nvPr/>
+        </p:nvSpPr>
+        <p:spPr>
+          <a:xfrm>
+            <a:off x="4850892" y="4169664"/>
             <a:ext cx="685800" cy="475488"/>
           </a:xfrm>
           <a:prstGeom prst="rect">
@@ -15266,13 +15200,13 @@
       </p:sp>
       <p:sp>
         <p:nvSpPr>
-          <p:cNvPr id="36" name="Text 34"/>
-          <p:cNvSpPr/>
-          <p:nvPr/>
-        </p:nvSpPr>
-        <p:spPr>
-          <a:xfrm>
-            <a:off x="3639312" y="4187952"/>
+          <p:cNvPr id="38" name="Text 36"/>
+          <p:cNvSpPr/>
+          <p:nvPr/>
+        </p:nvSpPr>
+        <p:spPr>
+          <a:xfrm>
+            <a:off x="4850892" y="4169664"/>
             <a:ext cx="685800" cy="475488"/>
           </a:xfrm>
           <a:prstGeom prst="rect">
@@ -15297,7 +15231,7 @@
                 <a:ea typeface="Trebuchet MS" pitchFamily="34" charset="-122"/>
                 <a:cs typeface="Trebuchet MS" pitchFamily="34" charset="-120"/>
               </a:rPr>
-              <a:t>are</a:t>
+              <a:t>f</a:t>
             </a:r>
             <a:endParaRPr lang="en-US" sz="900" dirty="0"/>
           </a:p>
@@ -15305,13 +15239,13 @@
       </p:sp>
       <p:sp>
         <p:nvSpPr>
-          <p:cNvPr id="37" name="Shape 35"/>
-          <p:cNvSpPr/>
-          <p:nvPr/>
-        </p:nvSpPr>
-        <p:spPr>
-          <a:xfrm>
-            <a:off x="4850892" y="4187952"/>
+          <p:cNvPr id="39" name="Shape 37"/>
+          <p:cNvSpPr/>
+          <p:nvPr/>
+        </p:nvSpPr>
+        <p:spPr>
+          <a:xfrm>
+            <a:off x="6062472" y="4169664"/>
             <a:ext cx="685800" cy="475488"/>
           </a:xfrm>
           <a:prstGeom prst="rect">
@@ -15332,13 +15266,13 @@
       </p:sp>
       <p:sp>
         <p:nvSpPr>
-          <p:cNvPr id="38" name="Text 36"/>
-          <p:cNvSpPr/>
-          <p:nvPr/>
-        </p:nvSpPr>
-        <p:spPr>
-          <a:xfrm>
-            <a:off x="4850892" y="4187952"/>
+          <p:cNvPr id="40" name="Text 38"/>
+          <p:cNvSpPr/>
+          <p:nvPr/>
+        </p:nvSpPr>
+        <p:spPr>
+          <a:xfrm>
+            <a:off x="6062472" y="4169664"/>
             <a:ext cx="685800" cy="475488"/>
           </a:xfrm>
           <a:prstGeom prst="rect">
@@ -15363,7 +15297,7 @@
                 <a:ea typeface="Trebuchet MS" pitchFamily="34" charset="-122"/>
                 <a:cs typeface="Trebuchet MS" pitchFamily="34" charset="-120"/>
               </a:rPr>
-              <a:t>f</a:t>
+              <a:t>u</a:t>
             </a:r>
             <a:endParaRPr lang="en-US" sz="900" dirty="0"/>
           </a:p>
@@ -15371,13 +15305,13 @@
       </p:sp>
       <p:sp>
         <p:nvSpPr>
-          <p:cNvPr id="39" name="Shape 37"/>
-          <p:cNvSpPr/>
-          <p:nvPr/>
-        </p:nvSpPr>
-        <p:spPr>
-          <a:xfrm>
-            <a:off x="6062472" y="4187952"/>
+          <p:cNvPr id="41" name="Shape 39"/>
+          <p:cNvSpPr/>
+          <p:nvPr/>
+        </p:nvSpPr>
+        <p:spPr>
+          <a:xfrm>
+            <a:off x="7274052" y="4169664"/>
             <a:ext cx="685800" cy="475488"/>
           </a:xfrm>
           <a:prstGeom prst="rect">
@@ -15398,79 +15332,13 @@
       </p:sp>
       <p:sp>
         <p:nvSpPr>
-          <p:cNvPr id="40" name="Text 38"/>
-          <p:cNvSpPr/>
-          <p:nvPr/>
-        </p:nvSpPr>
-        <p:spPr>
-          <a:xfrm>
-            <a:off x="6062472" y="4187952"/>
-            <a:ext cx="685800" cy="475488"/>
-          </a:xfrm>
-          <a:prstGeom prst="rect">
-            <a:avLst/>
-          </a:prstGeom>
-          <a:noFill/>
-          <a:ln/>
-        </p:spPr>
-        <p:txBody>
-          <a:bodyPr wrap="square" lIns="0" tIns="0" rIns="0" bIns="0" rtlCol="0" anchor="ctr"/>
-          <a:lstStyle/>
-          <a:p>
-            <a:pPr algn="ctr" indent="0" marL="0">
-              <a:buNone/>
-            </a:pPr>
-            <a:r>
-              <a:rPr lang="en-US" sz="900" b="1" dirty="0">
-                <a:solidFill>
-                  <a:srgbClr val="9D174D"/>
-                </a:solidFill>
-                <a:latin typeface="Trebuchet MS" pitchFamily="34" charset="0"/>
-                <a:ea typeface="Trebuchet MS" pitchFamily="34" charset="-122"/>
-                <a:cs typeface="Trebuchet MS" pitchFamily="34" charset="-120"/>
-              </a:rPr>
-              <a:t>u</a:t>
-            </a:r>
-            <a:endParaRPr lang="en-US" sz="900" dirty="0"/>
-          </a:p>
-        </p:txBody>
-      </p:sp>
-      <p:sp>
-        <p:nvSpPr>
-          <p:cNvPr id="41" name="Shape 39"/>
-          <p:cNvSpPr/>
-          <p:nvPr/>
-        </p:nvSpPr>
-        <p:spPr>
-          <a:xfrm>
-            <a:off x="7274052" y="4187952"/>
-            <a:ext cx="685800" cy="475488"/>
-          </a:xfrm>
-          <a:prstGeom prst="rect">
-            <a:avLst>
-              <a:gd name="adj" fmla="val 7692"/>
-            </a:avLst>
-          </a:prstGeom>
-          <a:solidFill>
-            <a:srgbClr val="FFFFFF"/>
-          </a:solidFill>
-          <a:ln w="12700">
-            <a:solidFill>
-              <a:srgbClr val="DB2777"/>
-            </a:solidFill>
-            <a:prstDash val="solid"/>
-          </a:ln>
-        </p:spPr>
-      </p:sp>
-      <p:sp>
-        <p:nvSpPr>
           <p:cNvPr id="42" name="Text 40"/>
           <p:cNvSpPr/>
           <p:nvPr/>
         </p:nvSpPr>
         <p:spPr>
           <a:xfrm>
-            <a:off x="7274052" y="4187952"/>
+            <a:off x="7274052" y="4169664"/>
             <a:ext cx="685800" cy="475488"/>
           </a:xfrm>
           <a:prstGeom prst="rect">
@@ -16838,7 +16706,7 @@
                 <a:ea typeface="Calibri" pitchFamily="34" charset="-122"/>
                 <a:cs typeface="Calibri" pitchFamily="34" charset="-120"/>
               </a:rPr>
-              <a:t>powerful</a:t>
+              <a:t>hopeful</a:t>
             </a:r>
             <a:pPr algn="l" indent="0" marL="0">
               <a:buNone/>
@@ -16852,7 +16720,7 @@
                 <a:ea typeface="Calibri" pitchFamily="34" charset="-122"/>
                 <a:cs typeface="Calibri" pitchFamily="34" charset="-120"/>
               </a:rPr>
-              <a:t> storm was frightful, but the </a:t>
+              <a:t> students were </a:t>
             </a:r>
             <a:pPr algn="l" indent="0" marL="0">
               <a:buNone/>
@@ -16869,7 +16737,7 @@
                 <a:ea typeface="Calibri" pitchFamily="34" charset="-122"/>
                 <a:cs typeface="Calibri" pitchFamily="34" charset="-120"/>
               </a:rPr>
-              <a:t>cheerful</a:t>
+              <a:t>careful</a:t>
             </a:r>
             <a:pPr algn="l" indent="0" marL="0">
               <a:buNone/>
@@ -16883,7 +16751,7 @@
                 <a:ea typeface="Calibri" pitchFamily="34" charset="-122"/>
                 <a:cs typeface="Calibri" pitchFamily="34" charset="-120"/>
               </a:rPr>
-              <a:t> teacher kept everyone calm and </a:t>
+              <a:t> and </a:t>
             </a:r>
             <a:pPr algn="l" indent="0" marL="0">
               <a:buNone/>
@@ -16900,7 +16768,7 @@
                 <a:ea typeface="Calibri" pitchFamily="34" charset="-122"/>
                 <a:cs typeface="Calibri" pitchFamily="34" charset="-120"/>
               </a:rPr>
-              <a:t>playful</a:t>
+              <a:t>thoughtful</a:t>
             </a:r>
             <a:pPr algn="l" indent="0" marL="0">
               <a:buNone/>
@@ -16914,7 +16782,7 @@
                 <a:ea typeface="Calibri" pitchFamily="34" charset="-122"/>
                 <a:cs typeface="Calibri" pitchFamily="34" charset="-120"/>
               </a:rPr>
-              <a:t>.</a:t>
+              <a:t> when they wrote their stories.</a:t>
             </a:r>
             <a:endParaRPr lang="en-US" sz="1800" dirty="0"/>
           </a:p>
@@ -17069,7 +16937,7 @@
                 <a:ea typeface="Trebuchet MS" pitchFamily="34" charset="-122"/>
                 <a:cs typeface="Trebuchet MS" pitchFamily="34" charset="-120"/>
               </a:rPr>
-              <a:t>powerful</a:t>
+              <a:t>hopeful</a:t>
             </a:r>
             <a:endParaRPr lang="en-US" sz="1400" dirty="0"/>
           </a:p>
@@ -17197,7 +17065,7 @@
                 <a:ea typeface="Trebuchet MS" pitchFamily="34" charset="-122"/>
                 <a:cs typeface="Trebuchet MS" pitchFamily="34" charset="-120"/>
               </a:rPr>
-              <a:t>cheerful</a:t>
+              <a:t>careful</a:t>
             </a:r>
             <a:endParaRPr lang="en-US" sz="1400" dirty="0"/>
           </a:p>
@@ -17325,7 +17193,7 @@
                 <a:ea typeface="Trebuchet MS" pitchFamily="34" charset="-122"/>
                 <a:cs typeface="Trebuchet MS" pitchFamily="34" charset="-120"/>
               </a:rPr>
-              <a:t>playful</a:t>
+              <a:t>thoughtful</a:t>
             </a:r>
             <a:endParaRPr lang="en-US" sz="1400" dirty="0"/>
           </a:p>
@@ -17795,7 +17663,7 @@
                 <a:ea typeface="Trebuchet MS" pitchFamily="34" charset="-122"/>
                 <a:cs typeface="Trebuchet MS" pitchFamily="34" charset="-120"/>
               </a:rPr>
-              <a:t>powerful</a:t>
+              <a:t>hopeful</a:t>
             </a:r>
             <a:endParaRPr lang="en-US" sz="2800" dirty="0"/>
           </a:p>
@@ -18074,11 +17942,11 @@
         <p:spPr>
           <a:xfrm>
             <a:off x="365760" y="4096512"/>
-            <a:ext cx="1371600" cy="658368"/>
+            <a:ext cx="1371600" cy="804672"/>
           </a:xfrm>
           <a:prstGeom prst="rect">
             <a:avLst>
-              <a:gd name="adj" fmla="val 8333"/>
+              <a:gd name="adj" fmla="val 6818"/>
             </a:avLst>
           </a:prstGeom>
           <a:solidFill>
@@ -18101,7 +17969,7 @@
         <p:spPr>
           <a:xfrm>
             <a:off x="365760" y="4096512"/>
-            <a:ext cx="1371600" cy="658368"/>
+            <a:ext cx="1371600" cy="804672"/>
           </a:xfrm>
           <a:prstGeom prst="rect">
             <a:avLst/>
@@ -18140,11 +18008,11 @@
         <p:spPr>
           <a:xfrm>
             <a:off x="1874520" y="4096512"/>
-            <a:ext cx="6903720" cy="658368"/>
+            <a:ext cx="6903720" cy="804672"/>
           </a:xfrm>
           <a:prstGeom prst="rect">
             <a:avLst>
-              <a:gd name="adj" fmla="val 8333"/>
+              <a:gd name="adj" fmla="val 6818"/>
             </a:avLst>
           </a:prstGeom>
           <a:solidFill>
@@ -18167,7 +18035,7 @@
         <p:spPr>
           <a:xfrm>
             <a:off x="1874520" y="4096512"/>
-            <a:ext cx="6903720" cy="658368"/>
+            <a:ext cx="6903720" cy="804672"/>
           </a:xfrm>
           <a:prstGeom prst="rect">
             <a:avLst/>
@@ -18622,7 +18490,7 @@
                 <a:ea typeface="Trebuchet MS" pitchFamily="34" charset="-122"/>
                 <a:cs typeface="Trebuchet MS" pitchFamily="34" charset="-120"/>
               </a:rPr>
-              <a:t>powerful</a:t>
+              <a:t>hopeful</a:t>
             </a:r>
             <a:endParaRPr lang="en-US" sz="2800" dirty="0"/>
           </a:p>
@@ -18761,7 +18629,7 @@
                 <a:ea typeface="Trebuchet MS" pitchFamily="34" charset="-122"/>
                 <a:cs typeface="Trebuchet MS" pitchFamily="34" charset="-120"/>
               </a:rPr>
-              <a:t>power</a:t>
+              <a:t>hope</a:t>
             </a:r>
             <a:endParaRPr lang="en-US" sz="1300" dirty="0"/>
           </a:p>
@@ -18800,7 +18668,7 @@
                 <a:ea typeface="Calibri" pitchFamily="34" charset="-122"/>
                 <a:cs typeface="Calibri" pitchFamily="34" charset="-120"/>
               </a:rPr>
-              <a:t>great strength or force</a:t>
+              <a:t>to wish for something good</a:t>
             </a:r>
             <a:endParaRPr lang="en-US" sz="850" dirty="0"/>
           </a:p>
@@ -18808,7 +18676,46 @@
       </p:sp>
       <p:sp>
         <p:nvSpPr>
-          <p:cNvPr id="19" name="Shape 17"/>
+          <p:cNvPr id="19" name="Text 17"/>
+          <p:cNvSpPr/>
+          <p:nvPr/>
+        </p:nvSpPr>
+        <p:spPr>
+          <a:xfrm>
+            <a:off x="2938272" y="2752344"/>
+            <a:ext cx="1828800" cy="182880"/>
+          </a:xfrm>
+          <a:prstGeom prst="rect">
+            <a:avLst/>
+          </a:prstGeom>
+          <a:noFill/>
+          <a:ln/>
+        </p:spPr>
+        <p:txBody>
+          <a:bodyPr wrap="square" lIns="0" tIns="0" rIns="0" bIns="0" rtlCol="0" anchor="t"/>
+          <a:lstStyle/>
+          <a:p>
+            <a:pPr algn="ctr" indent="0" marL="0">
+              <a:buNone/>
+            </a:pPr>
+            <a:r>
+              <a:rPr lang="en-US" sz="700" i="1" dirty="0">
+                <a:solidFill>
+                  <a:srgbClr val="94A3B8"/>
+                </a:solidFill>
+                <a:latin typeface="Calibri" pitchFamily="34" charset="0"/>
+                <a:ea typeface="Calibri" pitchFamily="34" charset="-122"/>
+                <a:cs typeface="Calibri" pitchFamily="34" charset="-120"/>
+              </a:rPr>
+              <a:t>'e' kept before consonant suffix</a:t>
+            </a:r>
+            <a:endParaRPr lang="en-US" sz="700" dirty="0"/>
+          </a:p>
+        </p:txBody>
+      </p:sp>
+      <p:sp>
+        <p:nvSpPr>
+          <p:cNvPr id="20" name="Shape 18"/>
           <p:cNvSpPr/>
           <p:nvPr/>
         </p:nvSpPr>
@@ -18842,7 +18749,7 @@
       </p:sp>
       <p:sp>
         <p:nvSpPr>
-          <p:cNvPr id="20" name="Text 18"/>
+          <p:cNvPr id="21" name="Text 19"/>
           <p:cNvSpPr/>
           <p:nvPr/>
         </p:nvSpPr>
@@ -18881,7 +18788,7 @@
       </p:sp>
       <p:sp>
         <p:nvSpPr>
-          <p:cNvPr id="21" name="Text 19"/>
+          <p:cNvPr id="22" name="Text 20"/>
           <p:cNvSpPr/>
           <p:nvPr/>
         </p:nvSpPr>
@@ -18920,7 +18827,7 @@
       </p:sp>
       <p:sp>
         <p:nvSpPr>
-          <p:cNvPr id="22" name="Shape 20"/>
+          <p:cNvPr id="23" name="Shape 21"/>
           <p:cNvSpPr/>
           <p:nvPr/>
         </p:nvSpPr>
@@ -18947,7 +18854,7 @@
       </p:sp>
       <p:sp>
         <p:nvSpPr>
-          <p:cNvPr id="23" name="Text 21"/>
+          <p:cNvPr id="24" name="Text 22"/>
           <p:cNvSpPr/>
           <p:nvPr/>
         </p:nvSpPr>
@@ -18986,7 +18893,7 @@
       </p:sp>
       <p:sp>
         <p:nvSpPr>
-          <p:cNvPr id="24" name="Shape 22"/>
+          <p:cNvPr id="25" name="Shape 23"/>
           <p:cNvSpPr/>
           <p:nvPr/>
         </p:nvSpPr>
@@ -19013,7 +18920,7 @@
       </p:sp>
       <p:sp>
         <p:nvSpPr>
-          <p:cNvPr id="25" name="Text 23"/>
+          <p:cNvPr id="26" name="Text 24"/>
           <p:cNvSpPr/>
           <p:nvPr/>
         </p:nvSpPr>
@@ -19052,18 +18959,18 @@
       </p:sp>
       <p:sp>
         <p:nvSpPr>
-          <p:cNvPr id="26" name="Shape 24"/>
+          <p:cNvPr id="27" name="Shape 25"/>
           <p:cNvSpPr/>
           <p:nvPr/>
         </p:nvSpPr>
         <p:spPr>
           <a:xfrm>
             <a:off x="365760" y="4096512"/>
-            <a:ext cx="1371600" cy="658368"/>
+            <a:ext cx="1371600" cy="804672"/>
           </a:xfrm>
           <a:prstGeom prst="rect">
             <a:avLst>
-              <a:gd name="adj" fmla="val 8333"/>
+              <a:gd name="adj" fmla="val 6818"/>
             </a:avLst>
           </a:prstGeom>
           <a:solidFill>
@@ -19079,14 +18986,14 @@
       </p:sp>
       <p:sp>
         <p:nvSpPr>
-          <p:cNvPr id="27" name="Text 25"/>
+          <p:cNvPr id="28" name="Text 26"/>
           <p:cNvSpPr/>
           <p:nvPr/>
         </p:nvSpPr>
         <p:spPr>
           <a:xfrm>
             <a:off x="365760" y="4096512"/>
-            <a:ext cx="1371600" cy="658368"/>
+            <a:ext cx="1371600" cy="804672"/>
           </a:xfrm>
           <a:prstGeom prst="rect">
             <a:avLst/>
@@ -19118,18 +19025,18 @@
       </p:sp>
       <p:sp>
         <p:nvSpPr>
-          <p:cNvPr id="28" name="Shape 26"/>
+          <p:cNvPr id="29" name="Shape 27"/>
           <p:cNvSpPr/>
           <p:nvPr/>
         </p:nvSpPr>
         <p:spPr>
           <a:xfrm>
             <a:off x="1874520" y="4096512"/>
-            <a:ext cx="6903720" cy="658368"/>
+            <a:ext cx="6903720" cy="804672"/>
           </a:xfrm>
           <a:prstGeom prst="rect">
             <a:avLst>
-              <a:gd name="adj" fmla="val 8333"/>
+              <a:gd name="adj" fmla="val 6818"/>
             </a:avLst>
           </a:prstGeom>
           <a:solidFill>
@@ -19145,14 +19052,14 @@
       </p:sp>
       <p:sp>
         <p:nvSpPr>
-          <p:cNvPr id="29" name="Text 27"/>
+          <p:cNvPr id="30" name="Text 28"/>
           <p:cNvSpPr/>
           <p:nvPr/>
         </p:nvSpPr>
         <p:spPr>
           <a:xfrm>
             <a:off x="1874520" y="4096512"/>
-            <a:ext cx="6903720" cy="658368"/>
+            <a:ext cx="6903720" cy="804672"/>
           </a:xfrm>
           <a:prstGeom prst="rect">
             <a:avLst/>
@@ -19607,7 +19514,7 @@
                 <a:ea typeface="Trebuchet MS" pitchFamily="34" charset="-122"/>
                 <a:cs typeface="Trebuchet MS" pitchFamily="34" charset="-120"/>
               </a:rPr>
-              <a:t>powerful</a:t>
+              <a:t>hopeful</a:t>
             </a:r>
             <a:endParaRPr lang="en-US" sz="2800" dirty="0"/>
           </a:p>
@@ -19746,7 +19653,7 @@
                 <a:ea typeface="Trebuchet MS" pitchFamily="34" charset="-122"/>
                 <a:cs typeface="Trebuchet MS" pitchFamily="34" charset="-120"/>
               </a:rPr>
-              <a:t>power</a:t>
+              <a:t>hope</a:t>
             </a:r>
             <a:endParaRPr lang="en-US" sz="1300" dirty="0"/>
           </a:p>
@@ -19785,7 +19692,7 @@
                 <a:ea typeface="Calibri" pitchFamily="34" charset="-122"/>
                 <a:cs typeface="Calibri" pitchFamily="34" charset="-120"/>
               </a:rPr>
-              <a:t>great strength or force</a:t>
+              <a:t>to wish for something good</a:t>
             </a:r>
             <a:endParaRPr lang="en-US" sz="850" dirty="0"/>
           </a:p>
@@ -19793,7 +19700,46 @@
       </p:sp>
       <p:sp>
         <p:nvSpPr>
-          <p:cNvPr id="19" name="Shape 17"/>
+          <p:cNvPr id="19" name="Text 17"/>
+          <p:cNvSpPr/>
+          <p:nvPr/>
+        </p:nvSpPr>
+        <p:spPr>
+          <a:xfrm>
+            <a:off x="2938272" y="2752344"/>
+            <a:ext cx="1828800" cy="182880"/>
+          </a:xfrm>
+          <a:prstGeom prst="rect">
+            <a:avLst/>
+          </a:prstGeom>
+          <a:noFill/>
+          <a:ln/>
+        </p:spPr>
+        <p:txBody>
+          <a:bodyPr wrap="square" lIns="0" tIns="0" rIns="0" bIns="0" rtlCol="0" anchor="t"/>
+          <a:lstStyle/>
+          <a:p>
+            <a:pPr algn="ctr" indent="0" marL="0">
+              <a:buNone/>
+            </a:pPr>
+            <a:r>
+              <a:rPr lang="en-US" sz="700" i="1" dirty="0">
+                <a:solidFill>
+                  <a:srgbClr val="94A3B8"/>
+                </a:solidFill>
+                <a:latin typeface="Calibri" pitchFamily="34" charset="0"/>
+                <a:ea typeface="Calibri" pitchFamily="34" charset="-122"/>
+                <a:cs typeface="Calibri" pitchFamily="34" charset="-120"/>
+              </a:rPr>
+              <a:t>'e' kept before consonant suffix</a:t>
+            </a:r>
+            <a:endParaRPr lang="en-US" sz="700" dirty="0"/>
+          </a:p>
+        </p:txBody>
+      </p:sp>
+      <p:sp>
+        <p:nvSpPr>
+          <p:cNvPr id="20" name="Shape 18"/>
           <p:cNvSpPr/>
           <p:nvPr/>
         </p:nvSpPr>
@@ -19827,7 +19773,7 @@
       </p:sp>
       <p:sp>
         <p:nvSpPr>
-          <p:cNvPr id="20" name="Text 18"/>
+          <p:cNvPr id="21" name="Text 19"/>
           <p:cNvSpPr/>
           <p:nvPr/>
         </p:nvSpPr>
@@ -19866,7 +19812,7 @@
       </p:sp>
       <p:sp>
         <p:nvSpPr>
-          <p:cNvPr id="21" name="Text 19"/>
+          <p:cNvPr id="22" name="Text 20"/>
           <p:cNvSpPr/>
           <p:nvPr/>
         </p:nvSpPr>
@@ -19905,7 +19851,7 @@
       </p:sp>
       <p:sp>
         <p:nvSpPr>
-          <p:cNvPr id="22" name="Shape 20"/>
+          <p:cNvPr id="23" name="Shape 21"/>
           <p:cNvSpPr/>
           <p:nvPr/>
         </p:nvSpPr>
@@ -19932,7 +19878,7 @@
       </p:sp>
       <p:sp>
         <p:nvSpPr>
-          <p:cNvPr id="23" name="Text 21"/>
+          <p:cNvPr id="24" name="Text 22"/>
           <p:cNvSpPr/>
           <p:nvPr/>
         </p:nvSpPr>
@@ -19971,7 +19917,7 @@
       </p:sp>
       <p:sp>
         <p:nvSpPr>
-          <p:cNvPr id="24" name="Shape 22"/>
+          <p:cNvPr id="25" name="Shape 23"/>
           <p:cNvSpPr/>
           <p:nvPr/>
         </p:nvSpPr>
@@ -19998,13 +19944,13 @@
       </p:sp>
       <p:sp>
         <p:nvSpPr>
-          <p:cNvPr id="25" name="Shape 23"/>
-          <p:cNvSpPr/>
-          <p:nvPr/>
-        </p:nvSpPr>
-        <p:spPr>
-          <a:xfrm>
-            <a:off x="2313432" y="3364992"/>
+          <p:cNvPr id="26" name="Shape 24"/>
+          <p:cNvSpPr/>
+          <p:nvPr/>
+        </p:nvSpPr>
+        <p:spPr>
+          <a:xfrm>
+            <a:off x="2999232" y="3364992"/>
             <a:ext cx="1645920" cy="475488"/>
           </a:xfrm>
           <a:prstGeom prst="rect">
@@ -20025,13 +19971,13 @@
       </p:sp>
       <p:sp>
         <p:nvSpPr>
-          <p:cNvPr id="26" name="Text 24"/>
-          <p:cNvSpPr/>
-          <p:nvPr/>
-        </p:nvSpPr>
-        <p:spPr>
-          <a:xfrm>
-            <a:off x="2313432" y="3364992"/>
+          <p:cNvPr id="27" name="Text 25"/>
+          <p:cNvSpPr/>
+          <p:nvPr/>
+        </p:nvSpPr>
+        <p:spPr>
+          <a:xfrm>
+            <a:off x="2999232" y="3364992"/>
             <a:ext cx="1645920" cy="475488"/>
           </a:xfrm>
           <a:prstGeom prst="rect">
@@ -20056,7 +20002,7 @@
                 <a:ea typeface="Trebuchet MS" pitchFamily="34" charset="-122"/>
                 <a:cs typeface="Trebuchet MS" pitchFamily="34" charset="-120"/>
               </a:rPr>
-              <a:t>pow</a:t>
+              <a:t>hope</a:t>
             </a:r>
             <a:endParaRPr lang="en-US" sz="1400" dirty="0"/>
           </a:p>
@@ -20064,14 +20010,14 @@
       </p:sp>
       <p:sp>
         <p:nvSpPr>
-          <p:cNvPr id="27" name="Text 25"/>
-          <p:cNvSpPr/>
-          <p:nvPr/>
-        </p:nvSpPr>
-        <p:spPr>
-          <a:xfrm>
-            <a:off x="3959352" y="3364992"/>
-            <a:ext cx="411480" cy="475488"/>
+          <p:cNvPr id="28" name="Text 26"/>
+          <p:cNvSpPr/>
+          <p:nvPr/>
+        </p:nvSpPr>
+        <p:spPr>
+          <a:xfrm>
+            <a:off x="4645152" y="3364992"/>
+            <a:ext cx="1097280" cy="475488"/>
           </a:xfrm>
           <a:prstGeom prst="rect">
             <a:avLst/>
@@ -20103,13 +20049,13 @@
       </p:sp>
       <p:sp>
         <p:nvSpPr>
-          <p:cNvPr id="28" name="Shape 26"/>
-          <p:cNvSpPr/>
-          <p:nvPr/>
-        </p:nvSpPr>
-        <p:spPr>
-          <a:xfrm>
-            <a:off x="4370832" y="3364992"/>
+          <p:cNvPr id="29" name="Shape 27"/>
+          <p:cNvSpPr/>
+          <p:nvPr/>
+        </p:nvSpPr>
+        <p:spPr>
+          <a:xfrm>
+            <a:off x="5742432" y="3364992"/>
             <a:ext cx="1645920" cy="475488"/>
           </a:xfrm>
           <a:prstGeom prst="rect">
@@ -20130,13 +20076,13 @@
       </p:sp>
       <p:sp>
         <p:nvSpPr>
-          <p:cNvPr id="29" name="Text 27"/>
-          <p:cNvSpPr/>
-          <p:nvPr/>
-        </p:nvSpPr>
-        <p:spPr>
-          <a:xfrm>
-            <a:off x="4370832" y="3364992"/>
+          <p:cNvPr id="30" name="Text 28"/>
+          <p:cNvSpPr/>
+          <p:nvPr/>
+        </p:nvSpPr>
+        <p:spPr>
+          <a:xfrm>
+            <a:off x="5742432" y="3364992"/>
             <a:ext cx="1645920" cy="475488"/>
           </a:xfrm>
           <a:prstGeom prst="rect">
@@ -20161,7 +20107,7 @@
                 <a:ea typeface="Trebuchet MS" pitchFamily="34" charset="-122"/>
                 <a:cs typeface="Trebuchet MS" pitchFamily="34" charset="-120"/>
               </a:rPr>
-              <a:t>er</a:t>
+              <a:t>ful</a:t>
             </a:r>
             <a:endParaRPr lang="en-US" sz="1400" dirty="0"/>
           </a:p>
@@ -20169,14 +20115,41 @@
       </p:sp>
       <p:sp>
         <p:nvSpPr>
-          <p:cNvPr id="30" name="Text 28"/>
-          <p:cNvSpPr/>
-          <p:nvPr/>
-        </p:nvSpPr>
-        <p:spPr>
-          <a:xfrm>
-            <a:off x="6016752" y="3364992"/>
-            <a:ext cx="411480" cy="475488"/>
+          <p:cNvPr id="31" name="Shape 29"/>
+          <p:cNvSpPr/>
+          <p:nvPr/>
+        </p:nvSpPr>
+        <p:spPr>
+          <a:xfrm>
+            <a:off x="365760" y="4096512"/>
+            <a:ext cx="1371600" cy="804672"/>
+          </a:xfrm>
+          <a:prstGeom prst="rect">
+            <a:avLst>
+              <a:gd name="adj" fmla="val 6818"/>
+            </a:avLst>
+          </a:prstGeom>
+          <a:solidFill>
+            <a:srgbClr val="E2E8F0"/>
+          </a:solidFill>
+          <a:ln w="12700">
+            <a:solidFill>
+              <a:srgbClr val="E2E8F0"/>
+            </a:solidFill>
+            <a:prstDash val="solid"/>
+          </a:ln>
+        </p:spPr>
+      </p:sp>
+      <p:sp>
+        <p:nvSpPr>
+          <p:cNvPr id="32" name="Text 30"/>
+          <p:cNvSpPr/>
+          <p:nvPr/>
+        </p:nvSpPr>
+        <p:spPr>
+          <a:xfrm>
+            <a:off x="365760" y="4096512"/>
+            <a:ext cx="1371600" cy="804672"/>
           </a:xfrm>
           <a:prstGeom prst="rect">
             <a:avLst/>
@@ -20192,110 +20165,44 @@
               <a:buNone/>
             </a:pPr>
             <a:r>
-              <a:rPr lang="en-US" sz="1600" b="1" dirty="0">
-                <a:solidFill>
-                  <a:srgbClr val="0D9488"/>
+              <a:rPr lang="en-US" sz="1100" b="1" dirty="0">
+                <a:solidFill>
+                  <a:srgbClr val="475569"/>
                 </a:solidFill>
                 <a:latin typeface="Trebuchet MS" pitchFamily="34" charset="0"/>
                 <a:ea typeface="Trebuchet MS" pitchFamily="34" charset="-122"/>
                 <a:cs typeface="Trebuchet MS" pitchFamily="34" charset="-120"/>
               </a:rPr>
-              <a:t>·</a:t>
-            </a:r>
-            <a:endParaRPr lang="en-US" sz="1600" dirty="0"/>
-          </a:p>
-        </p:txBody>
-      </p:sp>
-      <p:sp>
-        <p:nvSpPr>
-          <p:cNvPr id="31" name="Shape 29"/>
-          <p:cNvSpPr/>
-          <p:nvPr/>
-        </p:nvSpPr>
-        <p:spPr>
-          <a:xfrm>
-            <a:off x="6428232" y="3364992"/>
-            <a:ext cx="1645920" cy="475488"/>
+              <a:t>Phonemes</a:t>
+            </a:r>
+            <a:endParaRPr lang="en-US" sz="1100" dirty="0"/>
+          </a:p>
+        </p:txBody>
+      </p:sp>
+      <p:sp>
+        <p:nvSpPr>
+          <p:cNvPr id="33" name="Shape 31"/>
+          <p:cNvSpPr/>
+          <p:nvPr/>
+        </p:nvSpPr>
+        <p:spPr>
+          <a:xfrm>
+            <a:off x="1874520" y="4096512"/>
+            <a:ext cx="6903720" cy="804672"/>
           </a:xfrm>
           <a:prstGeom prst="rect">
             <a:avLst>
-              <a:gd name="adj" fmla="val 9615"/>
+              <a:gd name="adj" fmla="val 6818"/>
             </a:avLst>
           </a:prstGeom>
           <a:solidFill>
-            <a:srgbClr val="FFFFFF"/>
-          </a:solidFill>
-          <a:ln w="12700">
-            <a:solidFill>
-              <a:srgbClr val="0D9488"/>
-            </a:solidFill>
-            <a:prstDash val="solid"/>
-          </a:ln>
-        </p:spPr>
-      </p:sp>
-      <p:sp>
-        <p:nvSpPr>
-          <p:cNvPr id="32" name="Text 30"/>
-          <p:cNvSpPr/>
-          <p:nvPr/>
-        </p:nvSpPr>
-        <p:spPr>
-          <a:xfrm>
-            <a:off x="6428232" y="3364992"/>
-            <a:ext cx="1645920" cy="475488"/>
-          </a:xfrm>
-          <a:prstGeom prst="rect">
-            <a:avLst/>
-          </a:prstGeom>
-          <a:noFill/>
-          <a:ln/>
-        </p:spPr>
-        <p:txBody>
-          <a:bodyPr wrap="square" lIns="0" tIns="0" rIns="0" bIns="0" rtlCol="0" anchor="ctr"/>
-          <a:lstStyle/>
-          <a:p>
-            <a:pPr algn="ctr" indent="0" marL="0">
-              <a:buNone/>
-            </a:pPr>
-            <a:r>
-              <a:rPr lang="en-US" sz="1400" b="1" dirty="0">
-                <a:solidFill>
-                  <a:srgbClr val="0D9488"/>
-                </a:solidFill>
-                <a:latin typeface="Trebuchet MS" pitchFamily="34" charset="0"/>
-                <a:ea typeface="Trebuchet MS" pitchFamily="34" charset="-122"/>
-                <a:cs typeface="Trebuchet MS" pitchFamily="34" charset="-120"/>
-              </a:rPr>
-              <a:t>ful</a:t>
-            </a:r>
-            <a:endParaRPr lang="en-US" sz="1400" dirty="0"/>
-          </a:p>
-        </p:txBody>
-      </p:sp>
-      <p:sp>
-        <p:nvSpPr>
-          <p:cNvPr id="33" name="Shape 31"/>
-          <p:cNvSpPr/>
-          <p:nvPr/>
-        </p:nvSpPr>
-        <p:spPr>
-          <a:xfrm>
-            <a:off x="365760" y="4096512"/>
-            <a:ext cx="1371600" cy="658368"/>
-          </a:xfrm>
-          <a:prstGeom prst="rect">
-            <a:avLst>
-              <a:gd name="adj" fmla="val 8333"/>
-            </a:avLst>
-          </a:prstGeom>
-          <a:solidFill>
-            <a:srgbClr val="E2E8F0"/>
+            <a:srgbClr val="F8FAFC"/>
           </a:solidFill>
           <a:ln w="12700">
             <a:solidFill>
               <a:srgbClr val="E2E8F0"/>
             </a:solidFill>
-            <a:prstDash val="solid"/>
+            <a:prstDash val="dash"/>
           </a:ln>
         </p:spPr>
       </p:sp>
@@ -20307,74 +20214,8 @@
         </p:nvSpPr>
         <p:spPr>
           <a:xfrm>
-            <a:off x="365760" y="4096512"/>
-            <a:ext cx="1371600" cy="658368"/>
-          </a:xfrm>
-          <a:prstGeom prst="rect">
-            <a:avLst/>
-          </a:prstGeom>
-          <a:noFill/>
-          <a:ln/>
-        </p:spPr>
-        <p:txBody>
-          <a:bodyPr wrap="square" lIns="0" tIns="0" rIns="0" bIns="0" rtlCol="0" anchor="ctr"/>
-          <a:lstStyle/>
-          <a:p>
-            <a:pPr algn="ctr" indent="0" marL="0">
-              <a:buNone/>
-            </a:pPr>
-            <a:r>
-              <a:rPr lang="en-US" sz="1100" b="1" dirty="0">
-                <a:solidFill>
-                  <a:srgbClr val="475569"/>
-                </a:solidFill>
-                <a:latin typeface="Trebuchet MS" pitchFamily="34" charset="0"/>
-                <a:ea typeface="Trebuchet MS" pitchFamily="34" charset="-122"/>
-                <a:cs typeface="Trebuchet MS" pitchFamily="34" charset="-120"/>
-              </a:rPr>
-              <a:t>Phonemes</a:t>
-            </a:r>
-            <a:endParaRPr lang="en-US" sz="1100" dirty="0"/>
-          </a:p>
-        </p:txBody>
-      </p:sp>
-      <p:sp>
-        <p:nvSpPr>
-          <p:cNvPr id="35" name="Shape 33"/>
-          <p:cNvSpPr/>
-          <p:nvPr/>
-        </p:nvSpPr>
-        <p:spPr>
-          <a:xfrm>
             <a:off x="1874520" y="4096512"/>
-            <a:ext cx="6903720" cy="658368"/>
-          </a:xfrm>
-          <a:prstGeom prst="rect">
-            <a:avLst>
-              <a:gd name="adj" fmla="val 8333"/>
-            </a:avLst>
-          </a:prstGeom>
-          <a:solidFill>
-            <a:srgbClr val="F8FAFC"/>
-          </a:solidFill>
-          <a:ln w="12700">
-            <a:solidFill>
-              <a:srgbClr val="E2E8F0"/>
-            </a:solidFill>
-            <a:prstDash val="dash"/>
-          </a:ln>
-        </p:spPr>
-      </p:sp>
-      <p:sp>
-        <p:nvSpPr>
-          <p:cNvPr id="36" name="Text 34"/>
-          <p:cNvSpPr/>
-          <p:nvPr/>
-        </p:nvSpPr>
-        <p:spPr>
-          <a:xfrm>
-            <a:off x="1874520" y="4096512"/>
-            <a:ext cx="6903720" cy="658368"/>
+            <a:ext cx="6903720" cy="804672"/>
           </a:xfrm>
           <a:prstGeom prst="rect">
             <a:avLst/>
@@ -20829,7 +20670,7 @@
                 <a:ea typeface="Trebuchet MS" pitchFamily="34" charset="-122"/>
                 <a:cs typeface="Trebuchet MS" pitchFamily="34" charset="-120"/>
               </a:rPr>
-              <a:t>powerful</a:t>
+              <a:t>hopeful</a:t>
             </a:r>
             <a:endParaRPr lang="en-US" sz="2800" dirty="0"/>
           </a:p>
@@ -20968,7 +20809,7 @@
                 <a:ea typeface="Trebuchet MS" pitchFamily="34" charset="-122"/>
                 <a:cs typeface="Trebuchet MS" pitchFamily="34" charset="-120"/>
               </a:rPr>
-              <a:t>power</a:t>
+              <a:t>hope</a:t>
             </a:r>
             <a:endParaRPr lang="en-US" sz="1300" dirty="0"/>
           </a:p>
@@ -21007,7 +20848,7 @@
                 <a:ea typeface="Calibri" pitchFamily="34" charset="-122"/>
                 <a:cs typeface="Calibri" pitchFamily="34" charset="-120"/>
               </a:rPr>
-              <a:t>great strength or force</a:t>
+              <a:t>to wish for something good</a:t>
             </a:r>
             <a:endParaRPr lang="en-US" sz="850" dirty="0"/>
           </a:p>
@@ -21015,7 +20856,46 @@
       </p:sp>
       <p:sp>
         <p:nvSpPr>
-          <p:cNvPr id="19" name="Shape 17"/>
+          <p:cNvPr id="19" name="Text 17"/>
+          <p:cNvSpPr/>
+          <p:nvPr/>
+        </p:nvSpPr>
+        <p:spPr>
+          <a:xfrm>
+            <a:off x="2938272" y="2752344"/>
+            <a:ext cx="1828800" cy="182880"/>
+          </a:xfrm>
+          <a:prstGeom prst="rect">
+            <a:avLst/>
+          </a:prstGeom>
+          <a:noFill/>
+          <a:ln/>
+        </p:spPr>
+        <p:txBody>
+          <a:bodyPr wrap="square" lIns="0" tIns="0" rIns="0" bIns="0" rtlCol="0" anchor="t"/>
+          <a:lstStyle/>
+          <a:p>
+            <a:pPr algn="ctr" indent="0" marL="0">
+              <a:buNone/>
+            </a:pPr>
+            <a:r>
+              <a:rPr lang="en-US" sz="700" i="1" dirty="0">
+                <a:solidFill>
+                  <a:srgbClr val="94A3B8"/>
+                </a:solidFill>
+                <a:latin typeface="Calibri" pitchFamily="34" charset="0"/>
+                <a:ea typeface="Calibri" pitchFamily="34" charset="-122"/>
+                <a:cs typeface="Calibri" pitchFamily="34" charset="-120"/>
+              </a:rPr>
+              <a:t>'e' kept before consonant suffix</a:t>
+            </a:r>
+            <a:endParaRPr lang="en-US" sz="700" dirty="0"/>
+          </a:p>
+        </p:txBody>
+      </p:sp>
+      <p:sp>
+        <p:nvSpPr>
+          <p:cNvPr id="20" name="Shape 18"/>
           <p:cNvSpPr/>
           <p:nvPr/>
         </p:nvSpPr>
@@ -21049,7 +20929,7 @@
       </p:sp>
       <p:sp>
         <p:nvSpPr>
-          <p:cNvPr id="20" name="Text 18"/>
+          <p:cNvPr id="21" name="Text 19"/>
           <p:cNvSpPr/>
           <p:nvPr/>
         </p:nvSpPr>
@@ -21088,7 +20968,7 @@
       </p:sp>
       <p:sp>
         <p:nvSpPr>
-          <p:cNvPr id="21" name="Text 19"/>
+          <p:cNvPr id="22" name="Text 20"/>
           <p:cNvSpPr/>
           <p:nvPr/>
         </p:nvSpPr>
@@ -21127,7 +21007,7 @@
       </p:sp>
       <p:sp>
         <p:nvSpPr>
-          <p:cNvPr id="22" name="Shape 20"/>
+          <p:cNvPr id="23" name="Shape 21"/>
           <p:cNvSpPr/>
           <p:nvPr/>
         </p:nvSpPr>
@@ -21154,7 +21034,7 @@
       </p:sp>
       <p:sp>
         <p:nvSpPr>
-          <p:cNvPr id="23" name="Text 21"/>
+          <p:cNvPr id="24" name="Text 22"/>
           <p:cNvSpPr/>
           <p:nvPr/>
         </p:nvSpPr>
@@ -21193,7 +21073,7 @@
       </p:sp>
       <p:sp>
         <p:nvSpPr>
-          <p:cNvPr id="24" name="Shape 22"/>
+          <p:cNvPr id="25" name="Shape 23"/>
           <p:cNvSpPr/>
           <p:nvPr/>
         </p:nvSpPr>
@@ -21220,13 +21100,13 @@
       </p:sp>
       <p:sp>
         <p:nvSpPr>
-          <p:cNvPr id="25" name="Shape 23"/>
-          <p:cNvSpPr/>
-          <p:nvPr/>
-        </p:nvSpPr>
-        <p:spPr>
-          <a:xfrm>
-            <a:off x="2313432" y="3364992"/>
+          <p:cNvPr id="26" name="Shape 24"/>
+          <p:cNvSpPr/>
+          <p:nvPr/>
+        </p:nvSpPr>
+        <p:spPr>
+          <a:xfrm>
+            <a:off x="2999232" y="3364992"/>
             <a:ext cx="1645920" cy="475488"/>
           </a:xfrm>
           <a:prstGeom prst="rect">
@@ -21247,13 +21127,13 @@
       </p:sp>
       <p:sp>
         <p:nvSpPr>
-          <p:cNvPr id="26" name="Text 24"/>
-          <p:cNvSpPr/>
-          <p:nvPr/>
-        </p:nvSpPr>
-        <p:spPr>
-          <a:xfrm>
-            <a:off x="2313432" y="3364992"/>
+          <p:cNvPr id="27" name="Text 25"/>
+          <p:cNvSpPr/>
+          <p:nvPr/>
+        </p:nvSpPr>
+        <p:spPr>
+          <a:xfrm>
+            <a:off x="2999232" y="3364992"/>
             <a:ext cx="1645920" cy="475488"/>
           </a:xfrm>
           <a:prstGeom prst="rect">
@@ -21278,7 +21158,7 @@
                 <a:ea typeface="Trebuchet MS" pitchFamily="34" charset="-122"/>
                 <a:cs typeface="Trebuchet MS" pitchFamily="34" charset="-120"/>
               </a:rPr>
-              <a:t>pow</a:t>
+              <a:t>hope</a:t>
             </a:r>
             <a:endParaRPr lang="en-US" sz="1400" dirty="0"/>
           </a:p>
@@ -21286,14 +21166,14 @@
       </p:sp>
       <p:sp>
         <p:nvSpPr>
-          <p:cNvPr id="27" name="Text 25"/>
-          <p:cNvSpPr/>
-          <p:nvPr/>
-        </p:nvSpPr>
-        <p:spPr>
-          <a:xfrm>
-            <a:off x="3959352" y="3364992"/>
-            <a:ext cx="411480" cy="475488"/>
+          <p:cNvPr id="28" name="Text 26"/>
+          <p:cNvSpPr/>
+          <p:nvPr/>
+        </p:nvSpPr>
+        <p:spPr>
+          <a:xfrm>
+            <a:off x="4645152" y="3364992"/>
+            <a:ext cx="1097280" cy="475488"/>
           </a:xfrm>
           <a:prstGeom prst="rect">
             <a:avLst/>
@@ -21325,13 +21205,13 @@
       </p:sp>
       <p:sp>
         <p:nvSpPr>
-          <p:cNvPr id="28" name="Shape 26"/>
-          <p:cNvSpPr/>
-          <p:nvPr/>
-        </p:nvSpPr>
-        <p:spPr>
-          <a:xfrm>
-            <a:off x="4370832" y="3364992"/>
+          <p:cNvPr id="29" name="Shape 27"/>
+          <p:cNvSpPr/>
+          <p:nvPr/>
+        </p:nvSpPr>
+        <p:spPr>
+          <a:xfrm>
+            <a:off x="5742432" y="3364992"/>
             <a:ext cx="1645920" cy="475488"/>
           </a:xfrm>
           <a:prstGeom prst="rect">
@@ -21352,13 +21232,13 @@
       </p:sp>
       <p:sp>
         <p:nvSpPr>
-          <p:cNvPr id="29" name="Text 27"/>
-          <p:cNvSpPr/>
-          <p:nvPr/>
-        </p:nvSpPr>
-        <p:spPr>
-          <a:xfrm>
-            <a:off x="4370832" y="3364992"/>
+          <p:cNvPr id="30" name="Text 28"/>
+          <p:cNvSpPr/>
+          <p:nvPr/>
+        </p:nvSpPr>
+        <p:spPr>
+          <a:xfrm>
+            <a:off x="5742432" y="3364992"/>
             <a:ext cx="1645920" cy="475488"/>
           </a:xfrm>
           <a:prstGeom prst="rect">
@@ -21383,7 +21263,7 @@
                 <a:ea typeface="Trebuchet MS" pitchFamily="34" charset="-122"/>
                 <a:cs typeface="Trebuchet MS" pitchFamily="34" charset="-120"/>
               </a:rPr>
-              <a:t>er</a:t>
+              <a:t>ful</a:t>
             </a:r>
             <a:endParaRPr lang="en-US" sz="1400" dirty="0"/>
           </a:p>
@@ -21391,14 +21271,41 @@
       </p:sp>
       <p:sp>
         <p:nvSpPr>
-          <p:cNvPr id="30" name="Text 28"/>
-          <p:cNvSpPr/>
-          <p:nvPr/>
-        </p:nvSpPr>
-        <p:spPr>
-          <a:xfrm>
-            <a:off x="6016752" y="3364992"/>
-            <a:ext cx="411480" cy="475488"/>
+          <p:cNvPr id="31" name="Shape 29"/>
+          <p:cNvSpPr/>
+          <p:nvPr/>
+        </p:nvSpPr>
+        <p:spPr>
+          <a:xfrm>
+            <a:off x="365760" y="4096512"/>
+            <a:ext cx="1371600" cy="804672"/>
+          </a:xfrm>
+          <a:prstGeom prst="rect">
+            <a:avLst>
+              <a:gd name="adj" fmla="val 6818"/>
+            </a:avLst>
+          </a:prstGeom>
+          <a:solidFill>
+            <a:srgbClr val="E2E8F0"/>
+          </a:solidFill>
+          <a:ln w="12700">
+            <a:solidFill>
+              <a:srgbClr val="E2E8F0"/>
+            </a:solidFill>
+            <a:prstDash val="solid"/>
+          </a:ln>
+        </p:spPr>
+      </p:sp>
+      <p:sp>
+        <p:nvSpPr>
+          <p:cNvPr id="32" name="Text 30"/>
+          <p:cNvSpPr/>
+          <p:nvPr/>
+        </p:nvSpPr>
+        <p:spPr>
+          <a:xfrm>
+            <a:off x="365760" y="4096512"/>
+            <a:ext cx="1371600" cy="804672"/>
           </a:xfrm>
           <a:prstGeom prst="rect">
             <a:avLst/>
@@ -21414,57 +21321,84 @@
               <a:buNone/>
             </a:pPr>
             <a:r>
-              <a:rPr lang="en-US" sz="1600" b="1" dirty="0">
-                <a:solidFill>
-                  <a:srgbClr val="0D9488"/>
+              <a:rPr lang="en-US" sz="1100" b="1" dirty="0">
+                <a:solidFill>
+                  <a:srgbClr val="475569"/>
                 </a:solidFill>
                 <a:latin typeface="Trebuchet MS" pitchFamily="34" charset="0"/>
                 <a:ea typeface="Trebuchet MS" pitchFamily="34" charset="-122"/>
                 <a:cs typeface="Trebuchet MS" pitchFamily="34" charset="-120"/>
               </a:rPr>
-              <a:t>·</a:t>
-            </a:r>
-            <a:endParaRPr lang="en-US" sz="1600" dirty="0"/>
-          </a:p>
-        </p:txBody>
-      </p:sp>
-      <p:sp>
-        <p:nvSpPr>
-          <p:cNvPr id="31" name="Shape 29"/>
-          <p:cNvSpPr/>
-          <p:nvPr/>
-        </p:nvSpPr>
-        <p:spPr>
-          <a:xfrm>
-            <a:off x="6428232" y="3364992"/>
-            <a:ext cx="1645920" cy="475488"/>
+              <a:t>Phonemes</a:t>
+            </a:r>
+            <a:endParaRPr lang="en-US" sz="1100" dirty="0"/>
+          </a:p>
+        </p:txBody>
+      </p:sp>
+      <p:sp>
+        <p:nvSpPr>
+          <p:cNvPr id="33" name="Shape 31"/>
+          <p:cNvSpPr/>
+          <p:nvPr/>
+        </p:nvSpPr>
+        <p:spPr>
+          <a:xfrm>
+            <a:off x="1874520" y="4096512"/>
+            <a:ext cx="6903720" cy="658368"/>
           </a:xfrm>
           <a:prstGeom prst="rect">
             <a:avLst>
-              <a:gd name="adj" fmla="val 9615"/>
+              <a:gd name="adj" fmla="val 8333"/>
             </a:avLst>
           </a:prstGeom>
           <a:solidFill>
+            <a:srgbClr val="FCE7F3"/>
+          </a:solidFill>
+          <a:ln w="12700">
+            <a:solidFill>
+              <a:srgbClr val="DB2777"/>
+            </a:solidFill>
+            <a:prstDash val="solid"/>
+          </a:ln>
+        </p:spPr>
+      </p:sp>
+      <p:sp>
+        <p:nvSpPr>
+          <p:cNvPr id="34" name="Shape 32"/>
+          <p:cNvSpPr/>
+          <p:nvPr/>
+        </p:nvSpPr>
+        <p:spPr>
+          <a:xfrm>
+            <a:off x="2124837" y="4169664"/>
+            <a:ext cx="685800" cy="475488"/>
+          </a:xfrm>
+          <a:prstGeom prst="rect">
+            <a:avLst>
+              <a:gd name="adj" fmla="val 7692"/>
+            </a:avLst>
+          </a:prstGeom>
+          <a:solidFill>
             <a:srgbClr val="FFFFFF"/>
           </a:solidFill>
           <a:ln w="12700">
             <a:solidFill>
-              <a:srgbClr val="0D9488"/>
-            </a:solidFill>
-            <a:prstDash val="solid"/>
-          </a:ln>
-        </p:spPr>
-      </p:sp>
-      <p:sp>
-        <p:nvSpPr>
-          <p:cNvPr id="32" name="Text 30"/>
-          <p:cNvSpPr/>
-          <p:nvPr/>
-        </p:nvSpPr>
-        <p:spPr>
-          <a:xfrm>
-            <a:off x="6428232" y="3364992"/>
-            <a:ext cx="1645920" cy="475488"/>
+              <a:srgbClr val="DB2777"/>
+            </a:solidFill>
+            <a:prstDash val="solid"/>
+          </a:ln>
+        </p:spPr>
+      </p:sp>
+      <p:sp>
+        <p:nvSpPr>
+          <p:cNvPr id="35" name="Text 33"/>
+          <p:cNvSpPr/>
+          <p:nvPr/>
+        </p:nvSpPr>
+        <p:spPr>
+          <a:xfrm>
+            <a:off x="2124837" y="4169664"/>
+            <a:ext cx="685800" cy="475488"/>
           </a:xfrm>
           <a:prstGeom prst="rect">
             <a:avLst/>
@@ -21480,57 +21414,57 @@
               <a:buNone/>
             </a:pPr>
             <a:r>
-              <a:rPr lang="en-US" sz="1400" b="1" dirty="0">
-                <a:solidFill>
-                  <a:srgbClr val="0D9488"/>
+              <a:rPr lang="en-US" sz="900" b="1" dirty="0">
+                <a:solidFill>
+                  <a:srgbClr val="9D174D"/>
                 </a:solidFill>
                 <a:latin typeface="Trebuchet MS" pitchFamily="34" charset="0"/>
                 <a:ea typeface="Trebuchet MS" pitchFamily="34" charset="-122"/>
                 <a:cs typeface="Trebuchet MS" pitchFamily="34" charset="-120"/>
               </a:rPr>
-              <a:t>ful</a:t>
-            </a:r>
-            <a:endParaRPr lang="en-US" sz="1400" dirty="0"/>
-          </a:p>
-        </p:txBody>
-      </p:sp>
-      <p:sp>
-        <p:nvSpPr>
-          <p:cNvPr id="33" name="Shape 31"/>
-          <p:cNvSpPr/>
-          <p:nvPr/>
-        </p:nvSpPr>
-        <p:spPr>
-          <a:xfrm>
-            <a:off x="365760" y="4096512"/>
-            <a:ext cx="1371600" cy="658368"/>
+              <a:t>h</a:t>
+            </a:r>
+            <a:endParaRPr lang="en-US" sz="900" dirty="0"/>
+          </a:p>
+        </p:txBody>
+      </p:sp>
+      <p:sp>
+        <p:nvSpPr>
+          <p:cNvPr id="36" name="Shape 34"/>
+          <p:cNvSpPr/>
+          <p:nvPr/>
+        </p:nvSpPr>
+        <p:spPr>
+          <a:xfrm>
+            <a:off x="3033522" y="4169664"/>
+            <a:ext cx="685800" cy="475488"/>
           </a:xfrm>
           <a:prstGeom prst="rect">
             <a:avLst>
-              <a:gd name="adj" fmla="val 8333"/>
+              <a:gd name="adj" fmla="val 7692"/>
             </a:avLst>
           </a:prstGeom>
           <a:solidFill>
-            <a:srgbClr val="E2E8F0"/>
-          </a:solidFill>
-          <a:ln w="12700">
-            <a:solidFill>
-              <a:srgbClr val="E2E8F0"/>
-            </a:solidFill>
-            <a:prstDash val="solid"/>
-          </a:ln>
-        </p:spPr>
-      </p:sp>
-      <p:sp>
-        <p:nvSpPr>
-          <p:cNvPr id="34" name="Text 32"/>
-          <p:cNvSpPr/>
-          <p:nvPr/>
-        </p:nvSpPr>
-        <p:spPr>
-          <a:xfrm>
-            <a:off x="365760" y="4096512"/>
-            <a:ext cx="1371600" cy="658368"/>
+            <a:srgbClr val="FFFFFF"/>
+          </a:solidFill>
+          <a:ln w="12700">
+            <a:solidFill>
+              <a:srgbClr val="DB2777"/>
+            </a:solidFill>
+            <a:prstDash val="solid"/>
+          </a:ln>
+        </p:spPr>
+      </p:sp>
+      <p:sp>
+        <p:nvSpPr>
+          <p:cNvPr id="37" name="Text 35"/>
+          <p:cNvSpPr/>
+          <p:nvPr/>
+        </p:nvSpPr>
+        <p:spPr>
+          <a:xfrm>
+            <a:off x="3033522" y="4169664"/>
+            <a:ext cx="685800" cy="475488"/>
           </a:xfrm>
           <a:prstGeom prst="rect">
             <a:avLst/>
@@ -21546,56 +21480,29 @@
               <a:buNone/>
             </a:pPr>
             <a:r>
-              <a:rPr lang="en-US" sz="1100" b="1" dirty="0">
-                <a:solidFill>
-                  <a:srgbClr val="475569"/>
+              <a:rPr lang="en-US" sz="900" b="1" dirty="0">
+                <a:solidFill>
+                  <a:srgbClr val="9D174D"/>
                 </a:solidFill>
                 <a:latin typeface="Trebuchet MS" pitchFamily="34" charset="0"/>
                 <a:ea typeface="Trebuchet MS" pitchFamily="34" charset="-122"/>
                 <a:cs typeface="Trebuchet MS" pitchFamily="34" charset="-120"/>
               </a:rPr>
-              <a:t>Phonemes</a:t>
-            </a:r>
-            <a:endParaRPr lang="en-US" sz="1100" dirty="0"/>
-          </a:p>
-        </p:txBody>
-      </p:sp>
-      <p:sp>
-        <p:nvSpPr>
-          <p:cNvPr id="35" name="Shape 33"/>
-          <p:cNvSpPr/>
-          <p:nvPr/>
-        </p:nvSpPr>
-        <p:spPr>
-          <a:xfrm>
-            <a:off x="1874520" y="4096512"/>
-            <a:ext cx="6903720" cy="658368"/>
-          </a:xfrm>
-          <a:prstGeom prst="rect">
-            <a:avLst>
-              <a:gd name="adj" fmla="val 8333"/>
-            </a:avLst>
-          </a:prstGeom>
-          <a:solidFill>
-            <a:srgbClr val="FCE7F3"/>
-          </a:solidFill>
-          <a:ln w="12700">
-            <a:solidFill>
-              <a:srgbClr val="DB2777"/>
-            </a:solidFill>
-            <a:prstDash val="solid"/>
-          </a:ln>
-        </p:spPr>
-      </p:sp>
-      <p:sp>
-        <p:nvSpPr>
-          <p:cNvPr id="36" name="Shape 34"/>
-          <p:cNvSpPr/>
-          <p:nvPr/>
-        </p:nvSpPr>
-        <p:spPr>
-          <a:xfrm>
-            <a:off x="2254649" y="4187952"/>
+              <a:t>o</a:t>
+            </a:r>
+            <a:endParaRPr lang="en-US" sz="900" dirty="0"/>
+          </a:p>
+        </p:txBody>
+      </p:sp>
+      <p:sp>
+        <p:nvSpPr>
+          <p:cNvPr id="38" name="Shape 36"/>
+          <p:cNvSpPr/>
+          <p:nvPr/>
+        </p:nvSpPr>
+        <p:spPr>
+          <a:xfrm>
+            <a:off x="3942207" y="4169664"/>
             <a:ext cx="685800" cy="475488"/>
           </a:xfrm>
           <a:prstGeom prst="rect">
@@ -21616,13 +21523,13 @@
       </p:sp>
       <p:sp>
         <p:nvSpPr>
-          <p:cNvPr id="37" name="Text 35"/>
-          <p:cNvSpPr/>
-          <p:nvPr/>
-        </p:nvSpPr>
-        <p:spPr>
-          <a:xfrm>
-            <a:off x="2254649" y="4187952"/>
+          <p:cNvPr id="39" name="Text 37"/>
+          <p:cNvSpPr/>
+          <p:nvPr/>
+        </p:nvSpPr>
+        <p:spPr>
+          <a:xfrm>
+            <a:off x="3942207" y="4169664"/>
             <a:ext cx="685800" cy="475488"/>
           </a:xfrm>
           <a:prstGeom prst="rect">
@@ -21655,13 +21562,13 @@
       </p:sp>
       <p:sp>
         <p:nvSpPr>
-          <p:cNvPr id="38" name="Shape 36"/>
-          <p:cNvSpPr/>
-          <p:nvPr/>
-        </p:nvSpPr>
-        <p:spPr>
-          <a:xfrm>
-            <a:off x="3293146" y="4187952"/>
+          <p:cNvPr id="40" name="Shape 38"/>
+          <p:cNvSpPr/>
+          <p:nvPr/>
+        </p:nvSpPr>
+        <p:spPr>
+          <a:xfrm>
+            <a:off x="4850892" y="4169664"/>
             <a:ext cx="685800" cy="475488"/>
           </a:xfrm>
           <a:prstGeom prst="rect">
@@ -21682,13 +21589,13 @@
       </p:sp>
       <p:sp>
         <p:nvSpPr>
-          <p:cNvPr id="39" name="Text 37"/>
-          <p:cNvSpPr/>
-          <p:nvPr/>
-        </p:nvSpPr>
-        <p:spPr>
-          <a:xfrm>
-            <a:off x="3293146" y="4187952"/>
+          <p:cNvPr id="41" name="Text 39"/>
+          <p:cNvSpPr/>
+          <p:nvPr/>
+        </p:nvSpPr>
+        <p:spPr>
+          <a:xfrm>
+            <a:off x="4850892" y="4169664"/>
             <a:ext cx="685800" cy="475488"/>
           </a:xfrm>
           <a:prstGeom prst="rect">
@@ -21713,7 +21620,7 @@
                 <a:ea typeface="Trebuchet MS" pitchFamily="34" charset="-122"/>
                 <a:cs typeface="Trebuchet MS" pitchFamily="34" charset="-120"/>
               </a:rPr>
-              <a:t>ow</a:t>
+              <a:t>e</a:t>
             </a:r>
             <a:endParaRPr lang="en-US" sz="900" dirty="0"/>
           </a:p>
@@ -21721,13 +21628,13 @@
       </p:sp>
       <p:sp>
         <p:nvSpPr>
-          <p:cNvPr id="40" name="Shape 38"/>
-          <p:cNvSpPr/>
-          <p:nvPr/>
-        </p:nvSpPr>
-        <p:spPr>
-          <a:xfrm>
-            <a:off x="4331643" y="4187952"/>
+          <p:cNvPr id="42" name="Shape 40"/>
+          <p:cNvSpPr/>
+          <p:nvPr/>
+        </p:nvSpPr>
+        <p:spPr>
+          <a:xfrm>
+            <a:off x="5759577" y="4169664"/>
             <a:ext cx="685800" cy="475488"/>
           </a:xfrm>
           <a:prstGeom prst="rect">
@@ -21748,13 +21655,13 @@
       </p:sp>
       <p:sp>
         <p:nvSpPr>
-          <p:cNvPr id="41" name="Text 39"/>
-          <p:cNvSpPr/>
-          <p:nvPr/>
-        </p:nvSpPr>
-        <p:spPr>
-          <a:xfrm>
-            <a:off x="4331643" y="4187952"/>
+          <p:cNvPr id="43" name="Text 41"/>
+          <p:cNvSpPr/>
+          <p:nvPr/>
+        </p:nvSpPr>
+        <p:spPr>
+          <a:xfrm>
+            <a:off x="5759577" y="4169664"/>
             <a:ext cx="685800" cy="475488"/>
           </a:xfrm>
           <a:prstGeom prst="rect">
@@ -21779,7 +21686,7 @@
                 <a:ea typeface="Trebuchet MS" pitchFamily="34" charset="-122"/>
                 <a:cs typeface="Trebuchet MS" pitchFamily="34" charset="-120"/>
               </a:rPr>
-              <a:t>er</a:t>
+              <a:t>f</a:t>
             </a:r>
             <a:endParaRPr lang="en-US" sz="900" dirty="0"/>
           </a:p>
@@ -21787,13 +21694,13 @@
       </p:sp>
       <p:sp>
         <p:nvSpPr>
-          <p:cNvPr id="42" name="Shape 40"/>
-          <p:cNvSpPr/>
-          <p:nvPr/>
-        </p:nvSpPr>
-        <p:spPr>
-          <a:xfrm>
-            <a:off x="5370141" y="4187952"/>
+          <p:cNvPr id="44" name="Shape 42"/>
+          <p:cNvSpPr/>
+          <p:nvPr/>
+        </p:nvSpPr>
+        <p:spPr>
+          <a:xfrm>
+            <a:off x="6668262" y="4169664"/>
             <a:ext cx="685800" cy="475488"/>
           </a:xfrm>
           <a:prstGeom prst="rect">
@@ -21814,13 +21721,13 @@
       </p:sp>
       <p:sp>
         <p:nvSpPr>
-          <p:cNvPr id="43" name="Text 41"/>
-          <p:cNvSpPr/>
-          <p:nvPr/>
-        </p:nvSpPr>
-        <p:spPr>
-          <a:xfrm>
-            <a:off x="5370141" y="4187952"/>
+          <p:cNvPr id="45" name="Text 43"/>
+          <p:cNvSpPr/>
+          <p:nvPr/>
+        </p:nvSpPr>
+        <p:spPr>
+          <a:xfrm>
+            <a:off x="6668262" y="4169664"/>
             <a:ext cx="685800" cy="475488"/>
           </a:xfrm>
           <a:prstGeom prst="rect">
@@ -21845,7 +21752,7 @@
                 <a:ea typeface="Trebuchet MS" pitchFamily="34" charset="-122"/>
                 <a:cs typeface="Trebuchet MS" pitchFamily="34" charset="-120"/>
               </a:rPr>
-              <a:t>f</a:t>
+              <a:t>u</a:t>
             </a:r>
             <a:endParaRPr lang="en-US" sz="900" dirty="0"/>
           </a:p>
@@ -21853,13 +21760,13 @@
       </p:sp>
       <p:sp>
         <p:nvSpPr>
-          <p:cNvPr id="44" name="Shape 42"/>
-          <p:cNvSpPr/>
-          <p:nvPr/>
-        </p:nvSpPr>
-        <p:spPr>
-          <a:xfrm>
-            <a:off x="6408638" y="4187952"/>
+          <p:cNvPr id="46" name="Shape 44"/>
+          <p:cNvSpPr/>
+          <p:nvPr/>
+        </p:nvSpPr>
+        <p:spPr>
+          <a:xfrm>
+            <a:off x="7576947" y="4169664"/>
             <a:ext cx="685800" cy="475488"/>
           </a:xfrm>
           <a:prstGeom prst="rect">
@@ -21880,79 +21787,13 @@
       </p:sp>
       <p:sp>
         <p:nvSpPr>
-          <p:cNvPr id="45" name="Text 43"/>
-          <p:cNvSpPr/>
-          <p:nvPr/>
-        </p:nvSpPr>
-        <p:spPr>
-          <a:xfrm>
-            <a:off x="6408638" y="4187952"/>
-            <a:ext cx="685800" cy="475488"/>
-          </a:xfrm>
-          <a:prstGeom prst="rect">
-            <a:avLst/>
-          </a:prstGeom>
-          <a:noFill/>
-          <a:ln/>
-        </p:spPr>
-        <p:txBody>
-          <a:bodyPr wrap="square" lIns="0" tIns="0" rIns="0" bIns="0" rtlCol="0" anchor="ctr"/>
-          <a:lstStyle/>
-          <a:p>
-            <a:pPr algn="ctr" indent="0" marL="0">
-              <a:buNone/>
-            </a:pPr>
-            <a:r>
-              <a:rPr lang="en-US" sz="900" b="1" dirty="0">
-                <a:solidFill>
-                  <a:srgbClr val="9D174D"/>
-                </a:solidFill>
-                <a:latin typeface="Trebuchet MS" pitchFamily="34" charset="0"/>
-                <a:ea typeface="Trebuchet MS" pitchFamily="34" charset="-122"/>
-                <a:cs typeface="Trebuchet MS" pitchFamily="34" charset="-120"/>
-              </a:rPr>
-              <a:t>u</a:t>
-            </a:r>
-            <a:endParaRPr lang="en-US" sz="900" dirty="0"/>
-          </a:p>
-        </p:txBody>
-      </p:sp>
-      <p:sp>
-        <p:nvSpPr>
-          <p:cNvPr id="46" name="Shape 44"/>
-          <p:cNvSpPr/>
-          <p:nvPr/>
-        </p:nvSpPr>
-        <p:spPr>
-          <a:xfrm>
-            <a:off x="7447135" y="4187952"/>
-            <a:ext cx="685800" cy="475488"/>
-          </a:xfrm>
-          <a:prstGeom prst="rect">
-            <a:avLst>
-              <a:gd name="adj" fmla="val 7692"/>
-            </a:avLst>
-          </a:prstGeom>
-          <a:solidFill>
-            <a:srgbClr val="FFFFFF"/>
-          </a:solidFill>
-          <a:ln w="12700">
-            <a:solidFill>
-              <a:srgbClr val="DB2777"/>
-            </a:solidFill>
-            <a:prstDash val="solid"/>
-          </a:ln>
-        </p:spPr>
-      </p:sp>
-      <p:sp>
-        <p:nvSpPr>
           <p:cNvPr id="47" name="Text 45"/>
           <p:cNvSpPr/>
           <p:nvPr/>
         </p:nvSpPr>
         <p:spPr>
           <a:xfrm>
-            <a:off x="7447135" y="4187952"/>
+            <a:off x="7576947" y="4169664"/>
             <a:ext cx="685800" cy="475488"/>
           </a:xfrm>
           <a:prstGeom prst="rect">
@@ -22408,7 +22249,7 @@
                 <a:ea typeface="Trebuchet MS" pitchFamily="34" charset="-122"/>
                 <a:cs typeface="Trebuchet MS" pitchFamily="34" charset="-120"/>
               </a:rPr>
-              <a:t>cheerful</a:t>
+              <a:t>careful</a:t>
             </a:r>
             <a:endParaRPr lang="en-US" sz="2800" dirty="0"/>
           </a:p>
@@ -22687,11 +22528,11 @@
         <p:spPr>
           <a:xfrm>
             <a:off x="365760" y="4096512"/>
-            <a:ext cx="1371600" cy="658368"/>
+            <a:ext cx="1371600" cy="804672"/>
           </a:xfrm>
           <a:prstGeom prst="rect">
             <a:avLst>
-              <a:gd name="adj" fmla="val 8333"/>
+              <a:gd name="adj" fmla="val 6818"/>
             </a:avLst>
           </a:prstGeom>
           <a:solidFill>
@@ -22714,7 +22555,7 @@
         <p:spPr>
           <a:xfrm>
             <a:off x="365760" y="4096512"/>
-            <a:ext cx="1371600" cy="658368"/>
+            <a:ext cx="1371600" cy="804672"/>
           </a:xfrm>
           <a:prstGeom prst="rect">
             <a:avLst/>
@@ -22753,11 +22594,11 @@
         <p:spPr>
           <a:xfrm>
             <a:off x="1874520" y="4096512"/>
-            <a:ext cx="6903720" cy="658368"/>
+            <a:ext cx="6903720" cy="804672"/>
           </a:xfrm>
           <a:prstGeom prst="rect">
             <a:avLst>
-              <a:gd name="adj" fmla="val 8333"/>
+              <a:gd name="adj" fmla="val 6818"/>
             </a:avLst>
           </a:prstGeom>
           <a:solidFill>
@@ -22780,7 +22621,7 @@
         <p:spPr>
           <a:xfrm>
             <a:off x="1874520" y="4096512"/>
-            <a:ext cx="6903720" cy="658368"/>
+            <a:ext cx="6903720" cy="804672"/>
           </a:xfrm>
           <a:prstGeom prst="rect">
             <a:avLst/>
@@ -23235,7 +23076,7 @@
                 <a:ea typeface="Trebuchet MS" pitchFamily="34" charset="-122"/>
                 <a:cs typeface="Trebuchet MS" pitchFamily="34" charset="-120"/>
               </a:rPr>
-              <a:t>cheerful</a:t>
+              <a:t>careful</a:t>
             </a:r>
             <a:endParaRPr lang="en-US" sz="2800" dirty="0"/>
           </a:p>
@@ -23374,7 +23215,7 @@
                 <a:ea typeface="Trebuchet MS" pitchFamily="34" charset="-122"/>
                 <a:cs typeface="Trebuchet MS" pitchFamily="34" charset="-120"/>
               </a:rPr>
-              <a:t>cheer</a:t>
+              <a:t>care</a:t>
             </a:r>
             <a:endParaRPr lang="en-US" sz="1300" dirty="0"/>
           </a:p>
@@ -23413,7 +23254,7 @@
                 <a:ea typeface="Calibri" pitchFamily="34" charset="-122"/>
                 <a:cs typeface="Calibri" pitchFamily="34" charset="-120"/>
               </a:rPr>
-              <a:t>happiness, gladness</a:t>
+              <a:t>to pay close attention</a:t>
             </a:r>
             <a:endParaRPr lang="en-US" sz="850" dirty="0"/>
           </a:p>
@@ -23421,7 +23262,46 @@
       </p:sp>
       <p:sp>
         <p:nvSpPr>
-          <p:cNvPr id="19" name="Shape 17"/>
+          <p:cNvPr id="19" name="Text 17"/>
+          <p:cNvSpPr/>
+          <p:nvPr/>
+        </p:nvSpPr>
+        <p:spPr>
+          <a:xfrm>
+            <a:off x="2938272" y="2752344"/>
+            <a:ext cx="1828800" cy="182880"/>
+          </a:xfrm>
+          <a:prstGeom prst="rect">
+            <a:avLst/>
+          </a:prstGeom>
+          <a:noFill/>
+          <a:ln/>
+        </p:spPr>
+        <p:txBody>
+          <a:bodyPr wrap="square" lIns="0" tIns="0" rIns="0" bIns="0" rtlCol="0" anchor="t"/>
+          <a:lstStyle/>
+          <a:p>
+            <a:pPr algn="ctr" indent="0" marL="0">
+              <a:buNone/>
+            </a:pPr>
+            <a:r>
+              <a:rPr lang="en-US" sz="700" i="1" dirty="0">
+                <a:solidFill>
+                  <a:srgbClr val="94A3B8"/>
+                </a:solidFill>
+                <a:latin typeface="Calibri" pitchFamily="34" charset="0"/>
+                <a:ea typeface="Calibri" pitchFamily="34" charset="-122"/>
+                <a:cs typeface="Calibri" pitchFamily="34" charset="-120"/>
+              </a:rPr>
+              <a:t>'e' kept before consonant suffix</a:t>
+            </a:r>
+            <a:endParaRPr lang="en-US" sz="700" dirty="0"/>
+          </a:p>
+        </p:txBody>
+      </p:sp>
+      <p:sp>
+        <p:nvSpPr>
+          <p:cNvPr id="20" name="Shape 18"/>
           <p:cNvSpPr/>
           <p:nvPr/>
         </p:nvSpPr>
@@ -23455,7 +23335,7 @@
       </p:sp>
       <p:sp>
         <p:nvSpPr>
-          <p:cNvPr id="20" name="Text 18"/>
+          <p:cNvPr id="21" name="Text 19"/>
           <p:cNvSpPr/>
           <p:nvPr/>
         </p:nvSpPr>
@@ -23494,7 +23374,7 @@
       </p:sp>
       <p:sp>
         <p:nvSpPr>
-          <p:cNvPr id="21" name="Text 19"/>
+          <p:cNvPr id="22" name="Text 20"/>
           <p:cNvSpPr/>
           <p:nvPr/>
         </p:nvSpPr>
@@ -23533,7 +23413,7 @@
       </p:sp>
       <p:sp>
         <p:nvSpPr>
-          <p:cNvPr id="22" name="Shape 20"/>
+          <p:cNvPr id="23" name="Shape 21"/>
           <p:cNvSpPr/>
           <p:nvPr/>
         </p:nvSpPr>
@@ -23560,7 +23440,7 @@
       </p:sp>
       <p:sp>
         <p:nvSpPr>
-          <p:cNvPr id="23" name="Text 21"/>
+          <p:cNvPr id="24" name="Text 22"/>
           <p:cNvSpPr/>
           <p:nvPr/>
         </p:nvSpPr>
@@ -23599,7 +23479,7 @@
       </p:sp>
       <p:sp>
         <p:nvSpPr>
-          <p:cNvPr id="24" name="Shape 22"/>
+          <p:cNvPr id="25" name="Shape 23"/>
           <p:cNvSpPr/>
           <p:nvPr/>
         </p:nvSpPr>
@@ -23626,7 +23506,7 @@
       </p:sp>
       <p:sp>
         <p:nvSpPr>
-          <p:cNvPr id="25" name="Text 23"/>
+          <p:cNvPr id="26" name="Text 24"/>
           <p:cNvSpPr/>
           <p:nvPr/>
         </p:nvSpPr>
@@ -23665,18 +23545,18 @@
       </p:sp>
       <p:sp>
         <p:nvSpPr>
-          <p:cNvPr id="26" name="Shape 24"/>
+          <p:cNvPr id="27" name="Shape 25"/>
           <p:cNvSpPr/>
           <p:nvPr/>
         </p:nvSpPr>
         <p:spPr>
           <a:xfrm>
             <a:off x="365760" y="4096512"/>
-            <a:ext cx="1371600" cy="658368"/>
+            <a:ext cx="1371600" cy="804672"/>
           </a:xfrm>
           <a:prstGeom prst="rect">
             <a:avLst>
-              <a:gd name="adj" fmla="val 8333"/>
+              <a:gd name="adj" fmla="val 6818"/>
             </a:avLst>
           </a:prstGeom>
           <a:solidFill>
@@ -23692,14 +23572,14 @@
       </p:sp>
       <p:sp>
         <p:nvSpPr>
-          <p:cNvPr id="27" name="Text 25"/>
+          <p:cNvPr id="28" name="Text 26"/>
           <p:cNvSpPr/>
           <p:nvPr/>
         </p:nvSpPr>
         <p:spPr>
           <a:xfrm>
             <a:off x="365760" y="4096512"/>
-            <a:ext cx="1371600" cy="658368"/>
+            <a:ext cx="1371600" cy="804672"/>
           </a:xfrm>
           <a:prstGeom prst="rect">
             <a:avLst/>
@@ -23731,18 +23611,18 @@
       </p:sp>
       <p:sp>
         <p:nvSpPr>
-          <p:cNvPr id="28" name="Shape 26"/>
+          <p:cNvPr id="29" name="Shape 27"/>
           <p:cNvSpPr/>
           <p:nvPr/>
         </p:nvSpPr>
         <p:spPr>
           <a:xfrm>
             <a:off x="1874520" y="4096512"/>
-            <a:ext cx="6903720" cy="658368"/>
+            <a:ext cx="6903720" cy="804672"/>
           </a:xfrm>
           <a:prstGeom prst="rect">
             <a:avLst>
-              <a:gd name="adj" fmla="val 8333"/>
+              <a:gd name="adj" fmla="val 6818"/>
             </a:avLst>
           </a:prstGeom>
           <a:solidFill>
@@ -23758,14 +23638,14 @@
       </p:sp>
       <p:sp>
         <p:nvSpPr>
-          <p:cNvPr id="29" name="Text 27"/>
+          <p:cNvPr id="30" name="Text 28"/>
           <p:cNvSpPr/>
           <p:nvPr/>
         </p:nvSpPr>
         <p:spPr>
           <a:xfrm>
             <a:off x="1874520" y="4096512"/>
-            <a:ext cx="6903720" cy="658368"/>
+            <a:ext cx="6903720" cy="804672"/>
           </a:xfrm>
           <a:prstGeom prst="rect">
             <a:avLst/>
@@ -24939,7 +24819,7 @@
                 <a:ea typeface="Trebuchet MS" pitchFamily="34" charset="-122"/>
                 <a:cs typeface="Trebuchet MS" pitchFamily="34" charset="-120"/>
               </a:rPr>
-              <a:t>cheerful</a:t>
+              <a:t>careful</a:t>
             </a:r>
             <a:endParaRPr lang="en-US" sz="2800" dirty="0"/>
           </a:p>
@@ -25078,7 +24958,7 @@
                 <a:ea typeface="Trebuchet MS" pitchFamily="34" charset="-122"/>
                 <a:cs typeface="Trebuchet MS" pitchFamily="34" charset="-120"/>
               </a:rPr>
-              <a:t>cheer</a:t>
+              <a:t>care</a:t>
             </a:r>
             <a:endParaRPr lang="en-US" sz="1300" dirty="0"/>
           </a:p>
@@ -25117,7 +24997,7 @@
                 <a:ea typeface="Calibri" pitchFamily="34" charset="-122"/>
                 <a:cs typeface="Calibri" pitchFamily="34" charset="-120"/>
               </a:rPr>
-              <a:t>happiness, gladness</a:t>
+              <a:t>to pay close attention</a:t>
             </a:r>
             <a:endParaRPr lang="en-US" sz="850" dirty="0"/>
           </a:p>
@@ -25125,7 +25005,46 @@
       </p:sp>
       <p:sp>
         <p:nvSpPr>
-          <p:cNvPr id="19" name="Shape 17"/>
+          <p:cNvPr id="19" name="Text 17"/>
+          <p:cNvSpPr/>
+          <p:nvPr/>
+        </p:nvSpPr>
+        <p:spPr>
+          <a:xfrm>
+            <a:off x="2938272" y="2752344"/>
+            <a:ext cx="1828800" cy="182880"/>
+          </a:xfrm>
+          <a:prstGeom prst="rect">
+            <a:avLst/>
+          </a:prstGeom>
+          <a:noFill/>
+          <a:ln/>
+        </p:spPr>
+        <p:txBody>
+          <a:bodyPr wrap="square" lIns="0" tIns="0" rIns="0" bIns="0" rtlCol="0" anchor="t"/>
+          <a:lstStyle/>
+          <a:p>
+            <a:pPr algn="ctr" indent="0" marL="0">
+              <a:buNone/>
+            </a:pPr>
+            <a:r>
+              <a:rPr lang="en-US" sz="700" i="1" dirty="0">
+                <a:solidFill>
+                  <a:srgbClr val="94A3B8"/>
+                </a:solidFill>
+                <a:latin typeface="Calibri" pitchFamily="34" charset="0"/>
+                <a:ea typeface="Calibri" pitchFamily="34" charset="-122"/>
+                <a:cs typeface="Calibri" pitchFamily="34" charset="-120"/>
+              </a:rPr>
+              <a:t>'e' kept before consonant suffix</a:t>
+            </a:r>
+            <a:endParaRPr lang="en-US" sz="700" dirty="0"/>
+          </a:p>
+        </p:txBody>
+      </p:sp>
+      <p:sp>
+        <p:nvSpPr>
+          <p:cNvPr id="20" name="Shape 18"/>
           <p:cNvSpPr/>
           <p:nvPr/>
         </p:nvSpPr>
@@ -25159,7 +25078,7 @@
       </p:sp>
       <p:sp>
         <p:nvSpPr>
-          <p:cNvPr id="20" name="Text 18"/>
+          <p:cNvPr id="21" name="Text 19"/>
           <p:cNvSpPr/>
           <p:nvPr/>
         </p:nvSpPr>
@@ -25198,7 +25117,7 @@
       </p:sp>
       <p:sp>
         <p:nvSpPr>
-          <p:cNvPr id="21" name="Text 19"/>
+          <p:cNvPr id="22" name="Text 20"/>
           <p:cNvSpPr/>
           <p:nvPr/>
         </p:nvSpPr>
@@ -25237,7 +25156,7 @@
       </p:sp>
       <p:sp>
         <p:nvSpPr>
-          <p:cNvPr id="22" name="Shape 20"/>
+          <p:cNvPr id="23" name="Shape 21"/>
           <p:cNvSpPr/>
           <p:nvPr/>
         </p:nvSpPr>
@@ -25264,7 +25183,7 @@
       </p:sp>
       <p:sp>
         <p:nvSpPr>
-          <p:cNvPr id="23" name="Text 21"/>
+          <p:cNvPr id="24" name="Text 22"/>
           <p:cNvSpPr/>
           <p:nvPr/>
         </p:nvSpPr>
@@ -25303,7 +25222,7 @@
       </p:sp>
       <p:sp>
         <p:nvSpPr>
-          <p:cNvPr id="24" name="Shape 22"/>
+          <p:cNvPr id="25" name="Shape 23"/>
           <p:cNvSpPr/>
           <p:nvPr/>
         </p:nvSpPr>
@@ -25330,7 +25249,7 @@
       </p:sp>
       <p:sp>
         <p:nvSpPr>
-          <p:cNvPr id="25" name="Shape 23"/>
+          <p:cNvPr id="26" name="Shape 24"/>
           <p:cNvSpPr/>
           <p:nvPr/>
         </p:nvSpPr>
@@ -25357,7 +25276,7 @@
       </p:sp>
       <p:sp>
         <p:nvSpPr>
-          <p:cNvPr id="26" name="Text 24"/>
+          <p:cNvPr id="27" name="Text 25"/>
           <p:cNvSpPr/>
           <p:nvPr/>
         </p:nvSpPr>
@@ -25388,7 +25307,7 @@
                 <a:ea typeface="Trebuchet MS" pitchFamily="34" charset="-122"/>
                 <a:cs typeface="Trebuchet MS" pitchFamily="34" charset="-120"/>
               </a:rPr>
-              <a:t>cheer</a:t>
+              <a:t>care</a:t>
             </a:r>
             <a:endParaRPr lang="en-US" sz="1400" dirty="0"/>
           </a:p>
@@ -25396,7 +25315,7 @@
       </p:sp>
       <p:sp>
         <p:nvSpPr>
-          <p:cNvPr id="27" name="Text 25"/>
+          <p:cNvPr id="28" name="Text 26"/>
           <p:cNvSpPr/>
           <p:nvPr/>
         </p:nvSpPr>
@@ -25435,7 +25354,7 @@
       </p:sp>
       <p:sp>
         <p:nvSpPr>
-          <p:cNvPr id="28" name="Shape 26"/>
+          <p:cNvPr id="29" name="Shape 27"/>
           <p:cNvSpPr/>
           <p:nvPr/>
         </p:nvSpPr>
@@ -25462,7 +25381,7 @@
       </p:sp>
       <p:sp>
         <p:nvSpPr>
-          <p:cNvPr id="29" name="Text 27"/>
+          <p:cNvPr id="30" name="Text 28"/>
           <p:cNvSpPr/>
           <p:nvPr/>
         </p:nvSpPr>
@@ -25501,18 +25420,18 @@
       </p:sp>
       <p:sp>
         <p:nvSpPr>
-          <p:cNvPr id="30" name="Shape 28"/>
+          <p:cNvPr id="31" name="Shape 29"/>
           <p:cNvSpPr/>
           <p:nvPr/>
         </p:nvSpPr>
         <p:spPr>
           <a:xfrm>
             <a:off x="365760" y="4096512"/>
-            <a:ext cx="1371600" cy="658368"/>
+            <a:ext cx="1371600" cy="804672"/>
           </a:xfrm>
           <a:prstGeom prst="rect">
             <a:avLst>
-              <a:gd name="adj" fmla="val 8333"/>
+              <a:gd name="adj" fmla="val 6818"/>
             </a:avLst>
           </a:prstGeom>
           <a:solidFill>
@@ -25528,14 +25447,14 @@
       </p:sp>
       <p:sp>
         <p:nvSpPr>
-          <p:cNvPr id="31" name="Text 29"/>
+          <p:cNvPr id="32" name="Text 30"/>
           <p:cNvSpPr/>
           <p:nvPr/>
         </p:nvSpPr>
         <p:spPr>
           <a:xfrm>
             <a:off x="365760" y="4096512"/>
-            <a:ext cx="1371600" cy="658368"/>
+            <a:ext cx="1371600" cy="804672"/>
           </a:xfrm>
           <a:prstGeom prst="rect">
             <a:avLst/>
@@ -25567,18 +25486,18 @@
       </p:sp>
       <p:sp>
         <p:nvSpPr>
-          <p:cNvPr id="32" name="Shape 30"/>
+          <p:cNvPr id="33" name="Shape 31"/>
           <p:cNvSpPr/>
           <p:nvPr/>
         </p:nvSpPr>
         <p:spPr>
           <a:xfrm>
             <a:off x="1874520" y="4096512"/>
-            <a:ext cx="6903720" cy="658368"/>
+            <a:ext cx="6903720" cy="804672"/>
           </a:xfrm>
           <a:prstGeom prst="rect">
             <a:avLst>
-              <a:gd name="adj" fmla="val 8333"/>
+              <a:gd name="adj" fmla="val 6818"/>
             </a:avLst>
           </a:prstGeom>
           <a:solidFill>
@@ -25594,14 +25513,14 @@
       </p:sp>
       <p:sp>
         <p:nvSpPr>
-          <p:cNvPr id="33" name="Text 31"/>
+          <p:cNvPr id="34" name="Text 32"/>
           <p:cNvSpPr/>
           <p:nvPr/>
         </p:nvSpPr>
         <p:spPr>
           <a:xfrm>
             <a:off x="1874520" y="4096512"/>
-            <a:ext cx="6903720" cy="658368"/>
+            <a:ext cx="6903720" cy="804672"/>
           </a:xfrm>
           <a:prstGeom prst="rect">
             <a:avLst/>
@@ -26056,7 +25975,7 @@
                 <a:ea typeface="Trebuchet MS" pitchFamily="34" charset="-122"/>
                 <a:cs typeface="Trebuchet MS" pitchFamily="34" charset="-120"/>
               </a:rPr>
-              <a:t>cheerful</a:t>
+              <a:t>careful</a:t>
             </a:r>
             <a:endParaRPr lang="en-US" sz="2800" dirty="0"/>
           </a:p>
@@ -26195,7 +26114,7 @@
                 <a:ea typeface="Trebuchet MS" pitchFamily="34" charset="-122"/>
                 <a:cs typeface="Trebuchet MS" pitchFamily="34" charset="-120"/>
               </a:rPr>
-              <a:t>cheer</a:t>
+              <a:t>care</a:t>
             </a:r>
             <a:endParaRPr lang="en-US" sz="1300" dirty="0"/>
           </a:p>
@@ -26234,7 +26153,7 @@
                 <a:ea typeface="Calibri" pitchFamily="34" charset="-122"/>
                 <a:cs typeface="Calibri" pitchFamily="34" charset="-120"/>
               </a:rPr>
-              <a:t>happiness, gladness</a:t>
+              <a:t>to pay close attention</a:t>
             </a:r>
             <a:endParaRPr lang="en-US" sz="850" dirty="0"/>
           </a:p>
@@ -26242,7 +26161,46 @@
       </p:sp>
       <p:sp>
         <p:nvSpPr>
-          <p:cNvPr id="19" name="Shape 17"/>
+          <p:cNvPr id="19" name="Text 17"/>
+          <p:cNvSpPr/>
+          <p:nvPr/>
+        </p:nvSpPr>
+        <p:spPr>
+          <a:xfrm>
+            <a:off x="2938272" y="2752344"/>
+            <a:ext cx="1828800" cy="182880"/>
+          </a:xfrm>
+          <a:prstGeom prst="rect">
+            <a:avLst/>
+          </a:prstGeom>
+          <a:noFill/>
+          <a:ln/>
+        </p:spPr>
+        <p:txBody>
+          <a:bodyPr wrap="square" lIns="0" tIns="0" rIns="0" bIns="0" rtlCol="0" anchor="t"/>
+          <a:lstStyle/>
+          <a:p>
+            <a:pPr algn="ctr" indent="0" marL="0">
+              <a:buNone/>
+            </a:pPr>
+            <a:r>
+              <a:rPr lang="en-US" sz="700" i="1" dirty="0">
+                <a:solidFill>
+                  <a:srgbClr val="94A3B8"/>
+                </a:solidFill>
+                <a:latin typeface="Calibri" pitchFamily="34" charset="0"/>
+                <a:ea typeface="Calibri" pitchFamily="34" charset="-122"/>
+                <a:cs typeface="Calibri" pitchFamily="34" charset="-120"/>
+              </a:rPr>
+              <a:t>'e' kept before consonant suffix</a:t>
+            </a:r>
+            <a:endParaRPr lang="en-US" sz="700" dirty="0"/>
+          </a:p>
+        </p:txBody>
+      </p:sp>
+      <p:sp>
+        <p:nvSpPr>
+          <p:cNvPr id="20" name="Shape 18"/>
           <p:cNvSpPr/>
           <p:nvPr/>
         </p:nvSpPr>
@@ -26276,7 +26234,7 @@
       </p:sp>
       <p:sp>
         <p:nvSpPr>
-          <p:cNvPr id="20" name="Text 18"/>
+          <p:cNvPr id="21" name="Text 19"/>
           <p:cNvSpPr/>
           <p:nvPr/>
         </p:nvSpPr>
@@ -26315,7 +26273,7 @@
       </p:sp>
       <p:sp>
         <p:nvSpPr>
-          <p:cNvPr id="21" name="Text 19"/>
+          <p:cNvPr id="22" name="Text 20"/>
           <p:cNvSpPr/>
           <p:nvPr/>
         </p:nvSpPr>
@@ -26354,7 +26312,7 @@
       </p:sp>
       <p:sp>
         <p:nvSpPr>
-          <p:cNvPr id="22" name="Shape 20"/>
+          <p:cNvPr id="23" name="Shape 21"/>
           <p:cNvSpPr/>
           <p:nvPr/>
         </p:nvSpPr>
@@ -26381,7 +26339,7 @@
       </p:sp>
       <p:sp>
         <p:nvSpPr>
-          <p:cNvPr id="23" name="Text 21"/>
+          <p:cNvPr id="24" name="Text 22"/>
           <p:cNvSpPr/>
           <p:nvPr/>
         </p:nvSpPr>
@@ -26420,7 +26378,7 @@
       </p:sp>
       <p:sp>
         <p:nvSpPr>
-          <p:cNvPr id="24" name="Shape 22"/>
+          <p:cNvPr id="25" name="Shape 23"/>
           <p:cNvSpPr/>
           <p:nvPr/>
         </p:nvSpPr>
@@ -26447,7 +26405,7 @@
       </p:sp>
       <p:sp>
         <p:nvSpPr>
-          <p:cNvPr id="25" name="Shape 23"/>
+          <p:cNvPr id="26" name="Shape 24"/>
           <p:cNvSpPr/>
           <p:nvPr/>
         </p:nvSpPr>
@@ -26474,7 +26432,7 @@
       </p:sp>
       <p:sp>
         <p:nvSpPr>
-          <p:cNvPr id="26" name="Text 24"/>
+          <p:cNvPr id="27" name="Text 25"/>
           <p:cNvSpPr/>
           <p:nvPr/>
         </p:nvSpPr>
@@ -26505,7 +26463,7 @@
                 <a:ea typeface="Trebuchet MS" pitchFamily="34" charset="-122"/>
                 <a:cs typeface="Trebuchet MS" pitchFamily="34" charset="-120"/>
               </a:rPr>
-              <a:t>cheer</a:t>
+              <a:t>care</a:t>
             </a:r>
             <a:endParaRPr lang="en-US" sz="1400" dirty="0"/>
           </a:p>
@@ -26513,7 +26471,7 @@
       </p:sp>
       <p:sp>
         <p:nvSpPr>
-          <p:cNvPr id="27" name="Text 25"/>
+          <p:cNvPr id="28" name="Text 26"/>
           <p:cNvSpPr/>
           <p:nvPr/>
         </p:nvSpPr>
@@ -26552,7 +26510,7 @@
       </p:sp>
       <p:sp>
         <p:nvSpPr>
-          <p:cNvPr id="28" name="Shape 26"/>
+          <p:cNvPr id="29" name="Shape 27"/>
           <p:cNvSpPr/>
           <p:nvPr/>
         </p:nvSpPr>
@@ -26579,7 +26537,7 @@
       </p:sp>
       <p:sp>
         <p:nvSpPr>
-          <p:cNvPr id="29" name="Text 27"/>
+          <p:cNvPr id="30" name="Text 28"/>
           <p:cNvSpPr/>
           <p:nvPr/>
         </p:nvSpPr>
@@ -26618,18 +26576,18 @@
       </p:sp>
       <p:sp>
         <p:nvSpPr>
-          <p:cNvPr id="30" name="Shape 28"/>
+          <p:cNvPr id="31" name="Shape 29"/>
           <p:cNvSpPr/>
           <p:nvPr/>
         </p:nvSpPr>
         <p:spPr>
           <a:xfrm>
             <a:off x="365760" y="4096512"/>
-            <a:ext cx="1371600" cy="658368"/>
+            <a:ext cx="1371600" cy="804672"/>
           </a:xfrm>
           <a:prstGeom prst="rect">
             <a:avLst>
-              <a:gd name="adj" fmla="val 8333"/>
+              <a:gd name="adj" fmla="val 6818"/>
             </a:avLst>
           </a:prstGeom>
           <a:solidFill>
@@ -26645,14 +26603,14 @@
       </p:sp>
       <p:sp>
         <p:nvSpPr>
-          <p:cNvPr id="31" name="Text 29"/>
+          <p:cNvPr id="32" name="Text 30"/>
           <p:cNvSpPr/>
           <p:nvPr/>
         </p:nvSpPr>
         <p:spPr>
           <a:xfrm>
             <a:off x="365760" y="4096512"/>
-            <a:ext cx="1371600" cy="658368"/>
+            <a:ext cx="1371600" cy="804672"/>
           </a:xfrm>
           <a:prstGeom prst="rect">
             <a:avLst/>
@@ -26684,18 +26642,18 @@
       </p:sp>
       <p:sp>
         <p:nvSpPr>
-          <p:cNvPr id="32" name="Shape 30"/>
+          <p:cNvPr id="33" name="Shape 31"/>
           <p:cNvSpPr/>
           <p:nvPr/>
         </p:nvSpPr>
         <p:spPr>
           <a:xfrm>
             <a:off x="1874520" y="4096512"/>
-            <a:ext cx="6903720" cy="658368"/>
+            <a:ext cx="6903720" cy="804672"/>
           </a:xfrm>
           <a:prstGeom prst="rect">
             <a:avLst>
-              <a:gd name="adj" fmla="val 8333"/>
+              <a:gd name="adj" fmla="val 6818"/>
             </a:avLst>
           </a:prstGeom>
           <a:solidFill>
@@ -26711,18 +26669,18 @@
       </p:sp>
       <p:sp>
         <p:nvSpPr>
-          <p:cNvPr id="33" name="Shape 31"/>
-          <p:cNvSpPr/>
-          <p:nvPr/>
-        </p:nvSpPr>
-        <p:spPr>
-          <a:xfrm>
-            <a:off x="2427732" y="4187952"/>
-            <a:ext cx="685800" cy="475488"/>
+          <p:cNvPr id="34" name="Shape 32"/>
+          <p:cNvSpPr/>
+          <p:nvPr/>
+        </p:nvSpPr>
+        <p:spPr>
+          <a:xfrm>
+            <a:off x="2427732" y="4169664"/>
+            <a:ext cx="685800" cy="384048"/>
           </a:xfrm>
           <a:prstGeom prst="rect">
             <a:avLst>
-              <a:gd name="adj" fmla="val 7692"/>
+              <a:gd name="adj" fmla="val 9524"/>
             </a:avLst>
           </a:prstGeom>
           <a:solidFill>
@@ -26738,14 +26696,14 @@
       </p:sp>
       <p:sp>
         <p:nvSpPr>
-          <p:cNvPr id="34" name="Text 32"/>
-          <p:cNvSpPr/>
-          <p:nvPr/>
-        </p:nvSpPr>
-        <p:spPr>
-          <a:xfrm>
-            <a:off x="2427732" y="4187952"/>
-            <a:ext cx="685800" cy="475488"/>
+          <p:cNvPr id="35" name="Text 33"/>
+          <p:cNvSpPr/>
+          <p:nvPr/>
+        </p:nvSpPr>
+        <p:spPr>
+          <a:xfrm>
+            <a:off x="2427732" y="4169664"/>
+            <a:ext cx="685800" cy="384048"/>
           </a:xfrm>
           <a:prstGeom prst="rect">
             <a:avLst/>
@@ -26769,7 +26727,7 @@
                 <a:ea typeface="Trebuchet MS" pitchFamily="34" charset="-122"/>
                 <a:cs typeface="Trebuchet MS" pitchFamily="34" charset="-120"/>
               </a:rPr>
-              <a:t>ch</a:t>
+              <a:t>c</a:t>
             </a:r>
             <a:endParaRPr lang="en-US" sz="900" dirty="0"/>
           </a:p>
@@ -26777,18 +26735,57 @@
       </p:sp>
       <p:sp>
         <p:nvSpPr>
-          <p:cNvPr id="35" name="Shape 33"/>
-          <p:cNvSpPr/>
-          <p:nvPr/>
-        </p:nvSpPr>
-        <p:spPr>
-          <a:xfrm>
-            <a:off x="3639312" y="4187952"/>
-            <a:ext cx="685800" cy="475488"/>
+          <p:cNvPr id="36" name="Text 34"/>
+          <p:cNvSpPr/>
+          <p:nvPr/>
+        </p:nvSpPr>
+        <p:spPr>
+          <a:xfrm>
+            <a:off x="2427732" y="4572000"/>
+            <a:ext cx="685800" cy="219456"/>
+          </a:xfrm>
+          <a:prstGeom prst="rect">
+            <a:avLst/>
+          </a:prstGeom>
+          <a:noFill/>
+          <a:ln/>
+        </p:spPr>
+        <p:txBody>
+          <a:bodyPr wrap="square" lIns="0" tIns="0" rIns="0" bIns="0" rtlCol="0" anchor="t"/>
+          <a:lstStyle/>
+          <a:p>
+            <a:pPr algn="ctr" indent="0" marL="0">
+              <a:buNone/>
+            </a:pPr>
+            <a:r>
+              <a:rPr lang="en-US" sz="750" i="1" dirty="0">
+                <a:solidFill>
+                  <a:srgbClr val="94A3B8"/>
+                </a:solidFill>
+                <a:latin typeface="Calibri" pitchFamily="34" charset="0"/>
+                <a:ea typeface="Calibri" pitchFamily="34" charset="-122"/>
+                <a:cs typeface="Calibri" pitchFamily="34" charset="-120"/>
+              </a:rPr>
+              <a:t>/k/</a:t>
+            </a:r>
+            <a:endParaRPr lang="en-US" sz="750" dirty="0"/>
+          </a:p>
+        </p:txBody>
+      </p:sp>
+      <p:sp>
+        <p:nvSpPr>
+          <p:cNvPr id="37" name="Shape 35"/>
+          <p:cNvSpPr/>
+          <p:nvPr/>
+        </p:nvSpPr>
+        <p:spPr>
+          <a:xfrm>
+            <a:off x="3639312" y="4169664"/>
+            <a:ext cx="685800" cy="384048"/>
           </a:xfrm>
           <a:prstGeom prst="rect">
             <a:avLst>
-              <a:gd name="adj" fmla="val 7692"/>
+              <a:gd name="adj" fmla="val 9524"/>
             </a:avLst>
           </a:prstGeom>
           <a:solidFill>
@@ -26804,14 +26801,14 @@
       </p:sp>
       <p:sp>
         <p:nvSpPr>
-          <p:cNvPr id="36" name="Text 34"/>
-          <p:cNvSpPr/>
-          <p:nvPr/>
-        </p:nvSpPr>
-        <p:spPr>
-          <a:xfrm>
-            <a:off x="3639312" y="4187952"/>
-            <a:ext cx="685800" cy="475488"/>
+          <p:cNvPr id="38" name="Text 36"/>
+          <p:cNvSpPr/>
+          <p:nvPr/>
+        </p:nvSpPr>
+        <p:spPr>
+          <a:xfrm>
+            <a:off x="3639312" y="4169664"/>
+            <a:ext cx="685800" cy="384048"/>
           </a:xfrm>
           <a:prstGeom prst="rect">
             <a:avLst/>
@@ -26835,7 +26832,7 @@
                 <a:ea typeface="Trebuchet MS" pitchFamily="34" charset="-122"/>
                 <a:cs typeface="Trebuchet MS" pitchFamily="34" charset="-120"/>
               </a:rPr>
-              <a:t>eer</a:t>
+              <a:t>are</a:t>
             </a:r>
             <a:endParaRPr lang="en-US" sz="900" dirty="0"/>
           </a:p>
@@ -26843,18 +26840,18 @@
       </p:sp>
       <p:sp>
         <p:nvSpPr>
-          <p:cNvPr id="37" name="Shape 35"/>
-          <p:cNvSpPr/>
-          <p:nvPr/>
-        </p:nvSpPr>
-        <p:spPr>
-          <a:xfrm>
-            <a:off x="4850892" y="4187952"/>
-            <a:ext cx="685800" cy="475488"/>
+          <p:cNvPr id="39" name="Shape 37"/>
+          <p:cNvSpPr/>
+          <p:nvPr/>
+        </p:nvSpPr>
+        <p:spPr>
+          <a:xfrm>
+            <a:off x="4850892" y="4169664"/>
+            <a:ext cx="685800" cy="384048"/>
           </a:xfrm>
           <a:prstGeom prst="rect">
             <a:avLst>
-              <a:gd name="adj" fmla="val 7692"/>
+              <a:gd name="adj" fmla="val 9524"/>
             </a:avLst>
           </a:prstGeom>
           <a:solidFill>
@@ -26870,14 +26867,14 @@
       </p:sp>
       <p:sp>
         <p:nvSpPr>
-          <p:cNvPr id="38" name="Text 36"/>
-          <p:cNvSpPr/>
-          <p:nvPr/>
-        </p:nvSpPr>
-        <p:spPr>
-          <a:xfrm>
-            <a:off x="4850892" y="4187952"/>
-            <a:ext cx="685800" cy="475488"/>
+          <p:cNvPr id="40" name="Text 38"/>
+          <p:cNvSpPr/>
+          <p:nvPr/>
+        </p:nvSpPr>
+        <p:spPr>
+          <a:xfrm>
+            <a:off x="4850892" y="4169664"/>
+            <a:ext cx="685800" cy="384048"/>
           </a:xfrm>
           <a:prstGeom prst="rect">
             <a:avLst/>
@@ -26909,18 +26906,18 @@
       </p:sp>
       <p:sp>
         <p:nvSpPr>
-          <p:cNvPr id="39" name="Shape 37"/>
-          <p:cNvSpPr/>
-          <p:nvPr/>
-        </p:nvSpPr>
-        <p:spPr>
-          <a:xfrm>
-            <a:off x="6062472" y="4187952"/>
-            <a:ext cx="685800" cy="475488"/>
+          <p:cNvPr id="41" name="Shape 39"/>
+          <p:cNvSpPr/>
+          <p:nvPr/>
+        </p:nvSpPr>
+        <p:spPr>
+          <a:xfrm>
+            <a:off x="6062472" y="4169664"/>
+            <a:ext cx="685800" cy="384048"/>
           </a:xfrm>
           <a:prstGeom prst="rect">
             <a:avLst>
-              <a:gd name="adj" fmla="val 7692"/>
+              <a:gd name="adj" fmla="val 9524"/>
             </a:avLst>
           </a:prstGeom>
           <a:solidFill>
@@ -26936,14 +26933,14 @@
       </p:sp>
       <p:sp>
         <p:nvSpPr>
-          <p:cNvPr id="40" name="Text 38"/>
-          <p:cNvSpPr/>
-          <p:nvPr/>
-        </p:nvSpPr>
-        <p:spPr>
-          <a:xfrm>
-            <a:off x="6062472" y="4187952"/>
-            <a:ext cx="685800" cy="475488"/>
+          <p:cNvPr id="42" name="Text 40"/>
+          <p:cNvSpPr/>
+          <p:nvPr/>
+        </p:nvSpPr>
+        <p:spPr>
+          <a:xfrm>
+            <a:off x="6062472" y="4169664"/>
+            <a:ext cx="685800" cy="384048"/>
           </a:xfrm>
           <a:prstGeom prst="rect">
             <a:avLst/>
@@ -26975,18 +26972,18 @@
       </p:sp>
       <p:sp>
         <p:nvSpPr>
-          <p:cNvPr id="41" name="Shape 39"/>
-          <p:cNvSpPr/>
-          <p:nvPr/>
-        </p:nvSpPr>
-        <p:spPr>
-          <a:xfrm>
-            <a:off x="7274052" y="4187952"/>
-            <a:ext cx="685800" cy="475488"/>
+          <p:cNvPr id="43" name="Shape 41"/>
+          <p:cNvSpPr/>
+          <p:nvPr/>
+        </p:nvSpPr>
+        <p:spPr>
+          <a:xfrm>
+            <a:off x="7274052" y="4169664"/>
+            <a:ext cx="685800" cy="384048"/>
           </a:xfrm>
           <a:prstGeom prst="rect">
             <a:avLst>
-              <a:gd name="adj" fmla="val 7692"/>
+              <a:gd name="adj" fmla="val 9524"/>
             </a:avLst>
           </a:prstGeom>
           <a:solidFill>
@@ -27002,14 +26999,14 @@
       </p:sp>
       <p:sp>
         <p:nvSpPr>
-          <p:cNvPr id="42" name="Text 40"/>
-          <p:cNvSpPr/>
-          <p:nvPr/>
-        </p:nvSpPr>
-        <p:spPr>
-          <a:xfrm>
-            <a:off x="7274052" y="4187952"/>
-            <a:ext cx="685800" cy="475488"/>
+          <p:cNvPr id="44" name="Text 42"/>
+          <p:cNvSpPr/>
+          <p:nvPr/>
+        </p:nvSpPr>
+        <p:spPr>
+          <a:xfrm>
+            <a:off x="7274052" y="4169664"/>
+            <a:ext cx="685800" cy="384048"/>
           </a:xfrm>
           <a:prstGeom prst="rect">
             <a:avLst/>
@@ -27464,7 +27461,7 @@
                 <a:ea typeface="Trebuchet MS" pitchFamily="34" charset="-122"/>
                 <a:cs typeface="Trebuchet MS" pitchFamily="34" charset="-120"/>
               </a:rPr>
-              <a:t>playful</a:t>
+              <a:t>thoughtful</a:t>
             </a:r>
             <a:endParaRPr lang="en-US" sz="2800" dirty="0"/>
           </a:p>
@@ -27743,11 +27740,11 @@
         <p:spPr>
           <a:xfrm>
             <a:off x="365760" y="4096512"/>
-            <a:ext cx="1371600" cy="658368"/>
+            <a:ext cx="1371600" cy="804672"/>
           </a:xfrm>
           <a:prstGeom prst="rect">
             <a:avLst>
-              <a:gd name="adj" fmla="val 8333"/>
+              <a:gd name="adj" fmla="val 6818"/>
             </a:avLst>
           </a:prstGeom>
           <a:solidFill>
@@ -27770,7 +27767,7 @@
         <p:spPr>
           <a:xfrm>
             <a:off x="365760" y="4096512"/>
-            <a:ext cx="1371600" cy="658368"/>
+            <a:ext cx="1371600" cy="804672"/>
           </a:xfrm>
           <a:prstGeom prst="rect">
             <a:avLst/>
@@ -27809,11 +27806,11 @@
         <p:spPr>
           <a:xfrm>
             <a:off x="1874520" y="4096512"/>
-            <a:ext cx="6903720" cy="658368"/>
+            <a:ext cx="6903720" cy="804672"/>
           </a:xfrm>
           <a:prstGeom prst="rect">
             <a:avLst>
-              <a:gd name="adj" fmla="val 8333"/>
+              <a:gd name="adj" fmla="val 6818"/>
             </a:avLst>
           </a:prstGeom>
           <a:solidFill>
@@ -27836,7 +27833,7 @@
         <p:spPr>
           <a:xfrm>
             <a:off x="1874520" y="4096512"/>
-            <a:ext cx="6903720" cy="658368"/>
+            <a:ext cx="6903720" cy="804672"/>
           </a:xfrm>
           <a:prstGeom prst="rect">
             <a:avLst/>
@@ -28291,7 +28288,7 @@
                 <a:ea typeface="Trebuchet MS" pitchFamily="34" charset="-122"/>
                 <a:cs typeface="Trebuchet MS" pitchFamily="34" charset="-120"/>
               </a:rPr>
-              <a:t>playful</a:t>
+              <a:t>thoughtful</a:t>
             </a:r>
             <a:endParaRPr lang="en-US" sz="2800" dirty="0"/>
           </a:p>
@@ -28430,7 +28427,7 @@
                 <a:ea typeface="Trebuchet MS" pitchFamily="34" charset="-122"/>
                 <a:cs typeface="Trebuchet MS" pitchFamily="34" charset="-120"/>
               </a:rPr>
-              <a:t>play</a:t>
+              <a:t>thought</a:t>
             </a:r>
             <a:endParaRPr lang="en-US" sz="1300" dirty="0"/>
           </a:p>
@@ -28469,7 +28466,7 @@
                 <a:ea typeface="Calibri" pitchFamily="34" charset="-122"/>
                 <a:cs typeface="Calibri" pitchFamily="34" charset="-120"/>
               </a:rPr>
-              <a:t>fun, games, activity</a:t>
+              <a:t>an idea held in the mind</a:t>
             </a:r>
             <a:endParaRPr lang="en-US" sz="850" dirty="0"/>
           </a:p>
@@ -28728,11 +28725,11 @@
         <p:spPr>
           <a:xfrm>
             <a:off x="365760" y="4096512"/>
-            <a:ext cx="1371600" cy="658368"/>
+            <a:ext cx="1371600" cy="804672"/>
           </a:xfrm>
           <a:prstGeom prst="rect">
             <a:avLst>
-              <a:gd name="adj" fmla="val 8333"/>
+              <a:gd name="adj" fmla="val 6818"/>
             </a:avLst>
           </a:prstGeom>
           <a:solidFill>
@@ -28755,7 +28752,7 @@
         <p:spPr>
           <a:xfrm>
             <a:off x="365760" y="4096512"/>
-            <a:ext cx="1371600" cy="658368"/>
+            <a:ext cx="1371600" cy="804672"/>
           </a:xfrm>
           <a:prstGeom prst="rect">
             <a:avLst/>
@@ -28794,11 +28791,11 @@
         <p:spPr>
           <a:xfrm>
             <a:off x="1874520" y="4096512"/>
-            <a:ext cx="6903720" cy="658368"/>
+            <a:ext cx="6903720" cy="804672"/>
           </a:xfrm>
           <a:prstGeom prst="rect">
             <a:avLst>
-              <a:gd name="adj" fmla="val 8333"/>
+              <a:gd name="adj" fmla="val 6818"/>
             </a:avLst>
           </a:prstGeom>
           <a:solidFill>
@@ -28821,7 +28818,7 @@
         <p:spPr>
           <a:xfrm>
             <a:off x="1874520" y="4096512"/>
-            <a:ext cx="6903720" cy="658368"/>
+            <a:ext cx="6903720" cy="804672"/>
           </a:xfrm>
           <a:prstGeom prst="rect">
             <a:avLst/>
@@ -29276,7 +29273,7 @@
                 <a:ea typeface="Trebuchet MS" pitchFamily="34" charset="-122"/>
                 <a:cs typeface="Trebuchet MS" pitchFamily="34" charset="-120"/>
               </a:rPr>
-              <a:t>playful</a:t>
+              <a:t>thoughtful</a:t>
             </a:r>
             <a:endParaRPr lang="en-US" sz="2800" dirty="0"/>
           </a:p>
@@ -29415,7 +29412,7 @@
                 <a:ea typeface="Trebuchet MS" pitchFamily="34" charset="-122"/>
                 <a:cs typeface="Trebuchet MS" pitchFamily="34" charset="-120"/>
               </a:rPr>
-              <a:t>play</a:t>
+              <a:t>thought</a:t>
             </a:r>
             <a:endParaRPr lang="en-US" sz="1300" dirty="0"/>
           </a:p>
@@ -29454,7 +29451,7 @@
                 <a:ea typeface="Calibri" pitchFamily="34" charset="-122"/>
                 <a:cs typeface="Calibri" pitchFamily="34" charset="-120"/>
               </a:rPr>
-              <a:t>fun, games, activity</a:t>
+              <a:t>an idea held in the mind</a:t>
             </a:r>
             <a:endParaRPr lang="en-US" sz="850" dirty="0"/>
           </a:p>
@@ -29725,7 +29722,7 @@
                 <a:ea typeface="Trebuchet MS" pitchFamily="34" charset="-122"/>
                 <a:cs typeface="Trebuchet MS" pitchFamily="34" charset="-120"/>
               </a:rPr>
-              <a:t>play</a:t>
+              <a:t>thought</a:t>
             </a:r>
             <a:endParaRPr lang="en-US" sz="1400" dirty="0"/>
           </a:p>
@@ -29845,11 +29842,11 @@
         <p:spPr>
           <a:xfrm>
             <a:off x="365760" y="4096512"/>
-            <a:ext cx="1371600" cy="658368"/>
+            <a:ext cx="1371600" cy="804672"/>
           </a:xfrm>
           <a:prstGeom prst="rect">
             <a:avLst>
-              <a:gd name="adj" fmla="val 8333"/>
+              <a:gd name="adj" fmla="val 6818"/>
             </a:avLst>
           </a:prstGeom>
           <a:solidFill>
@@ -29872,7 +29869,7 @@
         <p:spPr>
           <a:xfrm>
             <a:off x="365760" y="4096512"/>
-            <a:ext cx="1371600" cy="658368"/>
+            <a:ext cx="1371600" cy="804672"/>
           </a:xfrm>
           <a:prstGeom prst="rect">
             <a:avLst/>
@@ -29911,11 +29908,11 @@
         <p:spPr>
           <a:xfrm>
             <a:off x="1874520" y="4096512"/>
-            <a:ext cx="6903720" cy="658368"/>
+            <a:ext cx="6903720" cy="804672"/>
           </a:xfrm>
           <a:prstGeom prst="rect">
             <a:avLst>
-              <a:gd name="adj" fmla="val 8333"/>
+              <a:gd name="adj" fmla="val 6818"/>
             </a:avLst>
           </a:prstGeom>
           <a:solidFill>
@@ -29938,7 +29935,7 @@
         <p:spPr>
           <a:xfrm>
             <a:off x="1874520" y="4096512"/>
-            <a:ext cx="6903720" cy="658368"/>
+            <a:ext cx="6903720" cy="804672"/>
           </a:xfrm>
           <a:prstGeom prst="rect">
             <a:avLst/>
@@ -30393,7 +30390,7 @@
                 <a:ea typeface="Trebuchet MS" pitchFamily="34" charset="-122"/>
                 <a:cs typeface="Trebuchet MS" pitchFamily="34" charset="-120"/>
               </a:rPr>
-              <a:t>playful</a:t>
+              <a:t>thoughtful</a:t>
             </a:r>
             <a:endParaRPr lang="en-US" sz="2800" dirty="0"/>
           </a:p>
@@ -30532,7 +30529,7 @@
                 <a:ea typeface="Trebuchet MS" pitchFamily="34" charset="-122"/>
                 <a:cs typeface="Trebuchet MS" pitchFamily="34" charset="-120"/>
               </a:rPr>
-              <a:t>play</a:t>
+              <a:t>thought</a:t>
             </a:r>
             <a:endParaRPr lang="en-US" sz="1300" dirty="0"/>
           </a:p>
@@ -30571,7 +30568,7 @@
                 <a:ea typeface="Calibri" pitchFamily="34" charset="-122"/>
                 <a:cs typeface="Calibri" pitchFamily="34" charset="-120"/>
               </a:rPr>
-              <a:t>fun, games, activity</a:t>
+              <a:t>an idea held in the mind</a:t>
             </a:r>
             <a:endParaRPr lang="en-US" sz="850" dirty="0"/>
           </a:p>
@@ -30842,7 +30839,7 @@
                 <a:ea typeface="Trebuchet MS" pitchFamily="34" charset="-122"/>
                 <a:cs typeface="Trebuchet MS" pitchFamily="34" charset="-120"/>
               </a:rPr>
-              <a:t>play</a:t>
+              <a:t>thought</a:t>
             </a:r>
             <a:endParaRPr lang="en-US" sz="1400" dirty="0"/>
           </a:p>
@@ -30962,11 +30959,11 @@
         <p:spPr>
           <a:xfrm>
             <a:off x="365760" y="4096512"/>
-            <a:ext cx="1371600" cy="658368"/>
+            <a:ext cx="1371600" cy="804672"/>
           </a:xfrm>
           <a:prstGeom prst="rect">
             <a:avLst>
-              <a:gd name="adj" fmla="val 8333"/>
+              <a:gd name="adj" fmla="val 6818"/>
             </a:avLst>
           </a:prstGeom>
           <a:solidFill>
@@ -30989,7 +30986,7 @@
         <p:spPr>
           <a:xfrm>
             <a:off x="365760" y="4096512"/>
-            <a:ext cx="1371600" cy="658368"/>
+            <a:ext cx="1371600" cy="804672"/>
           </a:xfrm>
           <a:prstGeom prst="rect">
             <a:avLst/>
@@ -31028,11 +31025,11 @@
         <p:spPr>
           <a:xfrm>
             <a:off x="1874520" y="4096512"/>
-            <a:ext cx="6903720" cy="658368"/>
+            <a:ext cx="6903720" cy="804672"/>
           </a:xfrm>
           <a:prstGeom prst="rect">
             <a:avLst>
-              <a:gd name="adj" fmla="val 8333"/>
+              <a:gd name="adj" fmla="val 6818"/>
             </a:avLst>
           </a:prstGeom>
           <a:solidFill>
@@ -31054,12 +31051,12 @@
         </p:nvSpPr>
         <p:spPr>
           <a:xfrm>
-            <a:off x="2254649" y="4187952"/>
-            <a:ext cx="685800" cy="475488"/>
+            <a:off x="2254649" y="4169664"/>
+            <a:ext cx="685800" cy="384048"/>
           </a:xfrm>
           <a:prstGeom prst="rect">
             <a:avLst>
-              <a:gd name="adj" fmla="val 7692"/>
+              <a:gd name="adj" fmla="val 9524"/>
             </a:avLst>
           </a:prstGeom>
           <a:solidFill>
@@ -31081,8 +31078,8 @@
         </p:nvSpPr>
         <p:spPr>
           <a:xfrm>
-            <a:off x="2254649" y="4187952"/>
-            <a:ext cx="685800" cy="475488"/>
+            <a:off x="2254649" y="4169664"/>
+            <a:ext cx="685800" cy="384048"/>
           </a:xfrm>
           <a:prstGeom prst="rect">
             <a:avLst/>
@@ -31106,7 +31103,7 @@
                 <a:ea typeface="Trebuchet MS" pitchFamily="34" charset="-122"/>
                 <a:cs typeface="Trebuchet MS" pitchFamily="34" charset="-120"/>
               </a:rPr>
-              <a:t>p</a:t>
+              <a:t>th</a:t>
             </a:r>
             <a:endParaRPr lang="en-US" sz="900" dirty="0"/>
           </a:p>
@@ -31120,12 +31117,12 @@
         </p:nvSpPr>
         <p:spPr>
           <a:xfrm>
-            <a:off x="3293146" y="4187952"/>
-            <a:ext cx="685800" cy="475488"/>
+            <a:off x="3293146" y="4169664"/>
+            <a:ext cx="685800" cy="384048"/>
           </a:xfrm>
           <a:prstGeom prst="rect">
             <a:avLst>
-              <a:gd name="adj" fmla="val 7692"/>
+              <a:gd name="adj" fmla="val 9524"/>
             </a:avLst>
           </a:prstGeom>
           <a:solidFill>
@@ -31147,8 +31144,8 @@
         </p:nvSpPr>
         <p:spPr>
           <a:xfrm>
-            <a:off x="3293146" y="4187952"/>
-            <a:ext cx="685800" cy="475488"/>
+            <a:off x="3293146" y="4169664"/>
+            <a:ext cx="685800" cy="384048"/>
           </a:xfrm>
           <a:prstGeom prst="rect">
             <a:avLst/>
@@ -31172,7 +31169,7 @@
                 <a:ea typeface="Trebuchet MS" pitchFamily="34" charset="-122"/>
                 <a:cs typeface="Trebuchet MS" pitchFamily="34" charset="-120"/>
               </a:rPr>
-              <a:t>l</a:t>
+              <a:t>ough</a:t>
             </a:r>
             <a:endParaRPr lang="en-US" sz="900" dirty="0"/>
           </a:p>
@@ -31180,18 +31177,57 @@
       </p:sp>
       <p:sp>
         <p:nvSpPr>
-          <p:cNvPr id="37" name="Shape 35"/>
-          <p:cNvSpPr/>
-          <p:nvPr/>
-        </p:nvSpPr>
-        <p:spPr>
-          <a:xfrm>
-            <a:off x="4331643" y="4187952"/>
-            <a:ext cx="685800" cy="475488"/>
+          <p:cNvPr id="37" name="Text 35"/>
+          <p:cNvSpPr/>
+          <p:nvPr/>
+        </p:nvSpPr>
+        <p:spPr>
+          <a:xfrm>
+            <a:off x="3293146" y="4572000"/>
+            <a:ext cx="685800" cy="219456"/>
+          </a:xfrm>
+          <a:prstGeom prst="rect">
+            <a:avLst/>
+          </a:prstGeom>
+          <a:noFill/>
+          <a:ln/>
+        </p:spPr>
+        <p:txBody>
+          <a:bodyPr wrap="square" lIns="0" tIns="0" rIns="0" bIns="0" rtlCol="0" anchor="t"/>
+          <a:lstStyle/>
+          <a:p>
+            <a:pPr algn="ctr" indent="0" marL="0">
+              <a:buNone/>
+            </a:pPr>
+            <a:r>
+              <a:rPr lang="en-US" sz="750" i="1" dirty="0">
+                <a:solidFill>
+                  <a:srgbClr val="94A3B8"/>
+                </a:solidFill>
+                <a:latin typeface="Calibri" pitchFamily="34" charset="0"/>
+                <a:ea typeface="Calibri" pitchFamily="34" charset="-122"/>
+                <a:cs typeface="Calibri" pitchFamily="34" charset="-120"/>
+              </a:rPr>
+              <a:t>/aw/</a:t>
+            </a:r>
+            <a:endParaRPr lang="en-US" sz="750" dirty="0"/>
+          </a:p>
+        </p:txBody>
+      </p:sp>
+      <p:sp>
+        <p:nvSpPr>
+          <p:cNvPr id="38" name="Shape 36"/>
+          <p:cNvSpPr/>
+          <p:nvPr/>
+        </p:nvSpPr>
+        <p:spPr>
+          <a:xfrm>
+            <a:off x="4331643" y="4169664"/>
+            <a:ext cx="685800" cy="384048"/>
           </a:xfrm>
           <a:prstGeom prst="rect">
             <a:avLst>
-              <a:gd name="adj" fmla="val 7692"/>
+              <a:gd name="adj" fmla="val 9524"/>
             </a:avLst>
           </a:prstGeom>
           <a:solidFill>
@@ -31207,14 +31243,14 @@
       </p:sp>
       <p:sp>
         <p:nvSpPr>
-          <p:cNvPr id="38" name="Text 36"/>
-          <p:cNvSpPr/>
-          <p:nvPr/>
-        </p:nvSpPr>
-        <p:spPr>
-          <a:xfrm>
-            <a:off x="4331643" y="4187952"/>
-            <a:ext cx="685800" cy="475488"/>
+          <p:cNvPr id="39" name="Text 37"/>
+          <p:cNvSpPr/>
+          <p:nvPr/>
+        </p:nvSpPr>
+        <p:spPr>
+          <a:xfrm>
+            <a:off x="4331643" y="4169664"/>
+            <a:ext cx="685800" cy="384048"/>
           </a:xfrm>
           <a:prstGeom prst="rect">
             <a:avLst/>
@@ -31238,7 +31274,7 @@
                 <a:ea typeface="Trebuchet MS" pitchFamily="34" charset="-122"/>
                 <a:cs typeface="Trebuchet MS" pitchFamily="34" charset="-120"/>
               </a:rPr>
-              <a:t>ay</a:t>
+              <a:t>t</a:t>
             </a:r>
             <a:endParaRPr lang="en-US" sz="900" dirty="0"/>
           </a:p>
@@ -31246,18 +31282,18 @@
       </p:sp>
       <p:sp>
         <p:nvSpPr>
-          <p:cNvPr id="39" name="Shape 37"/>
-          <p:cNvSpPr/>
-          <p:nvPr/>
-        </p:nvSpPr>
-        <p:spPr>
-          <a:xfrm>
-            <a:off x="5370141" y="4187952"/>
-            <a:ext cx="685800" cy="475488"/>
+          <p:cNvPr id="40" name="Shape 38"/>
+          <p:cNvSpPr/>
+          <p:nvPr/>
+        </p:nvSpPr>
+        <p:spPr>
+          <a:xfrm>
+            <a:off x="5370141" y="4169664"/>
+            <a:ext cx="685800" cy="384048"/>
           </a:xfrm>
           <a:prstGeom prst="rect">
             <a:avLst>
-              <a:gd name="adj" fmla="val 7692"/>
+              <a:gd name="adj" fmla="val 9524"/>
             </a:avLst>
           </a:prstGeom>
           <a:solidFill>
@@ -31273,14 +31309,14 @@
       </p:sp>
       <p:sp>
         <p:nvSpPr>
-          <p:cNvPr id="40" name="Text 38"/>
-          <p:cNvSpPr/>
-          <p:nvPr/>
-        </p:nvSpPr>
-        <p:spPr>
-          <a:xfrm>
-            <a:off x="5370141" y="4187952"/>
-            <a:ext cx="685800" cy="475488"/>
+          <p:cNvPr id="41" name="Text 39"/>
+          <p:cNvSpPr/>
+          <p:nvPr/>
+        </p:nvSpPr>
+        <p:spPr>
+          <a:xfrm>
+            <a:off x="5370141" y="4169664"/>
+            <a:ext cx="685800" cy="384048"/>
           </a:xfrm>
           <a:prstGeom prst="rect">
             <a:avLst/>
@@ -31312,18 +31348,18 @@
       </p:sp>
       <p:sp>
         <p:nvSpPr>
-          <p:cNvPr id="41" name="Shape 39"/>
-          <p:cNvSpPr/>
-          <p:nvPr/>
-        </p:nvSpPr>
-        <p:spPr>
-          <a:xfrm>
-            <a:off x="6408638" y="4187952"/>
-            <a:ext cx="685800" cy="475488"/>
+          <p:cNvPr id="42" name="Shape 40"/>
+          <p:cNvSpPr/>
+          <p:nvPr/>
+        </p:nvSpPr>
+        <p:spPr>
+          <a:xfrm>
+            <a:off x="6408638" y="4169664"/>
+            <a:ext cx="685800" cy="384048"/>
           </a:xfrm>
           <a:prstGeom prst="rect">
             <a:avLst>
-              <a:gd name="adj" fmla="val 7692"/>
+              <a:gd name="adj" fmla="val 9524"/>
             </a:avLst>
           </a:prstGeom>
           <a:solidFill>
@@ -31339,14 +31375,14 @@
       </p:sp>
       <p:sp>
         <p:nvSpPr>
-          <p:cNvPr id="42" name="Text 40"/>
-          <p:cNvSpPr/>
-          <p:nvPr/>
-        </p:nvSpPr>
-        <p:spPr>
-          <a:xfrm>
-            <a:off x="6408638" y="4187952"/>
-            <a:ext cx="685800" cy="475488"/>
+          <p:cNvPr id="43" name="Text 41"/>
+          <p:cNvSpPr/>
+          <p:nvPr/>
+        </p:nvSpPr>
+        <p:spPr>
+          <a:xfrm>
+            <a:off x="6408638" y="4169664"/>
+            <a:ext cx="685800" cy="384048"/>
           </a:xfrm>
           <a:prstGeom prst="rect">
             <a:avLst/>
@@ -31378,18 +31414,18 @@
       </p:sp>
       <p:sp>
         <p:nvSpPr>
-          <p:cNvPr id="43" name="Shape 41"/>
-          <p:cNvSpPr/>
-          <p:nvPr/>
-        </p:nvSpPr>
-        <p:spPr>
-          <a:xfrm>
-            <a:off x="7447135" y="4187952"/>
-            <a:ext cx="685800" cy="475488"/>
+          <p:cNvPr id="44" name="Shape 42"/>
+          <p:cNvSpPr/>
+          <p:nvPr/>
+        </p:nvSpPr>
+        <p:spPr>
+          <a:xfrm>
+            <a:off x="7447135" y="4169664"/>
+            <a:ext cx="685800" cy="384048"/>
           </a:xfrm>
           <a:prstGeom prst="rect">
             <a:avLst>
-              <a:gd name="adj" fmla="val 7692"/>
+              <a:gd name="adj" fmla="val 9524"/>
             </a:avLst>
           </a:prstGeom>
           <a:solidFill>
@@ -31405,14 +31441,14 @@
       </p:sp>
       <p:sp>
         <p:nvSpPr>
-          <p:cNvPr id="44" name="Text 42"/>
-          <p:cNvSpPr/>
-          <p:nvPr/>
-        </p:nvSpPr>
-        <p:spPr>
-          <a:xfrm>
-            <a:off x="7447135" y="4187952"/>
-            <a:ext cx="685800" cy="475488"/>
+          <p:cNvPr id="45" name="Text 43"/>
+          <p:cNvSpPr/>
+          <p:nvPr/>
+        </p:nvSpPr>
+        <p:spPr>
+          <a:xfrm>
+            <a:off x="7447135" y="4169664"/>
+            <a:ext cx="685800" cy="384048"/>
           </a:xfrm>
           <a:prstGeom prst="rect">
             <a:avLst/>
@@ -33696,7 +33732,7 @@
                 <a:ea typeface="Trebuchet MS" pitchFamily="34" charset="-122"/>
                 <a:cs typeface="Trebuchet MS" pitchFamily="34" charset="-120"/>
               </a:rPr>
-              <a:t>de-</a:t>
+              <a:t>dis-</a:t>
             </a:r>
             <a:endParaRPr lang="en-US" sz="1300" dirty="0"/>
           </a:p>
@@ -34373,7 +34409,7 @@
                 <a:ea typeface="Trebuchet MS" pitchFamily="34" charset="-122"/>
                 <a:cs typeface="Trebuchet MS" pitchFamily="34" charset="-120"/>
               </a:rPr>
-              <a:t>grateful</a:t>
+              <a:t>peaceful</a:t>
             </a:r>
             <a:endParaRPr lang="en-US" sz="1200" dirty="0"/>
           </a:p>
@@ -34439,7 +34475,7 @@
                 <a:ea typeface="Trebuchet MS" pitchFamily="34" charset="-122"/>
                 <a:cs typeface="Trebuchet MS" pitchFamily="34" charset="-120"/>
               </a:rPr>
-              <a:t>wonderful</a:t>
+              <a:t>colourful</a:t>
             </a:r>
             <a:endParaRPr lang="en-US" sz="1200" dirty="0"/>
           </a:p>
@@ -34505,7 +34541,7 @@
                 <a:ea typeface="Trebuchet MS" pitchFamily="34" charset="-122"/>
                 <a:cs typeface="Trebuchet MS" pitchFamily="34" charset="-120"/>
               </a:rPr>
-              <a:t>colourful</a:t>
+              <a:t>wonderful</a:t>
             </a:r>
             <a:endParaRPr lang="en-US" sz="1200" dirty="0"/>
           </a:p>
@@ -35693,7 +35729,7 @@
                 <a:ea typeface="Calibri" pitchFamily="34" charset="-122"/>
                 <a:cs typeface="Calibri" pitchFamily="34" charset="-120"/>
               </a:rPr>
-              <a:t>1.  The suffix '-ful' can turn a noun or verb into an adjective.</a:t>
+              <a:t>1.  The suffix '-ful' can turn a noun or verb into an adjective (describing word).</a:t>
             </a:r>
             <a:endParaRPr lang="en-US" sz="1300" dirty="0"/>
           </a:p>
@@ -35832,7 +35868,7 @@
                 <a:ea typeface="Calibri" pitchFamily="34" charset="-122"/>
                 <a:cs typeface="Calibri" pitchFamily="34" charset="-120"/>
               </a:rPr>
-              <a:t>2.  The suffix '-ful' means 'without' or 'lacking'.</a:t>
+              <a:t>2.  The suffix '-ful' means 'without' or 'lacking something'.</a:t>
             </a:r>
             <a:endParaRPr lang="en-US" sz="1300" dirty="0"/>
           </a:p>
@@ -35971,7 +36007,7 @@
                 <a:ea typeface="Calibri" pitchFamily="34" charset="-122"/>
                 <a:cs typeface="Calibri" pitchFamily="34" charset="-120"/>
               </a:rPr>
-              <a:t>3.  The word 'careful' contains the suffix '-ful'.</a:t>
+              <a:t>3.  The word 'hopeful' contains the base word 'hope' and the suffix '-ful'.</a:t>
             </a:r>
             <a:endParaRPr lang="en-US" sz="1300" dirty="0"/>
           </a:p>
@@ -36110,7 +36146,7 @@
                 <a:ea typeface="Calibri" pitchFamily="34" charset="-122"/>
                 <a:cs typeface="Calibri" pitchFamily="34" charset="-120"/>
               </a:rPr>
-              <a:t>4.  Adding '-ful' to a word usually means it has the quality of that word.</a:t>
+              <a:t>4.  Adding '-ful' to a word usually means the thing is full of that quality.</a:t>
             </a:r>
             <a:endParaRPr lang="en-US" sz="1300" dirty="0"/>
           </a:p>
@@ -36249,7 +36285,7 @@
                 <a:ea typeface="Calibri" pitchFamily="34" charset="-122"/>
                 <a:cs typeface="Calibri" pitchFamily="34" charset="-120"/>
               </a:rPr>
-              <a:t>5.  The suffix '-ful' always makes a word mean exactly one full cup of something.</a:t>
+              <a:t>5.  The suffix '-ful' always changes the spelling of the base word.</a:t>
             </a:r>
             <a:endParaRPr lang="en-US" sz="1300" dirty="0"/>
           </a:p>
@@ -37218,7 +37254,7 @@
                 <a:ea typeface="Trebuchet MS" pitchFamily="34" charset="-122"/>
                 <a:cs typeface="Trebuchet MS" pitchFamily="34" charset="-120"/>
               </a:rPr>
-              <a:t>grateful</a:t>
+              <a:t>peaceful</a:t>
             </a:r>
             <a:endParaRPr lang="en-US" sz="1300" dirty="0"/>
           </a:p>
@@ -37284,7 +37320,7 @@
                 <a:ea typeface="Trebuchet MS" pitchFamily="34" charset="-122"/>
                 <a:cs typeface="Trebuchet MS" pitchFamily="34" charset="-120"/>
               </a:rPr>
-              <a:t>wonderful</a:t>
+              <a:t>colourful</a:t>
             </a:r>
             <a:endParaRPr lang="en-US" sz="1300" dirty="0"/>
           </a:p>
@@ -38375,7 +38411,7 @@
                 <a:ea typeface="Trebuchet MS" pitchFamily="34" charset="-122"/>
                 <a:cs typeface="Trebuchet MS" pitchFamily="34" charset="-120"/>
               </a:rPr>
-              <a:t>de-</a:t>
+              <a:t>dis-</a:t>
             </a:r>
             <a:endParaRPr lang="en-US" sz="1300" dirty="0"/>
           </a:p>
@@ -39528,7 +39564,7 @@
                 <a:ea typeface="Calibri" pitchFamily="34" charset="-122"/>
                 <a:cs typeface="Calibri" pitchFamily="34" charset="-120"/>
               </a:rPr>
-              <a:t>Ready and willing to give assistance to others.</a:t>
+              <a:t>When you do things to make it easier for someone else, like lending a hand.</a:t>
             </a:r>
             <a:endParaRPr lang="en-US" sz="1200" dirty="0"/>
           </a:p>
@@ -39667,7 +39703,7 @@
                 <a:ea typeface="Calibri" pitchFamily="34" charset="-122"/>
                 <a:cs typeface="Calibri" pitchFamily="34" charset="-120"/>
               </a:rPr>
-              <a:t>Paying close attention to avoid mistakes or danger.</a:t>
+              <a:t>Paying close attention so you don't make mistakes or get hurt.</a:t>
             </a:r>
             <a:endParaRPr lang="en-US" sz="1200" dirty="0"/>
           </a:p>
@@ -39806,7 +39842,7 @@
                 <a:ea typeface="Calibri" pitchFamily="34" charset="-122"/>
                 <a:cs typeface="Calibri" pitchFamily="34" charset="-120"/>
               </a:rPr>
-              <a:t>Feeling that something good is likely to happen.</a:t>
+              <a:t>Feeling like something good is going to happen.</a:t>
             </a:r>
             <a:endParaRPr lang="en-US" sz="1200" dirty="0"/>
           </a:p>
@@ -39945,7 +39981,7 @@
                 <a:ea typeface="Calibri" pitchFamily="34" charset="-122"/>
                 <a:cs typeface="Calibri" pitchFamily="34" charset="-120"/>
               </a:rPr>
-              <a:t>Fond of fun and games; lively and cheerful.</a:t>
+              <a:t>Liking to have fun and joke around — full of play.</a:t>
             </a:r>
             <a:endParaRPr lang="en-US" sz="1200" dirty="0"/>
           </a:p>
@@ -40084,7 +40120,7 @@
                 <a:ea typeface="Calibri" pitchFamily="34" charset="-122"/>
                 <a:cs typeface="Calibri" pitchFamily="34" charset="-120"/>
               </a:rPr>
-              <a:t>Extremely good or impressive; causing delight.</a:t>
+              <a:t>Having lots of bright, vivid colours.</a:t>
             </a:r>
             <a:endParaRPr lang="en-US" sz="1200" dirty="0"/>
           </a:p>
@@ -40157,7 +40193,7 @@
                 <a:ea typeface="Trebuchet MS" pitchFamily="34" charset="-122"/>
                 <a:cs typeface="Trebuchet MS" pitchFamily="34" charset="-120"/>
               </a:rPr>
-              <a:t>grateful</a:t>
+              <a:t>peaceful</a:t>
             </a:r>
             <a:endParaRPr lang="en-US" sz="1200" dirty="0"/>
           </a:p>
@@ -40223,7 +40259,7 @@
                 <a:ea typeface="Calibri" pitchFamily="34" charset="-122"/>
                 <a:cs typeface="Calibri" pitchFamily="34" charset="-120"/>
               </a:rPr>
-              <a:t>Feeling thankful for something kind that was done for you.</a:t>
+              <a:t>Calm and quiet, with no fighting or trouble.</a:t>
             </a:r>
             <a:endParaRPr lang="en-US" sz="1200" dirty="0"/>
           </a:p>
@@ -40296,7 +40332,7 @@
                 <a:ea typeface="Trebuchet MS" pitchFamily="34" charset="-122"/>
                 <a:cs typeface="Trebuchet MS" pitchFamily="34" charset="-120"/>
               </a:rPr>
-              <a:t>wonderful</a:t>
+              <a:t>colourful</a:t>
             </a:r>
             <a:endParaRPr lang="en-US" sz="1200" dirty="0"/>
           </a:p>
@@ -40362,7 +40398,7 @@
                 <a:ea typeface="Calibri" pitchFamily="34" charset="-122"/>
                 <a:cs typeface="Calibri" pitchFamily="34" charset="-120"/>
               </a:rPr>
-              <a:t>Having great strength or force.</a:t>
+              <a:t>Having a lot of strength or force — like a powerful storm or a powerful engine.</a:t>
             </a:r>
             <a:endParaRPr lang="en-US" sz="1200" dirty="0"/>
           </a:p>
@@ -40857,7 +40893,7 @@
                 <a:ea typeface="Calibri" pitchFamily="34" charset="-122"/>
                 <a:cs typeface="Calibri" pitchFamily="34" charset="-120"/>
               </a:rPr>
-              <a:t>The helpful student showed the new child around the school.</a:t>
+              <a:t>The teacher was so helpful when I couldn't understand the maths problem.</a:t>
             </a:r>
             <a:endParaRPr lang="en-US" sz="1500" dirty="0"/>
           </a:p>
@@ -41021,7 +41057,7 @@
                 <a:ea typeface="Calibri" pitchFamily="34" charset="-122"/>
                 <a:cs typeface="Calibri" pitchFamily="34" charset="-120"/>
               </a:rPr>
-              <a:t>She was grateful for the kind note her teacher left on her desk.</a:t>
+              <a:t>We watched a colourful parade of floats go past our school.</a:t>
             </a:r>
             <a:endParaRPr lang="en-US" sz="1500" dirty="0"/>
           </a:p>
@@ -41185,7 +41221,7 @@
                 <a:ea typeface="Calibri" pitchFamily="34" charset="-122"/>
                 <a:cs typeface="Calibri" pitchFamily="34" charset="-120"/>
               </a:rPr>
-              <a:t>The colourful butterfly landed gently on the flower in the garden.</a:t>
+              <a:t>Be careful when you carry the glass of water across the room.</a:t>
             </a:r>
             <a:endParaRPr lang="en-US" sz="1500" dirty="0"/>
           </a:p>
